--- a/NandaPay.pptx
+++ b/NandaPay.pptx
@@ -1127,7 +1127,7 @@
   <p:cSld>
     <p:spTree>
       <p:nvGrpSpPr>
-        <p:cNvPr id="70" name="Shape 70"/>
+        <p:cNvPr id="71" name="Shape 71"/>
         <p:cNvGrpSpPr/>
         <p:nvPr/>
       </p:nvGrpSpPr>
@@ -1141,7 +1141,7 @@
       </p:grpSpPr>
       <p:sp>
         <p:nvSpPr>
-          <p:cNvPr id="71" name="Google Shape;71;p1:notes"/>
+          <p:cNvPr id="72" name="Google Shape;72;p1:notes"/>
           <p:cNvSpPr/>
           <p:nvPr>
             <p:ph idx="2" type="sldImg"/>
@@ -1186,7 +1186,7 @@
       </p:sp>
       <p:sp>
         <p:nvSpPr>
-          <p:cNvPr id="72" name="Google Shape;72;p1:notes"/>
+          <p:cNvPr id="73" name="Google Shape;73;p1:notes"/>
           <p:cNvSpPr txBox="1"/>
           <p:nvPr>
             <p:ph idx="1" type="body"/>
@@ -1244,7 +1244,7 @@
   <p:cSld>
     <p:spTree>
       <p:nvGrpSpPr>
-        <p:cNvPr id="79" name="Shape 79"/>
+        <p:cNvPr id="80" name="Shape 80"/>
         <p:cNvGrpSpPr/>
         <p:nvPr/>
       </p:nvGrpSpPr>
@@ -1258,7 +1258,7 @@
       </p:grpSpPr>
       <p:sp>
         <p:nvSpPr>
-          <p:cNvPr id="80" name="Google Shape;80;h5808c745e5c125a_1_33:notes"/>
+          <p:cNvPr id="81" name="Google Shape;81;h5808c745e5c125a_1_33:notes"/>
           <p:cNvSpPr/>
           <p:nvPr>
             <p:ph idx="2" type="sldImg"/>
@@ -1293,7 +1293,7 @@
       </p:sp>
       <p:sp>
         <p:nvSpPr>
-          <p:cNvPr id="81" name="Google Shape;81;h5808c745e5c125a_1_33:notes"/>
+          <p:cNvPr id="82" name="Google Shape;82;h5808c745e5c125a_1_33:notes"/>
           <p:cNvSpPr txBox="1"/>
           <p:nvPr>
             <p:ph idx="1" type="body"/>
@@ -9528,7 +9528,7 @@
         <p:spPr>
           <a:xfrm>
             <a:off x="152400" y="929500"/>
-            <a:ext cx="8839200" cy="4046220"/>
+            <a:ext cx="8839200" cy="3642499"/>
           </a:xfrm>
           <a:prstGeom prst="rect">
             <a:avLst/>
@@ -9539,6 +9539,58 @@
           </a:ln>
         </p:spPr>
       </p:pic>
+      <p:sp>
+        <p:nvSpPr>
+          <p:cNvPr id="70" name="Google Shape;70;p15">
+            <a:hlinkClick r:id="rId4"/>
+          </p:cNvPr>
+          <p:cNvSpPr txBox="1"/>
+          <p:nvPr/>
+        </p:nvSpPr>
+        <p:spPr>
+          <a:xfrm>
+            <a:off x="466725" y="4676775"/>
+            <a:ext cx="5162400" cy="354000"/>
+          </a:xfrm>
+          <a:prstGeom prst="rect">
+            <a:avLst/>
+          </a:prstGeom>
+          <a:noFill/>
+          <a:ln>
+            <a:noFill/>
+          </a:ln>
+        </p:spPr>
+        <p:txBody>
+          <a:bodyPr anchorCtr="0" anchor="t" bIns="91425" lIns="91425" spcFirstLastPara="1" rIns="91425" wrap="square" tIns="91425">
+            <a:spAutoFit/>
+          </a:bodyPr>
+          <a:lstStyle/>
+          <a:p>
+            <a:pPr indent="0" lvl="0" marL="0" rtl="0" algn="l">
+              <a:spcBef>
+                <a:spcPts val="0"/>
+              </a:spcBef>
+              <a:spcAft>
+                <a:spcPts val="0"/>
+              </a:spcAft>
+              <a:buNone/>
+            </a:pPr>
+            <a:r>
+              <a:rPr lang="pt-BR" sz="1100">
+                <a:solidFill>
+                  <a:schemeClr val="dk2"/>
+                </a:solidFill>
+              </a:rPr>
+              <a:t>Link script: https://github.com/fernanda-leite/NandaPay/blob/main/Nandapay.sql</a:t>
+            </a:r>
+            <a:endParaRPr sz="1100">
+              <a:solidFill>
+                <a:schemeClr val="dk2"/>
+              </a:solidFill>
+            </a:endParaRPr>
+          </a:p>
+        </p:txBody>
+      </p:sp>
     </p:spTree>
   </p:cSld>
   <p:clrMapOvr>
@@ -9552,7 +9604,7 @@
   <p:cSld>
     <p:spTree>
       <p:nvGrpSpPr>
-        <p:cNvPr id="73" name="Shape 73"/>
+        <p:cNvPr id="74" name="Shape 74"/>
         <p:cNvGrpSpPr/>
         <p:nvPr/>
       </p:nvGrpSpPr>
@@ -9564,65 +9616,9 @@
           <a:chExt cx="0" cy="0"/>
         </a:xfrm>
       </p:grpSpPr>
-      <p:pic>
-        <p:nvPicPr>
-          <p:cNvPr id="74" name="Google Shape;74;p16"/>
-          <p:cNvPicPr preferRelativeResize="0"/>
-          <p:nvPr/>
-        </p:nvPicPr>
-        <p:blipFill>
-          <a:blip r:embed="rId3">
-            <a:alphaModFix/>
-          </a:blip>
-          <a:stretch>
-            <a:fillRect/>
-          </a:stretch>
-        </p:blipFill>
-        <p:spPr>
-          <a:xfrm>
-            <a:off x="152400" y="152400"/>
-            <a:ext cx="8839200" cy="2082440"/>
-          </a:xfrm>
-          <a:prstGeom prst="rect">
-            <a:avLst/>
-          </a:prstGeom>
-          <a:noFill/>
-          <a:ln>
-            <a:noFill/>
-          </a:ln>
-        </p:spPr>
-      </p:pic>
-      <p:pic>
-        <p:nvPicPr>
-          <p:cNvPr id="75" name="Google Shape;75;p16"/>
-          <p:cNvPicPr preferRelativeResize="0"/>
-          <p:nvPr/>
-        </p:nvPicPr>
-        <p:blipFill>
-          <a:blip r:embed="rId4">
-            <a:alphaModFix/>
-          </a:blip>
-          <a:stretch>
-            <a:fillRect/>
-          </a:stretch>
-        </p:blipFill>
-        <p:spPr>
-          <a:xfrm>
-            <a:off x="4303300" y="2703075"/>
-            <a:ext cx="4118801" cy="2192925"/>
-          </a:xfrm>
-          <a:prstGeom prst="rect">
-            <a:avLst/>
-          </a:prstGeom>
-          <a:noFill/>
-          <a:ln>
-            <a:noFill/>
-          </a:ln>
-        </p:spPr>
-      </p:pic>
       <p:sp>
         <p:nvSpPr>
-          <p:cNvPr id="76" name="Google Shape;76;p16"/>
+          <p:cNvPr id="75" name="Google Shape;75;p16"/>
           <p:cNvSpPr txBox="1"/>
           <p:nvPr>
             <p:ph idx="4294967295" type="title"/>
@@ -9663,7 +9659,7 @@
       </p:sp>
       <p:sp>
         <p:nvSpPr>
-          <p:cNvPr id="77" name="Google Shape;77;p16"/>
+          <p:cNvPr id="76" name="Google Shape;76;p16"/>
           <p:cNvSpPr txBox="1"/>
           <p:nvPr>
             <p:ph idx="4294967295" type="title"/>
@@ -9704,7 +9700,63 @@
       </p:sp>
       <p:pic>
         <p:nvPicPr>
+          <p:cNvPr id="77" name="Google Shape;77;p16"/>
+          <p:cNvPicPr preferRelativeResize="0"/>
+          <p:nvPr/>
+        </p:nvPicPr>
+        <p:blipFill>
+          <a:blip r:embed="rId3">
+            <a:alphaModFix/>
+          </a:blip>
+          <a:stretch>
+            <a:fillRect/>
+          </a:stretch>
+        </p:blipFill>
+        <p:spPr>
+          <a:xfrm>
+            <a:off x="152400" y="3115250"/>
+            <a:ext cx="3991170" cy="1875850"/>
+          </a:xfrm>
+          <a:prstGeom prst="rect">
+            <a:avLst/>
+          </a:prstGeom>
+          <a:noFill/>
+          <a:ln>
+            <a:noFill/>
+          </a:ln>
+        </p:spPr>
+      </p:pic>
+      <p:pic>
+        <p:nvPicPr>
           <p:cNvPr id="78" name="Google Shape;78;p16"/>
+          <p:cNvPicPr preferRelativeResize="0"/>
+          <p:nvPr/>
+        </p:nvPicPr>
+        <p:blipFill>
+          <a:blip r:embed="rId4">
+            <a:alphaModFix/>
+          </a:blip>
+          <a:stretch>
+            <a:fillRect/>
+          </a:stretch>
+        </p:blipFill>
+        <p:spPr>
+          <a:xfrm>
+            <a:off x="4295970" y="2646950"/>
+            <a:ext cx="4695630" cy="2230602"/>
+          </a:xfrm>
+          <a:prstGeom prst="rect">
+            <a:avLst/>
+          </a:prstGeom>
+          <a:noFill/>
+          <a:ln>
+            <a:noFill/>
+          </a:ln>
+        </p:spPr>
+      </p:pic>
+      <p:pic>
+        <p:nvPicPr>
+          <p:cNvPr id="79" name="Google Shape;79;p16"/>
           <p:cNvPicPr preferRelativeResize="0"/>
           <p:nvPr/>
         </p:nvPicPr>
@@ -9718,8 +9770,8 @@
         </p:blipFill>
         <p:spPr>
           <a:xfrm>
-            <a:off x="152400" y="3115250"/>
-            <a:ext cx="3991170" cy="1875850"/>
+            <a:off x="152400" y="104775"/>
+            <a:ext cx="8667750" cy="1921475"/>
           </a:xfrm>
           <a:prstGeom prst="rect">
             <a:avLst/>
@@ -9743,7 +9795,7 @@
   <p:cSld>
     <p:spTree>
       <p:nvGrpSpPr>
-        <p:cNvPr id="82" name="Shape 82"/>
+        <p:cNvPr id="83" name="Shape 83"/>
         <p:cNvGrpSpPr/>
         <p:nvPr/>
       </p:nvGrpSpPr>
@@ -9757,7 +9809,7 @@
       </p:grpSpPr>
       <p:sp>
         <p:nvSpPr>
-          <p:cNvPr id="83" name="Google Shape;83;p17"/>
+          <p:cNvPr id="84" name="Google Shape;84;p17"/>
           <p:cNvSpPr txBox="1"/>
           <p:nvPr/>
         </p:nvSpPr>
@@ -10383,7 +10435,7 @@
       </p:sp>
       <p:sp>
         <p:nvSpPr>
-          <p:cNvPr id="84" name="Google Shape;84;p17"/>
+          <p:cNvPr id="85" name="Google Shape;85;p17"/>
           <p:cNvSpPr txBox="1"/>
           <p:nvPr>
             <p:ph idx="4294967295" type="title"/>
@@ -10431,6 +10483,285 @@
 </file>
 
 <file path=ppt/theme/theme1.xml><?xml version="1.0" encoding="utf-8"?>
+<a:theme xmlns:a="http://schemas.openxmlformats.org/drawingml/2006/main" xmlns:r="http://schemas.openxmlformats.org/officeDocument/2006/relationships" name="Simple Light">
+  <a:themeElements>
+    <a:clrScheme name="Simple Light">
+      <a:dk1>
+        <a:srgbClr val="000000"/>
+      </a:dk1>
+      <a:lt1>
+        <a:srgbClr val="FFFFFF"/>
+      </a:lt1>
+      <a:dk2>
+        <a:srgbClr val="595959"/>
+      </a:dk2>
+      <a:lt2>
+        <a:srgbClr val="EEEEEE"/>
+      </a:lt2>
+      <a:accent1>
+        <a:srgbClr val="4285F4"/>
+      </a:accent1>
+      <a:accent2>
+        <a:srgbClr val="212121"/>
+      </a:accent2>
+      <a:accent3>
+        <a:srgbClr val="78909C"/>
+      </a:accent3>
+      <a:accent4>
+        <a:srgbClr val="FFAB40"/>
+      </a:accent4>
+      <a:accent5>
+        <a:srgbClr val="0097A7"/>
+      </a:accent5>
+      <a:accent6>
+        <a:srgbClr val="EEFF41"/>
+      </a:accent6>
+      <a:hlink>
+        <a:srgbClr val="0097A7"/>
+      </a:hlink>
+      <a:folHlink>
+        <a:srgbClr val="0097A7"/>
+      </a:folHlink>
+    </a:clrScheme>
+    <a:fontScheme name="Office">
+      <a:majorFont>
+        <a:latin typeface="Arial"/>
+        <a:ea typeface=""/>
+        <a:cs typeface=""/>
+        <a:font script="Jpan" typeface="ＭＳ Ｐゴシック"/>
+        <a:font script="Hang" typeface="맑은 고딕"/>
+        <a:font script="Hans" typeface="宋体"/>
+        <a:font script="Hant" typeface="新細明體"/>
+        <a:font script="Arab" typeface="Times New Roman"/>
+        <a:font script="Hebr" typeface="Times New Roman"/>
+        <a:font script="Thai" typeface="Angsana New"/>
+        <a:font script="Ethi" typeface="Nyala"/>
+        <a:font script="Beng" typeface="Vrinda"/>
+        <a:font script="Gujr" typeface="Shruti"/>
+        <a:font script="Khmr" typeface="MoolBoran"/>
+        <a:font script="Knda" typeface="Tunga"/>
+        <a:font script="Guru" typeface="Raavi"/>
+        <a:font script="Cans" typeface="Euphemia"/>
+        <a:font script="Cher" typeface="Plantagenet Cherokee"/>
+        <a:font script="Yiii" typeface="Microsoft Yi Baiti"/>
+        <a:font script="Tibt" typeface="Microsoft Himalaya"/>
+        <a:font script="Thaa" typeface="MV Boli"/>
+        <a:font script="Deva" typeface="Mangal"/>
+        <a:font script="Telu" typeface="Gautami"/>
+        <a:font script="Taml" typeface="Latha"/>
+        <a:font script="Syrc" typeface="Estrangelo Edessa"/>
+        <a:font script="Orya" typeface="Kalinga"/>
+        <a:font script="Mlym" typeface="Kartika"/>
+        <a:font script="Laoo" typeface="DokChampa"/>
+        <a:font script="Sinh" typeface="Iskoola Pota"/>
+        <a:font script="Mong" typeface="Mongolian Baiti"/>
+        <a:font script="Viet" typeface="Times New Roman"/>
+        <a:font script="Uigh" typeface="Microsoft Uighur"/>
+        <a:font script="Geor" typeface="Sylfaen"/>
+      </a:majorFont>
+      <a:minorFont>
+        <a:latin typeface="Arial"/>
+        <a:ea typeface=""/>
+        <a:cs typeface=""/>
+        <a:font script="Jpan" typeface="ＭＳ Ｐゴシック"/>
+        <a:font script="Hang" typeface="맑은 고딕"/>
+        <a:font script="Hans" typeface="宋体"/>
+        <a:font script="Hant" typeface="新細明體"/>
+        <a:font script="Arab" typeface="Arial"/>
+        <a:font script="Hebr" typeface="Arial"/>
+        <a:font script="Thai" typeface="Cordia New"/>
+        <a:font script="Ethi" typeface="Nyala"/>
+        <a:font script="Beng" typeface="Vrinda"/>
+        <a:font script="Gujr" typeface="Shruti"/>
+        <a:font script="Khmr" typeface="DaunPenh"/>
+        <a:font script="Knda" typeface="Tunga"/>
+        <a:font script="Guru" typeface="Raavi"/>
+        <a:font script="Cans" typeface="Euphemia"/>
+        <a:font script="Cher" typeface="Plantagenet Cherokee"/>
+        <a:font script="Yiii" typeface="Microsoft Yi Baiti"/>
+        <a:font script="Tibt" typeface="Microsoft Himalaya"/>
+        <a:font script="Thaa" typeface="MV Boli"/>
+        <a:font script="Deva" typeface="Mangal"/>
+        <a:font script="Telu" typeface="Gautami"/>
+        <a:font script="Taml" typeface="Latha"/>
+        <a:font script="Syrc" typeface="Estrangelo Edessa"/>
+        <a:font script="Orya" typeface="Kalinga"/>
+        <a:font script="Mlym" typeface="Kartika"/>
+        <a:font script="Laoo" typeface="DokChampa"/>
+        <a:font script="Sinh" typeface="Iskoola Pota"/>
+        <a:font script="Mong" typeface="Mongolian Baiti"/>
+        <a:font script="Viet" typeface="Arial"/>
+        <a:font script="Uigh" typeface="Microsoft Uighur"/>
+        <a:font script="Geor" typeface="Sylfaen"/>
+      </a:minorFont>
+    </a:fontScheme>
+    <a:fmtScheme name="Office">
+      <a:fillStyleLst>
+        <a:solidFill>
+          <a:schemeClr val="phClr"/>
+        </a:solidFill>
+        <a:gradFill rotWithShape="1">
+          <a:gsLst>
+            <a:gs pos="0">
+              <a:schemeClr val="phClr">
+                <a:tint val="50000"/>
+                <a:satMod val="300000"/>
+              </a:schemeClr>
+            </a:gs>
+            <a:gs pos="35000">
+              <a:schemeClr val="phClr">
+                <a:tint val="37000"/>
+                <a:satMod val="300000"/>
+              </a:schemeClr>
+            </a:gs>
+            <a:gs pos="100000">
+              <a:schemeClr val="phClr">
+                <a:tint val="15000"/>
+                <a:satMod val="350000"/>
+              </a:schemeClr>
+            </a:gs>
+          </a:gsLst>
+          <a:lin ang="16200000" scaled="1"/>
+        </a:gradFill>
+        <a:gradFill rotWithShape="1">
+          <a:gsLst>
+            <a:gs pos="0">
+              <a:schemeClr val="phClr">
+                <a:tint val="100000"/>
+                <a:shade val="100000"/>
+                <a:satMod val="130000"/>
+              </a:schemeClr>
+            </a:gs>
+            <a:gs pos="100000">
+              <a:schemeClr val="phClr">
+                <a:tint val="50000"/>
+                <a:shade val="100000"/>
+                <a:satMod val="350000"/>
+              </a:schemeClr>
+            </a:gs>
+          </a:gsLst>
+          <a:lin ang="16200000" scaled="0"/>
+        </a:gradFill>
+      </a:fillStyleLst>
+      <a:lnStyleLst>
+        <a:ln w="9525" cap="flat" cmpd="sng" algn="ctr">
+          <a:solidFill>
+            <a:schemeClr val="phClr">
+              <a:shade val="95000"/>
+              <a:satMod val="105000"/>
+            </a:schemeClr>
+          </a:solidFill>
+          <a:prstDash val="solid"/>
+        </a:ln>
+        <a:ln w="25400" cap="flat" cmpd="sng" algn="ctr">
+          <a:solidFill>
+            <a:schemeClr val="phClr"/>
+          </a:solidFill>
+          <a:prstDash val="solid"/>
+        </a:ln>
+        <a:ln w="38100" cap="flat" cmpd="sng" algn="ctr">
+          <a:solidFill>
+            <a:schemeClr val="phClr"/>
+          </a:solidFill>
+          <a:prstDash val="solid"/>
+        </a:ln>
+      </a:lnStyleLst>
+      <a:effectStyleLst>
+        <a:effectStyle>
+          <a:effectLst>
+            <a:outerShdw blurRad="40000" dist="20000" dir="5400000" rotWithShape="0">
+              <a:srgbClr val="000000">
+                <a:alpha val="38000"/>
+              </a:srgbClr>
+            </a:outerShdw>
+          </a:effectLst>
+        </a:effectStyle>
+        <a:effectStyle>
+          <a:effectLst>
+            <a:outerShdw blurRad="40000" dist="23000" dir="5400000" rotWithShape="0">
+              <a:srgbClr val="000000">
+                <a:alpha val="35000"/>
+              </a:srgbClr>
+            </a:outerShdw>
+          </a:effectLst>
+        </a:effectStyle>
+        <a:effectStyle>
+          <a:effectLst>
+            <a:outerShdw blurRad="40000" dist="23000" dir="5400000" rotWithShape="0">
+              <a:srgbClr val="000000">
+                <a:alpha val="35000"/>
+              </a:srgbClr>
+            </a:outerShdw>
+          </a:effectLst>
+          <a:scene3d>
+            <a:camera prst="orthographicFront">
+              <a:rot lat="0" lon="0" rev="0"/>
+            </a:camera>
+            <a:lightRig rig="threePt" dir="t">
+              <a:rot lat="0" lon="0" rev="1200000"/>
+            </a:lightRig>
+          </a:scene3d>
+          <a:sp3d>
+            <a:bevelT w="63500" h="25400"/>
+          </a:sp3d>
+        </a:effectStyle>
+      </a:effectStyleLst>
+      <a:bgFillStyleLst>
+        <a:solidFill>
+          <a:schemeClr val="phClr"/>
+        </a:solidFill>
+        <a:gradFill rotWithShape="1">
+          <a:gsLst>
+            <a:gs pos="0">
+              <a:schemeClr val="phClr">
+                <a:tint val="40000"/>
+                <a:satMod val="350000"/>
+              </a:schemeClr>
+            </a:gs>
+            <a:gs pos="40000">
+              <a:schemeClr val="phClr">
+                <a:tint val="45000"/>
+                <a:shade val="99000"/>
+                <a:satMod val="350000"/>
+              </a:schemeClr>
+            </a:gs>
+            <a:gs pos="100000">
+              <a:schemeClr val="phClr">
+                <a:shade val="20000"/>
+                <a:satMod val="255000"/>
+              </a:schemeClr>
+            </a:gs>
+          </a:gsLst>
+          <a:path path="circle">
+            <a:fillToRect l="50000" t="-80000" r="50000" b="180000"/>
+          </a:path>
+        </a:gradFill>
+        <a:gradFill rotWithShape="1">
+          <a:gsLst>
+            <a:gs pos="0">
+              <a:schemeClr val="phClr">
+                <a:tint val="80000"/>
+                <a:satMod val="300000"/>
+              </a:schemeClr>
+            </a:gs>
+            <a:gs pos="100000">
+              <a:schemeClr val="phClr">
+                <a:shade val="30000"/>
+                <a:satMod val="200000"/>
+              </a:schemeClr>
+            </a:gs>
+          </a:gsLst>
+          <a:path path="circle">
+            <a:fillToRect l="50000" t="50000" r="50000" b="50000"/>
+          </a:path>
+        </a:gradFill>
+      </a:bgFillStyleLst>
+    </a:fmtScheme>
+  </a:themeElements>
+</a:theme>
+</file>
+
+<file path=ppt/theme/theme2.xml><?xml version="1.0" encoding="utf-8"?>
 <a:theme xmlns:a="http://schemas.openxmlformats.org/drawingml/2006/main" xmlns:r="http://schemas.openxmlformats.org/officeDocument/2006/relationships">
   <a:themeElements>
     <a:clrScheme name="Default">
@@ -10707,283 +11038,4 @@
     </a:fmtScheme>
   </a:themeElements>
 </a:theme>
-</file>
-
-<file path=ppt/theme/theme2.xml><?xml version="1.0" encoding="utf-8"?>
-<a:theme xmlns:a="http://schemas.openxmlformats.org/drawingml/2006/main" xmlns:r="http://schemas.openxmlformats.org/officeDocument/2006/relationships" name="Simple Light">
-  <a:themeElements>
-    <a:clrScheme name="Simple Light">
-      <a:dk1>
-        <a:srgbClr val="000000"/>
-      </a:dk1>
-      <a:lt1>
-        <a:srgbClr val="FFFFFF"/>
-      </a:lt1>
-      <a:dk2>
-        <a:srgbClr val="595959"/>
-      </a:dk2>
-      <a:lt2>
-        <a:srgbClr val="EEEEEE"/>
-      </a:lt2>
-      <a:accent1>
-        <a:srgbClr val="4285F4"/>
-      </a:accent1>
-      <a:accent2>
-        <a:srgbClr val="212121"/>
-      </a:accent2>
-      <a:accent3>
-        <a:srgbClr val="78909C"/>
-      </a:accent3>
-      <a:accent4>
-        <a:srgbClr val="FFAB40"/>
-      </a:accent4>
-      <a:accent5>
-        <a:srgbClr val="0097A7"/>
-      </a:accent5>
-      <a:accent6>
-        <a:srgbClr val="EEFF41"/>
-      </a:accent6>
-      <a:hlink>
-        <a:srgbClr val="0097A7"/>
-      </a:hlink>
-      <a:folHlink>
-        <a:srgbClr val="0097A7"/>
-      </a:folHlink>
-    </a:clrScheme>
-    <a:fontScheme name="Office">
-      <a:majorFont>
-        <a:latin typeface="Arial"/>
-        <a:ea typeface=""/>
-        <a:cs typeface=""/>
-        <a:font script="Jpan" typeface="ＭＳ Ｐゴシック"/>
-        <a:font script="Hang" typeface="맑은 고딕"/>
-        <a:font script="Hans" typeface="宋体"/>
-        <a:font script="Hant" typeface="新細明體"/>
-        <a:font script="Arab" typeface="Times New Roman"/>
-        <a:font script="Hebr" typeface="Times New Roman"/>
-        <a:font script="Thai" typeface="Angsana New"/>
-        <a:font script="Ethi" typeface="Nyala"/>
-        <a:font script="Beng" typeface="Vrinda"/>
-        <a:font script="Gujr" typeface="Shruti"/>
-        <a:font script="Khmr" typeface="MoolBoran"/>
-        <a:font script="Knda" typeface="Tunga"/>
-        <a:font script="Guru" typeface="Raavi"/>
-        <a:font script="Cans" typeface="Euphemia"/>
-        <a:font script="Cher" typeface="Plantagenet Cherokee"/>
-        <a:font script="Yiii" typeface="Microsoft Yi Baiti"/>
-        <a:font script="Tibt" typeface="Microsoft Himalaya"/>
-        <a:font script="Thaa" typeface="MV Boli"/>
-        <a:font script="Deva" typeface="Mangal"/>
-        <a:font script="Telu" typeface="Gautami"/>
-        <a:font script="Taml" typeface="Latha"/>
-        <a:font script="Syrc" typeface="Estrangelo Edessa"/>
-        <a:font script="Orya" typeface="Kalinga"/>
-        <a:font script="Mlym" typeface="Kartika"/>
-        <a:font script="Laoo" typeface="DokChampa"/>
-        <a:font script="Sinh" typeface="Iskoola Pota"/>
-        <a:font script="Mong" typeface="Mongolian Baiti"/>
-        <a:font script="Viet" typeface="Times New Roman"/>
-        <a:font script="Uigh" typeface="Microsoft Uighur"/>
-        <a:font script="Geor" typeface="Sylfaen"/>
-      </a:majorFont>
-      <a:minorFont>
-        <a:latin typeface="Arial"/>
-        <a:ea typeface=""/>
-        <a:cs typeface=""/>
-        <a:font script="Jpan" typeface="ＭＳ Ｐゴシック"/>
-        <a:font script="Hang" typeface="맑은 고딕"/>
-        <a:font script="Hans" typeface="宋体"/>
-        <a:font script="Hant" typeface="新細明體"/>
-        <a:font script="Arab" typeface="Arial"/>
-        <a:font script="Hebr" typeface="Arial"/>
-        <a:font script="Thai" typeface="Cordia New"/>
-        <a:font script="Ethi" typeface="Nyala"/>
-        <a:font script="Beng" typeface="Vrinda"/>
-        <a:font script="Gujr" typeface="Shruti"/>
-        <a:font script="Khmr" typeface="DaunPenh"/>
-        <a:font script="Knda" typeface="Tunga"/>
-        <a:font script="Guru" typeface="Raavi"/>
-        <a:font script="Cans" typeface="Euphemia"/>
-        <a:font script="Cher" typeface="Plantagenet Cherokee"/>
-        <a:font script="Yiii" typeface="Microsoft Yi Baiti"/>
-        <a:font script="Tibt" typeface="Microsoft Himalaya"/>
-        <a:font script="Thaa" typeface="MV Boli"/>
-        <a:font script="Deva" typeface="Mangal"/>
-        <a:font script="Telu" typeface="Gautami"/>
-        <a:font script="Taml" typeface="Latha"/>
-        <a:font script="Syrc" typeface="Estrangelo Edessa"/>
-        <a:font script="Orya" typeface="Kalinga"/>
-        <a:font script="Mlym" typeface="Kartika"/>
-        <a:font script="Laoo" typeface="DokChampa"/>
-        <a:font script="Sinh" typeface="Iskoola Pota"/>
-        <a:font script="Mong" typeface="Mongolian Baiti"/>
-        <a:font script="Viet" typeface="Arial"/>
-        <a:font script="Uigh" typeface="Microsoft Uighur"/>
-        <a:font script="Geor" typeface="Sylfaen"/>
-      </a:minorFont>
-    </a:fontScheme>
-    <a:fmtScheme name="Office">
-      <a:fillStyleLst>
-        <a:solidFill>
-          <a:schemeClr val="phClr"/>
-        </a:solidFill>
-        <a:gradFill rotWithShape="1">
-          <a:gsLst>
-            <a:gs pos="0">
-              <a:schemeClr val="phClr">
-                <a:tint val="50000"/>
-                <a:satMod val="300000"/>
-              </a:schemeClr>
-            </a:gs>
-            <a:gs pos="35000">
-              <a:schemeClr val="phClr">
-                <a:tint val="37000"/>
-                <a:satMod val="300000"/>
-              </a:schemeClr>
-            </a:gs>
-            <a:gs pos="100000">
-              <a:schemeClr val="phClr">
-                <a:tint val="15000"/>
-                <a:satMod val="350000"/>
-              </a:schemeClr>
-            </a:gs>
-          </a:gsLst>
-          <a:lin ang="16200000" scaled="1"/>
-        </a:gradFill>
-        <a:gradFill rotWithShape="1">
-          <a:gsLst>
-            <a:gs pos="0">
-              <a:schemeClr val="phClr">
-                <a:tint val="100000"/>
-                <a:shade val="100000"/>
-                <a:satMod val="130000"/>
-              </a:schemeClr>
-            </a:gs>
-            <a:gs pos="100000">
-              <a:schemeClr val="phClr">
-                <a:tint val="50000"/>
-                <a:shade val="100000"/>
-                <a:satMod val="350000"/>
-              </a:schemeClr>
-            </a:gs>
-          </a:gsLst>
-          <a:lin ang="16200000" scaled="0"/>
-        </a:gradFill>
-      </a:fillStyleLst>
-      <a:lnStyleLst>
-        <a:ln w="9525" cap="flat" cmpd="sng" algn="ctr">
-          <a:solidFill>
-            <a:schemeClr val="phClr">
-              <a:shade val="95000"/>
-              <a:satMod val="105000"/>
-            </a:schemeClr>
-          </a:solidFill>
-          <a:prstDash val="solid"/>
-        </a:ln>
-        <a:ln w="25400" cap="flat" cmpd="sng" algn="ctr">
-          <a:solidFill>
-            <a:schemeClr val="phClr"/>
-          </a:solidFill>
-          <a:prstDash val="solid"/>
-        </a:ln>
-        <a:ln w="38100" cap="flat" cmpd="sng" algn="ctr">
-          <a:solidFill>
-            <a:schemeClr val="phClr"/>
-          </a:solidFill>
-          <a:prstDash val="solid"/>
-        </a:ln>
-      </a:lnStyleLst>
-      <a:effectStyleLst>
-        <a:effectStyle>
-          <a:effectLst>
-            <a:outerShdw blurRad="40000" dist="20000" dir="5400000" rotWithShape="0">
-              <a:srgbClr val="000000">
-                <a:alpha val="38000"/>
-              </a:srgbClr>
-            </a:outerShdw>
-          </a:effectLst>
-        </a:effectStyle>
-        <a:effectStyle>
-          <a:effectLst>
-            <a:outerShdw blurRad="40000" dist="23000" dir="5400000" rotWithShape="0">
-              <a:srgbClr val="000000">
-                <a:alpha val="35000"/>
-              </a:srgbClr>
-            </a:outerShdw>
-          </a:effectLst>
-        </a:effectStyle>
-        <a:effectStyle>
-          <a:effectLst>
-            <a:outerShdw blurRad="40000" dist="23000" dir="5400000" rotWithShape="0">
-              <a:srgbClr val="000000">
-                <a:alpha val="35000"/>
-              </a:srgbClr>
-            </a:outerShdw>
-          </a:effectLst>
-          <a:scene3d>
-            <a:camera prst="orthographicFront">
-              <a:rot lat="0" lon="0" rev="0"/>
-            </a:camera>
-            <a:lightRig rig="threePt" dir="t">
-              <a:rot lat="0" lon="0" rev="1200000"/>
-            </a:lightRig>
-          </a:scene3d>
-          <a:sp3d>
-            <a:bevelT w="63500" h="25400"/>
-          </a:sp3d>
-        </a:effectStyle>
-      </a:effectStyleLst>
-      <a:bgFillStyleLst>
-        <a:solidFill>
-          <a:schemeClr val="phClr"/>
-        </a:solidFill>
-        <a:gradFill rotWithShape="1">
-          <a:gsLst>
-            <a:gs pos="0">
-              <a:schemeClr val="phClr">
-                <a:tint val="40000"/>
-                <a:satMod val="350000"/>
-              </a:schemeClr>
-            </a:gs>
-            <a:gs pos="40000">
-              <a:schemeClr val="phClr">
-                <a:tint val="45000"/>
-                <a:shade val="99000"/>
-                <a:satMod val="350000"/>
-              </a:schemeClr>
-            </a:gs>
-            <a:gs pos="100000">
-              <a:schemeClr val="phClr">
-                <a:shade val="20000"/>
-                <a:satMod val="255000"/>
-              </a:schemeClr>
-            </a:gs>
-          </a:gsLst>
-          <a:path path="circle">
-            <a:fillToRect l="50000" t="-80000" r="50000" b="180000"/>
-          </a:path>
-        </a:gradFill>
-        <a:gradFill rotWithShape="1">
-          <a:gsLst>
-            <a:gs pos="0">
-              <a:schemeClr val="phClr">
-                <a:tint val="80000"/>
-                <a:satMod val="300000"/>
-              </a:schemeClr>
-            </a:gs>
-            <a:gs pos="100000">
-              <a:schemeClr val="phClr">
-                <a:shade val="30000"/>
-                <a:satMod val="200000"/>
-              </a:schemeClr>
-            </a:gs>
-          </a:gsLst>
-          <a:path path="circle">
-            <a:fillToRect l="50000" t="50000" r="50000" b="50000"/>
-          </a:path>
-        </a:gradFill>
-      </a:bgFillStyleLst>
-    </a:fmtScheme>
-  </a:themeElements>
-</a:theme>
 </file>
--- a/NandaPay.pptx
+++ b/NandaPay.pptx
@@ -844,7 +844,7 @@
       </p:grpSpPr>
       <p:sp>
         <p:nvSpPr>
-          <p:cNvPr id="51" name="Google Shape;51;h5808c745e5c125a_1_0:notes"/>
+          <p:cNvPr id="51" name="Google Shape;51;p1:notes"/>
           <p:cNvSpPr/>
           <p:nvPr>
             <p:ph idx="2" type="sldImg"/>
@@ -875,11 +875,21 @@
               </a:path>
             </a:pathLst>
           </a:custGeom>
+          <a:noFill/>
+          <a:ln cap="flat" cmpd="sng" w="9525">
+            <a:solidFill>
+              <a:srgbClr val="000000"/>
+            </a:solidFill>
+            <a:prstDash val="solid"/>
+            <a:round/>
+            <a:headEnd len="sm" w="sm" type="none"/>
+            <a:tailEnd len="sm" w="sm" type="none"/>
+          </a:ln>
         </p:spPr>
       </p:sp>
       <p:sp>
         <p:nvSpPr>
-          <p:cNvPr id="52" name="Google Shape;52;h5808c745e5c125a_1_0:notes"/>
+          <p:cNvPr id="52" name="Google Shape;52;p1:notes"/>
           <p:cNvSpPr txBox="1"/>
           <p:nvPr>
             <p:ph idx="1" type="body"/>
@@ -893,6 +903,10 @@
           <a:prstGeom prst="rect">
             <a:avLst/>
           </a:prstGeom>
+          <a:noFill/>
+          <a:ln>
+            <a:noFill/>
+          </a:ln>
         </p:spPr>
         <p:txBody>
           <a:bodyPr anchorCtr="0" anchor="t" bIns="91425" lIns="91425" spcFirstLastPara="1" rIns="91425" wrap="square" tIns="91425">
@@ -901,12 +915,16 @@
           <a:lstStyle/>
           <a:p>
             <a:pPr indent="0" lvl="0" marL="0" rtl="0" algn="l">
-              <a:spcBef>
-                <a:spcPts val="0"/>
-              </a:spcBef>
-              <a:spcAft>
-                <a:spcPts val="0"/>
-              </a:spcAft>
+              <a:lnSpc>
+                <a:spcPct val="100000"/>
+              </a:lnSpc>
+              <a:spcBef>
+                <a:spcPts val="0"/>
+              </a:spcBef>
+              <a:spcAft>
+                <a:spcPts val="0"/>
+              </a:spcAft>
+              <a:buSzPts val="1100"/>
               <a:buNone/>
             </a:pPr>
             <a:r>
@@ -943,7 +961,7 @@
       </p:grpSpPr>
       <p:sp>
         <p:nvSpPr>
-          <p:cNvPr id="59" name="Google Shape;59;h5808c745e5c125a_1_9:notes"/>
+          <p:cNvPr id="59" name="Google Shape;59;p2:notes"/>
           <p:cNvSpPr/>
           <p:nvPr>
             <p:ph idx="2" type="sldImg"/>
@@ -974,11 +992,21 @@
               </a:path>
             </a:pathLst>
           </a:custGeom>
+          <a:noFill/>
+          <a:ln cap="flat" cmpd="sng" w="9525">
+            <a:solidFill>
+              <a:srgbClr val="000000"/>
+            </a:solidFill>
+            <a:prstDash val="solid"/>
+            <a:round/>
+            <a:headEnd len="sm" w="sm" type="none"/>
+            <a:tailEnd len="sm" w="sm" type="none"/>
+          </a:ln>
         </p:spPr>
       </p:sp>
       <p:sp>
         <p:nvSpPr>
-          <p:cNvPr id="60" name="Google Shape;60;h5808c745e5c125a_1_9:notes"/>
+          <p:cNvPr id="60" name="Google Shape;60;p2:notes"/>
           <p:cNvSpPr txBox="1"/>
           <p:nvPr>
             <p:ph idx="1" type="body"/>
@@ -992,6 +1020,10 @@
           <a:prstGeom prst="rect">
             <a:avLst/>
           </a:prstGeom>
+          <a:noFill/>
+          <a:ln>
+            <a:noFill/>
+          </a:ln>
         </p:spPr>
         <p:txBody>
           <a:bodyPr anchorCtr="0" anchor="t" bIns="91425" lIns="91425" spcFirstLastPara="1" rIns="91425" wrap="square" tIns="91425">
@@ -1000,12 +1032,16 @@
           <a:lstStyle/>
           <a:p>
             <a:pPr indent="0" lvl="0" marL="0" rtl="0" algn="l">
-              <a:spcBef>
-                <a:spcPts val="0"/>
-              </a:spcBef>
-              <a:spcAft>
-                <a:spcPts val="0"/>
-              </a:spcAft>
+              <a:lnSpc>
+                <a:spcPct val="100000"/>
+              </a:lnSpc>
+              <a:spcBef>
+                <a:spcPts val="0"/>
+              </a:spcBef>
+              <a:spcAft>
+                <a:spcPts val="0"/>
+              </a:spcAft>
+              <a:buSzPts val="1100"/>
               <a:buNone/>
             </a:pPr>
             <a:r>
@@ -1042,7 +1078,7 @@
       </p:grpSpPr>
       <p:sp>
         <p:nvSpPr>
-          <p:cNvPr id="65" name="Google Shape;65;h5808c745e5c125a_1_15:notes"/>
+          <p:cNvPr id="65" name="Google Shape;65;p3:notes"/>
           <p:cNvSpPr/>
           <p:nvPr>
             <p:ph idx="2" type="sldImg"/>
@@ -1073,11 +1109,21 @@
               </a:path>
             </a:pathLst>
           </a:custGeom>
+          <a:noFill/>
+          <a:ln cap="flat" cmpd="sng" w="9525">
+            <a:solidFill>
+              <a:srgbClr val="000000"/>
+            </a:solidFill>
+            <a:prstDash val="solid"/>
+            <a:round/>
+            <a:headEnd len="sm" w="sm" type="none"/>
+            <a:tailEnd len="sm" w="sm" type="none"/>
+          </a:ln>
         </p:spPr>
       </p:sp>
       <p:sp>
         <p:nvSpPr>
-          <p:cNvPr id="66" name="Google Shape;66;h5808c745e5c125a_1_15:notes"/>
+          <p:cNvPr id="66" name="Google Shape;66;p3:notes"/>
           <p:cNvSpPr txBox="1"/>
           <p:nvPr>
             <p:ph idx="1" type="body"/>
@@ -1091,6 +1137,10 @@
           <a:prstGeom prst="rect">
             <a:avLst/>
           </a:prstGeom>
+          <a:noFill/>
+          <a:ln>
+            <a:noFill/>
+          </a:ln>
         </p:spPr>
         <p:txBody>
           <a:bodyPr anchorCtr="0" anchor="t" bIns="91425" lIns="91425" spcFirstLastPara="1" rIns="91425" wrap="square" tIns="91425">
@@ -1099,12 +1149,16 @@
           <a:lstStyle/>
           <a:p>
             <a:pPr indent="0" lvl="0" marL="0" rtl="0" algn="l">
-              <a:spcBef>
-                <a:spcPts val="0"/>
-              </a:spcBef>
-              <a:spcAft>
-                <a:spcPts val="0"/>
-              </a:spcAft>
+              <a:lnSpc>
+                <a:spcPct val="100000"/>
+              </a:lnSpc>
+              <a:spcBef>
+                <a:spcPts val="0"/>
+              </a:spcBef>
+              <a:spcAft>
+                <a:spcPts val="0"/>
+              </a:spcAft>
+              <a:buSzPts val="1100"/>
               <a:buNone/>
             </a:pPr>
             <a:r>
@@ -1127,7 +1181,7 @@
   <p:cSld>
     <p:spTree>
       <p:nvGrpSpPr>
-        <p:cNvPr id="71" name="Shape 71"/>
+        <p:cNvPr id="70" name="Shape 70"/>
         <p:cNvGrpSpPr/>
         <p:nvPr/>
       </p:nvGrpSpPr>
@@ -1141,7 +1195,7 @@
       </p:grpSpPr>
       <p:sp>
         <p:nvSpPr>
-          <p:cNvPr id="72" name="Google Shape;72;p1:notes"/>
+          <p:cNvPr id="71" name="Google Shape;71;p4:notes"/>
           <p:cNvSpPr/>
           <p:nvPr>
             <p:ph idx="2" type="sldImg"/>
@@ -1186,7 +1240,7 @@
       </p:sp>
       <p:sp>
         <p:nvSpPr>
-          <p:cNvPr id="73" name="Google Shape;73;p1:notes"/>
+          <p:cNvPr id="72" name="Google Shape;72;p4:notes"/>
           <p:cNvSpPr txBox="1"/>
           <p:nvPr>
             <p:ph idx="1" type="body"/>
@@ -1244,7 +1298,7 @@
   <p:cSld>
     <p:spTree>
       <p:nvGrpSpPr>
-        <p:cNvPr id="80" name="Shape 80"/>
+        <p:cNvPr id="79" name="Shape 79"/>
         <p:cNvGrpSpPr/>
         <p:nvPr/>
       </p:nvGrpSpPr>
@@ -1258,7 +1312,7 @@
       </p:grpSpPr>
       <p:sp>
         <p:nvSpPr>
-          <p:cNvPr id="81" name="Google Shape;81;h5808c745e5c125a_1_33:notes"/>
+          <p:cNvPr id="80" name="Google Shape;80;p5:notes"/>
           <p:cNvSpPr/>
           <p:nvPr>
             <p:ph idx="2" type="sldImg"/>
@@ -1289,11 +1343,21 @@
               </a:path>
             </a:pathLst>
           </a:custGeom>
+          <a:noFill/>
+          <a:ln cap="flat" cmpd="sng" w="9525">
+            <a:solidFill>
+              <a:srgbClr val="000000"/>
+            </a:solidFill>
+            <a:prstDash val="solid"/>
+            <a:round/>
+            <a:headEnd len="sm" w="sm" type="none"/>
+            <a:tailEnd len="sm" w="sm" type="none"/>
+          </a:ln>
         </p:spPr>
       </p:sp>
       <p:sp>
         <p:nvSpPr>
-          <p:cNvPr id="82" name="Google Shape;82;h5808c745e5c125a_1_33:notes"/>
+          <p:cNvPr id="81" name="Google Shape;81;p5:notes"/>
           <p:cNvSpPr txBox="1"/>
           <p:nvPr>
             <p:ph idx="1" type="body"/>
@@ -1307,6 +1371,10 @@
           <a:prstGeom prst="rect">
             <a:avLst/>
           </a:prstGeom>
+          <a:noFill/>
+          <a:ln>
+            <a:noFill/>
+          </a:ln>
         </p:spPr>
         <p:txBody>
           <a:bodyPr anchorCtr="0" anchor="t" bIns="91425" lIns="91425" spcFirstLastPara="1" rIns="91425" wrap="square" tIns="91425">
@@ -1315,12 +1383,16 @@
           <a:lstStyle/>
           <a:p>
             <a:pPr indent="0" lvl="0" marL="0" rtl="0" algn="l">
-              <a:spcBef>
-                <a:spcPts val="0"/>
-              </a:spcBef>
-              <a:spcAft>
-                <a:spcPts val="0"/>
-              </a:spcAft>
+              <a:lnSpc>
+                <a:spcPct val="100000"/>
+              </a:lnSpc>
+              <a:spcBef>
+                <a:spcPts val="0"/>
+              </a:spcBef>
+              <a:spcAft>
+                <a:spcPts val="0"/>
+              </a:spcAft>
+              <a:buSzPts val="1100"/>
               <a:buNone/>
             </a:pPr>
             <a:r>
@@ -1339,8 +1411,8 @@
 </file>
 
 <file path=ppt/slideLayouts/slideLayout1.xml><?xml version="1.0" encoding="utf-8"?>
-<p:sldLayout xmlns:a="http://schemas.openxmlformats.org/drawingml/2006/main" xmlns:r="http://schemas.openxmlformats.org/officeDocument/2006/relationships" xmlns:mc="http://schemas.openxmlformats.org/markup-compatibility/2006" xmlns:mv="urn:schemas-microsoft-com:mac:vml" xmlns:p="http://schemas.openxmlformats.org/presentationml/2006/main" xmlns:c="http://schemas.openxmlformats.org/drawingml/2006/chart" xmlns:dgm="http://schemas.openxmlformats.org/drawingml/2006/diagram" xmlns:o="urn:schemas-microsoft-com:office:office" xmlns:v="urn:schemas-microsoft-com:vml" xmlns:pvml="urn:schemas-microsoft-com:office:powerpoint" xmlns:com="http://schemas.openxmlformats.org/drawingml/2006/compatibility" xmlns:p14="http://schemas.microsoft.com/office/powerpoint/2010/main" xmlns:p15="http://schemas.microsoft.com/office/powerpoint/2012/main" xmlns:ahyp="http://schemas.microsoft.com/office/drawing/2018/hyperlinkcolor" matchingName="Title slide" type="title">
-  <p:cSld name="TITLE">
+<p:sldLayout xmlns:a="http://schemas.openxmlformats.org/drawingml/2006/main" xmlns:r="http://schemas.openxmlformats.org/officeDocument/2006/relationships" xmlns:mc="http://schemas.openxmlformats.org/markup-compatibility/2006" xmlns:mv="urn:schemas-microsoft-com:mac:vml" xmlns:p="http://schemas.openxmlformats.org/presentationml/2006/main" xmlns:c="http://schemas.openxmlformats.org/drawingml/2006/chart" xmlns:dgm="http://schemas.openxmlformats.org/drawingml/2006/diagram" xmlns:o="urn:schemas-microsoft-com:office:office" xmlns:v="urn:schemas-microsoft-com:vml" xmlns:pvml="urn:schemas-microsoft-com:office:powerpoint" xmlns:com="http://schemas.openxmlformats.org/drawingml/2006/compatibility" xmlns:p14="http://schemas.microsoft.com/office/powerpoint/2010/main" xmlns:p15="http://schemas.microsoft.com/office/powerpoint/2012/main" xmlns:ahyp="http://schemas.microsoft.com/office/drawing/2018/hyperlinkcolor" matchingName="Title and body" type="tx">
+  <p:cSld name="TITLE_AND_BODY">
     <p:spTree>
       <p:nvGrpSpPr>
         <p:cNvPr id="9" name="Shape 9"/>
@@ -1360,169 +1432,13 @@
           <p:cNvPr id="10" name="Google Shape;10;p2"/>
           <p:cNvSpPr txBox="1"/>
           <p:nvPr>
-            <p:ph type="ctrTitle"/>
+            <p:ph type="title"/>
           </p:nvPr>
         </p:nvSpPr>
         <p:spPr>
           <a:xfrm>
-            <a:off x="311708" y="744575"/>
-            <a:ext cx="8520600" cy="2052600"/>
-          </a:xfrm>
-          <a:prstGeom prst="rect">
-            <a:avLst/>
-          </a:prstGeom>
-          <a:noFill/>
-          <a:ln>
-            <a:noFill/>
-          </a:ln>
-        </p:spPr>
-        <p:txBody>
-          <a:bodyPr anchorCtr="0" anchor="b" bIns="91425" lIns="91425" spcFirstLastPara="1" rIns="91425" wrap="square" tIns="91425">
-            <a:normAutofit/>
-          </a:bodyPr>
-          <a:lstStyle>
-            <a:lvl1pPr lvl="0" algn="ctr">
-              <a:lnSpc>
-                <a:spcPct val="100000"/>
-              </a:lnSpc>
-              <a:spcBef>
-                <a:spcPts val="0"/>
-              </a:spcBef>
-              <a:spcAft>
-                <a:spcPts val="0"/>
-              </a:spcAft>
-              <a:buSzPts val="5200"/>
-              <a:buNone/>
-              <a:defRPr sz="5200"/>
-            </a:lvl1pPr>
-            <a:lvl2pPr lvl="1" algn="ctr">
-              <a:lnSpc>
-                <a:spcPct val="100000"/>
-              </a:lnSpc>
-              <a:spcBef>
-                <a:spcPts val="0"/>
-              </a:spcBef>
-              <a:spcAft>
-                <a:spcPts val="0"/>
-              </a:spcAft>
-              <a:buSzPts val="5200"/>
-              <a:buNone/>
-              <a:defRPr sz="5200"/>
-            </a:lvl2pPr>
-            <a:lvl3pPr lvl="2" algn="ctr">
-              <a:lnSpc>
-                <a:spcPct val="100000"/>
-              </a:lnSpc>
-              <a:spcBef>
-                <a:spcPts val="0"/>
-              </a:spcBef>
-              <a:spcAft>
-                <a:spcPts val="0"/>
-              </a:spcAft>
-              <a:buSzPts val="5200"/>
-              <a:buNone/>
-              <a:defRPr sz="5200"/>
-            </a:lvl3pPr>
-            <a:lvl4pPr lvl="3" algn="ctr">
-              <a:lnSpc>
-                <a:spcPct val="100000"/>
-              </a:lnSpc>
-              <a:spcBef>
-                <a:spcPts val="0"/>
-              </a:spcBef>
-              <a:spcAft>
-                <a:spcPts val="0"/>
-              </a:spcAft>
-              <a:buSzPts val="5200"/>
-              <a:buNone/>
-              <a:defRPr sz="5200"/>
-            </a:lvl4pPr>
-            <a:lvl5pPr lvl="4" algn="ctr">
-              <a:lnSpc>
-                <a:spcPct val="100000"/>
-              </a:lnSpc>
-              <a:spcBef>
-                <a:spcPts val="0"/>
-              </a:spcBef>
-              <a:spcAft>
-                <a:spcPts val="0"/>
-              </a:spcAft>
-              <a:buSzPts val="5200"/>
-              <a:buNone/>
-              <a:defRPr sz="5200"/>
-            </a:lvl5pPr>
-            <a:lvl6pPr lvl="5" algn="ctr">
-              <a:lnSpc>
-                <a:spcPct val="100000"/>
-              </a:lnSpc>
-              <a:spcBef>
-                <a:spcPts val="0"/>
-              </a:spcBef>
-              <a:spcAft>
-                <a:spcPts val="0"/>
-              </a:spcAft>
-              <a:buSzPts val="5200"/>
-              <a:buNone/>
-              <a:defRPr sz="5200"/>
-            </a:lvl6pPr>
-            <a:lvl7pPr lvl="6" algn="ctr">
-              <a:lnSpc>
-                <a:spcPct val="100000"/>
-              </a:lnSpc>
-              <a:spcBef>
-                <a:spcPts val="0"/>
-              </a:spcBef>
-              <a:spcAft>
-                <a:spcPts val="0"/>
-              </a:spcAft>
-              <a:buSzPts val="5200"/>
-              <a:buNone/>
-              <a:defRPr sz="5200"/>
-            </a:lvl7pPr>
-            <a:lvl8pPr lvl="7" algn="ctr">
-              <a:lnSpc>
-                <a:spcPct val="100000"/>
-              </a:lnSpc>
-              <a:spcBef>
-                <a:spcPts val="0"/>
-              </a:spcBef>
-              <a:spcAft>
-                <a:spcPts val="0"/>
-              </a:spcAft>
-              <a:buSzPts val="5200"/>
-              <a:buNone/>
-              <a:defRPr sz="5200"/>
-            </a:lvl8pPr>
-            <a:lvl9pPr lvl="8" algn="ctr">
-              <a:lnSpc>
-                <a:spcPct val="100000"/>
-              </a:lnSpc>
-              <a:spcBef>
-                <a:spcPts val="0"/>
-              </a:spcBef>
-              <a:spcAft>
-                <a:spcPts val="0"/>
-              </a:spcAft>
-              <a:buSzPts val="5200"/>
-              <a:buNone/>
-              <a:defRPr sz="5200"/>
-            </a:lvl9pPr>
-          </a:lstStyle>
-          <a:p/>
-        </p:txBody>
-      </p:sp>
-      <p:sp>
-        <p:nvSpPr>
-          <p:cNvPr id="11" name="Google Shape;11;p2"/>
-          <p:cNvSpPr txBox="1"/>
-          <p:nvPr>
-            <p:ph idx="1" type="subTitle"/>
-          </p:nvPr>
-        </p:nvSpPr>
-        <p:spPr>
-          <a:xfrm>
-            <a:off x="311700" y="2834125"/>
-            <a:ext cx="8520600" cy="792600"/>
+            <a:off x="311700" y="445025"/>
+            <a:ext cx="8520600" cy="572700"/>
           </a:xfrm>
           <a:prstGeom prst="rect">
             <a:avLst/>
@@ -1537,7 +1453,7 @@
             <a:normAutofit/>
           </a:bodyPr>
           <a:lstStyle>
-            <a:lvl1pPr lvl="0" algn="ctr">
+            <a:lvl1pPr lvl="0" algn="l">
               <a:lnSpc>
                 <a:spcPct val="100000"/>
               </a:lnSpc>
@@ -1549,9 +1465,9 @@
               </a:spcAft>
               <a:buSzPts val="2800"/>
               <a:buNone/>
-              <a:defRPr sz="2800"/>
+              <a:defRPr/>
             </a:lvl1pPr>
-            <a:lvl2pPr lvl="1" algn="ctr">
+            <a:lvl2pPr lvl="1" algn="l">
               <a:lnSpc>
                 <a:spcPct val="100000"/>
               </a:lnSpc>
@@ -1563,9 +1479,9 @@
               </a:spcAft>
               <a:buSzPts val="2800"/>
               <a:buNone/>
-              <a:defRPr sz="2800"/>
+              <a:defRPr/>
             </a:lvl2pPr>
-            <a:lvl3pPr lvl="2" algn="ctr">
+            <a:lvl3pPr lvl="2" algn="l">
               <a:lnSpc>
                 <a:spcPct val="100000"/>
               </a:lnSpc>
@@ -1577,9 +1493,9 @@
               </a:spcAft>
               <a:buSzPts val="2800"/>
               <a:buNone/>
-              <a:defRPr sz="2800"/>
+              <a:defRPr/>
             </a:lvl3pPr>
-            <a:lvl4pPr lvl="3" algn="ctr">
+            <a:lvl4pPr lvl="3" algn="l">
               <a:lnSpc>
                 <a:spcPct val="100000"/>
               </a:lnSpc>
@@ -1591,9 +1507,9 @@
               </a:spcAft>
               <a:buSzPts val="2800"/>
               <a:buNone/>
-              <a:defRPr sz="2800"/>
+              <a:defRPr/>
             </a:lvl4pPr>
-            <a:lvl5pPr lvl="4" algn="ctr">
+            <a:lvl5pPr lvl="4" algn="l">
               <a:lnSpc>
                 <a:spcPct val="100000"/>
               </a:lnSpc>
@@ -1605,9 +1521,9 @@
               </a:spcAft>
               <a:buSzPts val="2800"/>
               <a:buNone/>
-              <a:defRPr sz="2800"/>
+              <a:defRPr/>
             </a:lvl5pPr>
-            <a:lvl6pPr lvl="5" algn="ctr">
+            <a:lvl6pPr lvl="5" algn="l">
               <a:lnSpc>
                 <a:spcPct val="100000"/>
               </a:lnSpc>
@@ -1619,9 +1535,9 @@
               </a:spcAft>
               <a:buSzPts val="2800"/>
               <a:buNone/>
-              <a:defRPr sz="2800"/>
+              <a:defRPr/>
             </a:lvl6pPr>
-            <a:lvl7pPr lvl="6" algn="ctr">
+            <a:lvl7pPr lvl="6" algn="l">
               <a:lnSpc>
                 <a:spcPct val="100000"/>
               </a:lnSpc>
@@ -1633,9 +1549,9 @@
               </a:spcAft>
               <a:buSzPts val="2800"/>
               <a:buNone/>
-              <a:defRPr sz="2800"/>
+              <a:defRPr/>
             </a:lvl7pPr>
-            <a:lvl8pPr lvl="7" algn="ctr">
+            <a:lvl8pPr lvl="7" algn="l">
               <a:lnSpc>
                 <a:spcPct val="100000"/>
               </a:lnSpc>
@@ -1647,9 +1563,9 @@
               </a:spcAft>
               <a:buSzPts val="2800"/>
               <a:buNone/>
-              <a:defRPr sz="2800"/>
+              <a:defRPr/>
             </a:lvl8pPr>
-            <a:lvl9pPr lvl="8" algn="ctr">
+            <a:lvl9pPr lvl="8" algn="l">
               <a:lnSpc>
                 <a:spcPct val="100000"/>
               </a:lnSpc>
@@ -1661,7 +1577,163 @@
               </a:spcAft>
               <a:buSzPts val="2800"/>
               <a:buNone/>
-              <a:defRPr sz="2800"/>
+              <a:defRPr/>
+            </a:lvl9pPr>
+          </a:lstStyle>
+          <a:p/>
+        </p:txBody>
+      </p:sp>
+      <p:sp>
+        <p:nvSpPr>
+          <p:cNvPr id="11" name="Google Shape;11;p2"/>
+          <p:cNvSpPr txBox="1"/>
+          <p:nvPr>
+            <p:ph idx="1" type="body"/>
+          </p:nvPr>
+        </p:nvSpPr>
+        <p:spPr>
+          <a:xfrm>
+            <a:off x="311700" y="1152475"/>
+            <a:ext cx="8520600" cy="3416400"/>
+          </a:xfrm>
+          <a:prstGeom prst="rect">
+            <a:avLst/>
+          </a:prstGeom>
+          <a:noFill/>
+          <a:ln>
+            <a:noFill/>
+          </a:ln>
+        </p:spPr>
+        <p:txBody>
+          <a:bodyPr anchorCtr="0" anchor="t" bIns="91425" lIns="91425" spcFirstLastPara="1" rIns="91425" wrap="square" tIns="91425">
+            <a:normAutofit/>
+          </a:bodyPr>
+          <a:lstStyle>
+            <a:lvl1pPr indent="-342900" lvl="0" marL="457200" algn="l">
+              <a:lnSpc>
+                <a:spcPct val="115000"/>
+              </a:lnSpc>
+              <a:spcBef>
+                <a:spcPts val="0"/>
+              </a:spcBef>
+              <a:spcAft>
+                <a:spcPts val="0"/>
+              </a:spcAft>
+              <a:buSzPts val="1800"/>
+              <a:buChar char="●"/>
+              <a:defRPr/>
+            </a:lvl1pPr>
+            <a:lvl2pPr indent="-317500" lvl="1" marL="914400" algn="l">
+              <a:lnSpc>
+                <a:spcPct val="115000"/>
+              </a:lnSpc>
+              <a:spcBef>
+                <a:spcPts val="0"/>
+              </a:spcBef>
+              <a:spcAft>
+                <a:spcPts val="0"/>
+              </a:spcAft>
+              <a:buSzPts val="1400"/>
+              <a:buChar char="○"/>
+              <a:defRPr/>
+            </a:lvl2pPr>
+            <a:lvl3pPr indent="-317500" lvl="2" marL="1371600" algn="l">
+              <a:lnSpc>
+                <a:spcPct val="115000"/>
+              </a:lnSpc>
+              <a:spcBef>
+                <a:spcPts val="0"/>
+              </a:spcBef>
+              <a:spcAft>
+                <a:spcPts val="0"/>
+              </a:spcAft>
+              <a:buSzPts val="1400"/>
+              <a:buChar char="■"/>
+              <a:defRPr/>
+            </a:lvl3pPr>
+            <a:lvl4pPr indent="-317500" lvl="3" marL="1828800" algn="l">
+              <a:lnSpc>
+                <a:spcPct val="115000"/>
+              </a:lnSpc>
+              <a:spcBef>
+                <a:spcPts val="0"/>
+              </a:spcBef>
+              <a:spcAft>
+                <a:spcPts val="0"/>
+              </a:spcAft>
+              <a:buSzPts val="1400"/>
+              <a:buChar char="●"/>
+              <a:defRPr/>
+            </a:lvl4pPr>
+            <a:lvl5pPr indent="-317500" lvl="4" marL="2286000" algn="l">
+              <a:lnSpc>
+                <a:spcPct val="115000"/>
+              </a:lnSpc>
+              <a:spcBef>
+                <a:spcPts val="0"/>
+              </a:spcBef>
+              <a:spcAft>
+                <a:spcPts val="0"/>
+              </a:spcAft>
+              <a:buSzPts val="1400"/>
+              <a:buChar char="○"/>
+              <a:defRPr/>
+            </a:lvl5pPr>
+            <a:lvl6pPr indent="-317500" lvl="5" marL="2743200" algn="l">
+              <a:lnSpc>
+                <a:spcPct val="115000"/>
+              </a:lnSpc>
+              <a:spcBef>
+                <a:spcPts val="0"/>
+              </a:spcBef>
+              <a:spcAft>
+                <a:spcPts val="0"/>
+              </a:spcAft>
+              <a:buSzPts val="1400"/>
+              <a:buChar char="■"/>
+              <a:defRPr/>
+            </a:lvl6pPr>
+            <a:lvl7pPr indent="-317500" lvl="6" marL="3200400" algn="l">
+              <a:lnSpc>
+                <a:spcPct val="115000"/>
+              </a:lnSpc>
+              <a:spcBef>
+                <a:spcPts val="0"/>
+              </a:spcBef>
+              <a:spcAft>
+                <a:spcPts val="0"/>
+              </a:spcAft>
+              <a:buSzPts val="1400"/>
+              <a:buChar char="●"/>
+              <a:defRPr/>
+            </a:lvl7pPr>
+            <a:lvl8pPr indent="-317500" lvl="7" marL="3657600" algn="l">
+              <a:lnSpc>
+                <a:spcPct val="115000"/>
+              </a:lnSpc>
+              <a:spcBef>
+                <a:spcPts val="0"/>
+              </a:spcBef>
+              <a:spcAft>
+                <a:spcPts val="0"/>
+              </a:spcAft>
+              <a:buSzPts val="1400"/>
+              <a:buChar char="○"/>
+              <a:defRPr/>
+            </a:lvl8pPr>
+            <a:lvl9pPr indent="-317500" lvl="8" marL="4114800" algn="l">
+              <a:lnSpc>
+                <a:spcPct val="115000"/>
+              </a:lnSpc>
+              <a:spcBef>
+                <a:spcPts val="0"/>
+              </a:spcBef>
+              <a:spcAft>
+                <a:spcPts val="0"/>
+              </a:spcAft>
+              <a:buSzPts val="1400"/>
+              <a:buChar char="■"/>
+              <a:defRPr/>
             </a:lvl9pPr>
           </a:lstStyle>
           <a:p/>
@@ -2879,8 +2951,8 @@
 </file>
 
 <file path=ppt/slideLayouts/slideLayout2.xml><?xml version="1.0" encoding="utf-8"?>
-<p:sldLayout xmlns:a="http://schemas.openxmlformats.org/drawingml/2006/main" xmlns:r="http://schemas.openxmlformats.org/officeDocument/2006/relationships" xmlns:mc="http://schemas.openxmlformats.org/markup-compatibility/2006" xmlns:mv="urn:schemas-microsoft-com:mac:vml" xmlns:p="http://schemas.openxmlformats.org/presentationml/2006/main" xmlns:c="http://schemas.openxmlformats.org/drawingml/2006/chart" xmlns:dgm="http://schemas.openxmlformats.org/drawingml/2006/diagram" xmlns:o="urn:schemas-microsoft-com:office:office" xmlns:v="urn:schemas-microsoft-com:vml" xmlns:pvml="urn:schemas-microsoft-com:office:powerpoint" xmlns:com="http://schemas.openxmlformats.org/drawingml/2006/compatibility" xmlns:p14="http://schemas.microsoft.com/office/powerpoint/2010/main" xmlns:p15="http://schemas.microsoft.com/office/powerpoint/2012/main" xmlns:ahyp="http://schemas.microsoft.com/office/drawing/2018/hyperlinkcolor" matchingName="Section header" type="secHead">
-  <p:cSld name="SECTION_HEADER">
+<p:sldLayout xmlns:a="http://schemas.openxmlformats.org/drawingml/2006/main" xmlns:r="http://schemas.openxmlformats.org/officeDocument/2006/relationships" xmlns:mc="http://schemas.openxmlformats.org/markup-compatibility/2006" xmlns:mv="urn:schemas-microsoft-com:mac:vml" xmlns:p="http://schemas.openxmlformats.org/presentationml/2006/main" xmlns:c="http://schemas.openxmlformats.org/drawingml/2006/chart" xmlns:dgm="http://schemas.openxmlformats.org/drawingml/2006/diagram" xmlns:o="urn:schemas-microsoft-com:office:office" xmlns:v="urn:schemas-microsoft-com:vml" xmlns:pvml="urn:schemas-microsoft-com:office:powerpoint" xmlns:com="http://schemas.openxmlformats.org/drawingml/2006/compatibility" xmlns:p14="http://schemas.microsoft.com/office/powerpoint/2010/main" xmlns:p15="http://schemas.microsoft.com/office/powerpoint/2012/main" xmlns:ahyp="http://schemas.microsoft.com/office/drawing/2018/hyperlinkcolor" matchingName="Title slide" type="title">
+  <p:cSld name="TITLE">
     <p:spTree>
       <p:nvGrpSpPr>
         <p:cNvPr id="13" name="Shape 13"/>
@@ -2898,6 +2970,622 @@
       <p:sp>
         <p:nvSpPr>
           <p:cNvPr id="14" name="Google Shape;14;p3"/>
+          <p:cNvSpPr txBox="1"/>
+          <p:nvPr>
+            <p:ph type="ctrTitle"/>
+          </p:nvPr>
+        </p:nvSpPr>
+        <p:spPr>
+          <a:xfrm>
+            <a:off x="311708" y="744575"/>
+            <a:ext cx="8520600" cy="2052600"/>
+          </a:xfrm>
+          <a:prstGeom prst="rect">
+            <a:avLst/>
+          </a:prstGeom>
+          <a:noFill/>
+          <a:ln>
+            <a:noFill/>
+          </a:ln>
+        </p:spPr>
+        <p:txBody>
+          <a:bodyPr anchorCtr="0" anchor="b" bIns="91425" lIns="91425" spcFirstLastPara="1" rIns="91425" wrap="square" tIns="91425">
+            <a:normAutofit/>
+          </a:bodyPr>
+          <a:lstStyle>
+            <a:lvl1pPr lvl="0" algn="ctr">
+              <a:lnSpc>
+                <a:spcPct val="100000"/>
+              </a:lnSpc>
+              <a:spcBef>
+                <a:spcPts val="0"/>
+              </a:spcBef>
+              <a:spcAft>
+                <a:spcPts val="0"/>
+              </a:spcAft>
+              <a:buSzPts val="5200"/>
+              <a:buNone/>
+              <a:defRPr sz="5200"/>
+            </a:lvl1pPr>
+            <a:lvl2pPr lvl="1" algn="ctr">
+              <a:lnSpc>
+                <a:spcPct val="100000"/>
+              </a:lnSpc>
+              <a:spcBef>
+                <a:spcPts val="0"/>
+              </a:spcBef>
+              <a:spcAft>
+                <a:spcPts val="0"/>
+              </a:spcAft>
+              <a:buSzPts val="5200"/>
+              <a:buNone/>
+              <a:defRPr sz="5200"/>
+            </a:lvl2pPr>
+            <a:lvl3pPr lvl="2" algn="ctr">
+              <a:lnSpc>
+                <a:spcPct val="100000"/>
+              </a:lnSpc>
+              <a:spcBef>
+                <a:spcPts val="0"/>
+              </a:spcBef>
+              <a:spcAft>
+                <a:spcPts val="0"/>
+              </a:spcAft>
+              <a:buSzPts val="5200"/>
+              <a:buNone/>
+              <a:defRPr sz="5200"/>
+            </a:lvl3pPr>
+            <a:lvl4pPr lvl="3" algn="ctr">
+              <a:lnSpc>
+                <a:spcPct val="100000"/>
+              </a:lnSpc>
+              <a:spcBef>
+                <a:spcPts val="0"/>
+              </a:spcBef>
+              <a:spcAft>
+                <a:spcPts val="0"/>
+              </a:spcAft>
+              <a:buSzPts val="5200"/>
+              <a:buNone/>
+              <a:defRPr sz="5200"/>
+            </a:lvl4pPr>
+            <a:lvl5pPr lvl="4" algn="ctr">
+              <a:lnSpc>
+                <a:spcPct val="100000"/>
+              </a:lnSpc>
+              <a:spcBef>
+                <a:spcPts val="0"/>
+              </a:spcBef>
+              <a:spcAft>
+                <a:spcPts val="0"/>
+              </a:spcAft>
+              <a:buSzPts val="5200"/>
+              <a:buNone/>
+              <a:defRPr sz="5200"/>
+            </a:lvl5pPr>
+            <a:lvl6pPr lvl="5" algn="ctr">
+              <a:lnSpc>
+                <a:spcPct val="100000"/>
+              </a:lnSpc>
+              <a:spcBef>
+                <a:spcPts val="0"/>
+              </a:spcBef>
+              <a:spcAft>
+                <a:spcPts val="0"/>
+              </a:spcAft>
+              <a:buSzPts val="5200"/>
+              <a:buNone/>
+              <a:defRPr sz="5200"/>
+            </a:lvl6pPr>
+            <a:lvl7pPr lvl="6" algn="ctr">
+              <a:lnSpc>
+                <a:spcPct val="100000"/>
+              </a:lnSpc>
+              <a:spcBef>
+                <a:spcPts val="0"/>
+              </a:spcBef>
+              <a:spcAft>
+                <a:spcPts val="0"/>
+              </a:spcAft>
+              <a:buSzPts val="5200"/>
+              <a:buNone/>
+              <a:defRPr sz="5200"/>
+            </a:lvl7pPr>
+            <a:lvl8pPr lvl="7" algn="ctr">
+              <a:lnSpc>
+                <a:spcPct val="100000"/>
+              </a:lnSpc>
+              <a:spcBef>
+                <a:spcPts val="0"/>
+              </a:spcBef>
+              <a:spcAft>
+                <a:spcPts val="0"/>
+              </a:spcAft>
+              <a:buSzPts val="5200"/>
+              <a:buNone/>
+              <a:defRPr sz="5200"/>
+            </a:lvl8pPr>
+            <a:lvl9pPr lvl="8" algn="ctr">
+              <a:lnSpc>
+                <a:spcPct val="100000"/>
+              </a:lnSpc>
+              <a:spcBef>
+                <a:spcPts val="0"/>
+              </a:spcBef>
+              <a:spcAft>
+                <a:spcPts val="0"/>
+              </a:spcAft>
+              <a:buSzPts val="5200"/>
+              <a:buNone/>
+              <a:defRPr sz="5200"/>
+            </a:lvl9pPr>
+          </a:lstStyle>
+          <a:p/>
+        </p:txBody>
+      </p:sp>
+      <p:sp>
+        <p:nvSpPr>
+          <p:cNvPr id="15" name="Google Shape;15;p3"/>
+          <p:cNvSpPr txBox="1"/>
+          <p:nvPr>
+            <p:ph idx="1" type="subTitle"/>
+          </p:nvPr>
+        </p:nvSpPr>
+        <p:spPr>
+          <a:xfrm>
+            <a:off x="311700" y="2834125"/>
+            <a:ext cx="8520600" cy="792600"/>
+          </a:xfrm>
+          <a:prstGeom prst="rect">
+            <a:avLst/>
+          </a:prstGeom>
+          <a:noFill/>
+          <a:ln>
+            <a:noFill/>
+          </a:ln>
+        </p:spPr>
+        <p:txBody>
+          <a:bodyPr anchorCtr="0" anchor="t" bIns="91425" lIns="91425" spcFirstLastPara="1" rIns="91425" wrap="square" tIns="91425">
+            <a:normAutofit/>
+          </a:bodyPr>
+          <a:lstStyle>
+            <a:lvl1pPr lvl="0" algn="ctr">
+              <a:lnSpc>
+                <a:spcPct val="100000"/>
+              </a:lnSpc>
+              <a:spcBef>
+                <a:spcPts val="0"/>
+              </a:spcBef>
+              <a:spcAft>
+                <a:spcPts val="0"/>
+              </a:spcAft>
+              <a:buSzPts val="2800"/>
+              <a:buNone/>
+              <a:defRPr sz="2800"/>
+            </a:lvl1pPr>
+            <a:lvl2pPr lvl="1" algn="ctr">
+              <a:lnSpc>
+                <a:spcPct val="100000"/>
+              </a:lnSpc>
+              <a:spcBef>
+                <a:spcPts val="0"/>
+              </a:spcBef>
+              <a:spcAft>
+                <a:spcPts val="0"/>
+              </a:spcAft>
+              <a:buSzPts val="2800"/>
+              <a:buNone/>
+              <a:defRPr sz="2800"/>
+            </a:lvl2pPr>
+            <a:lvl3pPr lvl="2" algn="ctr">
+              <a:lnSpc>
+                <a:spcPct val="100000"/>
+              </a:lnSpc>
+              <a:spcBef>
+                <a:spcPts val="0"/>
+              </a:spcBef>
+              <a:spcAft>
+                <a:spcPts val="0"/>
+              </a:spcAft>
+              <a:buSzPts val="2800"/>
+              <a:buNone/>
+              <a:defRPr sz="2800"/>
+            </a:lvl3pPr>
+            <a:lvl4pPr lvl="3" algn="ctr">
+              <a:lnSpc>
+                <a:spcPct val="100000"/>
+              </a:lnSpc>
+              <a:spcBef>
+                <a:spcPts val="0"/>
+              </a:spcBef>
+              <a:spcAft>
+                <a:spcPts val="0"/>
+              </a:spcAft>
+              <a:buSzPts val="2800"/>
+              <a:buNone/>
+              <a:defRPr sz="2800"/>
+            </a:lvl4pPr>
+            <a:lvl5pPr lvl="4" algn="ctr">
+              <a:lnSpc>
+                <a:spcPct val="100000"/>
+              </a:lnSpc>
+              <a:spcBef>
+                <a:spcPts val="0"/>
+              </a:spcBef>
+              <a:spcAft>
+                <a:spcPts val="0"/>
+              </a:spcAft>
+              <a:buSzPts val="2800"/>
+              <a:buNone/>
+              <a:defRPr sz="2800"/>
+            </a:lvl5pPr>
+            <a:lvl6pPr lvl="5" algn="ctr">
+              <a:lnSpc>
+                <a:spcPct val="100000"/>
+              </a:lnSpc>
+              <a:spcBef>
+                <a:spcPts val="0"/>
+              </a:spcBef>
+              <a:spcAft>
+                <a:spcPts val="0"/>
+              </a:spcAft>
+              <a:buSzPts val="2800"/>
+              <a:buNone/>
+              <a:defRPr sz="2800"/>
+            </a:lvl6pPr>
+            <a:lvl7pPr lvl="6" algn="ctr">
+              <a:lnSpc>
+                <a:spcPct val="100000"/>
+              </a:lnSpc>
+              <a:spcBef>
+                <a:spcPts val="0"/>
+              </a:spcBef>
+              <a:spcAft>
+                <a:spcPts val="0"/>
+              </a:spcAft>
+              <a:buSzPts val="2800"/>
+              <a:buNone/>
+              <a:defRPr sz="2800"/>
+            </a:lvl7pPr>
+            <a:lvl8pPr lvl="7" algn="ctr">
+              <a:lnSpc>
+                <a:spcPct val="100000"/>
+              </a:lnSpc>
+              <a:spcBef>
+                <a:spcPts val="0"/>
+              </a:spcBef>
+              <a:spcAft>
+                <a:spcPts val="0"/>
+              </a:spcAft>
+              <a:buSzPts val="2800"/>
+              <a:buNone/>
+              <a:defRPr sz="2800"/>
+            </a:lvl8pPr>
+            <a:lvl9pPr lvl="8" algn="ctr">
+              <a:lnSpc>
+                <a:spcPct val="100000"/>
+              </a:lnSpc>
+              <a:spcBef>
+                <a:spcPts val="0"/>
+              </a:spcBef>
+              <a:spcAft>
+                <a:spcPts val="0"/>
+              </a:spcAft>
+              <a:buSzPts val="2800"/>
+              <a:buNone/>
+              <a:defRPr sz="2800"/>
+            </a:lvl9pPr>
+          </a:lstStyle>
+          <a:p/>
+        </p:txBody>
+      </p:sp>
+      <p:sp>
+        <p:nvSpPr>
+          <p:cNvPr id="16" name="Google Shape;16;p3"/>
+          <p:cNvSpPr txBox="1"/>
+          <p:nvPr>
+            <p:ph idx="12" type="sldNum"/>
+          </p:nvPr>
+        </p:nvSpPr>
+        <p:spPr>
+          <a:xfrm>
+            <a:off x="8472458" y="4663217"/>
+            <a:ext cx="548700" cy="393600"/>
+          </a:xfrm>
+          <a:prstGeom prst="rect">
+            <a:avLst/>
+          </a:prstGeom>
+          <a:noFill/>
+          <a:ln>
+            <a:noFill/>
+          </a:ln>
+        </p:spPr>
+        <p:txBody>
+          <a:bodyPr anchorCtr="0" anchor="ctr" bIns="91425" lIns="91425" spcFirstLastPara="1" rIns="91425" wrap="square" tIns="91425">
+            <a:normAutofit/>
+          </a:bodyPr>
+          <a:lstStyle>
+            <a:lvl1pPr indent="0" lvl="0" marL="0" marR="0" algn="r">
+              <a:lnSpc>
+                <a:spcPct val="100000"/>
+              </a:lnSpc>
+              <a:spcBef>
+                <a:spcPts val="0"/>
+              </a:spcBef>
+              <a:spcAft>
+                <a:spcPts val="0"/>
+              </a:spcAft>
+              <a:buClr>
+                <a:srgbClr val="000000"/>
+              </a:buClr>
+              <a:buSzPts val="1000"/>
+              <a:buFont typeface="Arial"/>
+              <a:buNone/>
+              <a:defRPr b="0" i="0" sz="1000" u="none" cap="none" strike="noStrike">
+                <a:solidFill>
+                  <a:schemeClr val="dk2"/>
+                </a:solidFill>
+                <a:latin typeface="Arial"/>
+                <a:ea typeface="Arial"/>
+                <a:cs typeface="Arial"/>
+                <a:sym typeface="Arial"/>
+              </a:defRPr>
+            </a:lvl1pPr>
+            <a:lvl2pPr indent="0" lvl="1" marL="0" marR="0" algn="r">
+              <a:lnSpc>
+                <a:spcPct val="100000"/>
+              </a:lnSpc>
+              <a:spcBef>
+                <a:spcPts val="0"/>
+              </a:spcBef>
+              <a:spcAft>
+                <a:spcPts val="0"/>
+              </a:spcAft>
+              <a:buClr>
+                <a:srgbClr val="000000"/>
+              </a:buClr>
+              <a:buSzPts val="1000"/>
+              <a:buFont typeface="Arial"/>
+              <a:buNone/>
+              <a:defRPr b="0" i="0" sz="1000" u="none" cap="none" strike="noStrike">
+                <a:solidFill>
+                  <a:schemeClr val="dk2"/>
+                </a:solidFill>
+                <a:latin typeface="Arial"/>
+                <a:ea typeface="Arial"/>
+                <a:cs typeface="Arial"/>
+                <a:sym typeface="Arial"/>
+              </a:defRPr>
+            </a:lvl2pPr>
+            <a:lvl3pPr indent="0" lvl="2" marL="0" marR="0" algn="r">
+              <a:lnSpc>
+                <a:spcPct val="100000"/>
+              </a:lnSpc>
+              <a:spcBef>
+                <a:spcPts val="0"/>
+              </a:spcBef>
+              <a:spcAft>
+                <a:spcPts val="0"/>
+              </a:spcAft>
+              <a:buClr>
+                <a:srgbClr val="000000"/>
+              </a:buClr>
+              <a:buSzPts val="1000"/>
+              <a:buFont typeface="Arial"/>
+              <a:buNone/>
+              <a:defRPr b="0" i="0" sz="1000" u="none" cap="none" strike="noStrike">
+                <a:solidFill>
+                  <a:schemeClr val="dk2"/>
+                </a:solidFill>
+                <a:latin typeface="Arial"/>
+                <a:ea typeface="Arial"/>
+                <a:cs typeface="Arial"/>
+                <a:sym typeface="Arial"/>
+              </a:defRPr>
+            </a:lvl3pPr>
+            <a:lvl4pPr indent="0" lvl="3" marL="0" marR="0" algn="r">
+              <a:lnSpc>
+                <a:spcPct val="100000"/>
+              </a:lnSpc>
+              <a:spcBef>
+                <a:spcPts val="0"/>
+              </a:spcBef>
+              <a:spcAft>
+                <a:spcPts val="0"/>
+              </a:spcAft>
+              <a:buClr>
+                <a:srgbClr val="000000"/>
+              </a:buClr>
+              <a:buSzPts val="1000"/>
+              <a:buFont typeface="Arial"/>
+              <a:buNone/>
+              <a:defRPr b="0" i="0" sz="1000" u="none" cap="none" strike="noStrike">
+                <a:solidFill>
+                  <a:schemeClr val="dk2"/>
+                </a:solidFill>
+                <a:latin typeface="Arial"/>
+                <a:ea typeface="Arial"/>
+                <a:cs typeface="Arial"/>
+                <a:sym typeface="Arial"/>
+              </a:defRPr>
+            </a:lvl4pPr>
+            <a:lvl5pPr indent="0" lvl="4" marL="0" marR="0" algn="r">
+              <a:lnSpc>
+                <a:spcPct val="100000"/>
+              </a:lnSpc>
+              <a:spcBef>
+                <a:spcPts val="0"/>
+              </a:spcBef>
+              <a:spcAft>
+                <a:spcPts val="0"/>
+              </a:spcAft>
+              <a:buClr>
+                <a:srgbClr val="000000"/>
+              </a:buClr>
+              <a:buSzPts val="1000"/>
+              <a:buFont typeface="Arial"/>
+              <a:buNone/>
+              <a:defRPr b="0" i="0" sz="1000" u="none" cap="none" strike="noStrike">
+                <a:solidFill>
+                  <a:schemeClr val="dk2"/>
+                </a:solidFill>
+                <a:latin typeface="Arial"/>
+                <a:ea typeface="Arial"/>
+                <a:cs typeface="Arial"/>
+                <a:sym typeface="Arial"/>
+              </a:defRPr>
+            </a:lvl5pPr>
+            <a:lvl6pPr indent="0" lvl="5" marL="0" marR="0" algn="r">
+              <a:lnSpc>
+                <a:spcPct val="100000"/>
+              </a:lnSpc>
+              <a:spcBef>
+                <a:spcPts val="0"/>
+              </a:spcBef>
+              <a:spcAft>
+                <a:spcPts val="0"/>
+              </a:spcAft>
+              <a:buClr>
+                <a:srgbClr val="000000"/>
+              </a:buClr>
+              <a:buSzPts val="1000"/>
+              <a:buFont typeface="Arial"/>
+              <a:buNone/>
+              <a:defRPr b="0" i="0" sz="1000" u="none" cap="none" strike="noStrike">
+                <a:solidFill>
+                  <a:schemeClr val="dk2"/>
+                </a:solidFill>
+                <a:latin typeface="Arial"/>
+                <a:ea typeface="Arial"/>
+                <a:cs typeface="Arial"/>
+                <a:sym typeface="Arial"/>
+              </a:defRPr>
+            </a:lvl6pPr>
+            <a:lvl7pPr indent="0" lvl="6" marL="0" marR="0" algn="r">
+              <a:lnSpc>
+                <a:spcPct val="100000"/>
+              </a:lnSpc>
+              <a:spcBef>
+                <a:spcPts val="0"/>
+              </a:spcBef>
+              <a:spcAft>
+                <a:spcPts val="0"/>
+              </a:spcAft>
+              <a:buClr>
+                <a:srgbClr val="000000"/>
+              </a:buClr>
+              <a:buSzPts val="1000"/>
+              <a:buFont typeface="Arial"/>
+              <a:buNone/>
+              <a:defRPr b="0" i="0" sz="1000" u="none" cap="none" strike="noStrike">
+                <a:solidFill>
+                  <a:schemeClr val="dk2"/>
+                </a:solidFill>
+                <a:latin typeface="Arial"/>
+                <a:ea typeface="Arial"/>
+                <a:cs typeface="Arial"/>
+                <a:sym typeface="Arial"/>
+              </a:defRPr>
+            </a:lvl7pPr>
+            <a:lvl8pPr indent="0" lvl="7" marL="0" marR="0" algn="r">
+              <a:lnSpc>
+                <a:spcPct val="100000"/>
+              </a:lnSpc>
+              <a:spcBef>
+                <a:spcPts val="0"/>
+              </a:spcBef>
+              <a:spcAft>
+                <a:spcPts val="0"/>
+              </a:spcAft>
+              <a:buClr>
+                <a:srgbClr val="000000"/>
+              </a:buClr>
+              <a:buSzPts val="1000"/>
+              <a:buFont typeface="Arial"/>
+              <a:buNone/>
+              <a:defRPr b="0" i="0" sz="1000" u="none" cap="none" strike="noStrike">
+                <a:solidFill>
+                  <a:schemeClr val="dk2"/>
+                </a:solidFill>
+                <a:latin typeface="Arial"/>
+                <a:ea typeface="Arial"/>
+                <a:cs typeface="Arial"/>
+                <a:sym typeface="Arial"/>
+              </a:defRPr>
+            </a:lvl8pPr>
+            <a:lvl9pPr indent="0" lvl="8" marL="0" marR="0" algn="r">
+              <a:lnSpc>
+                <a:spcPct val="100000"/>
+              </a:lnSpc>
+              <a:spcBef>
+                <a:spcPts val="0"/>
+              </a:spcBef>
+              <a:spcAft>
+                <a:spcPts val="0"/>
+              </a:spcAft>
+              <a:buClr>
+                <a:srgbClr val="000000"/>
+              </a:buClr>
+              <a:buSzPts val="1000"/>
+              <a:buFont typeface="Arial"/>
+              <a:buNone/>
+              <a:defRPr b="0" i="0" sz="1000" u="none" cap="none" strike="noStrike">
+                <a:solidFill>
+                  <a:schemeClr val="dk2"/>
+                </a:solidFill>
+                <a:latin typeface="Arial"/>
+                <a:ea typeface="Arial"/>
+                <a:cs typeface="Arial"/>
+                <a:sym typeface="Arial"/>
+              </a:defRPr>
+            </a:lvl9pPr>
+          </a:lstStyle>
+          <a:p>
+            <a:pPr indent="0" lvl="0" marL="0" rtl="0" algn="r">
+              <a:spcBef>
+                <a:spcPts val="0"/>
+              </a:spcBef>
+              <a:spcAft>
+                <a:spcPts val="0"/>
+              </a:spcAft>
+              <a:buNone/>
+            </a:pPr>
+            <a:fld id="{00000000-1234-1234-1234-123412341234}" type="slidenum">
+              <a:rPr lang="pt-BR"/>
+              <a:t>‹#›</a:t>
+            </a:fld>
+            <a:endParaRPr/>
+          </a:p>
+        </p:txBody>
+      </p:sp>
+    </p:spTree>
+  </p:cSld>
+  <p:clrMapOvr>
+    <a:masterClrMapping/>
+  </p:clrMapOvr>
+</p:sldLayout>
+</file>
+
+<file path=ppt/slideLayouts/slideLayout3.xml><?xml version="1.0" encoding="utf-8"?>
+<p:sldLayout xmlns:a="http://schemas.openxmlformats.org/drawingml/2006/main" xmlns:r="http://schemas.openxmlformats.org/officeDocument/2006/relationships" xmlns:mc="http://schemas.openxmlformats.org/markup-compatibility/2006" xmlns:mv="urn:schemas-microsoft-com:mac:vml" xmlns:p="http://schemas.openxmlformats.org/presentationml/2006/main" xmlns:c="http://schemas.openxmlformats.org/drawingml/2006/chart" xmlns:dgm="http://schemas.openxmlformats.org/drawingml/2006/diagram" xmlns:o="urn:schemas-microsoft-com:office:office" xmlns:v="urn:schemas-microsoft-com:vml" xmlns:pvml="urn:schemas-microsoft-com:office:powerpoint" xmlns:com="http://schemas.openxmlformats.org/drawingml/2006/compatibility" xmlns:p14="http://schemas.microsoft.com/office/powerpoint/2010/main" xmlns:p15="http://schemas.microsoft.com/office/powerpoint/2012/main" xmlns:ahyp="http://schemas.microsoft.com/office/drawing/2018/hyperlinkcolor" matchingName="Section header" type="secHead">
+  <p:cSld name="SECTION_HEADER">
+    <p:spTree>
+      <p:nvGrpSpPr>
+        <p:cNvPr id="17" name="Shape 17"/>
+        <p:cNvGrpSpPr/>
+        <p:nvPr/>
+      </p:nvGrpSpPr>
+      <p:grpSpPr>
+        <a:xfrm>
+          <a:off x="0" y="0"/>
+          <a:ext cx="0" cy="0"/>
+          <a:chOff x="0" y="0"/>
+          <a:chExt cx="0" cy="0"/>
+        </a:xfrm>
+      </p:grpSpPr>
+      <p:sp>
+        <p:nvSpPr>
+          <p:cNvPr id="18" name="Google Shape;18;p4"/>
           <p:cNvSpPr txBox="1"/>
           <p:nvPr>
             <p:ph type="title"/>
@@ -3046,622 +3734,6 @@
               <a:buSzPts val="3600"/>
               <a:buNone/>
               <a:defRPr sz="3600"/>
-            </a:lvl9pPr>
-          </a:lstStyle>
-          <a:p/>
-        </p:txBody>
-      </p:sp>
-      <p:sp>
-        <p:nvSpPr>
-          <p:cNvPr id="15" name="Google Shape;15;p3"/>
-          <p:cNvSpPr txBox="1"/>
-          <p:nvPr>
-            <p:ph idx="12" type="sldNum"/>
-          </p:nvPr>
-        </p:nvSpPr>
-        <p:spPr>
-          <a:xfrm>
-            <a:off x="8472458" y="4663217"/>
-            <a:ext cx="548700" cy="393600"/>
-          </a:xfrm>
-          <a:prstGeom prst="rect">
-            <a:avLst/>
-          </a:prstGeom>
-          <a:noFill/>
-          <a:ln>
-            <a:noFill/>
-          </a:ln>
-        </p:spPr>
-        <p:txBody>
-          <a:bodyPr anchorCtr="0" anchor="ctr" bIns="91425" lIns="91425" spcFirstLastPara="1" rIns="91425" wrap="square" tIns="91425">
-            <a:normAutofit/>
-          </a:bodyPr>
-          <a:lstStyle>
-            <a:lvl1pPr indent="0" lvl="0" marL="0" marR="0" algn="r">
-              <a:lnSpc>
-                <a:spcPct val="100000"/>
-              </a:lnSpc>
-              <a:spcBef>
-                <a:spcPts val="0"/>
-              </a:spcBef>
-              <a:spcAft>
-                <a:spcPts val="0"/>
-              </a:spcAft>
-              <a:buClr>
-                <a:srgbClr val="000000"/>
-              </a:buClr>
-              <a:buSzPts val="1000"/>
-              <a:buFont typeface="Arial"/>
-              <a:buNone/>
-              <a:defRPr b="0" i="0" sz="1000" u="none" cap="none" strike="noStrike">
-                <a:solidFill>
-                  <a:schemeClr val="dk2"/>
-                </a:solidFill>
-                <a:latin typeface="Arial"/>
-                <a:ea typeface="Arial"/>
-                <a:cs typeface="Arial"/>
-                <a:sym typeface="Arial"/>
-              </a:defRPr>
-            </a:lvl1pPr>
-            <a:lvl2pPr indent="0" lvl="1" marL="0" marR="0" algn="r">
-              <a:lnSpc>
-                <a:spcPct val="100000"/>
-              </a:lnSpc>
-              <a:spcBef>
-                <a:spcPts val="0"/>
-              </a:spcBef>
-              <a:spcAft>
-                <a:spcPts val="0"/>
-              </a:spcAft>
-              <a:buClr>
-                <a:srgbClr val="000000"/>
-              </a:buClr>
-              <a:buSzPts val="1000"/>
-              <a:buFont typeface="Arial"/>
-              <a:buNone/>
-              <a:defRPr b="0" i="0" sz="1000" u="none" cap="none" strike="noStrike">
-                <a:solidFill>
-                  <a:schemeClr val="dk2"/>
-                </a:solidFill>
-                <a:latin typeface="Arial"/>
-                <a:ea typeface="Arial"/>
-                <a:cs typeface="Arial"/>
-                <a:sym typeface="Arial"/>
-              </a:defRPr>
-            </a:lvl2pPr>
-            <a:lvl3pPr indent="0" lvl="2" marL="0" marR="0" algn="r">
-              <a:lnSpc>
-                <a:spcPct val="100000"/>
-              </a:lnSpc>
-              <a:spcBef>
-                <a:spcPts val="0"/>
-              </a:spcBef>
-              <a:spcAft>
-                <a:spcPts val="0"/>
-              </a:spcAft>
-              <a:buClr>
-                <a:srgbClr val="000000"/>
-              </a:buClr>
-              <a:buSzPts val="1000"/>
-              <a:buFont typeface="Arial"/>
-              <a:buNone/>
-              <a:defRPr b="0" i="0" sz="1000" u="none" cap="none" strike="noStrike">
-                <a:solidFill>
-                  <a:schemeClr val="dk2"/>
-                </a:solidFill>
-                <a:latin typeface="Arial"/>
-                <a:ea typeface="Arial"/>
-                <a:cs typeface="Arial"/>
-                <a:sym typeface="Arial"/>
-              </a:defRPr>
-            </a:lvl3pPr>
-            <a:lvl4pPr indent="0" lvl="3" marL="0" marR="0" algn="r">
-              <a:lnSpc>
-                <a:spcPct val="100000"/>
-              </a:lnSpc>
-              <a:spcBef>
-                <a:spcPts val="0"/>
-              </a:spcBef>
-              <a:spcAft>
-                <a:spcPts val="0"/>
-              </a:spcAft>
-              <a:buClr>
-                <a:srgbClr val="000000"/>
-              </a:buClr>
-              <a:buSzPts val="1000"/>
-              <a:buFont typeface="Arial"/>
-              <a:buNone/>
-              <a:defRPr b="0" i="0" sz="1000" u="none" cap="none" strike="noStrike">
-                <a:solidFill>
-                  <a:schemeClr val="dk2"/>
-                </a:solidFill>
-                <a:latin typeface="Arial"/>
-                <a:ea typeface="Arial"/>
-                <a:cs typeface="Arial"/>
-                <a:sym typeface="Arial"/>
-              </a:defRPr>
-            </a:lvl4pPr>
-            <a:lvl5pPr indent="0" lvl="4" marL="0" marR="0" algn="r">
-              <a:lnSpc>
-                <a:spcPct val="100000"/>
-              </a:lnSpc>
-              <a:spcBef>
-                <a:spcPts val="0"/>
-              </a:spcBef>
-              <a:spcAft>
-                <a:spcPts val="0"/>
-              </a:spcAft>
-              <a:buClr>
-                <a:srgbClr val="000000"/>
-              </a:buClr>
-              <a:buSzPts val="1000"/>
-              <a:buFont typeface="Arial"/>
-              <a:buNone/>
-              <a:defRPr b="0" i="0" sz="1000" u="none" cap="none" strike="noStrike">
-                <a:solidFill>
-                  <a:schemeClr val="dk2"/>
-                </a:solidFill>
-                <a:latin typeface="Arial"/>
-                <a:ea typeface="Arial"/>
-                <a:cs typeface="Arial"/>
-                <a:sym typeface="Arial"/>
-              </a:defRPr>
-            </a:lvl5pPr>
-            <a:lvl6pPr indent="0" lvl="5" marL="0" marR="0" algn="r">
-              <a:lnSpc>
-                <a:spcPct val="100000"/>
-              </a:lnSpc>
-              <a:spcBef>
-                <a:spcPts val="0"/>
-              </a:spcBef>
-              <a:spcAft>
-                <a:spcPts val="0"/>
-              </a:spcAft>
-              <a:buClr>
-                <a:srgbClr val="000000"/>
-              </a:buClr>
-              <a:buSzPts val="1000"/>
-              <a:buFont typeface="Arial"/>
-              <a:buNone/>
-              <a:defRPr b="0" i="0" sz="1000" u="none" cap="none" strike="noStrike">
-                <a:solidFill>
-                  <a:schemeClr val="dk2"/>
-                </a:solidFill>
-                <a:latin typeface="Arial"/>
-                <a:ea typeface="Arial"/>
-                <a:cs typeface="Arial"/>
-                <a:sym typeface="Arial"/>
-              </a:defRPr>
-            </a:lvl6pPr>
-            <a:lvl7pPr indent="0" lvl="6" marL="0" marR="0" algn="r">
-              <a:lnSpc>
-                <a:spcPct val="100000"/>
-              </a:lnSpc>
-              <a:spcBef>
-                <a:spcPts val="0"/>
-              </a:spcBef>
-              <a:spcAft>
-                <a:spcPts val="0"/>
-              </a:spcAft>
-              <a:buClr>
-                <a:srgbClr val="000000"/>
-              </a:buClr>
-              <a:buSzPts val="1000"/>
-              <a:buFont typeface="Arial"/>
-              <a:buNone/>
-              <a:defRPr b="0" i="0" sz="1000" u="none" cap="none" strike="noStrike">
-                <a:solidFill>
-                  <a:schemeClr val="dk2"/>
-                </a:solidFill>
-                <a:latin typeface="Arial"/>
-                <a:ea typeface="Arial"/>
-                <a:cs typeface="Arial"/>
-                <a:sym typeface="Arial"/>
-              </a:defRPr>
-            </a:lvl7pPr>
-            <a:lvl8pPr indent="0" lvl="7" marL="0" marR="0" algn="r">
-              <a:lnSpc>
-                <a:spcPct val="100000"/>
-              </a:lnSpc>
-              <a:spcBef>
-                <a:spcPts val="0"/>
-              </a:spcBef>
-              <a:spcAft>
-                <a:spcPts val="0"/>
-              </a:spcAft>
-              <a:buClr>
-                <a:srgbClr val="000000"/>
-              </a:buClr>
-              <a:buSzPts val="1000"/>
-              <a:buFont typeface="Arial"/>
-              <a:buNone/>
-              <a:defRPr b="0" i="0" sz="1000" u="none" cap="none" strike="noStrike">
-                <a:solidFill>
-                  <a:schemeClr val="dk2"/>
-                </a:solidFill>
-                <a:latin typeface="Arial"/>
-                <a:ea typeface="Arial"/>
-                <a:cs typeface="Arial"/>
-                <a:sym typeface="Arial"/>
-              </a:defRPr>
-            </a:lvl8pPr>
-            <a:lvl9pPr indent="0" lvl="8" marL="0" marR="0" algn="r">
-              <a:lnSpc>
-                <a:spcPct val="100000"/>
-              </a:lnSpc>
-              <a:spcBef>
-                <a:spcPts val="0"/>
-              </a:spcBef>
-              <a:spcAft>
-                <a:spcPts val="0"/>
-              </a:spcAft>
-              <a:buClr>
-                <a:srgbClr val="000000"/>
-              </a:buClr>
-              <a:buSzPts val="1000"/>
-              <a:buFont typeface="Arial"/>
-              <a:buNone/>
-              <a:defRPr b="0" i="0" sz="1000" u="none" cap="none" strike="noStrike">
-                <a:solidFill>
-                  <a:schemeClr val="dk2"/>
-                </a:solidFill>
-                <a:latin typeface="Arial"/>
-                <a:ea typeface="Arial"/>
-                <a:cs typeface="Arial"/>
-                <a:sym typeface="Arial"/>
-              </a:defRPr>
-            </a:lvl9pPr>
-          </a:lstStyle>
-          <a:p>
-            <a:pPr indent="0" lvl="0" marL="0" rtl="0" algn="r">
-              <a:spcBef>
-                <a:spcPts val="0"/>
-              </a:spcBef>
-              <a:spcAft>
-                <a:spcPts val="0"/>
-              </a:spcAft>
-              <a:buNone/>
-            </a:pPr>
-            <a:fld id="{00000000-1234-1234-1234-123412341234}" type="slidenum">
-              <a:rPr lang="pt-BR"/>
-              <a:t>‹#›</a:t>
-            </a:fld>
-            <a:endParaRPr/>
-          </a:p>
-        </p:txBody>
-      </p:sp>
-    </p:spTree>
-  </p:cSld>
-  <p:clrMapOvr>
-    <a:masterClrMapping/>
-  </p:clrMapOvr>
-</p:sldLayout>
-</file>
-
-<file path=ppt/slideLayouts/slideLayout3.xml><?xml version="1.0" encoding="utf-8"?>
-<p:sldLayout xmlns:a="http://schemas.openxmlformats.org/drawingml/2006/main" xmlns:r="http://schemas.openxmlformats.org/officeDocument/2006/relationships" xmlns:mc="http://schemas.openxmlformats.org/markup-compatibility/2006" xmlns:mv="urn:schemas-microsoft-com:mac:vml" xmlns:p="http://schemas.openxmlformats.org/presentationml/2006/main" xmlns:c="http://schemas.openxmlformats.org/drawingml/2006/chart" xmlns:dgm="http://schemas.openxmlformats.org/drawingml/2006/diagram" xmlns:o="urn:schemas-microsoft-com:office:office" xmlns:v="urn:schemas-microsoft-com:vml" xmlns:pvml="urn:schemas-microsoft-com:office:powerpoint" xmlns:com="http://schemas.openxmlformats.org/drawingml/2006/compatibility" xmlns:p14="http://schemas.microsoft.com/office/powerpoint/2010/main" xmlns:p15="http://schemas.microsoft.com/office/powerpoint/2012/main" xmlns:ahyp="http://schemas.microsoft.com/office/drawing/2018/hyperlinkcolor" matchingName="Title and body" type="tx">
-  <p:cSld name="TITLE_AND_BODY">
-    <p:spTree>
-      <p:nvGrpSpPr>
-        <p:cNvPr id="16" name="Shape 16"/>
-        <p:cNvGrpSpPr/>
-        <p:nvPr/>
-      </p:nvGrpSpPr>
-      <p:grpSpPr>
-        <a:xfrm>
-          <a:off x="0" y="0"/>
-          <a:ext cx="0" cy="0"/>
-          <a:chOff x="0" y="0"/>
-          <a:chExt cx="0" cy="0"/>
-        </a:xfrm>
-      </p:grpSpPr>
-      <p:sp>
-        <p:nvSpPr>
-          <p:cNvPr id="17" name="Google Shape;17;p4"/>
-          <p:cNvSpPr txBox="1"/>
-          <p:nvPr>
-            <p:ph type="title"/>
-          </p:nvPr>
-        </p:nvSpPr>
-        <p:spPr>
-          <a:xfrm>
-            <a:off x="311700" y="445025"/>
-            <a:ext cx="8520600" cy="572700"/>
-          </a:xfrm>
-          <a:prstGeom prst="rect">
-            <a:avLst/>
-          </a:prstGeom>
-          <a:noFill/>
-          <a:ln>
-            <a:noFill/>
-          </a:ln>
-        </p:spPr>
-        <p:txBody>
-          <a:bodyPr anchorCtr="0" anchor="t" bIns="91425" lIns="91425" spcFirstLastPara="1" rIns="91425" wrap="square" tIns="91425">
-            <a:normAutofit/>
-          </a:bodyPr>
-          <a:lstStyle>
-            <a:lvl1pPr lvl="0" algn="l">
-              <a:lnSpc>
-                <a:spcPct val="100000"/>
-              </a:lnSpc>
-              <a:spcBef>
-                <a:spcPts val="0"/>
-              </a:spcBef>
-              <a:spcAft>
-                <a:spcPts val="0"/>
-              </a:spcAft>
-              <a:buSzPts val="2800"/>
-              <a:buNone/>
-              <a:defRPr/>
-            </a:lvl1pPr>
-            <a:lvl2pPr lvl="1" algn="l">
-              <a:lnSpc>
-                <a:spcPct val="100000"/>
-              </a:lnSpc>
-              <a:spcBef>
-                <a:spcPts val="0"/>
-              </a:spcBef>
-              <a:spcAft>
-                <a:spcPts val="0"/>
-              </a:spcAft>
-              <a:buSzPts val="2800"/>
-              <a:buNone/>
-              <a:defRPr/>
-            </a:lvl2pPr>
-            <a:lvl3pPr lvl="2" algn="l">
-              <a:lnSpc>
-                <a:spcPct val="100000"/>
-              </a:lnSpc>
-              <a:spcBef>
-                <a:spcPts val="0"/>
-              </a:spcBef>
-              <a:spcAft>
-                <a:spcPts val="0"/>
-              </a:spcAft>
-              <a:buSzPts val="2800"/>
-              <a:buNone/>
-              <a:defRPr/>
-            </a:lvl3pPr>
-            <a:lvl4pPr lvl="3" algn="l">
-              <a:lnSpc>
-                <a:spcPct val="100000"/>
-              </a:lnSpc>
-              <a:spcBef>
-                <a:spcPts val="0"/>
-              </a:spcBef>
-              <a:spcAft>
-                <a:spcPts val="0"/>
-              </a:spcAft>
-              <a:buSzPts val="2800"/>
-              <a:buNone/>
-              <a:defRPr/>
-            </a:lvl4pPr>
-            <a:lvl5pPr lvl="4" algn="l">
-              <a:lnSpc>
-                <a:spcPct val="100000"/>
-              </a:lnSpc>
-              <a:spcBef>
-                <a:spcPts val="0"/>
-              </a:spcBef>
-              <a:spcAft>
-                <a:spcPts val="0"/>
-              </a:spcAft>
-              <a:buSzPts val="2800"/>
-              <a:buNone/>
-              <a:defRPr/>
-            </a:lvl5pPr>
-            <a:lvl6pPr lvl="5" algn="l">
-              <a:lnSpc>
-                <a:spcPct val="100000"/>
-              </a:lnSpc>
-              <a:spcBef>
-                <a:spcPts val="0"/>
-              </a:spcBef>
-              <a:spcAft>
-                <a:spcPts val="0"/>
-              </a:spcAft>
-              <a:buSzPts val="2800"/>
-              <a:buNone/>
-              <a:defRPr/>
-            </a:lvl6pPr>
-            <a:lvl7pPr lvl="6" algn="l">
-              <a:lnSpc>
-                <a:spcPct val="100000"/>
-              </a:lnSpc>
-              <a:spcBef>
-                <a:spcPts val="0"/>
-              </a:spcBef>
-              <a:spcAft>
-                <a:spcPts val="0"/>
-              </a:spcAft>
-              <a:buSzPts val="2800"/>
-              <a:buNone/>
-              <a:defRPr/>
-            </a:lvl7pPr>
-            <a:lvl8pPr lvl="7" algn="l">
-              <a:lnSpc>
-                <a:spcPct val="100000"/>
-              </a:lnSpc>
-              <a:spcBef>
-                <a:spcPts val="0"/>
-              </a:spcBef>
-              <a:spcAft>
-                <a:spcPts val="0"/>
-              </a:spcAft>
-              <a:buSzPts val="2800"/>
-              <a:buNone/>
-              <a:defRPr/>
-            </a:lvl8pPr>
-            <a:lvl9pPr lvl="8" algn="l">
-              <a:lnSpc>
-                <a:spcPct val="100000"/>
-              </a:lnSpc>
-              <a:spcBef>
-                <a:spcPts val="0"/>
-              </a:spcBef>
-              <a:spcAft>
-                <a:spcPts val="0"/>
-              </a:spcAft>
-              <a:buSzPts val="2800"/>
-              <a:buNone/>
-              <a:defRPr/>
-            </a:lvl9pPr>
-          </a:lstStyle>
-          <a:p/>
-        </p:txBody>
-      </p:sp>
-      <p:sp>
-        <p:nvSpPr>
-          <p:cNvPr id="18" name="Google Shape;18;p4"/>
-          <p:cNvSpPr txBox="1"/>
-          <p:nvPr>
-            <p:ph idx="1" type="body"/>
-          </p:nvPr>
-        </p:nvSpPr>
-        <p:spPr>
-          <a:xfrm>
-            <a:off x="311700" y="1152475"/>
-            <a:ext cx="8520600" cy="3416400"/>
-          </a:xfrm>
-          <a:prstGeom prst="rect">
-            <a:avLst/>
-          </a:prstGeom>
-          <a:noFill/>
-          <a:ln>
-            <a:noFill/>
-          </a:ln>
-        </p:spPr>
-        <p:txBody>
-          <a:bodyPr anchorCtr="0" anchor="t" bIns="91425" lIns="91425" spcFirstLastPara="1" rIns="91425" wrap="square" tIns="91425">
-            <a:normAutofit/>
-          </a:bodyPr>
-          <a:lstStyle>
-            <a:lvl1pPr indent="-342900" lvl="0" marL="457200" algn="l">
-              <a:lnSpc>
-                <a:spcPct val="115000"/>
-              </a:lnSpc>
-              <a:spcBef>
-                <a:spcPts val="0"/>
-              </a:spcBef>
-              <a:spcAft>
-                <a:spcPts val="0"/>
-              </a:spcAft>
-              <a:buSzPts val="1800"/>
-              <a:buChar char="●"/>
-              <a:defRPr/>
-            </a:lvl1pPr>
-            <a:lvl2pPr indent="-317500" lvl="1" marL="914400" algn="l">
-              <a:lnSpc>
-                <a:spcPct val="115000"/>
-              </a:lnSpc>
-              <a:spcBef>
-                <a:spcPts val="0"/>
-              </a:spcBef>
-              <a:spcAft>
-                <a:spcPts val="0"/>
-              </a:spcAft>
-              <a:buSzPts val="1400"/>
-              <a:buChar char="○"/>
-              <a:defRPr/>
-            </a:lvl2pPr>
-            <a:lvl3pPr indent="-317500" lvl="2" marL="1371600" algn="l">
-              <a:lnSpc>
-                <a:spcPct val="115000"/>
-              </a:lnSpc>
-              <a:spcBef>
-                <a:spcPts val="0"/>
-              </a:spcBef>
-              <a:spcAft>
-                <a:spcPts val="0"/>
-              </a:spcAft>
-              <a:buSzPts val="1400"/>
-              <a:buChar char="■"/>
-              <a:defRPr/>
-            </a:lvl3pPr>
-            <a:lvl4pPr indent="-317500" lvl="3" marL="1828800" algn="l">
-              <a:lnSpc>
-                <a:spcPct val="115000"/>
-              </a:lnSpc>
-              <a:spcBef>
-                <a:spcPts val="0"/>
-              </a:spcBef>
-              <a:spcAft>
-                <a:spcPts val="0"/>
-              </a:spcAft>
-              <a:buSzPts val="1400"/>
-              <a:buChar char="●"/>
-              <a:defRPr/>
-            </a:lvl4pPr>
-            <a:lvl5pPr indent="-317500" lvl="4" marL="2286000" algn="l">
-              <a:lnSpc>
-                <a:spcPct val="115000"/>
-              </a:lnSpc>
-              <a:spcBef>
-                <a:spcPts val="0"/>
-              </a:spcBef>
-              <a:spcAft>
-                <a:spcPts val="0"/>
-              </a:spcAft>
-              <a:buSzPts val="1400"/>
-              <a:buChar char="○"/>
-              <a:defRPr/>
-            </a:lvl5pPr>
-            <a:lvl6pPr indent="-317500" lvl="5" marL="2743200" algn="l">
-              <a:lnSpc>
-                <a:spcPct val="115000"/>
-              </a:lnSpc>
-              <a:spcBef>
-                <a:spcPts val="0"/>
-              </a:spcBef>
-              <a:spcAft>
-                <a:spcPts val="0"/>
-              </a:spcAft>
-              <a:buSzPts val="1400"/>
-              <a:buChar char="■"/>
-              <a:defRPr/>
-            </a:lvl6pPr>
-            <a:lvl7pPr indent="-317500" lvl="6" marL="3200400" algn="l">
-              <a:lnSpc>
-                <a:spcPct val="115000"/>
-              </a:lnSpc>
-              <a:spcBef>
-                <a:spcPts val="0"/>
-              </a:spcBef>
-              <a:spcAft>
-                <a:spcPts val="0"/>
-              </a:spcAft>
-              <a:buSzPts val="1400"/>
-              <a:buChar char="●"/>
-              <a:defRPr/>
-            </a:lvl7pPr>
-            <a:lvl8pPr indent="-317500" lvl="7" marL="3657600" algn="l">
-              <a:lnSpc>
-                <a:spcPct val="115000"/>
-              </a:lnSpc>
-              <a:spcBef>
-                <a:spcPts val="0"/>
-              </a:spcBef>
-              <a:spcAft>
-                <a:spcPts val="0"/>
-              </a:spcAft>
-              <a:buSzPts val="1400"/>
-              <a:buChar char="○"/>
-              <a:defRPr/>
-            </a:lvl8pPr>
-            <a:lvl9pPr indent="-317500" lvl="8" marL="4114800" algn="l">
-              <a:lnSpc>
-                <a:spcPct val="115000"/>
-              </a:lnSpc>
-              <a:spcBef>
-                <a:spcPts val="0"/>
-              </a:spcBef>
-              <a:spcAft>
-                <a:spcPts val="0"/>
-              </a:spcAft>
-              <a:buSzPts val="1400"/>
-              <a:buChar char="■"/>
-              <a:defRPr/>
             </a:lvl9pPr>
           </a:lstStyle>
           <a:p/>
@@ -9014,6 +9086,10 @@
           <a:prstGeom prst="rect">
             <a:avLst/>
           </a:prstGeom>
+          <a:noFill/>
+          <a:ln>
+            <a:noFill/>
+          </a:ln>
         </p:spPr>
         <p:txBody>
           <a:bodyPr anchorCtr="0" anchor="t" bIns="91425" lIns="91425" spcFirstLastPara="1" rIns="91425" wrap="square" tIns="91425">
@@ -9022,6 +9098,9 @@
           <a:lstStyle/>
           <a:p>
             <a:pPr indent="0" lvl="0" marL="0" rtl="0" algn="l">
+              <a:lnSpc>
+                <a:spcPct val="100000"/>
+              </a:lnSpc>
               <a:spcBef>
                 <a:spcPts val="0"/>
               </a:spcBef>
@@ -9055,6 +9134,10 @@
           <a:prstGeom prst="rect">
             <a:avLst/>
           </a:prstGeom>
+          <a:noFill/>
+          <a:ln>
+            <a:noFill/>
+          </a:ln>
         </p:spPr>
         <p:txBody>
           <a:bodyPr anchorCtr="0" anchor="t" bIns="91425" lIns="91425" spcFirstLastPara="1" rIns="91425" wrap="square" tIns="91425">
@@ -9063,12 +9146,16 @@
           <a:lstStyle/>
           <a:p>
             <a:pPr indent="0" lvl="0" marL="0" rtl="0" algn="l">
-              <a:spcBef>
-                <a:spcPts val="0"/>
-              </a:spcBef>
-              <a:spcAft>
-                <a:spcPts val="0"/>
-              </a:spcAft>
+              <a:lnSpc>
+                <a:spcPct val="115000"/>
+              </a:lnSpc>
+              <a:spcBef>
+                <a:spcPts val="0"/>
+              </a:spcBef>
+              <a:spcAft>
+                <a:spcPts val="0"/>
+              </a:spcAft>
+              <a:buSzPts val="1800"/>
               <a:buNone/>
             </a:pPr>
             <a:r>
@@ -9115,6 +9202,10 @@
           <a:prstGeom prst="rect">
             <a:avLst/>
           </a:prstGeom>
+          <a:noFill/>
+          <a:ln>
+            <a:noFill/>
+          </a:ln>
         </p:spPr>
         <p:txBody>
           <a:bodyPr anchorCtr="0" anchor="t" bIns="91425" lIns="91425" spcFirstLastPara="1" rIns="91425" wrap="square" tIns="91425">
@@ -9123,6 +9214,9 @@
           <a:lstStyle/>
           <a:p>
             <a:pPr indent="0" lvl="0" marL="0" rtl="0" algn="l">
+              <a:lnSpc>
+                <a:spcPct val="100000"/>
+              </a:lnSpc>
               <a:spcBef>
                 <a:spcPts val="0"/>
               </a:spcBef>
@@ -9156,6 +9250,10 @@
           <a:prstGeom prst="rect">
             <a:avLst/>
           </a:prstGeom>
+          <a:noFill/>
+          <a:ln>
+            <a:noFill/>
+          </a:ln>
         </p:spPr>
         <p:txBody>
           <a:bodyPr anchorCtr="0" anchor="t" bIns="91425" lIns="91425" spcFirstLastPara="1" rIns="91425" wrap="square" tIns="91425">
@@ -9164,12 +9262,16 @@
           <a:lstStyle/>
           <a:p>
             <a:pPr indent="0" lvl="0" marL="0" rtl="0" algn="l">
-              <a:spcBef>
-                <a:spcPts val="0"/>
-              </a:spcBef>
-              <a:spcAft>
-                <a:spcPts val="0"/>
-              </a:spcAft>
+              <a:lnSpc>
+                <a:spcPct val="115000"/>
+              </a:lnSpc>
+              <a:spcBef>
+                <a:spcPts val="0"/>
+              </a:spcBef>
+              <a:spcAft>
+                <a:spcPts val="0"/>
+              </a:spcAft>
+              <a:buSzPts val="1800"/>
               <a:buNone/>
             </a:pPr>
             <a:r>
@@ -9178,15 +9280,7 @@
                   <a:schemeClr val="dk1"/>
                 </a:solidFill>
               </a:rPr>
-              <a:t>- </a:t>
-            </a:r>
-            <a:r>
-              <a:rPr b="1" lang="pt-BR" sz="1100">
-                <a:solidFill>
-                  <a:schemeClr val="dk1"/>
-                </a:solidFill>
-              </a:rPr>
-              <a:t>Modelo de Dados e Histórico:</a:t>
+              <a:t>- Modelo de Dados e Histórico:</a:t>
             </a:r>
             <a:r>
               <a:rPr lang="pt-BR" sz="1100">
@@ -9204,6 +9298,9 @@
           </a:p>
           <a:p>
             <a:pPr indent="0" lvl="0" marL="0" rtl="0" algn="l">
+              <a:lnSpc>
+                <a:spcPct val="115000"/>
+              </a:lnSpc>
               <a:spcBef>
                 <a:spcPts val="0"/>
               </a:spcBef>
@@ -9228,12 +9325,16 @@
           </a:p>
           <a:p>
             <a:pPr indent="0" lvl="0" marL="0" rtl="0" algn="l">
-              <a:spcBef>
-                <a:spcPts val="0"/>
-              </a:spcBef>
-              <a:spcAft>
-                <a:spcPts val="0"/>
-              </a:spcAft>
+              <a:lnSpc>
+                <a:spcPct val="115000"/>
+              </a:lnSpc>
+              <a:spcBef>
+                <a:spcPts val="0"/>
+              </a:spcBef>
+              <a:spcAft>
+                <a:spcPts val="0"/>
+              </a:spcAft>
+              <a:buSzPts val="1800"/>
               <a:buNone/>
             </a:pPr>
             <a:r>
@@ -9242,15 +9343,7 @@
                   <a:schemeClr val="dk1"/>
                 </a:solidFill>
               </a:rPr>
-              <a:t>- </a:t>
-            </a:r>
-            <a:r>
-              <a:rPr b="1" lang="pt-BR" sz="1100">
-                <a:solidFill>
-                  <a:schemeClr val="dk1"/>
-                </a:solidFill>
-              </a:rPr>
-              <a:t>Chave de Idempotência:</a:t>
+              <a:t>- Chave de Idempotência:</a:t>
             </a:r>
             <a:r>
               <a:rPr lang="pt-BR" sz="1100">
@@ -9268,6 +9361,9 @@
           </a:p>
           <a:p>
             <a:pPr indent="0" lvl="0" marL="0" rtl="0" algn="l">
+              <a:lnSpc>
+                <a:spcPct val="115000"/>
+              </a:lnSpc>
               <a:spcBef>
                 <a:spcPts val="0"/>
               </a:spcBef>
@@ -9292,12 +9388,16 @@
           </a:p>
           <a:p>
             <a:pPr indent="0" lvl="0" marL="0" rtl="0" algn="l">
-              <a:spcBef>
-                <a:spcPts val="0"/>
-              </a:spcBef>
-              <a:spcAft>
-                <a:spcPts val="0"/>
-              </a:spcAft>
+              <a:lnSpc>
+                <a:spcPct val="115000"/>
+              </a:lnSpc>
+              <a:spcBef>
+                <a:spcPts val="0"/>
+              </a:spcBef>
+              <a:spcAft>
+                <a:spcPts val="0"/>
+              </a:spcAft>
+              <a:buSzPts val="1800"/>
               <a:buNone/>
             </a:pPr>
             <a:r>
@@ -9306,15 +9406,7 @@
                   <a:schemeClr val="dk1"/>
                 </a:solidFill>
               </a:rPr>
-              <a:t>- </a:t>
-            </a:r>
-            <a:r>
-              <a:rPr b="1" lang="pt-BR" sz="1100">
-                <a:solidFill>
-                  <a:schemeClr val="dk1"/>
-                </a:solidFill>
-              </a:rPr>
-              <a:t>Mensageria com Dead Letter Queue (DLQ) e Retry Exponencial:</a:t>
+              <a:t>- Mensageria com Dead Letter Queue (DLQ) e Retry Exponencial:</a:t>
             </a:r>
             <a:r>
               <a:rPr lang="pt-BR" sz="1100">
@@ -9332,12 +9424,16 @@
           </a:p>
           <a:p>
             <a:pPr indent="0" lvl="0" marL="0" rtl="0" algn="l">
-              <a:spcBef>
-                <a:spcPts val="0"/>
-              </a:spcBef>
-              <a:spcAft>
-                <a:spcPts val="0"/>
-              </a:spcAft>
+              <a:lnSpc>
+                <a:spcPct val="115000"/>
+              </a:lnSpc>
+              <a:spcBef>
+                <a:spcPts val="0"/>
+              </a:spcBef>
+              <a:spcAft>
+                <a:spcPts val="0"/>
+              </a:spcAft>
+              <a:buSzPts val="1800"/>
               <a:buNone/>
             </a:pPr>
             <a:r>
@@ -9392,6 +9488,10 @@
           <a:prstGeom prst="rect">
             <a:avLst/>
           </a:prstGeom>
+          <a:noFill/>
+          <a:ln>
+            <a:noFill/>
+          </a:ln>
         </p:spPr>
         <p:txBody>
           <a:bodyPr anchorCtr="0" anchor="t" bIns="91425" lIns="91425" spcFirstLastPara="1" rIns="91425" wrap="square" tIns="91425">
@@ -9400,6 +9500,9 @@
           <a:lstStyle/>
           <a:p>
             <a:pPr indent="0" lvl="0" marL="0" rtl="0" algn="l">
+              <a:lnSpc>
+                <a:spcPct val="100000"/>
+              </a:lnSpc>
               <a:spcBef>
                 <a:spcPts val="0"/>
               </a:spcBef>
@@ -9423,13 +9526,12 @@
           <p:cNvPicPr preferRelativeResize="0"/>
           <p:nvPr/>
         </p:nvPicPr>
-        <p:blipFill>
+        <p:blipFill rotWithShape="1">
           <a:blip r:embed="rId3">
             <a:alphaModFix/>
           </a:blip>
-          <a:stretch>
-            <a:fillRect/>
-          </a:stretch>
+          <a:srcRect b="0" l="0" r="0" t="0"/>
+          <a:stretch/>
         </p:blipFill>
         <p:spPr>
           <a:xfrm>
@@ -9486,6 +9588,10 @@
           <a:prstGeom prst="rect">
             <a:avLst/>
           </a:prstGeom>
+          <a:noFill/>
+          <a:ln>
+            <a:noFill/>
+          </a:ln>
         </p:spPr>
         <p:txBody>
           <a:bodyPr anchorCtr="0" anchor="t" bIns="91425" lIns="91425" spcFirstLastPara="1" rIns="91425" wrap="square" tIns="91425">
@@ -9494,6 +9600,9 @@
           <a:lstStyle/>
           <a:p>
             <a:pPr indent="0" lvl="0" marL="0" rtl="0" algn="l">
+              <a:lnSpc>
+                <a:spcPct val="100000"/>
+              </a:lnSpc>
               <a:spcBef>
                 <a:spcPts val="0"/>
               </a:spcBef>
@@ -9513,17 +9622,18 @@
       </p:sp>
       <p:pic>
         <p:nvPicPr>
-          <p:cNvPr id="69" name="Google Shape;69;p15"/>
+          <p:cNvPr id="69" name="Google Shape;69;p15">
+            <a:hlinkClick r:id="rId3"/>
+          </p:cNvPr>
           <p:cNvPicPr preferRelativeResize="0"/>
           <p:nvPr/>
         </p:nvPicPr>
-        <p:blipFill>
-          <a:blip r:embed="rId3">
+        <p:blipFill rotWithShape="1">
+          <a:blip r:embed="rId4">
             <a:alphaModFix/>
           </a:blip>
-          <a:stretch>
-            <a:fillRect/>
-          </a:stretch>
+          <a:srcRect b="0" l="0" r="0" t="0"/>
+          <a:stretch/>
         </p:blipFill>
         <p:spPr>
           <a:xfrm>
@@ -9539,58 +9649,6 @@
           </a:ln>
         </p:spPr>
       </p:pic>
-      <p:sp>
-        <p:nvSpPr>
-          <p:cNvPr id="70" name="Google Shape;70;p15">
-            <a:hlinkClick r:id="rId4"/>
-          </p:cNvPr>
-          <p:cNvSpPr txBox="1"/>
-          <p:nvPr/>
-        </p:nvSpPr>
-        <p:spPr>
-          <a:xfrm>
-            <a:off x="466725" y="4676775"/>
-            <a:ext cx="5162400" cy="354000"/>
-          </a:xfrm>
-          <a:prstGeom prst="rect">
-            <a:avLst/>
-          </a:prstGeom>
-          <a:noFill/>
-          <a:ln>
-            <a:noFill/>
-          </a:ln>
-        </p:spPr>
-        <p:txBody>
-          <a:bodyPr anchorCtr="0" anchor="t" bIns="91425" lIns="91425" spcFirstLastPara="1" rIns="91425" wrap="square" tIns="91425">
-            <a:spAutoFit/>
-          </a:bodyPr>
-          <a:lstStyle/>
-          <a:p>
-            <a:pPr indent="0" lvl="0" marL="0" rtl="0" algn="l">
-              <a:spcBef>
-                <a:spcPts val="0"/>
-              </a:spcBef>
-              <a:spcAft>
-                <a:spcPts val="0"/>
-              </a:spcAft>
-              <a:buNone/>
-            </a:pPr>
-            <a:r>
-              <a:rPr lang="pt-BR" sz="1100">
-                <a:solidFill>
-                  <a:schemeClr val="dk2"/>
-                </a:solidFill>
-              </a:rPr>
-              <a:t>Link script: https://github.com/fernanda-leite/NandaPay/blob/main/Nandapay.sql</a:t>
-            </a:r>
-            <a:endParaRPr sz="1100">
-              <a:solidFill>
-                <a:schemeClr val="dk2"/>
-              </a:solidFill>
-            </a:endParaRPr>
-          </a:p>
-        </p:txBody>
-      </p:sp>
     </p:spTree>
   </p:cSld>
   <p:clrMapOvr>
@@ -9604,7 +9662,7 @@
   <p:cSld>
     <p:spTree>
       <p:nvGrpSpPr>
-        <p:cNvPr id="74" name="Shape 74"/>
+        <p:cNvPr id="73" name="Shape 73"/>
         <p:cNvGrpSpPr/>
         <p:nvPr/>
       </p:nvGrpSpPr>
@@ -9618,7 +9676,7 @@
       </p:grpSpPr>
       <p:sp>
         <p:nvSpPr>
-          <p:cNvPr id="75" name="Google Shape;75;p16"/>
+          <p:cNvPr id="74" name="Google Shape;74;p16"/>
           <p:cNvSpPr txBox="1"/>
           <p:nvPr>
             <p:ph idx="4294967295" type="title"/>
@@ -9632,6 +9690,10 @@
           <a:prstGeom prst="rect">
             <a:avLst/>
           </a:prstGeom>
+          <a:noFill/>
+          <a:ln>
+            <a:noFill/>
+          </a:ln>
         </p:spPr>
         <p:txBody>
           <a:bodyPr anchorCtr="0" anchor="t" bIns="91425" lIns="91425" spcFirstLastPara="1" rIns="91425" wrap="square" tIns="91425">
@@ -9640,6 +9702,9 @@
           <a:lstStyle/>
           <a:p>
             <a:pPr indent="0" lvl="0" marL="0" rtl="0" algn="l">
+              <a:lnSpc>
+                <a:spcPct val="100000"/>
+              </a:lnSpc>
               <a:spcBef>
                 <a:spcPts val="0"/>
               </a:spcBef>
@@ -9659,7 +9724,7 @@
       </p:sp>
       <p:sp>
         <p:nvSpPr>
-          <p:cNvPr id="76" name="Google Shape;76;p16"/>
+          <p:cNvPr id="75" name="Google Shape;75;p16"/>
           <p:cNvSpPr txBox="1"/>
           <p:nvPr>
             <p:ph idx="4294967295" type="title"/>
@@ -9673,6 +9738,10 @@
           <a:prstGeom prst="rect">
             <a:avLst/>
           </a:prstGeom>
+          <a:noFill/>
+          <a:ln>
+            <a:noFill/>
+          </a:ln>
         </p:spPr>
         <p:txBody>
           <a:bodyPr anchorCtr="0" anchor="t" bIns="91425" lIns="91425" spcFirstLastPara="1" rIns="91425" wrap="square" tIns="91425">
@@ -9681,6 +9750,9 @@
           <a:lstStyle/>
           <a:p>
             <a:pPr indent="0" lvl="0" marL="0" rtl="0" algn="l">
+              <a:lnSpc>
+                <a:spcPct val="100000"/>
+              </a:lnSpc>
               <a:spcBef>
                 <a:spcPts val="0"/>
               </a:spcBef>
@@ -9700,17 +9772,16 @@
       </p:sp>
       <p:pic>
         <p:nvPicPr>
-          <p:cNvPr id="77" name="Google Shape;77;p16"/>
+          <p:cNvPr id="76" name="Google Shape;76;p16"/>
           <p:cNvPicPr preferRelativeResize="0"/>
           <p:nvPr/>
         </p:nvPicPr>
-        <p:blipFill>
+        <p:blipFill rotWithShape="1">
           <a:blip r:embed="rId3">
             <a:alphaModFix/>
           </a:blip>
-          <a:stretch>
-            <a:fillRect/>
-          </a:stretch>
+          <a:srcRect b="0" l="0" r="0" t="0"/>
+          <a:stretch/>
         </p:blipFill>
         <p:spPr>
           <a:xfrm>
@@ -9728,17 +9799,16 @@
       </p:pic>
       <p:pic>
         <p:nvPicPr>
-          <p:cNvPr id="78" name="Google Shape;78;p16"/>
+          <p:cNvPr id="77" name="Google Shape;77;p16"/>
           <p:cNvPicPr preferRelativeResize="0"/>
           <p:nvPr/>
         </p:nvPicPr>
-        <p:blipFill>
+        <p:blipFill rotWithShape="1">
           <a:blip r:embed="rId4">
             <a:alphaModFix/>
           </a:blip>
-          <a:stretch>
-            <a:fillRect/>
-          </a:stretch>
+          <a:srcRect b="0" l="0" r="0" t="0"/>
+          <a:stretch/>
         </p:blipFill>
         <p:spPr>
           <a:xfrm>
@@ -9756,17 +9826,16 @@
       </p:pic>
       <p:pic>
         <p:nvPicPr>
-          <p:cNvPr id="79" name="Google Shape;79;p16"/>
+          <p:cNvPr id="78" name="Google Shape;78;p16"/>
           <p:cNvPicPr preferRelativeResize="0"/>
           <p:nvPr/>
         </p:nvPicPr>
-        <p:blipFill>
+        <p:blipFill rotWithShape="1">
           <a:blip r:embed="rId5">
             <a:alphaModFix/>
           </a:blip>
-          <a:stretch>
-            <a:fillRect/>
-          </a:stretch>
+          <a:srcRect b="0" l="0" r="0" t="0"/>
+          <a:stretch/>
         </p:blipFill>
         <p:spPr>
           <a:xfrm>
@@ -9795,7 +9864,7 @@
   <p:cSld>
     <p:spTree>
       <p:nvGrpSpPr>
-        <p:cNvPr id="83" name="Shape 83"/>
+        <p:cNvPr id="82" name="Shape 82"/>
         <p:cNvGrpSpPr/>
         <p:nvPr/>
       </p:nvGrpSpPr>
@@ -9809,7 +9878,7 @@
       </p:grpSpPr>
       <p:sp>
         <p:nvSpPr>
-          <p:cNvPr id="84" name="Google Shape;84;p17"/>
+          <p:cNvPr id="83" name="Google Shape;83;p17"/>
           <p:cNvSpPr txBox="1"/>
           <p:nvPr/>
         </p:nvSpPr>
@@ -9842,29 +9911,24 @@
               <a:spcAft>
                 <a:spcPts val="0"/>
               </a:spcAft>
-              <a:buClr>
-                <a:schemeClr val="dk1"/>
-              </a:buClr>
-              <a:buSzPts val="1100"/>
-              <a:buFont typeface="Arial"/>
               <a:buNone/>
             </a:pPr>
             <a:r>
-              <a:rPr b="1" lang="pt-BR" sz="1000">
+              <a:rPr b="1" lang="pt-BR" sz="900">
                 <a:solidFill>
                   <a:srgbClr val="1F1F1F"/>
                 </a:solidFill>
               </a:rPr>
-              <a:t>1. Inconsistência por Concorrência no Saldo de Limite </a:t>
+              <a:t>1. Principais Decisões</a:t>
             </a:r>
-            <a:endParaRPr b="1" sz="1000">
+            <a:endParaRPr b="1" sz="900">
               <a:solidFill>
                 <a:srgbClr val="1F1F1F"/>
               </a:solidFill>
             </a:endParaRPr>
           </a:p>
           <a:p>
-            <a:pPr indent="-279400" lvl="0" marL="457200" rtl="0" algn="l">
+            <a:pPr indent="-273050" lvl="0" marL="457200" rtl="0" algn="l">
               <a:lnSpc>
                 <a:spcPct val="115000"/>
               </a:lnSpc>
@@ -9877,33 +9941,49 @@
               <a:buClr>
                 <a:srgbClr val="1F1F1F"/>
               </a:buClr>
-              <a:buSzPts val="800"/>
+              <a:buSzPts val="700"/>
               <a:buChar char="●"/>
             </a:pPr>
             <a:r>
-              <a:rPr b="1" lang="pt-BR" sz="800">
+              <a:rPr b="1" lang="pt-BR" sz="700">
                 <a:solidFill>
                   <a:srgbClr val="1F1F1F"/>
                 </a:solidFill>
               </a:rPr>
-              <a:t>Risco:</a:t>
+              <a:t>Arquitetura Orientada a Eventos baseada em CDC :</a:t>
             </a:r>
             <a:r>
-              <a:rPr lang="pt-BR" sz="800">
+              <a:rPr lang="pt-BR" sz="700">
                 <a:solidFill>
                   <a:srgbClr val="1F1F1F"/>
                 </a:solidFill>
               </a:rPr>
-              <a:t> Múltiplas solicitações simultâneas de transação para a mesma conta, tentando validar e consumir o mesmo limite disponível em milissegundos.</a:t>
+              <a:t> Utilização de uma ferramenta de CDC para consumir o </a:t>
             </a:r>
-            <a:endParaRPr sz="800">
+            <a:r>
+              <a:rPr i="1" lang="pt-BR" sz="700">
+                <a:solidFill>
+                  <a:srgbClr val="1F1F1F"/>
+                </a:solidFill>
+              </a:rPr>
+              <a:t>RedoLog</a:t>
+            </a:r>
+            <a:r>
+              <a:rPr lang="pt-BR" sz="700">
+                <a:solidFill>
+                  <a:srgbClr val="1F1F1F"/>
+                </a:solidFill>
+              </a:rPr>
+              <a:t> de um banco de dados relacional e enviar eventos de manipulação de dados para um barramento de streaming.</a:t>
+            </a:r>
+            <a:endParaRPr sz="700">
               <a:solidFill>
                 <a:srgbClr val="1F1F1F"/>
               </a:solidFill>
             </a:endParaRPr>
           </a:p>
           <a:p>
-            <a:pPr indent="-279400" lvl="0" marL="457200" rtl="0" algn="l">
+            <a:pPr indent="0" lvl="0" marL="457200" rtl="0" algn="l">
               <a:lnSpc>
                 <a:spcPct val="115000"/>
               </a:lnSpc>
@@ -9913,52 +9993,19 @@
               <a:spcAft>
                 <a:spcPts val="0"/>
               </a:spcAft>
-              <a:buClr>
-                <a:srgbClr val="1F1F1F"/>
-              </a:buClr>
-              <a:buSzPts val="800"/>
-              <a:buChar char="●"/>
+              <a:buNone/>
             </a:pPr>
             <a:r>
-              <a:rPr b="1" lang="pt-BR" sz="800">
-                <a:solidFill>
-                  <a:srgbClr val="1F1F1F"/>
-                </a:solidFill>
-              </a:rPr>
-              <a:t>Impacto:</a:t>
+              <a:t/>
             </a:r>
-            <a:r>
-              <a:rPr lang="pt-BR" sz="800">
-                <a:solidFill>
-                  <a:srgbClr val="1F1F1F"/>
-                </a:solidFill>
-              </a:rPr>
-              <a:t> Estouro de limite,</a:t>
-            </a:r>
-            <a:r>
-              <a:rPr b="1" lang="pt-BR" sz="800">
-                <a:solidFill>
-                  <a:srgbClr val="1F1F1F"/>
-                </a:solidFill>
-              </a:rPr>
-              <a:t> </a:t>
-            </a:r>
-            <a:r>
-              <a:rPr lang="pt-BR" sz="800">
-                <a:solidFill>
-                  <a:srgbClr val="1F1F1F"/>
-                </a:solidFill>
-              </a:rPr>
-              <a:t>o banco pode autorizar transações acima do saldo permitido, gerando prejuízo financeiro direto e risco regulatório.</a:t>
-            </a:r>
-            <a:endParaRPr sz="800">
+            <a:endParaRPr sz="700">
               <a:solidFill>
                 <a:srgbClr val="1F1F1F"/>
               </a:solidFill>
             </a:endParaRPr>
           </a:p>
           <a:p>
-            <a:pPr indent="-279400" lvl="0" marL="457200" rtl="0" algn="l">
+            <a:pPr indent="-273050" lvl="0" marL="457200" rtl="0" algn="l">
               <a:lnSpc>
                 <a:spcPct val="115000"/>
               </a:lnSpc>
@@ -9971,58 +10018,141 @@
               <a:buClr>
                 <a:srgbClr val="1F1F1F"/>
               </a:buClr>
-              <a:buSzPts val="800"/>
+              <a:buSzPts val="700"/>
               <a:buChar char="●"/>
             </a:pPr>
             <a:r>
-              <a:rPr b="1" lang="pt-BR" sz="800">
+              <a:rPr b="1" lang="pt-BR" sz="700">
                 <a:solidFill>
                   <a:srgbClr val="1F1F1F"/>
                 </a:solidFill>
               </a:rPr>
-              <a:t>Estratégia de Mitigação: </a:t>
+              <a:t>Uso de Streaming e Processamento em Tempo Real:</a:t>
             </a:r>
             <a:r>
-              <a:rPr lang="pt-BR" sz="800">
+              <a:rPr lang="pt-BR" sz="700">
                 <a:solidFill>
                   <a:srgbClr val="1F1F1F"/>
                 </a:solidFill>
               </a:rPr>
-              <a:t>Utilizar bloqueio pessimista (select..for update)</a:t>
+              <a:t> Adoção de serviços gerenciados de streaming  integrados a uma ferramenta de processamento de stream para transformar, enriquecer e despachar dados para tópicos de leitura com suporte a </a:t>
             </a:r>
             <a:r>
-              <a:rPr lang="pt-BR" sz="1000">
+              <a:rPr i="1" lang="pt-BR" sz="700">
                 <a:solidFill>
                   <a:srgbClr val="1F1F1F"/>
                 </a:solidFill>
               </a:rPr>
-              <a:t> , </a:t>
+              <a:t>backoff</a:t>
             </a:r>
             <a:r>
-              <a:rPr lang="pt-BR" sz="800">
+              <a:rPr lang="pt-BR" sz="700">
                 <a:solidFill>
                   <a:srgbClr val="1F1F1F"/>
                 </a:solidFill>
               </a:rPr>
-              <a:t>para “prender a linha”</a:t>
+              <a:t> exponencial e </a:t>
             </a:r>
             <a:r>
-              <a:rPr lang="pt-BR" sz="1000">
+              <a:rPr i="1" lang="pt-BR" sz="700">
                 <a:solidFill>
                   <a:srgbClr val="1F1F1F"/>
                 </a:solidFill>
               </a:rPr>
-              <a:t> </a:t>
+              <a:t>Dead Letter Queue</a:t>
             </a:r>
             <a:r>
-              <a:rPr lang="pt-BR" sz="800">
+              <a:rPr lang="pt-BR" sz="700">
                 <a:solidFill>
                   <a:srgbClr val="1F1F1F"/>
                 </a:solidFill>
               </a:rPr>
-              <a:t>até que a transação atual seja concluída (commitada ou revertida).</a:t>
+              <a:t> (DLQ).</a:t>
             </a:r>
-            <a:endParaRPr sz="800">
+            <a:endParaRPr sz="700">
+              <a:solidFill>
+                <a:srgbClr val="1F1F1F"/>
+              </a:solidFill>
+            </a:endParaRPr>
+          </a:p>
+          <a:p>
+            <a:pPr indent="0" lvl="0" marL="457200" rtl="0" algn="l">
+              <a:lnSpc>
+                <a:spcPct val="115000"/>
+              </a:lnSpc>
+              <a:spcBef>
+                <a:spcPts val="0"/>
+              </a:spcBef>
+              <a:spcAft>
+                <a:spcPts val="0"/>
+              </a:spcAft>
+              <a:buNone/>
+            </a:pPr>
+            <a:r>
+              <a:t/>
+            </a:r>
+            <a:endParaRPr sz="700">
+              <a:solidFill>
+                <a:srgbClr val="1F1F1F"/>
+              </a:solidFill>
+            </a:endParaRPr>
+          </a:p>
+          <a:p>
+            <a:pPr indent="-273050" lvl="0" marL="457200" rtl="0" algn="l">
+              <a:lnSpc>
+                <a:spcPct val="115000"/>
+              </a:lnSpc>
+              <a:spcBef>
+                <a:spcPts val="0"/>
+              </a:spcBef>
+              <a:spcAft>
+                <a:spcPts val="0"/>
+              </a:spcAft>
+              <a:buClr>
+                <a:srgbClr val="1F1F1F"/>
+              </a:buClr>
+              <a:buSzPts val="700"/>
+              <a:buChar char="●"/>
+            </a:pPr>
+            <a:r>
+              <a:rPr b="1" lang="pt-BR" sz="700">
+                <a:solidFill>
+                  <a:srgbClr val="1F1F1F"/>
+                </a:solidFill>
+              </a:rPr>
+              <a:t>Exposição de APIs Desacopladas:</a:t>
+            </a:r>
+            <a:r>
+              <a:rPr lang="pt-BR" sz="700">
+                <a:solidFill>
+                  <a:srgbClr val="1F1F1F"/>
+                </a:solidFill>
+              </a:rPr>
+              <a:t> Implementação de um fluxo de entrada com API Gateway conectado a uma API de transação que processa solicitações vindas de múltiplos canais e interage com o banco de dados relacional.</a:t>
+            </a:r>
+            <a:endParaRPr sz="700">
+              <a:solidFill>
+                <a:srgbClr val="1F1F1F"/>
+              </a:solidFill>
+            </a:endParaRPr>
+          </a:p>
+          <a:p>
+            <a:pPr indent="0" lvl="0" marL="457200" rtl="0" algn="l">
+              <a:lnSpc>
+                <a:spcPct val="115000"/>
+              </a:lnSpc>
+              <a:spcBef>
+                <a:spcPts val="0"/>
+              </a:spcBef>
+              <a:spcAft>
+                <a:spcPts val="0"/>
+              </a:spcAft>
+              <a:buNone/>
+            </a:pPr>
+            <a:r>
+              <a:t/>
+            </a:r>
+            <a:endParaRPr sz="700">
               <a:solidFill>
                 <a:srgbClr val="1F1F1F"/>
               </a:solidFill>
@@ -10039,17 +10169,287 @@
               <a:spcAft>
                 <a:spcPts val="0"/>
               </a:spcAft>
-              <a:buClr>
-                <a:schemeClr val="dk1"/>
-              </a:buClr>
-              <a:buSzPts val="1100"/>
-              <a:buFont typeface="Arial"/>
+              <a:buNone/>
+            </a:pPr>
+            <a:r>
+              <a:rPr b="1" lang="pt-BR" sz="900">
+                <a:solidFill>
+                  <a:srgbClr val="1F1F1F"/>
+                </a:solidFill>
+              </a:rPr>
+              <a:t>2. Principais Trade-offs </a:t>
+            </a:r>
+            <a:endParaRPr b="1" sz="900">
+              <a:solidFill>
+                <a:srgbClr val="1F1F1F"/>
+              </a:solidFill>
+            </a:endParaRPr>
+          </a:p>
+          <a:p>
+            <a:pPr indent="-273050" lvl="0" marL="457200" rtl="0" algn="l">
+              <a:lnSpc>
+                <a:spcPct val="115000"/>
+              </a:lnSpc>
+              <a:spcBef>
+                <a:spcPts val="0"/>
+              </a:spcBef>
+              <a:spcAft>
+                <a:spcPts val="0"/>
+              </a:spcAft>
+              <a:buClr>
+                <a:srgbClr val="1F1F1F"/>
+              </a:buClr>
+              <a:buSzPts val="700"/>
+              <a:buChar char="●"/>
+            </a:pPr>
+            <a:r>
+              <a:rPr b="1" lang="pt-BR" sz="700">
+                <a:solidFill>
+                  <a:srgbClr val="1F1F1F"/>
+                </a:solidFill>
+              </a:rPr>
+              <a:t>CDC via RedoLog vs. Consultas na Aplicação:</a:t>
+            </a:r>
+            <a:br>
+              <a:rPr b="1" lang="pt-BR" sz="700">
+                <a:solidFill>
+                  <a:srgbClr val="1F1F1F"/>
+                </a:solidFill>
+              </a:rPr>
+            </a:br>
+            <a:endParaRPr b="1" sz="700">
+              <a:solidFill>
+                <a:srgbClr val="1F1F1F"/>
+              </a:solidFill>
+            </a:endParaRPr>
+          </a:p>
+          <a:p>
+            <a:pPr indent="-273050" lvl="1" marL="914400" rtl="0" algn="l">
+              <a:lnSpc>
+                <a:spcPct val="115000"/>
+              </a:lnSpc>
+              <a:spcBef>
+                <a:spcPts val="0"/>
+              </a:spcBef>
+              <a:spcAft>
+                <a:spcPts val="0"/>
+              </a:spcAft>
+              <a:buClr>
+                <a:srgbClr val="1F1F1F"/>
+              </a:buClr>
+              <a:buSzPts val="700"/>
+              <a:buChar char="○"/>
+            </a:pPr>
+            <a:r>
+              <a:rPr i="1" lang="pt-BR" sz="700">
+                <a:solidFill>
+                  <a:srgbClr val="1F1F1F"/>
+                </a:solidFill>
+              </a:rPr>
+              <a:t>Vantagem:</a:t>
+            </a:r>
+            <a:r>
+              <a:rPr lang="pt-BR" sz="700">
+                <a:solidFill>
+                  <a:srgbClr val="1F1F1F"/>
+                </a:solidFill>
+              </a:rPr>
+              <a:t> Desacopla o banco de dados transacional de sistemas analíticos ou de leitura, evitando sobrecarga nas tabelas transacionais.</a:t>
+            </a:r>
+            <a:endParaRPr sz="700">
+              <a:solidFill>
+                <a:srgbClr val="1F1F1F"/>
+              </a:solidFill>
+            </a:endParaRPr>
+          </a:p>
+          <a:p>
+            <a:pPr indent="-273050" lvl="1" marL="914400" rtl="0" algn="l">
+              <a:lnSpc>
+                <a:spcPct val="115000"/>
+              </a:lnSpc>
+              <a:spcBef>
+                <a:spcPts val="0"/>
+              </a:spcBef>
+              <a:spcAft>
+                <a:spcPts val="0"/>
+              </a:spcAft>
+              <a:buClr>
+                <a:srgbClr val="1F1F1F"/>
+              </a:buClr>
+              <a:buSzPts val="700"/>
+              <a:buChar char="○"/>
+            </a:pPr>
+            <a:r>
+              <a:rPr i="1" lang="pt-BR" sz="700">
+                <a:solidFill>
+                  <a:srgbClr val="1F1F1F"/>
+                </a:solidFill>
+              </a:rPr>
+              <a:t>Desvantagem:</a:t>
+            </a:r>
+            <a:r>
+              <a:rPr lang="pt-BR" sz="700">
+                <a:solidFill>
+                  <a:srgbClr val="1F1F1F"/>
+                </a:solidFill>
+              </a:rPr>
+              <a:t> Maior complexidade operacional na configuração e monitoramento da ferramenta de CDC e dos </a:t>
+            </a:r>
+            <a:r>
+              <a:rPr i="1" lang="pt-BR" sz="700">
+                <a:solidFill>
+                  <a:srgbClr val="1F1F1F"/>
+                </a:solidFill>
+              </a:rPr>
+              <a:t>pipelines</a:t>
+            </a:r>
+            <a:r>
+              <a:rPr lang="pt-BR" sz="700">
+                <a:solidFill>
+                  <a:srgbClr val="1F1F1F"/>
+                </a:solidFill>
+              </a:rPr>
+              <a:t> de streaming.</a:t>
+            </a:r>
+            <a:endParaRPr sz="700">
+              <a:solidFill>
+                <a:srgbClr val="1F1F1F"/>
+              </a:solidFill>
+            </a:endParaRPr>
+          </a:p>
+          <a:p>
+            <a:pPr indent="0" lvl="0" marL="914400" rtl="0" algn="l">
+              <a:lnSpc>
+                <a:spcPct val="115000"/>
+              </a:lnSpc>
+              <a:spcBef>
+                <a:spcPts val="0"/>
+              </a:spcBef>
+              <a:spcAft>
+                <a:spcPts val="0"/>
+              </a:spcAft>
               <a:buNone/>
             </a:pPr>
             <a:r>
               <a:t/>
             </a:r>
-            <a:endParaRPr sz="1100">
+            <a:endParaRPr sz="700">
+              <a:solidFill>
+                <a:srgbClr val="1F1F1F"/>
+              </a:solidFill>
+            </a:endParaRPr>
+          </a:p>
+          <a:p>
+            <a:pPr indent="-273050" lvl="0" marL="457200" rtl="0" algn="l">
+              <a:lnSpc>
+                <a:spcPct val="115000"/>
+              </a:lnSpc>
+              <a:spcBef>
+                <a:spcPts val="0"/>
+              </a:spcBef>
+              <a:spcAft>
+                <a:spcPts val="0"/>
+              </a:spcAft>
+              <a:buClr>
+                <a:srgbClr val="1F1F1F"/>
+              </a:buClr>
+              <a:buSzPts val="700"/>
+              <a:buChar char="●"/>
+            </a:pPr>
+            <a:r>
+              <a:rPr b="1" lang="pt-BR" sz="700">
+                <a:solidFill>
+                  <a:srgbClr val="1F1F1F"/>
+                </a:solidFill>
+              </a:rPr>
+              <a:t>Processamento em Tempo Real (Stream Processing) vs. Carga em Lotes (Batch):</a:t>
+            </a:r>
+            <a:br>
+              <a:rPr b="1" lang="pt-BR" sz="700">
+                <a:solidFill>
+                  <a:srgbClr val="1F1F1F"/>
+                </a:solidFill>
+              </a:rPr>
+            </a:br>
+            <a:endParaRPr b="1" sz="700">
+              <a:solidFill>
+                <a:srgbClr val="1F1F1F"/>
+              </a:solidFill>
+            </a:endParaRPr>
+          </a:p>
+          <a:p>
+            <a:pPr indent="-273050" lvl="1" marL="914400" rtl="0" algn="l">
+              <a:lnSpc>
+                <a:spcPct val="115000"/>
+              </a:lnSpc>
+              <a:spcBef>
+                <a:spcPts val="0"/>
+              </a:spcBef>
+              <a:spcAft>
+                <a:spcPts val="0"/>
+              </a:spcAft>
+              <a:buClr>
+                <a:srgbClr val="1F1F1F"/>
+              </a:buClr>
+              <a:buSzPts val="700"/>
+              <a:buChar char="○"/>
+            </a:pPr>
+            <a:r>
+              <a:rPr i="1" lang="pt-BR" sz="700">
+                <a:solidFill>
+                  <a:srgbClr val="1F1F1F"/>
+                </a:solidFill>
+              </a:rPr>
+              <a:t>Vantagem:</a:t>
+            </a:r>
+            <a:r>
+              <a:rPr lang="pt-BR" sz="700">
+                <a:solidFill>
+                  <a:srgbClr val="1F1F1F"/>
+                </a:solidFill>
+              </a:rPr>
+              <a:t> Disponibilidade imediata dos dados transformados e enriquecidos para os tópicos de consumo.</a:t>
+            </a:r>
+            <a:endParaRPr sz="700">
+              <a:solidFill>
+                <a:srgbClr val="1F1F1F"/>
+              </a:solidFill>
+            </a:endParaRPr>
+          </a:p>
+          <a:p>
+            <a:pPr indent="-273050" lvl="1" marL="914400" rtl="0" algn="l">
+              <a:lnSpc>
+                <a:spcPct val="115000"/>
+              </a:lnSpc>
+              <a:spcBef>
+                <a:spcPts val="0"/>
+              </a:spcBef>
+              <a:spcAft>
+                <a:spcPts val="0"/>
+              </a:spcAft>
+              <a:buClr>
+                <a:srgbClr val="1F1F1F"/>
+              </a:buClr>
+              <a:buSzPts val="700"/>
+              <a:buChar char="○"/>
+            </a:pPr>
+            <a:r>
+              <a:rPr i="1" lang="pt-BR" sz="700">
+                <a:solidFill>
+                  <a:srgbClr val="1F1F1F"/>
+                </a:solidFill>
+              </a:rPr>
+              <a:t>Desvantagem:</a:t>
+            </a:r>
+            <a:r>
+              <a:rPr lang="pt-BR" sz="700">
+                <a:solidFill>
+                  <a:srgbClr val="1F1F1F"/>
+                </a:solidFill>
+              </a:rPr>
+              <a:t> Custos operacionais mais elevados e maior complexidade de arquitetura em comparação com processamentos periódicos em lote.</a:t>
+            </a:r>
+            <a:endParaRPr sz="700">
               <a:solidFill>
                 <a:srgbClr val="1F1F1F"/>
               </a:solidFill>
@@ -10066,166 +10466,12 @@
               <a:spcAft>
                 <a:spcPts val="0"/>
               </a:spcAft>
-              <a:buClr>
-                <a:schemeClr val="dk1"/>
-              </a:buClr>
-              <a:buSzPts val="1100"/>
-              <a:buFont typeface="Arial"/>
-              <a:buNone/>
-            </a:pPr>
-            <a:r>
-              <a:rPr b="1" lang="pt-BR" sz="1000">
-                <a:solidFill>
-                  <a:srgbClr val="1F1F1F"/>
-                </a:solidFill>
-              </a:rPr>
-              <a:t>2. Divergência e Perda de Rastreabilidade das Regras de Decisão </a:t>
-            </a:r>
-            <a:endParaRPr b="1" sz="1000">
-              <a:solidFill>
-                <a:srgbClr val="1F1F1F"/>
-              </a:solidFill>
-            </a:endParaRPr>
-          </a:p>
-          <a:p>
-            <a:pPr indent="-279400" lvl="0" marL="457200" rtl="0" algn="l">
-              <a:lnSpc>
-                <a:spcPct val="115000"/>
-              </a:lnSpc>
-              <a:spcBef>
-                <a:spcPts val="0"/>
-              </a:spcBef>
-              <a:spcAft>
-                <a:spcPts val="0"/>
-              </a:spcAft>
-              <a:buClr>
-                <a:srgbClr val="1F1F1F"/>
-              </a:buClr>
-              <a:buSzPts val="800"/>
-              <a:buChar char="●"/>
-            </a:pPr>
-            <a:r>
-              <a:rPr b="1" lang="pt-BR" sz="800">
-                <a:solidFill>
-                  <a:srgbClr val="1F1F1F"/>
-                </a:solidFill>
-              </a:rPr>
-              <a:t>Risco:</a:t>
-            </a:r>
-            <a:r>
-              <a:rPr lang="pt-BR" sz="800">
-                <a:solidFill>
-                  <a:srgbClr val="1F1F1F"/>
-                </a:solidFill>
-              </a:rPr>
-              <a:t> Como as regras e valores de limite mudam ao longo do tempo (e o sistema precisa evoluir de forma independente), transações podem ser avaliadas por versões diferentes de regras de negócio sem que o motivo exato da negação/aprovação fique registrado.</a:t>
-            </a:r>
-            <a:endParaRPr sz="800">
-              <a:solidFill>
-                <a:srgbClr val="1F1F1F"/>
-              </a:solidFill>
-            </a:endParaRPr>
-          </a:p>
-          <a:p>
-            <a:pPr indent="-279400" lvl="0" marL="457200" rtl="0" algn="l">
-              <a:lnSpc>
-                <a:spcPct val="115000"/>
-              </a:lnSpc>
-              <a:spcBef>
-                <a:spcPts val="0"/>
-              </a:spcBef>
-              <a:spcAft>
-                <a:spcPts val="0"/>
-              </a:spcAft>
-              <a:buClr>
-                <a:srgbClr val="1F1F1F"/>
-              </a:buClr>
-              <a:buSzPts val="800"/>
-              <a:buChar char="●"/>
-            </a:pPr>
-            <a:r>
-              <a:rPr b="1" lang="pt-BR" sz="800">
-                <a:solidFill>
-                  <a:srgbClr val="1F1F1F"/>
-                </a:solidFill>
-              </a:rPr>
-              <a:t>Impacto:</a:t>
-            </a:r>
-            <a:r>
-              <a:rPr lang="pt-BR" sz="800">
-                <a:solidFill>
-                  <a:srgbClr val="1F1F1F"/>
-                </a:solidFill>
-              </a:rPr>
-              <a:t> Impossibilidade de justificar ao cliente ou ao órgão regulador por que uma transação foi negada no passado.</a:t>
-            </a:r>
-            <a:endParaRPr sz="800">
-              <a:solidFill>
-                <a:srgbClr val="1F1F1F"/>
-              </a:solidFill>
-            </a:endParaRPr>
-          </a:p>
-          <a:p>
-            <a:pPr indent="-279400" lvl="0" marL="457200" rtl="0" algn="l">
-              <a:lnSpc>
-                <a:spcPct val="115000"/>
-              </a:lnSpc>
-              <a:spcBef>
-                <a:spcPts val="0"/>
-              </a:spcBef>
-              <a:spcAft>
-                <a:spcPts val="0"/>
-              </a:spcAft>
-              <a:buClr>
-                <a:srgbClr val="1F1F1F"/>
-              </a:buClr>
-              <a:buSzPts val="800"/>
-              <a:buChar char="●"/>
-            </a:pPr>
-            <a:r>
-              <a:rPr b="1" lang="pt-BR" sz="800">
-                <a:solidFill>
-                  <a:srgbClr val="1F1F1F"/>
-                </a:solidFill>
-              </a:rPr>
-              <a:t>Estratégia de Mitigação: </a:t>
-            </a:r>
-            <a:r>
-              <a:rPr lang="pt-BR" sz="800">
-                <a:solidFill>
-                  <a:srgbClr val="1F1F1F"/>
-                </a:solidFill>
-              </a:rPr>
-              <a:t>Snapshot de Decisão no Evento/Transação. No momento da decisão (autorização/negação), salvar junto ao registro da transação os dados do estado exato da regra aplicada.</a:t>
-            </a:r>
-            <a:endParaRPr sz="800">
-              <a:solidFill>
-                <a:srgbClr val="1F1F1F"/>
-              </a:solidFill>
-            </a:endParaRPr>
-          </a:p>
-          <a:p>
-            <a:pPr indent="0" lvl="0" marL="914400" rtl="0" algn="l">
-              <a:lnSpc>
-                <a:spcPct val="115000"/>
-              </a:lnSpc>
-              <a:spcBef>
-                <a:spcPts val="0"/>
-              </a:spcBef>
-              <a:spcAft>
-                <a:spcPts val="0"/>
-              </a:spcAft>
-              <a:buClr>
-                <a:schemeClr val="dk1"/>
-              </a:buClr>
-              <a:buSzPts val="1100"/>
-              <a:buFont typeface="Arial"/>
               <a:buNone/>
             </a:pPr>
             <a:r>
               <a:t/>
             </a:r>
-            <a:endParaRPr sz="1100">
+            <a:endParaRPr sz="700">
               <a:solidFill>
                 <a:srgbClr val="1F1F1F"/>
               </a:solidFill>
@@ -10242,29 +10488,24 @@
               <a:spcAft>
                 <a:spcPts val="0"/>
               </a:spcAft>
-              <a:buClr>
-                <a:schemeClr val="dk1"/>
-              </a:buClr>
-              <a:buSzPts val="1100"/>
-              <a:buFont typeface="Arial"/>
               <a:buNone/>
             </a:pPr>
             <a:r>
-              <a:rPr b="1" lang="pt-BR" sz="1000">
+              <a:rPr b="1" lang="pt-BR" sz="900">
                 <a:solidFill>
                   <a:srgbClr val="1F1F1F"/>
                 </a:solidFill>
               </a:rPr>
-              <a:t>3. Latência Excessiva e Gargalo em Consultas/Autorizações de Alto Volume</a:t>
+              <a:t>3. Principais Riscos</a:t>
             </a:r>
-            <a:endParaRPr b="1" sz="1000">
+            <a:endParaRPr b="1" sz="900">
               <a:solidFill>
                 <a:srgbClr val="1F1F1F"/>
               </a:solidFill>
             </a:endParaRPr>
           </a:p>
           <a:p>
-            <a:pPr indent="-279400" lvl="0" marL="457200" rtl="0" algn="l">
+            <a:pPr indent="-273050" lvl="0" marL="457200" rtl="0" algn="l">
               <a:lnSpc>
                 <a:spcPct val="115000"/>
               </a:lnSpc>
@@ -10277,33 +10518,49 @@
               <a:buClr>
                 <a:srgbClr val="1F1F1F"/>
               </a:buClr>
-              <a:buSzPts val="800"/>
+              <a:buSzPts val="700"/>
               <a:buChar char="●"/>
             </a:pPr>
             <a:r>
-              <a:rPr b="1" lang="pt-BR" sz="800">
+              <a:rPr b="1" lang="pt-BR" sz="700">
                 <a:solidFill>
                   <a:srgbClr val="1F1F1F"/>
                 </a:solidFill>
               </a:rPr>
-              <a:t>Risco:</a:t>
+              <a:t>Gargalos ou Falhas no Consumo do RedoLog:</a:t>
             </a:r>
             <a:r>
-              <a:rPr lang="pt-BR" sz="800">
+              <a:rPr lang="pt-BR" sz="700">
                 <a:solidFill>
                   <a:srgbClr val="1F1F1F"/>
                 </a:solidFill>
               </a:rPr>
-              <a:t> Depender do banco de dados relacional do legado ou de chamadas síncronas em cadeia para buscar contas, limites configurados, histórico e realizar a decisão de autorização.</a:t>
+              <a:t> Se a ferramenta de CDC falhar ou ficar lenta ao consumir o </a:t>
             </a:r>
-            <a:endParaRPr sz="800">
+            <a:r>
+              <a:rPr i="1" lang="pt-BR" sz="700">
+                <a:solidFill>
+                  <a:srgbClr val="1F1F1F"/>
+                </a:solidFill>
+              </a:rPr>
+              <a:t>RedoLog</a:t>
+            </a:r>
+            <a:r>
+              <a:rPr lang="pt-BR" sz="700">
+                <a:solidFill>
+                  <a:srgbClr val="1F1F1F"/>
+                </a:solidFill>
+              </a:rPr>
+              <a:t> do banco relacional, isso pode gerar impacto na performance do banco de dados principal ou atrasos severos na replicação dos eventos.</a:t>
+            </a:r>
+            <a:endParaRPr sz="700">
               <a:solidFill>
                 <a:srgbClr val="1F1F1F"/>
               </a:solidFill>
             </a:endParaRPr>
           </a:p>
           <a:p>
-            <a:pPr indent="-279400" lvl="0" marL="457200" rtl="0" algn="l">
+            <a:pPr indent="0" lvl="0" marL="457200" rtl="0" algn="l">
               <a:lnSpc>
                 <a:spcPct val="115000"/>
               </a:lnSpc>
@@ -10313,52 +10570,19 @@
               <a:spcAft>
                 <a:spcPts val="0"/>
               </a:spcAft>
-              <a:buClr>
-                <a:srgbClr val="1F1F1F"/>
-              </a:buClr>
-              <a:buSzPts val="800"/>
-              <a:buChar char="●"/>
+              <a:buNone/>
             </a:pPr>
             <a:r>
-              <a:rPr b="1" lang="pt-BR" sz="800">
-                <a:solidFill>
-                  <a:srgbClr val="1F1F1F"/>
-                </a:solidFill>
-              </a:rPr>
-              <a:t>Impacto:</a:t>
+              <a:t/>
             </a:r>
-            <a:r>
-              <a:rPr lang="pt-BR" sz="800">
-                <a:solidFill>
-                  <a:srgbClr val="1F1F1F"/>
-                </a:solidFill>
-              </a:rPr>
-              <a:t> </a:t>
-            </a:r>
-            <a:r>
-              <a:rPr i="1" lang="pt-BR" sz="800">
-                <a:solidFill>
-                  <a:srgbClr val="1F1F1F"/>
-                </a:solidFill>
-              </a:rPr>
-              <a:t>Timeouts</a:t>
-            </a:r>
-            <a:r>
-              <a:rPr lang="pt-BR" sz="800">
-                <a:solidFill>
-                  <a:srgbClr val="1F1F1F"/>
-                </a:solidFill>
-              </a:rPr>
-              <a:t> e indisponibilidade nos canais do cliente, durante picos de uso (ex: Black Friday, dia de pagamento), degradando a experiência do usuário e violando os SLAs do banco.</a:t>
-            </a:r>
-            <a:endParaRPr sz="800">
+            <a:endParaRPr sz="700">
               <a:solidFill>
                 <a:srgbClr val="1F1F1F"/>
               </a:solidFill>
             </a:endParaRPr>
           </a:p>
           <a:p>
-            <a:pPr indent="-279400" lvl="0" marL="457200" rtl="0" algn="l">
+            <a:pPr indent="-273050" lvl="0" marL="457200" rtl="0" algn="l">
               <a:lnSpc>
                 <a:spcPct val="115000"/>
               </a:lnSpc>
@@ -10371,49 +10595,68 @@
               <a:buClr>
                 <a:srgbClr val="1F1F1F"/>
               </a:buClr>
-              <a:buSzPts val="800"/>
+              <a:buSzPts val="700"/>
               <a:buChar char="●"/>
             </a:pPr>
             <a:r>
-              <a:rPr b="1" lang="pt-BR" sz="800">
+              <a:rPr b="1" lang="pt-BR" sz="700">
                 <a:solidFill>
                   <a:srgbClr val="1F1F1F"/>
                 </a:solidFill>
               </a:rPr>
-              <a:t>Estratégia de Mitigação: </a:t>
+              <a:t>Complexidade na Tratativa de Erros e Resiliência:</a:t>
             </a:r>
             <a:r>
-              <a:rPr lang="pt-BR" sz="800">
+              <a:rPr lang="pt-BR" sz="700">
                 <a:solidFill>
                   <a:srgbClr val="1F1F1F"/>
                 </a:solidFill>
               </a:rPr>
-              <a:t>Arquitetura Orientada a Eventos (EDA)</a:t>
+              <a:t> Apesar de contar com </a:t>
             </a:r>
             <a:r>
-              <a:rPr b="1" lang="pt-BR" sz="800">
+              <a:rPr i="1" lang="pt-BR" sz="700">
                 <a:solidFill>
                   <a:srgbClr val="1F1F1F"/>
                 </a:solidFill>
               </a:rPr>
-              <a:t> . </a:t>
+              <a:t>backoff</a:t>
             </a:r>
             <a:r>
-              <a:rPr lang="pt-BR" sz="800">
+              <a:rPr lang="pt-BR" sz="700">
                 <a:solidFill>
                   <a:srgbClr val="1F1F1F"/>
                 </a:solidFill>
               </a:rPr>
-              <a:t>Notificar alterações de limites e estados de transação de forma assíncrona (via stream) para atualizar os sistemas secundários sem bloquear a linha de resposta da transação principal.</a:t>
+              <a:t> exponencial e DLQ nos tópicos de leitura, falhas mal configuradas no processamento de stream (</a:t>
             </a:r>
-            <a:endParaRPr sz="800">
+            <a:r>
+              <a:rPr i="1" lang="pt-BR" sz="700">
+                <a:solidFill>
+                  <a:srgbClr val="1F1F1F"/>
+                </a:solidFill>
+              </a:rPr>
+              <a:t>Stream Processing</a:t>
+            </a:r>
+            <a:r>
+              <a:rPr lang="pt-BR" sz="700">
+                <a:solidFill>
+                  <a:srgbClr val="1F1F1F"/>
+                </a:solidFill>
+              </a:rPr>
+              <a:t>) podem resultar em perda de eventos, mensagens duplicadas ou travamento no fluxo de dados.</a:t>
+            </a:r>
+            <a:endParaRPr sz="700">
               <a:solidFill>
                 <a:srgbClr val="1F1F1F"/>
               </a:solidFill>
             </a:endParaRPr>
           </a:p>
           <a:p>
-            <a:pPr indent="0" lvl="0" marL="0" rtl="0" algn="l">
+            <a:pPr indent="0" lvl="0" marL="457200" rtl="0" algn="l">
+              <a:lnSpc>
+                <a:spcPct val="115000"/>
+              </a:lnSpc>
               <a:spcBef>
                 <a:spcPts val="0"/>
               </a:spcBef>
@@ -10425,17 +10668,87 @@
             <a:r>
               <a:t/>
             </a:r>
-            <a:endParaRPr sz="1800">
+            <a:endParaRPr sz="700">
+              <a:solidFill>
+                <a:srgbClr val="1F1F1F"/>
+              </a:solidFill>
+            </a:endParaRPr>
+          </a:p>
+          <a:p>
+            <a:pPr indent="-273050" lvl="0" marL="457200" rtl="0" algn="l">
+              <a:lnSpc>
+                <a:spcPct val="115000"/>
+              </a:lnSpc>
+              <a:spcBef>
+                <a:spcPts val="0"/>
+              </a:spcBef>
+              <a:spcAft>
+                <a:spcPts val="0"/>
+              </a:spcAft>
+              <a:buClr>
+                <a:srgbClr val="1F1F1F"/>
+              </a:buClr>
+              <a:buSzPts val="700"/>
+              <a:buChar char="●"/>
+            </a:pPr>
+            <a:r>
+              <a:rPr b="1" lang="pt-BR" sz="700">
+                <a:solidFill>
+                  <a:srgbClr val="1F1F1F"/>
+                </a:solidFill>
+              </a:rPr>
+              <a:t>Ponto Único de Falha Operacional:</a:t>
+            </a:r>
+            <a:r>
+              <a:rPr lang="pt-BR" sz="700">
+                <a:solidFill>
+                  <a:srgbClr val="1F1F1F"/>
+                </a:solidFill>
+              </a:rPr>
+              <a:t> A dependência de múltiplos componentes gerenciados em cadeia (API Gateway  API de Transação  Banco  CDC  Streaming  Stream Processing  Streaming de Destino) aumenta a superfície de falhas sistêmicas, exigindo observabilidade robusta em ponta a ponta.</a:t>
+            </a:r>
+            <a:endParaRPr b="1" sz="800">
+              <a:solidFill>
+                <a:srgbClr val="1F1F1F"/>
+              </a:solidFill>
+            </a:endParaRPr>
+          </a:p>
+          <a:p>
+            <a:pPr indent="0" lvl="0" marL="0" marR="0" rtl="0" algn="l">
+              <a:lnSpc>
+                <a:spcPct val="100000"/>
+              </a:lnSpc>
+              <a:spcBef>
+                <a:spcPts val="0"/>
+              </a:spcBef>
+              <a:spcAft>
+                <a:spcPts val="0"/>
+              </a:spcAft>
+              <a:buClr>
+                <a:srgbClr val="000000"/>
+              </a:buClr>
+              <a:buSzPts val="1800"/>
+              <a:buFont typeface="Arial"/>
+              <a:buNone/>
+            </a:pPr>
+            <a:r>
+              <a:t/>
+            </a:r>
+            <a:endParaRPr b="0" i="0" sz="1800" u="none" cap="none" strike="noStrike">
               <a:solidFill>
                 <a:schemeClr val="dk2"/>
               </a:solidFill>
+              <a:latin typeface="Arial"/>
+              <a:ea typeface="Arial"/>
+              <a:cs typeface="Arial"/>
+              <a:sym typeface="Arial"/>
             </a:endParaRPr>
           </a:p>
         </p:txBody>
       </p:sp>
       <p:sp>
         <p:nvSpPr>
-          <p:cNvPr id="85" name="Google Shape;85;p17"/>
+          <p:cNvPr id="84" name="Google Shape;84;p17"/>
           <p:cNvSpPr txBox="1"/>
           <p:nvPr>
             <p:ph idx="4294967295" type="title"/>
@@ -10449,6 +10762,10 @@
           <a:prstGeom prst="rect">
             <a:avLst/>
           </a:prstGeom>
+          <a:noFill/>
+          <a:ln>
+            <a:noFill/>
+          </a:ln>
         </p:spPr>
         <p:txBody>
           <a:bodyPr anchorCtr="0" anchor="t" bIns="91425" lIns="91425" spcFirstLastPara="1" rIns="91425" wrap="square" tIns="91425">
@@ -10457,6 +10774,9 @@
           <a:lstStyle/>
           <a:p>
             <a:pPr indent="0" lvl="0" marL="0" rtl="0" algn="l">
+              <a:lnSpc>
+                <a:spcPct val="100000"/>
+              </a:lnSpc>
               <a:spcBef>
                 <a:spcPts val="0"/>
               </a:spcBef>
@@ -10468,7 +10788,7 @@
             </a:pPr>
             <a:r>
               <a:rPr b="1" lang="pt-BR" sz="1388"/>
-              <a:t>Riscos, impactos e mitigação</a:t>
+              <a:t>Decisões, trade-offs e riscos</a:t>
             </a:r>
             <a:endParaRPr b="1" sz="1388"/>
           </a:p>

--- a/NandaPay.pptx
+++ b/NandaPay.pptx
@@ -855,7 +855,7 @@
       </p:grpSpPr>
       <p:sp>
         <p:nvSpPr>
-          <p:cNvPr id="51" name="Google Shape;51;h648292c39f742fe6_1_9:notes"/>
+          <p:cNvPr id="51" name="Google Shape;51;p1:notes"/>
           <p:cNvSpPr txBox="1"/>
           <p:nvPr>
             <p:ph idx="1" type="body"/>
@@ -869,6 +869,10 @@
           <a:prstGeom prst="rect">
             <a:avLst/>
           </a:prstGeom>
+          <a:noFill/>
+          <a:ln>
+            <a:noFill/>
+          </a:ln>
         </p:spPr>
         <p:txBody>
           <a:bodyPr anchorCtr="0" anchor="t" bIns="91425" lIns="91425" spcFirstLastPara="1" rIns="91425" wrap="square" tIns="91425">
@@ -877,12 +881,16 @@
           <a:lstStyle/>
           <a:p>
             <a:pPr indent="0" lvl="0" marL="0" rtl="0" algn="l">
-              <a:spcBef>
-                <a:spcPts val="0"/>
-              </a:spcBef>
-              <a:spcAft>
-                <a:spcPts val="0"/>
-              </a:spcAft>
+              <a:lnSpc>
+                <a:spcPct val="100000"/>
+              </a:lnSpc>
+              <a:spcBef>
+                <a:spcPts val="0"/>
+              </a:spcBef>
+              <a:spcAft>
+                <a:spcPts val="0"/>
+              </a:spcAft>
+              <a:buSzPts val="1100"/>
               <a:buNone/>
             </a:pPr>
             <a:r>
@@ -894,7 +902,7 @@
       </p:sp>
       <p:sp>
         <p:nvSpPr>
-          <p:cNvPr id="52" name="Google Shape;52;h648292c39f742fe6_1_9:notes"/>
+          <p:cNvPr id="52" name="Google Shape;52;p1:notes"/>
           <p:cNvSpPr/>
           <p:nvPr>
             <p:ph idx="2" type="sldImg"/>
@@ -925,6 +933,16 @@
               </a:path>
             </a:pathLst>
           </a:custGeom>
+          <a:noFill/>
+          <a:ln cap="flat" cmpd="sng" w="9525">
+            <a:solidFill>
+              <a:srgbClr val="000000"/>
+            </a:solidFill>
+            <a:prstDash val="solid"/>
+            <a:round/>
+            <a:headEnd len="sm" w="sm" type="none"/>
+            <a:tailEnd len="sm" w="sm" type="none"/>
+          </a:ln>
         </p:spPr>
       </p:sp>
     </p:spTree>
@@ -954,7 +972,7 @@
       </p:grpSpPr>
       <p:sp>
         <p:nvSpPr>
-          <p:cNvPr id="86" name="Google Shape;86;p1:notes"/>
+          <p:cNvPr id="86" name="Google Shape;86;p2:notes"/>
           <p:cNvSpPr/>
           <p:nvPr>
             <p:ph idx="2" type="sldImg"/>
@@ -999,7 +1017,7 @@
       </p:sp>
       <p:sp>
         <p:nvSpPr>
-          <p:cNvPr id="87" name="Google Shape;87;p1:notes"/>
+          <p:cNvPr id="87" name="Google Shape;87;p2:notes"/>
           <p:cNvSpPr txBox="1"/>
           <p:nvPr>
             <p:ph idx="1" type="body"/>
@@ -1071,7 +1089,7 @@
       </p:grpSpPr>
       <p:sp>
         <p:nvSpPr>
-          <p:cNvPr id="94" name="Google Shape;94;p2:notes"/>
+          <p:cNvPr id="94" name="Google Shape;94;p3:notes"/>
           <p:cNvSpPr/>
           <p:nvPr>
             <p:ph idx="2" type="sldImg"/>
@@ -1116,7 +1134,7 @@
       </p:sp>
       <p:sp>
         <p:nvSpPr>
-          <p:cNvPr id="95" name="Google Shape;95;p2:notes"/>
+          <p:cNvPr id="95" name="Google Shape;95;p3:notes"/>
           <p:cNvSpPr txBox="1"/>
           <p:nvPr>
             <p:ph idx="1" type="body"/>
@@ -1188,7 +1206,7 @@
       </p:grpSpPr>
       <p:sp>
         <p:nvSpPr>
-          <p:cNvPr id="100" name="Google Shape;100;p3:notes"/>
+          <p:cNvPr id="100" name="Google Shape;100;p4:notes"/>
           <p:cNvSpPr/>
           <p:nvPr>
             <p:ph idx="2" type="sldImg"/>
@@ -1233,7 +1251,7 @@
       </p:sp>
       <p:sp>
         <p:nvSpPr>
-          <p:cNvPr id="101" name="Google Shape;101;p3:notes"/>
+          <p:cNvPr id="101" name="Google Shape;101;p4:notes"/>
           <p:cNvSpPr txBox="1"/>
           <p:nvPr>
             <p:ph idx="1" type="body"/>
@@ -1305,7 +1323,7 @@
       </p:grpSpPr>
       <p:sp>
         <p:nvSpPr>
-          <p:cNvPr id="106" name="Google Shape;106;p4:notes"/>
+          <p:cNvPr id="106" name="Google Shape;106;p5:notes"/>
           <p:cNvSpPr/>
           <p:nvPr>
             <p:ph idx="2" type="sldImg"/>
@@ -1350,7 +1368,7 @@
       </p:sp>
       <p:sp>
         <p:nvSpPr>
-          <p:cNvPr id="107" name="Google Shape;107;p4:notes"/>
+          <p:cNvPr id="107" name="Google Shape;107;p5:notes"/>
           <p:cNvSpPr txBox="1"/>
           <p:nvPr>
             <p:ph idx="1" type="body"/>
@@ -1422,7 +1440,7 @@
       </p:grpSpPr>
       <p:sp>
         <p:nvSpPr>
-          <p:cNvPr id="113" name="Google Shape;113;p5:notes"/>
+          <p:cNvPr id="113" name="Google Shape;113;p6:notes"/>
           <p:cNvSpPr/>
           <p:nvPr>
             <p:ph idx="2" type="sldImg"/>
@@ -1467,7 +1485,7 @@
       </p:sp>
       <p:sp>
         <p:nvSpPr>
-          <p:cNvPr id="114" name="Google Shape;114;p5:notes"/>
+          <p:cNvPr id="114" name="Google Shape;114;p6:notes"/>
           <p:cNvSpPr txBox="1"/>
           <p:nvPr>
             <p:ph idx="1" type="body"/>
@@ -1539,7 +1557,7 @@
       </p:grpSpPr>
       <p:sp>
         <p:nvSpPr>
-          <p:cNvPr id="119" name="Google Shape;119;h648292c39f742fe6_1_166:notes"/>
+          <p:cNvPr id="119" name="Google Shape;119;p7:notes"/>
           <p:cNvSpPr/>
           <p:nvPr>
             <p:ph idx="2" type="sldImg"/>
@@ -1584,7 +1602,7 @@
       </p:sp>
       <p:sp>
         <p:nvSpPr>
-          <p:cNvPr id="120" name="Google Shape;120;h648292c39f742fe6_1_166:notes"/>
+          <p:cNvPr id="120" name="Google Shape;120;p7:notes"/>
           <p:cNvSpPr txBox="1"/>
           <p:nvPr>
             <p:ph idx="1" type="body"/>
@@ -1638,8 +1656,8 @@
 </file>
 
 <file path=ppt/slideLayouts/slideLayout1.xml><?xml version="1.0" encoding="utf-8"?>
-<p:sldLayout xmlns:a="http://schemas.openxmlformats.org/drawingml/2006/main" xmlns:r="http://schemas.openxmlformats.org/officeDocument/2006/relationships" xmlns:mc="http://schemas.openxmlformats.org/markup-compatibility/2006" xmlns:mv="urn:schemas-microsoft-com:mac:vml" xmlns:p="http://schemas.openxmlformats.org/presentationml/2006/main" xmlns:c="http://schemas.openxmlformats.org/drawingml/2006/chart" xmlns:dgm="http://schemas.openxmlformats.org/drawingml/2006/diagram" xmlns:o="urn:schemas-microsoft-com:office:office" xmlns:v="urn:schemas-microsoft-com:vml" xmlns:pvml="urn:schemas-microsoft-com:office:powerpoint" xmlns:com="http://schemas.openxmlformats.org/drawingml/2006/compatibility" xmlns:p14="http://schemas.microsoft.com/office/powerpoint/2010/main" xmlns:p15="http://schemas.microsoft.com/office/powerpoint/2012/main" xmlns:ahyp="http://schemas.microsoft.com/office/drawing/2018/hyperlinkcolor" matchingName="Title slide" type="title">
-  <p:cSld name="TITLE">
+<p:sldLayout xmlns:a="http://schemas.openxmlformats.org/drawingml/2006/main" xmlns:r="http://schemas.openxmlformats.org/officeDocument/2006/relationships" xmlns:mc="http://schemas.openxmlformats.org/markup-compatibility/2006" xmlns:mv="urn:schemas-microsoft-com:mac:vml" xmlns:p="http://schemas.openxmlformats.org/presentationml/2006/main" xmlns:c="http://schemas.openxmlformats.org/drawingml/2006/chart" xmlns:dgm="http://schemas.openxmlformats.org/drawingml/2006/diagram" xmlns:o="urn:schemas-microsoft-com:office:office" xmlns:v="urn:schemas-microsoft-com:vml" xmlns:pvml="urn:schemas-microsoft-com:office:powerpoint" xmlns:com="http://schemas.openxmlformats.org/drawingml/2006/compatibility" xmlns:p14="http://schemas.microsoft.com/office/powerpoint/2010/main" xmlns:p15="http://schemas.microsoft.com/office/powerpoint/2012/main" xmlns:ahyp="http://schemas.microsoft.com/office/drawing/2018/hyperlinkcolor" matchingName="Blank" type="blank">
+  <p:cSld name="BLANK">
     <p:spTree>
       <p:nvGrpSpPr>
         <p:cNvPr id="9" name="Shape 9"/>
@@ -1659,283 +1677,6 @@
           <p:cNvPr id="10" name="Google Shape;10;p2"/>
           <p:cNvSpPr txBox="1"/>
           <p:nvPr>
-            <p:ph type="ctrTitle"/>
-          </p:nvPr>
-        </p:nvSpPr>
-        <p:spPr>
-          <a:xfrm>
-            <a:off x="311708" y="744575"/>
-            <a:ext cx="8520600" cy="2052600"/>
-          </a:xfrm>
-          <a:prstGeom prst="rect">
-            <a:avLst/>
-          </a:prstGeom>
-        </p:spPr>
-        <p:txBody>
-          <a:bodyPr anchorCtr="0" anchor="b" bIns="91425" lIns="91425" spcFirstLastPara="1" rIns="91425" wrap="square" tIns="91425">
-            <a:normAutofit/>
-          </a:bodyPr>
-          <a:lstStyle>
-            <a:lvl1pPr lvl="0" algn="ctr">
-              <a:spcBef>
-                <a:spcPts val="0"/>
-              </a:spcBef>
-              <a:spcAft>
-                <a:spcPts val="0"/>
-              </a:spcAft>
-              <a:buSzPts val="5200"/>
-              <a:buNone/>
-              <a:defRPr sz="5200"/>
-            </a:lvl1pPr>
-            <a:lvl2pPr lvl="1" algn="ctr">
-              <a:spcBef>
-                <a:spcPts val="0"/>
-              </a:spcBef>
-              <a:spcAft>
-                <a:spcPts val="0"/>
-              </a:spcAft>
-              <a:buSzPts val="5200"/>
-              <a:buNone/>
-              <a:defRPr sz="5200"/>
-            </a:lvl2pPr>
-            <a:lvl3pPr lvl="2" algn="ctr">
-              <a:spcBef>
-                <a:spcPts val="0"/>
-              </a:spcBef>
-              <a:spcAft>
-                <a:spcPts val="0"/>
-              </a:spcAft>
-              <a:buSzPts val="5200"/>
-              <a:buNone/>
-              <a:defRPr sz="5200"/>
-            </a:lvl3pPr>
-            <a:lvl4pPr lvl="3" algn="ctr">
-              <a:spcBef>
-                <a:spcPts val="0"/>
-              </a:spcBef>
-              <a:spcAft>
-                <a:spcPts val="0"/>
-              </a:spcAft>
-              <a:buSzPts val="5200"/>
-              <a:buNone/>
-              <a:defRPr sz="5200"/>
-            </a:lvl4pPr>
-            <a:lvl5pPr lvl="4" algn="ctr">
-              <a:spcBef>
-                <a:spcPts val="0"/>
-              </a:spcBef>
-              <a:spcAft>
-                <a:spcPts val="0"/>
-              </a:spcAft>
-              <a:buSzPts val="5200"/>
-              <a:buNone/>
-              <a:defRPr sz="5200"/>
-            </a:lvl5pPr>
-            <a:lvl6pPr lvl="5" algn="ctr">
-              <a:spcBef>
-                <a:spcPts val="0"/>
-              </a:spcBef>
-              <a:spcAft>
-                <a:spcPts val="0"/>
-              </a:spcAft>
-              <a:buSzPts val="5200"/>
-              <a:buNone/>
-              <a:defRPr sz="5200"/>
-            </a:lvl6pPr>
-            <a:lvl7pPr lvl="6" algn="ctr">
-              <a:spcBef>
-                <a:spcPts val="0"/>
-              </a:spcBef>
-              <a:spcAft>
-                <a:spcPts val="0"/>
-              </a:spcAft>
-              <a:buSzPts val="5200"/>
-              <a:buNone/>
-              <a:defRPr sz="5200"/>
-            </a:lvl7pPr>
-            <a:lvl8pPr lvl="7" algn="ctr">
-              <a:spcBef>
-                <a:spcPts val="0"/>
-              </a:spcBef>
-              <a:spcAft>
-                <a:spcPts val="0"/>
-              </a:spcAft>
-              <a:buSzPts val="5200"/>
-              <a:buNone/>
-              <a:defRPr sz="5200"/>
-            </a:lvl8pPr>
-            <a:lvl9pPr lvl="8" algn="ctr">
-              <a:spcBef>
-                <a:spcPts val="0"/>
-              </a:spcBef>
-              <a:spcAft>
-                <a:spcPts val="0"/>
-              </a:spcAft>
-              <a:buSzPts val="5200"/>
-              <a:buNone/>
-              <a:defRPr sz="5200"/>
-            </a:lvl9pPr>
-          </a:lstStyle>
-          <a:p/>
-        </p:txBody>
-      </p:sp>
-      <p:sp>
-        <p:nvSpPr>
-          <p:cNvPr id="11" name="Google Shape;11;p2"/>
-          <p:cNvSpPr txBox="1"/>
-          <p:nvPr>
-            <p:ph idx="1" type="subTitle"/>
-          </p:nvPr>
-        </p:nvSpPr>
-        <p:spPr>
-          <a:xfrm>
-            <a:off x="311700" y="2834125"/>
-            <a:ext cx="8520600" cy="792600"/>
-          </a:xfrm>
-          <a:prstGeom prst="rect">
-            <a:avLst/>
-          </a:prstGeom>
-        </p:spPr>
-        <p:txBody>
-          <a:bodyPr anchorCtr="0" anchor="t" bIns="91425" lIns="91425" spcFirstLastPara="1" rIns="91425" wrap="square" tIns="91425">
-            <a:normAutofit/>
-          </a:bodyPr>
-          <a:lstStyle>
-            <a:lvl1pPr lvl="0" algn="ctr">
-              <a:lnSpc>
-                <a:spcPct val="100000"/>
-              </a:lnSpc>
-              <a:spcBef>
-                <a:spcPts val="0"/>
-              </a:spcBef>
-              <a:spcAft>
-                <a:spcPts val="0"/>
-              </a:spcAft>
-              <a:buSzPts val="2800"/>
-              <a:buNone/>
-              <a:defRPr sz="2800"/>
-            </a:lvl1pPr>
-            <a:lvl2pPr lvl="1" algn="ctr">
-              <a:lnSpc>
-                <a:spcPct val="100000"/>
-              </a:lnSpc>
-              <a:spcBef>
-                <a:spcPts val="0"/>
-              </a:spcBef>
-              <a:spcAft>
-                <a:spcPts val="0"/>
-              </a:spcAft>
-              <a:buSzPts val="2800"/>
-              <a:buNone/>
-              <a:defRPr sz="2800"/>
-            </a:lvl2pPr>
-            <a:lvl3pPr lvl="2" algn="ctr">
-              <a:lnSpc>
-                <a:spcPct val="100000"/>
-              </a:lnSpc>
-              <a:spcBef>
-                <a:spcPts val="0"/>
-              </a:spcBef>
-              <a:spcAft>
-                <a:spcPts val="0"/>
-              </a:spcAft>
-              <a:buSzPts val="2800"/>
-              <a:buNone/>
-              <a:defRPr sz="2800"/>
-            </a:lvl3pPr>
-            <a:lvl4pPr lvl="3" algn="ctr">
-              <a:lnSpc>
-                <a:spcPct val="100000"/>
-              </a:lnSpc>
-              <a:spcBef>
-                <a:spcPts val="0"/>
-              </a:spcBef>
-              <a:spcAft>
-                <a:spcPts val="0"/>
-              </a:spcAft>
-              <a:buSzPts val="2800"/>
-              <a:buNone/>
-              <a:defRPr sz="2800"/>
-            </a:lvl4pPr>
-            <a:lvl5pPr lvl="4" algn="ctr">
-              <a:lnSpc>
-                <a:spcPct val="100000"/>
-              </a:lnSpc>
-              <a:spcBef>
-                <a:spcPts val="0"/>
-              </a:spcBef>
-              <a:spcAft>
-                <a:spcPts val="0"/>
-              </a:spcAft>
-              <a:buSzPts val="2800"/>
-              <a:buNone/>
-              <a:defRPr sz="2800"/>
-            </a:lvl5pPr>
-            <a:lvl6pPr lvl="5" algn="ctr">
-              <a:lnSpc>
-                <a:spcPct val="100000"/>
-              </a:lnSpc>
-              <a:spcBef>
-                <a:spcPts val="0"/>
-              </a:spcBef>
-              <a:spcAft>
-                <a:spcPts val="0"/>
-              </a:spcAft>
-              <a:buSzPts val="2800"/>
-              <a:buNone/>
-              <a:defRPr sz="2800"/>
-            </a:lvl6pPr>
-            <a:lvl7pPr lvl="6" algn="ctr">
-              <a:lnSpc>
-                <a:spcPct val="100000"/>
-              </a:lnSpc>
-              <a:spcBef>
-                <a:spcPts val="0"/>
-              </a:spcBef>
-              <a:spcAft>
-                <a:spcPts val="0"/>
-              </a:spcAft>
-              <a:buSzPts val="2800"/>
-              <a:buNone/>
-              <a:defRPr sz="2800"/>
-            </a:lvl7pPr>
-            <a:lvl8pPr lvl="7" algn="ctr">
-              <a:lnSpc>
-                <a:spcPct val="100000"/>
-              </a:lnSpc>
-              <a:spcBef>
-                <a:spcPts val="0"/>
-              </a:spcBef>
-              <a:spcAft>
-                <a:spcPts val="0"/>
-              </a:spcAft>
-              <a:buSzPts val="2800"/>
-              <a:buNone/>
-              <a:defRPr sz="2800"/>
-            </a:lvl8pPr>
-            <a:lvl9pPr lvl="8" algn="ctr">
-              <a:lnSpc>
-                <a:spcPct val="100000"/>
-              </a:lnSpc>
-              <a:spcBef>
-                <a:spcPts val="0"/>
-              </a:spcBef>
-              <a:spcAft>
-                <a:spcPts val="0"/>
-              </a:spcAft>
-              <a:buSzPts val="2800"/>
-              <a:buNone/>
-              <a:defRPr sz="2800"/>
-            </a:lvl9pPr>
-          </a:lstStyle>
-          <a:p/>
-        </p:txBody>
-      </p:sp>
-      <p:sp>
-        <p:nvSpPr>
-          <p:cNvPr id="12" name="Google Shape;12;p2"/>
-          <p:cNvSpPr txBox="1"/>
-          <p:nvPr>
             <p:ph idx="12" type="sldNum"/>
           </p:nvPr>
         </p:nvSpPr>
@@ -1947,47 +1688,249 @@
           <a:prstGeom prst="rect">
             <a:avLst/>
           </a:prstGeom>
+          <a:noFill/>
+          <a:ln>
+            <a:noFill/>
+          </a:ln>
         </p:spPr>
         <p:txBody>
           <a:bodyPr anchorCtr="0" anchor="ctr" bIns="91425" lIns="91425" spcFirstLastPara="1" rIns="91425" wrap="square" tIns="91425">
             <a:normAutofit/>
           </a:bodyPr>
           <a:lstStyle>
-            <a:lvl1pPr lvl="0">
-              <a:buNone/>
-              <a:defRPr/>
+            <a:lvl1pPr indent="0" lvl="0" marL="0" marR="0" algn="r">
+              <a:lnSpc>
+                <a:spcPct val="100000"/>
+              </a:lnSpc>
+              <a:spcBef>
+                <a:spcPts val="0"/>
+              </a:spcBef>
+              <a:spcAft>
+                <a:spcPts val="0"/>
+              </a:spcAft>
+              <a:buClr>
+                <a:srgbClr val="000000"/>
+              </a:buClr>
+              <a:buSzPts val="1000"/>
+              <a:buFont typeface="Arial"/>
+              <a:buNone/>
+              <a:defRPr b="0" i="0" sz="1000" u="none" cap="none" strike="noStrike">
+                <a:solidFill>
+                  <a:schemeClr val="dk2"/>
+                </a:solidFill>
+                <a:latin typeface="Arial"/>
+                <a:ea typeface="Arial"/>
+                <a:cs typeface="Arial"/>
+                <a:sym typeface="Arial"/>
+              </a:defRPr>
             </a:lvl1pPr>
-            <a:lvl2pPr lvl="1">
-              <a:buNone/>
-              <a:defRPr/>
+            <a:lvl2pPr indent="0" lvl="1" marL="0" marR="0" algn="r">
+              <a:lnSpc>
+                <a:spcPct val="100000"/>
+              </a:lnSpc>
+              <a:spcBef>
+                <a:spcPts val="0"/>
+              </a:spcBef>
+              <a:spcAft>
+                <a:spcPts val="0"/>
+              </a:spcAft>
+              <a:buClr>
+                <a:srgbClr val="000000"/>
+              </a:buClr>
+              <a:buSzPts val="1000"/>
+              <a:buFont typeface="Arial"/>
+              <a:buNone/>
+              <a:defRPr b="0" i="0" sz="1000" u="none" cap="none" strike="noStrike">
+                <a:solidFill>
+                  <a:schemeClr val="dk2"/>
+                </a:solidFill>
+                <a:latin typeface="Arial"/>
+                <a:ea typeface="Arial"/>
+                <a:cs typeface="Arial"/>
+                <a:sym typeface="Arial"/>
+              </a:defRPr>
             </a:lvl2pPr>
-            <a:lvl3pPr lvl="2">
-              <a:buNone/>
-              <a:defRPr/>
+            <a:lvl3pPr indent="0" lvl="2" marL="0" marR="0" algn="r">
+              <a:lnSpc>
+                <a:spcPct val="100000"/>
+              </a:lnSpc>
+              <a:spcBef>
+                <a:spcPts val="0"/>
+              </a:spcBef>
+              <a:spcAft>
+                <a:spcPts val="0"/>
+              </a:spcAft>
+              <a:buClr>
+                <a:srgbClr val="000000"/>
+              </a:buClr>
+              <a:buSzPts val="1000"/>
+              <a:buFont typeface="Arial"/>
+              <a:buNone/>
+              <a:defRPr b="0" i="0" sz="1000" u="none" cap="none" strike="noStrike">
+                <a:solidFill>
+                  <a:schemeClr val="dk2"/>
+                </a:solidFill>
+                <a:latin typeface="Arial"/>
+                <a:ea typeface="Arial"/>
+                <a:cs typeface="Arial"/>
+                <a:sym typeface="Arial"/>
+              </a:defRPr>
             </a:lvl3pPr>
-            <a:lvl4pPr lvl="3">
-              <a:buNone/>
-              <a:defRPr/>
+            <a:lvl4pPr indent="0" lvl="3" marL="0" marR="0" algn="r">
+              <a:lnSpc>
+                <a:spcPct val="100000"/>
+              </a:lnSpc>
+              <a:spcBef>
+                <a:spcPts val="0"/>
+              </a:spcBef>
+              <a:spcAft>
+                <a:spcPts val="0"/>
+              </a:spcAft>
+              <a:buClr>
+                <a:srgbClr val="000000"/>
+              </a:buClr>
+              <a:buSzPts val="1000"/>
+              <a:buFont typeface="Arial"/>
+              <a:buNone/>
+              <a:defRPr b="0" i="0" sz="1000" u="none" cap="none" strike="noStrike">
+                <a:solidFill>
+                  <a:schemeClr val="dk2"/>
+                </a:solidFill>
+                <a:latin typeface="Arial"/>
+                <a:ea typeface="Arial"/>
+                <a:cs typeface="Arial"/>
+                <a:sym typeface="Arial"/>
+              </a:defRPr>
             </a:lvl4pPr>
-            <a:lvl5pPr lvl="4">
-              <a:buNone/>
-              <a:defRPr/>
+            <a:lvl5pPr indent="0" lvl="4" marL="0" marR="0" algn="r">
+              <a:lnSpc>
+                <a:spcPct val="100000"/>
+              </a:lnSpc>
+              <a:spcBef>
+                <a:spcPts val="0"/>
+              </a:spcBef>
+              <a:spcAft>
+                <a:spcPts val="0"/>
+              </a:spcAft>
+              <a:buClr>
+                <a:srgbClr val="000000"/>
+              </a:buClr>
+              <a:buSzPts val="1000"/>
+              <a:buFont typeface="Arial"/>
+              <a:buNone/>
+              <a:defRPr b="0" i="0" sz="1000" u="none" cap="none" strike="noStrike">
+                <a:solidFill>
+                  <a:schemeClr val="dk2"/>
+                </a:solidFill>
+                <a:latin typeface="Arial"/>
+                <a:ea typeface="Arial"/>
+                <a:cs typeface="Arial"/>
+                <a:sym typeface="Arial"/>
+              </a:defRPr>
             </a:lvl5pPr>
-            <a:lvl6pPr lvl="5">
-              <a:buNone/>
-              <a:defRPr/>
+            <a:lvl6pPr indent="0" lvl="5" marL="0" marR="0" algn="r">
+              <a:lnSpc>
+                <a:spcPct val="100000"/>
+              </a:lnSpc>
+              <a:spcBef>
+                <a:spcPts val="0"/>
+              </a:spcBef>
+              <a:spcAft>
+                <a:spcPts val="0"/>
+              </a:spcAft>
+              <a:buClr>
+                <a:srgbClr val="000000"/>
+              </a:buClr>
+              <a:buSzPts val="1000"/>
+              <a:buFont typeface="Arial"/>
+              <a:buNone/>
+              <a:defRPr b="0" i="0" sz="1000" u="none" cap="none" strike="noStrike">
+                <a:solidFill>
+                  <a:schemeClr val="dk2"/>
+                </a:solidFill>
+                <a:latin typeface="Arial"/>
+                <a:ea typeface="Arial"/>
+                <a:cs typeface="Arial"/>
+                <a:sym typeface="Arial"/>
+              </a:defRPr>
             </a:lvl6pPr>
-            <a:lvl7pPr lvl="6">
-              <a:buNone/>
-              <a:defRPr/>
+            <a:lvl7pPr indent="0" lvl="6" marL="0" marR="0" algn="r">
+              <a:lnSpc>
+                <a:spcPct val="100000"/>
+              </a:lnSpc>
+              <a:spcBef>
+                <a:spcPts val="0"/>
+              </a:spcBef>
+              <a:spcAft>
+                <a:spcPts val="0"/>
+              </a:spcAft>
+              <a:buClr>
+                <a:srgbClr val="000000"/>
+              </a:buClr>
+              <a:buSzPts val="1000"/>
+              <a:buFont typeface="Arial"/>
+              <a:buNone/>
+              <a:defRPr b="0" i="0" sz="1000" u="none" cap="none" strike="noStrike">
+                <a:solidFill>
+                  <a:schemeClr val="dk2"/>
+                </a:solidFill>
+                <a:latin typeface="Arial"/>
+                <a:ea typeface="Arial"/>
+                <a:cs typeface="Arial"/>
+                <a:sym typeface="Arial"/>
+              </a:defRPr>
             </a:lvl7pPr>
-            <a:lvl8pPr lvl="7">
-              <a:buNone/>
-              <a:defRPr/>
+            <a:lvl8pPr indent="0" lvl="7" marL="0" marR="0" algn="r">
+              <a:lnSpc>
+                <a:spcPct val="100000"/>
+              </a:lnSpc>
+              <a:spcBef>
+                <a:spcPts val="0"/>
+              </a:spcBef>
+              <a:spcAft>
+                <a:spcPts val="0"/>
+              </a:spcAft>
+              <a:buClr>
+                <a:srgbClr val="000000"/>
+              </a:buClr>
+              <a:buSzPts val="1000"/>
+              <a:buFont typeface="Arial"/>
+              <a:buNone/>
+              <a:defRPr b="0" i="0" sz="1000" u="none" cap="none" strike="noStrike">
+                <a:solidFill>
+                  <a:schemeClr val="dk2"/>
+                </a:solidFill>
+                <a:latin typeface="Arial"/>
+                <a:ea typeface="Arial"/>
+                <a:cs typeface="Arial"/>
+                <a:sym typeface="Arial"/>
+              </a:defRPr>
             </a:lvl8pPr>
-            <a:lvl9pPr lvl="8">
-              <a:buNone/>
-              <a:defRPr/>
+            <a:lvl9pPr indent="0" lvl="8" marL="0" marR="0" algn="r">
+              <a:lnSpc>
+                <a:spcPct val="100000"/>
+              </a:lnSpc>
+              <a:spcBef>
+                <a:spcPts val="0"/>
+              </a:spcBef>
+              <a:spcAft>
+                <a:spcPts val="0"/>
+              </a:spcAft>
+              <a:buClr>
+                <a:srgbClr val="000000"/>
+              </a:buClr>
+              <a:buSzPts val="1000"/>
+              <a:buFont typeface="Arial"/>
+              <a:buNone/>
+              <a:defRPr b="0" i="0" sz="1000" u="none" cap="none" strike="noStrike">
+                <a:solidFill>
+                  <a:schemeClr val="dk2"/>
+                </a:solidFill>
+                <a:latin typeface="Arial"/>
+                <a:ea typeface="Arial"/>
+                <a:cs typeface="Arial"/>
+                <a:sym typeface="Arial"/>
+              </a:defRPr>
             </a:lvl9pPr>
           </a:lstStyle>
           <a:p>
@@ -2017,11 +1960,11 @@
 </file>
 
 <file path=ppt/slideLayouts/slideLayout10.xml><?xml version="1.0" encoding="utf-8"?>
-<p:sldLayout xmlns:a="http://schemas.openxmlformats.org/drawingml/2006/main" xmlns:r="http://schemas.openxmlformats.org/officeDocument/2006/relationships" xmlns:mc="http://schemas.openxmlformats.org/markup-compatibility/2006" xmlns:mv="urn:schemas-microsoft-com:mac:vml" xmlns:p="http://schemas.openxmlformats.org/presentationml/2006/main" xmlns:c="http://schemas.openxmlformats.org/drawingml/2006/chart" xmlns:dgm="http://schemas.openxmlformats.org/drawingml/2006/diagram" xmlns:o="urn:schemas-microsoft-com:office:office" xmlns:v="urn:schemas-microsoft-com:vml" xmlns:pvml="urn:schemas-microsoft-com:office:powerpoint" xmlns:com="http://schemas.openxmlformats.org/drawingml/2006/compatibility" xmlns:p14="http://schemas.microsoft.com/office/powerpoint/2010/main" xmlns:p15="http://schemas.microsoft.com/office/powerpoint/2012/main" xmlns:ahyp="http://schemas.microsoft.com/office/drawing/2018/hyperlinkcolor" matchingName="Big number">
-  <p:cSld name="BIG_NUMBER">
+<p:sldLayout xmlns:a="http://schemas.openxmlformats.org/drawingml/2006/main" xmlns:r="http://schemas.openxmlformats.org/officeDocument/2006/relationships" xmlns:mc="http://schemas.openxmlformats.org/markup-compatibility/2006" xmlns:mv="urn:schemas-microsoft-com:mac:vml" xmlns:p="http://schemas.openxmlformats.org/presentationml/2006/main" xmlns:c="http://schemas.openxmlformats.org/drawingml/2006/chart" xmlns:dgm="http://schemas.openxmlformats.org/drawingml/2006/diagram" xmlns:o="urn:schemas-microsoft-com:office:office" xmlns:v="urn:schemas-microsoft-com:vml" xmlns:pvml="urn:schemas-microsoft-com:office:powerpoint" xmlns:com="http://schemas.openxmlformats.org/drawingml/2006/compatibility" xmlns:p14="http://schemas.microsoft.com/office/powerpoint/2010/main" xmlns:p15="http://schemas.microsoft.com/office/powerpoint/2012/main" xmlns:ahyp="http://schemas.microsoft.com/office/drawing/2018/hyperlinkcolor" matchingName="Caption">
+  <p:cSld name="CAPTION_ONLY">
     <p:spTree>
       <p:nvGrpSpPr>
-        <p:cNvPr id="44" name="Shape 44"/>
+        <p:cNvPr id="43" name="Shape 43"/>
         <p:cNvGrpSpPr/>
         <p:nvPr/>
       </p:nvGrpSpPr>
@@ -2035,136 +1978,7 @@
       </p:grpSpPr>
       <p:sp>
         <p:nvSpPr>
-          <p:cNvPr id="45" name="Google Shape;45;p11"/>
-          <p:cNvSpPr txBox="1"/>
-          <p:nvPr>
-            <p:ph hasCustomPrompt="1" type="title"/>
-          </p:nvPr>
-        </p:nvSpPr>
-        <p:spPr>
-          <a:xfrm>
-            <a:off x="311700" y="1106125"/>
-            <a:ext cx="8520600" cy="1963500"/>
-          </a:xfrm>
-          <a:prstGeom prst="rect">
-            <a:avLst/>
-          </a:prstGeom>
-        </p:spPr>
-        <p:txBody>
-          <a:bodyPr anchorCtr="0" anchor="b" bIns="91425" lIns="91425" spcFirstLastPara="1" rIns="91425" wrap="square" tIns="91425">
-            <a:normAutofit/>
-          </a:bodyPr>
-          <a:lstStyle>
-            <a:lvl1pPr lvl="0" algn="ctr">
-              <a:spcBef>
-                <a:spcPts val="0"/>
-              </a:spcBef>
-              <a:spcAft>
-                <a:spcPts val="0"/>
-              </a:spcAft>
-              <a:buSzPts val="12000"/>
-              <a:buNone/>
-              <a:defRPr sz="12000"/>
-            </a:lvl1pPr>
-            <a:lvl2pPr lvl="1" algn="ctr">
-              <a:spcBef>
-                <a:spcPts val="0"/>
-              </a:spcBef>
-              <a:spcAft>
-                <a:spcPts val="0"/>
-              </a:spcAft>
-              <a:buSzPts val="12000"/>
-              <a:buNone/>
-              <a:defRPr sz="12000"/>
-            </a:lvl2pPr>
-            <a:lvl3pPr lvl="2" algn="ctr">
-              <a:spcBef>
-                <a:spcPts val="0"/>
-              </a:spcBef>
-              <a:spcAft>
-                <a:spcPts val="0"/>
-              </a:spcAft>
-              <a:buSzPts val="12000"/>
-              <a:buNone/>
-              <a:defRPr sz="12000"/>
-            </a:lvl3pPr>
-            <a:lvl4pPr lvl="3" algn="ctr">
-              <a:spcBef>
-                <a:spcPts val="0"/>
-              </a:spcBef>
-              <a:spcAft>
-                <a:spcPts val="0"/>
-              </a:spcAft>
-              <a:buSzPts val="12000"/>
-              <a:buNone/>
-              <a:defRPr sz="12000"/>
-            </a:lvl4pPr>
-            <a:lvl5pPr lvl="4" algn="ctr">
-              <a:spcBef>
-                <a:spcPts val="0"/>
-              </a:spcBef>
-              <a:spcAft>
-                <a:spcPts val="0"/>
-              </a:spcAft>
-              <a:buSzPts val="12000"/>
-              <a:buNone/>
-              <a:defRPr sz="12000"/>
-            </a:lvl5pPr>
-            <a:lvl6pPr lvl="5" algn="ctr">
-              <a:spcBef>
-                <a:spcPts val="0"/>
-              </a:spcBef>
-              <a:spcAft>
-                <a:spcPts val="0"/>
-              </a:spcAft>
-              <a:buSzPts val="12000"/>
-              <a:buNone/>
-              <a:defRPr sz="12000"/>
-            </a:lvl6pPr>
-            <a:lvl7pPr lvl="6" algn="ctr">
-              <a:spcBef>
-                <a:spcPts val="0"/>
-              </a:spcBef>
-              <a:spcAft>
-                <a:spcPts val="0"/>
-              </a:spcAft>
-              <a:buSzPts val="12000"/>
-              <a:buNone/>
-              <a:defRPr sz="12000"/>
-            </a:lvl7pPr>
-            <a:lvl8pPr lvl="7" algn="ctr">
-              <a:spcBef>
-                <a:spcPts val="0"/>
-              </a:spcBef>
-              <a:spcAft>
-                <a:spcPts val="0"/>
-              </a:spcAft>
-              <a:buSzPts val="12000"/>
-              <a:buNone/>
-              <a:defRPr sz="12000"/>
-            </a:lvl8pPr>
-            <a:lvl9pPr lvl="8" algn="ctr">
-              <a:spcBef>
-                <a:spcPts val="0"/>
-              </a:spcBef>
-              <a:spcAft>
-                <a:spcPts val="0"/>
-              </a:spcAft>
-              <a:buSzPts val="12000"/>
-              <a:buNone/>
-              <a:defRPr sz="12000"/>
-            </a:lvl9pPr>
-          </a:lstStyle>
-          <a:p>
-            <a:r>
-              <a:t>xx%</a:t>
-            </a:r>
-          </a:p>
-        </p:txBody>
-      </p:sp>
-      <p:sp>
-        <p:nvSpPr>
-          <p:cNvPr id="46" name="Google Shape;46;p11"/>
+          <p:cNvPr id="44" name="Google Shape;44;p11"/>
           <p:cNvSpPr txBox="1"/>
           <p:nvPr>
             <p:ph idx="1" type="body"/>
@@ -2172,19 +1986,26 @@
         </p:nvSpPr>
         <p:spPr>
           <a:xfrm>
-            <a:off x="311700" y="3152225"/>
-            <a:ext cx="8520600" cy="1300800"/>
+            <a:off x="311700" y="4230575"/>
+            <a:ext cx="5998800" cy="605100"/>
           </a:xfrm>
           <a:prstGeom prst="rect">
             <a:avLst/>
           </a:prstGeom>
+          <a:noFill/>
+          <a:ln>
+            <a:noFill/>
+          </a:ln>
         </p:spPr>
         <p:txBody>
-          <a:bodyPr anchorCtr="0" anchor="t" bIns="91425" lIns="91425" spcFirstLastPara="1" rIns="91425" wrap="square" tIns="91425">
+          <a:bodyPr anchorCtr="0" anchor="ctr" bIns="91425" lIns="91425" spcFirstLastPara="1" rIns="91425" wrap="square" tIns="91425">
             <a:normAutofit/>
           </a:bodyPr>
           <a:lstStyle>
-            <a:lvl1pPr indent="-342900" lvl="0" marL="457200" algn="ctr">
+            <a:lvl1pPr indent="-228600" lvl="0" marL="457200" algn="l">
+              <a:lnSpc>
+                <a:spcPct val="100000"/>
+              </a:lnSpc>
               <a:spcBef>
                 <a:spcPts val="0"/>
               </a:spcBef>
@@ -2192,104 +2013,16 @@
                 <a:spcPts val="0"/>
               </a:spcAft>
               <a:buSzPts val="1800"/>
-              <a:buChar char="●"/>
+              <a:buNone/>
               <a:defRPr/>
             </a:lvl1pPr>
-            <a:lvl2pPr indent="-317500" lvl="1" marL="914400" algn="ctr">
-              <a:spcBef>
-                <a:spcPts val="0"/>
-              </a:spcBef>
-              <a:spcAft>
-                <a:spcPts val="0"/>
-              </a:spcAft>
-              <a:buSzPts val="1400"/>
-              <a:buChar char="○"/>
-              <a:defRPr/>
-            </a:lvl2pPr>
-            <a:lvl3pPr indent="-317500" lvl="2" marL="1371600" algn="ctr">
-              <a:spcBef>
-                <a:spcPts val="0"/>
-              </a:spcBef>
-              <a:spcAft>
-                <a:spcPts val="0"/>
-              </a:spcAft>
-              <a:buSzPts val="1400"/>
-              <a:buChar char="■"/>
-              <a:defRPr/>
-            </a:lvl3pPr>
-            <a:lvl4pPr indent="-317500" lvl="3" marL="1828800" algn="ctr">
-              <a:spcBef>
-                <a:spcPts val="0"/>
-              </a:spcBef>
-              <a:spcAft>
-                <a:spcPts val="0"/>
-              </a:spcAft>
-              <a:buSzPts val="1400"/>
-              <a:buChar char="●"/>
-              <a:defRPr/>
-            </a:lvl4pPr>
-            <a:lvl5pPr indent="-317500" lvl="4" marL="2286000" algn="ctr">
-              <a:spcBef>
-                <a:spcPts val="0"/>
-              </a:spcBef>
-              <a:spcAft>
-                <a:spcPts val="0"/>
-              </a:spcAft>
-              <a:buSzPts val="1400"/>
-              <a:buChar char="○"/>
-              <a:defRPr/>
-            </a:lvl5pPr>
-            <a:lvl6pPr indent="-317500" lvl="5" marL="2743200" algn="ctr">
-              <a:spcBef>
-                <a:spcPts val="0"/>
-              </a:spcBef>
-              <a:spcAft>
-                <a:spcPts val="0"/>
-              </a:spcAft>
-              <a:buSzPts val="1400"/>
-              <a:buChar char="■"/>
-              <a:defRPr/>
-            </a:lvl6pPr>
-            <a:lvl7pPr indent="-317500" lvl="6" marL="3200400" algn="ctr">
-              <a:spcBef>
-                <a:spcPts val="0"/>
-              </a:spcBef>
-              <a:spcAft>
-                <a:spcPts val="0"/>
-              </a:spcAft>
-              <a:buSzPts val="1400"/>
-              <a:buChar char="●"/>
-              <a:defRPr/>
-            </a:lvl7pPr>
-            <a:lvl8pPr indent="-317500" lvl="7" marL="3657600" algn="ctr">
-              <a:spcBef>
-                <a:spcPts val="0"/>
-              </a:spcBef>
-              <a:spcAft>
-                <a:spcPts val="0"/>
-              </a:spcAft>
-              <a:buSzPts val="1400"/>
-              <a:buChar char="○"/>
-              <a:defRPr/>
-            </a:lvl8pPr>
-            <a:lvl9pPr indent="-317500" lvl="8" marL="4114800" algn="ctr">
-              <a:spcBef>
-                <a:spcPts val="0"/>
-              </a:spcBef>
-              <a:spcAft>
-                <a:spcPts val="0"/>
-              </a:spcAft>
-              <a:buSzPts val="1400"/>
-              <a:buChar char="■"/>
-              <a:defRPr/>
-            </a:lvl9pPr>
           </a:lstStyle>
           <a:p/>
         </p:txBody>
       </p:sp>
       <p:sp>
         <p:nvSpPr>
-          <p:cNvPr id="47" name="Google Shape;47;p11"/>
+          <p:cNvPr id="45" name="Google Shape;45;p11"/>
           <p:cNvSpPr txBox="1"/>
           <p:nvPr>
             <p:ph idx="12" type="sldNum"/>
@@ -2303,47 +2036,249 @@
           <a:prstGeom prst="rect">
             <a:avLst/>
           </a:prstGeom>
+          <a:noFill/>
+          <a:ln>
+            <a:noFill/>
+          </a:ln>
         </p:spPr>
         <p:txBody>
           <a:bodyPr anchorCtr="0" anchor="ctr" bIns="91425" lIns="91425" spcFirstLastPara="1" rIns="91425" wrap="square" tIns="91425">
             <a:normAutofit/>
           </a:bodyPr>
           <a:lstStyle>
-            <a:lvl1pPr lvl="0">
-              <a:buNone/>
-              <a:defRPr/>
+            <a:lvl1pPr indent="0" lvl="0" marL="0" marR="0" algn="r">
+              <a:lnSpc>
+                <a:spcPct val="100000"/>
+              </a:lnSpc>
+              <a:spcBef>
+                <a:spcPts val="0"/>
+              </a:spcBef>
+              <a:spcAft>
+                <a:spcPts val="0"/>
+              </a:spcAft>
+              <a:buClr>
+                <a:srgbClr val="000000"/>
+              </a:buClr>
+              <a:buSzPts val="1000"/>
+              <a:buFont typeface="Arial"/>
+              <a:buNone/>
+              <a:defRPr b="0" i="0" sz="1000" u="none" cap="none" strike="noStrike">
+                <a:solidFill>
+                  <a:schemeClr val="dk2"/>
+                </a:solidFill>
+                <a:latin typeface="Arial"/>
+                <a:ea typeface="Arial"/>
+                <a:cs typeface="Arial"/>
+                <a:sym typeface="Arial"/>
+              </a:defRPr>
             </a:lvl1pPr>
-            <a:lvl2pPr lvl="1">
-              <a:buNone/>
-              <a:defRPr/>
+            <a:lvl2pPr indent="0" lvl="1" marL="0" marR="0" algn="r">
+              <a:lnSpc>
+                <a:spcPct val="100000"/>
+              </a:lnSpc>
+              <a:spcBef>
+                <a:spcPts val="0"/>
+              </a:spcBef>
+              <a:spcAft>
+                <a:spcPts val="0"/>
+              </a:spcAft>
+              <a:buClr>
+                <a:srgbClr val="000000"/>
+              </a:buClr>
+              <a:buSzPts val="1000"/>
+              <a:buFont typeface="Arial"/>
+              <a:buNone/>
+              <a:defRPr b="0" i="0" sz="1000" u="none" cap="none" strike="noStrike">
+                <a:solidFill>
+                  <a:schemeClr val="dk2"/>
+                </a:solidFill>
+                <a:latin typeface="Arial"/>
+                <a:ea typeface="Arial"/>
+                <a:cs typeface="Arial"/>
+                <a:sym typeface="Arial"/>
+              </a:defRPr>
             </a:lvl2pPr>
-            <a:lvl3pPr lvl="2">
-              <a:buNone/>
-              <a:defRPr/>
+            <a:lvl3pPr indent="0" lvl="2" marL="0" marR="0" algn="r">
+              <a:lnSpc>
+                <a:spcPct val="100000"/>
+              </a:lnSpc>
+              <a:spcBef>
+                <a:spcPts val="0"/>
+              </a:spcBef>
+              <a:spcAft>
+                <a:spcPts val="0"/>
+              </a:spcAft>
+              <a:buClr>
+                <a:srgbClr val="000000"/>
+              </a:buClr>
+              <a:buSzPts val="1000"/>
+              <a:buFont typeface="Arial"/>
+              <a:buNone/>
+              <a:defRPr b="0" i="0" sz="1000" u="none" cap="none" strike="noStrike">
+                <a:solidFill>
+                  <a:schemeClr val="dk2"/>
+                </a:solidFill>
+                <a:latin typeface="Arial"/>
+                <a:ea typeface="Arial"/>
+                <a:cs typeface="Arial"/>
+                <a:sym typeface="Arial"/>
+              </a:defRPr>
             </a:lvl3pPr>
-            <a:lvl4pPr lvl="3">
-              <a:buNone/>
-              <a:defRPr/>
+            <a:lvl4pPr indent="0" lvl="3" marL="0" marR="0" algn="r">
+              <a:lnSpc>
+                <a:spcPct val="100000"/>
+              </a:lnSpc>
+              <a:spcBef>
+                <a:spcPts val="0"/>
+              </a:spcBef>
+              <a:spcAft>
+                <a:spcPts val="0"/>
+              </a:spcAft>
+              <a:buClr>
+                <a:srgbClr val="000000"/>
+              </a:buClr>
+              <a:buSzPts val="1000"/>
+              <a:buFont typeface="Arial"/>
+              <a:buNone/>
+              <a:defRPr b="0" i="0" sz="1000" u="none" cap="none" strike="noStrike">
+                <a:solidFill>
+                  <a:schemeClr val="dk2"/>
+                </a:solidFill>
+                <a:latin typeface="Arial"/>
+                <a:ea typeface="Arial"/>
+                <a:cs typeface="Arial"/>
+                <a:sym typeface="Arial"/>
+              </a:defRPr>
             </a:lvl4pPr>
-            <a:lvl5pPr lvl="4">
-              <a:buNone/>
-              <a:defRPr/>
+            <a:lvl5pPr indent="0" lvl="4" marL="0" marR="0" algn="r">
+              <a:lnSpc>
+                <a:spcPct val="100000"/>
+              </a:lnSpc>
+              <a:spcBef>
+                <a:spcPts val="0"/>
+              </a:spcBef>
+              <a:spcAft>
+                <a:spcPts val="0"/>
+              </a:spcAft>
+              <a:buClr>
+                <a:srgbClr val="000000"/>
+              </a:buClr>
+              <a:buSzPts val="1000"/>
+              <a:buFont typeface="Arial"/>
+              <a:buNone/>
+              <a:defRPr b="0" i="0" sz="1000" u="none" cap="none" strike="noStrike">
+                <a:solidFill>
+                  <a:schemeClr val="dk2"/>
+                </a:solidFill>
+                <a:latin typeface="Arial"/>
+                <a:ea typeface="Arial"/>
+                <a:cs typeface="Arial"/>
+                <a:sym typeface="Arial"/>
+              </a:defRPr>
             </a:lvl5pPr>
-            <a:lvl6pPr lvl="5">
-              <a:buNone/>
-              <a:defRPr/>
+            <a:lvl6pPr indent="0" lvl="5" marL="0" marR="0" algn="r">
+              <a:lnSpc>
+                <a:spcPct val="100000"/>
+              </a:lnSpc>
+              <a:spcBef>
+                <a:spcPts val="0"/>
+              </a:spcBef>
+              <a:spcAft>
+                <a:spcPts val="0"/>
+              </a:spcAft>
+              <a:buClr>
+                <a:srgbClr val="000000"/>
+              </a:buClr>
+              <a:buSzPts val="1000"/>
+              <a:buFont typeface="Arial"/>
+              <a:buNone/>
+              <a:defRPr b="0" i="0" sz="1000" u="none" cap="none" strike="noStrike">
+                <a:solidFill>
+                  <a:schemeClr val="dk2"/>
+                </a:solidFill>
+                <a:latin typeface="Arial"/>
+                <a:ea typeface="Arial"/>
+                <a:cs typeface="Arial"/>
+                <a:sym typeface="Arial"/>
+              </a:defRPr>
             </a:lvl6pPr>
-            <a:lvl7pPr lvl="6">
-              <a:buNone/>
-              <a:defRPr/>
+            <a:lvl7pPr indent="0" lvl="6" marL="0" marR="0" algn="r">
+              <a:lnSpc>
+                <a:spcPct val="100000"/>
+              </a:lnSpc>
+              <a:spcBef>
+                <a:spcPts val="0"/>
+              </a:spcBef>
+              <a:spcAft>
+                <a:spcPts val="0"/>
+              </a:spcAft>
+              <a:buClr>
+                <a:srgbClr val="000000"/>
+              </a:buClr>
+              <a:buSzPts val="1000"/>
+              <a:buFont typeface="Arial"/>
+              <a:buNone/>
+              <a:defRPr b="0" i="0" sz="1000" u="none" cap="none" strike="noStrike">
+                <a:solidFill>
+                  <a:schemeClr val="dk2"/>
+                </a:solidFill>
+                <a:latin typeface="Arial"/>
+                <a:ea typeface="Arial"/>
+                <a:cs typeface="Arial"/>
+                <a:sym typeface="Arial"/>
+              </a:defRPr>
             </a:lvl7pPr>
-            <a:lvl8pPr lvl="7">
-              <a:buNone/>
-              <a:defRPr/>
+            <a:lvl8pPr indent="0" lvl="7" marL="0" marR="0" algn="r">
+              <a:lnSpc>
+                <a:spcPct val="100000"/>
+              </a:lnSpc>
+              <a:spcBef>
+                <a:spcPts val="0"/>
+              </a:spcBef>
+              <a:spcAft>
+                <a:spcPts val="0"/>
+              </a:spcAft>
+              <a:buClr>
+                <a:srgbClr val="000000"/>
+              </a:buClr>
+              <a:buSzPts val="1000"/>
+              <a:buFont typeface="Arial"/>
+              <a:buNone/>
+              <a:defRPr b="0" i="0" sz="1000" u="none" cap="none" strike="noStrike">
+                <a:solidFill>
+                  <a:schemeClr val="dk2"/>
+                </a:solidFill>
+                <a:latin typeface="Arial"/>
+                <a:ea typeface="Arial"/>
+                <a:cs typeface="Arial"/>
+                <a:sym typeface="Arial"/>
+              </a:defRPr>
             </a:lvl8pPr>
-            <a:lvl9pPr lvl="8">
-              <a:buNone/>
-              <a:defRPr/>
+            <a:lvl9pPr indent="0" lvl="8" marL="0" marR="0" algn="r">
+              <a:lnSpc>
+                <a:spcPct val="100000"/>
+              </a:lnSpc>
+              <a:spcBef>
+                <a:spcPts val="0"/>
+              </a:spcBef>
+              <a:spcAft>
+                <a:spcPts val="0"/>
+              </a:spcAft>
+              <a:buClr>
+                <a:srgbClr val="000000"/>
+              </a:buClr>
+              <a:buSzPts val="1000"/>
+              <a:buFont typeface="Arial"/>
+              <a:buNone/>
+              <a:defRPr b="0" i="0" sz="1000" u="none" cap="none" strike="noStrike">
+                <a:solidFill>
+                  <a:schemeClr val="dk2"/>
+                </a:solidFill>
+                <a:latin typeface="Arial"/>
+                <a:ea typeface="Arial"/>
+                <a:cs typeface="Arial"/>
+                <a:sym typeface="Arial"/>
+              </a:defRPr>
             </a:lvl9pPr>
           </a:lstStyle>
           <a:p>
@@ -2373,11 +2308,11 @@
 </file>
 
 <file path=ppt/slideLayouts/slideLayout11.xml><?xml version="1.0" encoding="utf-8"?>
-<p:sldLayout xmlns:a="http://schemas.openxmlformats.org/drawingml/2006/main" xmlns:r="http://schemas.openxmlformats.org/officeDocument/2006/relationships" xmlns:mc="http://schemas.openxmlformats.org/markup-compatibility/2006" xmlns:mv="urn:schemas-microsoft-com:mac:vml" xmlns:p="http://schemas.openxmlformats.org/presentationml/2006/main" xmlns:c="http://schemas.openxmlformats.org/drawingml/2006/chart" xmlns:dgm="http://schemas.openxmlformats.org/drawingml/2006/diagram" xmlns:o="urn:schemas-microsoft-com:office:office" xmlns:v="urn:schemas-microsoft-com:vml" xmlns:pvml="urn:schemas-microsoft-com:office:powerpoint" xmlns:com="http://schemas.openxmlformats.org/drawingml/2006/compatibility" xmlns:p14="http://schemas.microsoft.com/office/powerpoint/2010/main" xmlns:p15="http://schemas.microsoft.com/office/powerpoint/2012/main" xmlns:ahyp="http://schemas.microsoft.com/office/drawing/2018/hyperlinkcolor" matchingName="Blank" type="blank">
-  <p:cSld name="BLANK">
+<p:sldLayout xmlns:a="http://schemas.openxmlformats.org/drawingml/2006/main" xmlns:r="http://schemas.openxmlformats.org/officeDocument/2006/relationships" xmlns:mc="http://schemas.openxmlformats.org/markup-compatibility/2006" xmlns:mv="urn:schemas-microsoft-com:mac:vml" xmlns:p="http://schemas.openxmlformats.org/presentationml/2006/main" xmlns:c="http://schemas.openxmlformats.org/drawingml/2006/chart" xmlns:dgm="http://schemas.openxmlformats.org/drawingml/2006/diagram" xmlns:o="urn:schemas-microsoft-com:office:office" xmlns:v="urn:schemas-microsoft-com:vml" xmlns:pvml="urn:schemas-microsoft-com:office:powerpoint" xmlns:com="http://schemas.openxmlformats.org/drawingml/2006/compatibility" xmlns:p14="http://schemas.microsoft.com/office/powerpoint/2010/main" xmlns:p15="http://schemas.microsoft.com/office/powerpoint/2012/main" xmlns:ahyp="http://schemas.microsoft.com/office/drawing/2018/hyperlinkcolor" matchingName="Big number">
+  <p:cSld name="BIG_NUMBER">
     <p:spTree>
       <p:nvGrpSpPr>
-        <p:cNvPr id="48" name="Shape 48"/>
+        <p:cNvPr id="46" name="Shape 46"/>
         <p:cNvGrpSpPr/>
         <p:nvPr/>
       </p:nvGrpSpPr>
@@ -2389,6 +2324,322 @@
           <a:chExt cx="0" cy="0"/>
         </a:xfrm>
       </p:grpSpPr>
+      <p:sp>
+        <p:nvSpPr>
+          <p:cNvPr id="47" name="Google Shape;47;p12"/>
+          <p:cNvSpPr txBox="1"/>
+          <p:nvPr>
+            <p:ph hasCustomPrompt="1" type="title"/>
+          </p:nvPr>
+        </p:nvSpPr>
+        <p:spPr>
+          <a:xfrm>
+            <a:off x="311700" y="1106125"/>
+            <a:ext cx="8520600" cy="1963500"/>
+          </a:xfrm>
+          <a:prstGeom prst="rect">
+            <a:avLst/>
+          </a:prstGeom>
+          <a:noFill/>
+          <a:ln>
+            <a:noFill/>
+          </a:ln>
+        </p:spPr>
+        <p:txBody>
+          <a:bodyPr anchorCtr="0" anchor="b" bIns="91425" lIns="91425" spcFirstLastPara="1" rIns="91425" wrap="square" tIns="91425">
+            <a:normAutofit/>
+          </a:bodyPr>
+          <a:lstStyle>
+            <a:lvl1pPr lvl="0" algn="ctr">
+              <a:lnSpc>
+                <a:spcPct val="100000"/>
+              </a:lnSpc>
+              <a:spcBef>
+                <a:spcPts val="0"/>
+              </a:spcBef>
+              <a:spcAft>
+                <a:spcPts val="0"/>
+              </a:spcAft>
+              <a:buSzPts val="12000"/>
+              <a:buNone/>
+              <a:defRPr sz="12000"/>
+            </a:lvl1pPr>
+            <a:lvl2pPr lvl="1" algn="ctr">
+              <a:lnSpc>
+                <a:spcPct val="100000"/>
+              </a:lnSpc>
+              <a:spcBef>
+                <a:spcPts val="0"/>
+              </a:spcBef>
+              <a:spcAft>
+                <a:spcPts val="0"/>
+              </a:spcAft>
+              <a:buSzPts val="12000"/>
+              <a:buNone/>
+              <a:defRPr sz="12000"/>
+            </a:lvl2pPr>
+            <a:lvl3pPr lvl="2" algn="ctr">
+              <a:lnSpc>
+                <a:spcPct val="100000"/>
+              </a:lnSpc>
+              <a:spcBef>
+                <a:spcPts val="0"/>
+              </a:spcBef>
+              <a:spcAft>
+                <a:spcPts val="0"/>
+              </a:spcAft>
+              <a:buSzPts val="12000"/>
+              <a:buNone/>
+              <a:defRPr sz="12000"/>
+            </a:lvl3pPr>
+            <a:lvl4pPr lvl="3" algn="ctr">
+              <a:lnSpc>
+                <a:spcPct val="100000"/>
+              </a:lnSpc>
+              <a:spcBef>
+                <a:spcPts val="0"/>
+              </a:spcBef>
+              <a:spcAft>
+                <a:spcPts val="0"/>
+              </a:spcAft>
+              <a:buSzPts val="12000"/>
+              <a:buNone/>
+              <a:defRPr sz="12000"/>
+            </a:lvl4pPr>
+            <a:lvl5pPr lvl="4" algn="ctr">
+              <a:lnSpc>
+                <a:spcPct val="100000"/>
+              </a:lnSpc>
+              <a:spcBef>
+                <a:spcPts val="0"/>
+              </a:spcBef>
+              <a:spcAft>
+                <a:spcPts val="0"/>
+              </a:spcAft>
+              <a:buSzPts val="12000"/>
+              <a:buNone/>
+              <a:defRPr sz="12000"/>
+            </a:lvl5pPr>
+            <a:lvl6pPr lvl="5" algn="ctr">
+              <a:lnSpc>
+                <a:spcPct val="100000"/>
+              </a:lnSpc>
+              <a:spcBef>
+                <a:spcPts val="0"/>
+              </a:spcBef>
+              <a:spcAft>
+                <a:spcPts val="0"/>
+              </a:spcAft>
+              <a:buSzPts val="12000"/>
+              <a:buNone/>
+              <a:defRPr sz="12000"/>
+            </a:lvl6pPr>
+            <a:lvl7pPr lvl="6" algn="ctr">
+              <a:lnSpc>
+                <a:spcPct val="100000"/>
+              </a:lnSpc>
+              <a:spcBef>
+                <a:spcPts val="0"/>
+              </a:spcBef>
+              <a:spcAft>
+                <a:spcPts val="0"/>
+              </a:spcAft>
+              <a:buSzPts val="12000"/>
+              <a:buNone/>
+              <a:defRPr sz="12000"/>
+            </a:lvl7pPr>
+            <a:lvl8pPr lvl="7" algn="ctr">
+              <a:lnSpc>
+                <a:spcPct val="100000"/>
+              </a:lnSpc>
+              <a:spcBef>
+                <a:spcPts val="0"/>
+              </a:spcBef>
+              <a:spcAft>
+                <a:spcPts val="0"/>
+              </a:spcAft>
+              <a:buSzPts val="12000"/>
+              <a:buNone/>
+              <a:defRPr sz="12000"/>
+            </a:lvl8pPr>
+            <a:lvl9pPr lvl="8" algn="ctr">
+              <a:lnSpc>
+                <a:spcPct val="100000"/>
+              </a:lnSpc>
+              <a:spcBef>
+                <a:spcPts val="0"/>
+              </a:spcBef>
+              <a:spcAft>
+                <a:spcPts val="0"/>
+              </a:spcAft>
+              <a:buSzPts val="12000"/>
+              <a:buNone/>
+              <a:defRPr sz="12000"/>
+            </a:lvl9pPr>
+          </a:lstStyle>
+          <a:p>
+            <a:r>
+              <a:t>xx%</a:t>
+            </a:r>
+          </a:p>
+        </p:txBody>
+      </p:sp>
+      <p:sp>
+        <p:nvSpPr>
+          <p:cNvPr id="48" name="Google Shape;48;p12"/>
+          <p:cNvSpPr txBox="1"/>
+          <p:nvPr>
+            <p:ph idx="1" type="body"/>
+          </p:nvPr>
+        </p:nvSpPr>
+        <p:spPr>
+          <a:xfrm>
+            <a:off x="311700" y="3152225"/>
+            <a:ext cx="8520600" cy="1300800"/>
+          </a:xfrm>
+          <a:prstGeom prst="rect">
+            <a:avLst/>
+          </a:prstGeom>
+          <a:noFill/>
+          <a:ln>
+            <a:noFill/>
+          </a:ln>
+        </p:spPr>
+        <p:txBody>
+          <a:bodyPr anchorCtr="0" anchor="t" bIns="91425" lIns="91425" spcFirstLastPara="1" rIns="91425" wrap="square" tIns="91425">
+            <a:normAutofit/>
+          </a:bodyPr>
+          <a:lstStyle>
+            <a:lvl1pPr indent="-342900" lvl="0" marL="457200" algn="ctr">
+              <a:lnSpc>
+                <a:spcPct val="115000"/>
+              </a:lnSpc>
+              <a:spcBef>
+                <a:spcPts val="0"/>
+              </a:spcBef>
+              <a:spcAft>
+                <a:spcPts val="0"/>
+              </a:spcAft>
+              <a:buSzPts val="1800"/>
+              <a:buChar char="●"/>
+              <a:defRPr/>
+            </a:lvl1pPr>
+            <a:lvl2pPr indent="-317500" lvl="1" marL="914400" algn="ctr">
+              <a:lnSpc>
+                <a:spcPct val="115000"/>
+              </a:lnSpc>
+              <a:spcBef>
+                <a:spcPts val="0"/>
+              </a:spcBef>
+              <a:spcAft>
+                <a:spcPts val="0"/>
+              </a:spcAft>
+              <a:buSzPts val="1400"/>
+              <a:buChar char="○"/>
+              <a:defRPr/>
+            </a:lvl2pPr>
+            <a:lvl3pPr indent="-317500" lvl="2" marL="1371600" algn="ctr">
+              <a:lnSpc>
+                <a:spcPct val="115000"/>
+              </a:lnSpc>
+              <a:spcBef>
+                <a:spcPts val="0"/>
+              </a:spcBef>
+              <a:spcAft>
+                <a:spcPts val="0"/>
+              </a:spcAft>
+              <a:buSzPts val="1400"/>
+              <a:buChar char="■"/>
+              <a:defRPr/>
+            </a:lvl3pPr>
+            <a:lvl4pPr indent="-317500" lvl="3" marL="1828800" algn="ctr">
+              <a:lnSpc>
+                <a:spcPct val="115000"/>
+              </a:lnSpc>
+              <a:spcBef>
+                <a:spcPts val="0"/>
+              </a:spcBef>
+              <a:spcAft>
+                <a:spcPts val="0"/>
+              </a:spcAft>
+              <a:buSzPts val="1400"/>
+              <a:buChar char="●"/>
+              <a:defRPr/>
+            </a:lvl4pPr>
+            <a:lvl5pPr indent="-317500" lvl="4" marL="2286000" algn="ctr">
+              <a:lnSpc>
+                <a:spcPct val="115000"/>
+              </a:lnSpc>
+              <a:spcBef>
+                <a:spcPts val="0"/>
+              </a:spcBef>
+              <a:spcAft>
+                <a:spcPts val="0"/>
+              </a:spcAft>
+              <a:buSzPts val="1400"/>
+              <a:buChar char="○"/>
+              <a:defRPr/>
+            </a:lvl5pPr>
+            <a:lvl6pPr indent="-317500" lvl="5" marL="2743200" algn="ctr">
+              <a:lnSpc>
+                <a:spcPct val="115000"/>
+              </a:lnSpc>
+              <a:spcBef>
+                <a:spcPts val="0"/>
+              </a:spcBef>
+              <a:spcAft>
+                <a:spcPts val="0"/>
+              </a:spcAft>
+              <a:buSzPts val="1400"/>
+              <a:buChar char="■"/>
+              <a:defRPr/>
+            </a:lvl6pPr>
+            <a:lvl7pPr indent="-317500" lvl="6" marL="3200400" algn="ctr">
+              <a:lnSpc>
+                <a:spcPct val="115000"/>
+              </a:lnSpc>
+              <a:spcBef>
+                <a:spcPts val="0"/>
+              </a:spcBef>
+              <a:spcAft>
+                <a:spcPts val="0"/>
+              </a:spcAft>
+              <a:buSzPts val="1400"/>
+              <a:buChar char="●"/>
+              <a:defRPr/>
+            </a:lvl7pPr>
+            <a:lvl8pPr indent="-317500" lvl="7" marL="3657600" algn="ctr">
+              <a:lnSpc>
+                <a:spcPct val="115000"/>
+              </a:lnSpc>
+              <a:spcBef>
+                <a:spcPts val="0"/>
+              </a:spcBef>
+              <a:spcAft>
+                <a:spcPts val="0"/>
+              </a:spcAft>
+              <a:buSzPts val="1400"/>
+              <a:buChar char="○"/>
+              <a:defRPr/>
+            </a:lvl8pPr>
+            <a:lvl9pPr indent="-317500" lvl="8" marL="4114800" algn="ctr">
+              <a:lnSpc>
+                <a:spcPct val="115000"/>
+              </a:lnSpc>
+              <a:spcBef>
+                <a:spcPts val="0"/>
+              </a:spcBef>
+              <a:spcAft>
+                <a:spcPts val="0"/>
+              </a:spcAft>
+              <a:buSzPts val="1400"/>
+              <a:buChar char="■"/>
+              <a:defRPr/>
+            </a:lvl9pPr>
+          </a:lstStyle>
+          <a:p/>
+        </p:txBody>
+      </p:sp>
       <p:sp>
         <p:nvSpPr>
           <p:cNvPr id="49" name="Google Shape;49;p12"/>
@@ -2405,47 +2656,249 @@
           <a:prstGeom prst="rect">
             <a:avLst/>
           </a:prstGeom>
+          <a:noFill/>
+          <a:ln>
+            <a:noFill/>
+          </a:ln>
         </p:spPr>
         <p:txBody>
           <a:bodyPr anchorCtr="0" anchor="ctr" bIns="91425" lIns="91425" spcFirstLastPara="1" rIns="91425" wrap="square" tIns="91425">
             <a:normAutofit/>
           </a:bodyPr>
           <a:lstStyle>
-            <a:lvl1pPr lvl="0">
-              <a:buNone/>
-              <a:defRPr/>
+            <a:lvl1pPr indent="0" lvl="0" marL="0" marR="0" algn="r">
+              <a:lnSpc>
+                <a:spcPct val="100000"/>
+              </a:lnSpc>
+              <a:spcBef>
+                <a:spcPts val="0"/>
+              </a:spcBef>
+              <a:spcAft>
+                <a:spcPts val="0"/>
+              </a:spcAft>
+              <a:buClr>
+                <a:srgbClr val="000000"/>
+              </a:buClr>
+              <a:buSzPts val="1000"/>
+              <a:buFont typeface="Arial"/>
+              <a:buNone/>
+              <a:defRPr b="0" i="0" sz="1000" u="none" cap="none" strike="noStrike">
+                <a:solidFill>
+                  <a:schemeClr val="dk2"/>
+                </a:solidFill>
+                <a:latin typeface="Arial"/>
+                <a:ea typeface="Arial"/>
+                <a:cs typeface="Arial"/>
+                <a:sym typeface="Arial"/>
+              </a:defRPr>
             </a:lvl1pPr>
-            <a:lvl2pPr lvl="1">
-              <a:buNone/>
-              <a:defRPr/>
+            <a:lvl2pPr indent="0" lvl="1" marL="0" marR="0" algn="r">
+              <a:lnSpc>
+                <a:spcPct val="100000"/>
+              </a:lnSpc>
+              <a:spcBef>
+                <a:spcPts val="0"/>
+              </a:spcBef>
+              <a:spcAft>
+                <a:spcPts val="0"/>
+              </a:spcAft>
+              <a:buClr>
+                <a:srgbClr val="000000"/>
+              </a:buClr>
+              <a:buSzPts val="1000"/>
+              <a:buFont typeface="Arial"/>
+              <a:buNone/>
+              <a:defRPr b="0" i="0" sz="1000" u="none" cap="none" strike="noStrike">
+                <a:solidFill>
+                  <a:schemeClr val="dk2"/>
+                </a:solidFill>
+                <a:latin typeface="Arial"/>
+                <a:ea typeface="Arial"/>
+                <a:cs typeface="Arial"/>
+                <a:sym typeface="Arial"/>
+              </a:defRPr>
             </a:lvl2pPr>
-            <a:lvl3pPr lvl="2">
-              <a:buNone/>
-              <a:defRPr/>
+            <a:lvl3pPr indent="0" lvl="2" marL="0" marR="0" algn="r">
+              <a:lnSpc>
+                <a:spcPct val="100000"/>
+              </a:lnSpc>
+              <a:spcBef>
+                <a:spcPts val="0"/>
+              </a:spcBef>
+              <a:spcAft>
+                <a:spcPts val="0"/>
+              </a:spcAft>
+              <a:buClr>
+                <a:srgbClr val="000000"/>
+              </a:buClr>
+              <a:buSzPts val="1000"/>
+              <a:buFont typeface="Arial"/>
+              <a:buNone/>
+              <a:defRPr b="0" i="0" sz="1000" u="none" cap="none" strike="noStrike">
+                <a:solidFill>
+                  <a:schemeClr val="dk2"/>
+                </a:solidFill>
+                <a:latin typeface="Arial"/>
+                <a:ea typeface="Arial"/>
+                <a:cs typeface="Arial"/>
+                <a:sym typeface="Arial"/>
+              </a:defRPr>
             </a:lvl3pPr>
-            <a:lvl4pPr lvl="3">
-              <a:buNone/>
-              <a:defRPr/>
+            <a:lvl4pPr indent="0" lvl="3" marL="0" marR="0" algn="r">
+              <a:lnSpc>
+                <a:spcPct val="100000"/>
+              </a:lnSpc>
+              <a:spcBef>
+                <a:spcPts val="0"/>
+              </a:spcBef>
+              <a:spcAft>
+                <a:spcPts val="0"/>
+              </a:spcAft>
+              <a:buClr>
+                <a:srgbClr val="000000"/>
+              </a:buClr>
+              <a:buSzPts val="1000"/>
+              <a:buFont typeface="Arial"/>
+              <a:buNone/>
+              <a:defRPr b="0" i="0" sz="1000" u="none" cap="none" strike="noStrike">
+                <a:solidFill>
+                  <a:schemeClr val="dk2"/>
+                </a:solidFill>
+                <a:latin typeface="Arial"/>
+                <a:ea typeface="Arial"/>
+                <a:cs typeface="Arial"/>
+                <a:sym typeface="Arial"/>
+              </a:defRPr>
             </a:lvl4pPr>
-            <a:lvl5pPr lvl="4">
-              <a:buNone/>
-              <a:defRPr/>
+            <a:lvl5pPr indent="0" lvl="4" marL="0" marR="0" algn="r">
+              <a:lnSpc>
+                <a:spcPct val="100000"/>
+              </a:lnSpc>
+              <a:spcBef>
+                <a:spcPts val="0"/>
+              </a:spcBef>
+              <a:spcAft>
+                <a:spcPts val="0"/>
+              </a:spcAft>
+              <a:buClr>
+                <a:srgbClr val="000000"/>
+              </a:buClr>
+              <a:buSzPts val="1000"/>
+              <a:buFont typeface="Arial"/>
+              <a:buNone/>
+              <a:defRPr b="0" i="0" sz="1000" u="none" cap="none" strike="noStrike">
+                <a:solidFill>
+                  <a:schemeClr val="dk2"/>
+                </a:solidFill>
+                <a:latin typeface="Arial"/>
+                <a:ea typeface="Arial"/>
+                <a:cs typeface="Arial"/>
+                <a:sym typeface="Arial"/>
+              </a:defRPr>
             </a:lvl5pPr>
-            <a:lvl6pPr lvl="5">
-              <a:buNone/>
-              <a:defRPr/>
+            <a:lvl6pPr indent="0" lvl="5" marL="0" marR="0" algn="r">
+              <a:lnSpc>
+                <a:spcPct val="100000"/>
+              </a:lnSpc>
+              <a:spcBef>
+                <a:spcPts val="0"/>
+              </a:spcBef>
+              <a:spcAft>
+                <a:spcPts val="0"/>
+              </a:spcAft>
+              <a:buClr>
+                <a:srgbClr val="000000"/>
+              </a:buClr>
+              <a:buSzPts val="1000"/>
+              <a:buFont typeface="Arial"/>
+              <a:buNone/>
+              <a:defRPr b="0" i="0" sz="1000" u="none" cap="none" strike="noStrike">
+                <a:solidFill>
+                  <a:schemeClr val="dk2"/>
+                </a:solidFill>
+                <a:latin typeface="Arial"/>
+                <a:ea typeface="Arial"/>
+                <a:cs typeface="Arial"/>
+                <a:sym typeface="Arial"/>
+              </a:defRPr>
             </a:lvl6pPr>
-            <a:lvl7pPr lvl="6">
-              <a:buNone/>
-              <a:defRPr/>
+            <a:lvl7pPr indent="0" lvl="6" marL="0" marR="0" algn="r">
+              <a:lnSpc>
+                <a:spcPct val="100000"/>
+              </a:lnSpc>
+              <a:spcBef>
+                <a:spcPts val="0"/>
+              </a:spcBef>
+              <a:spcAft>
+                <a:spcPts val="0"/>
+              </a:spcAft>
+              <a:buClr>
+                <a:srgbClr val="000000"/>
+              </a:buClr>
+              <a:buSzPts val="1000"/>
+              <a:buFont typeface="Arial"/>
+              <a:buNone/>
+              <a:defRPr b="0" i="0" sz="1000" u="none" cap="none" strike="noStrike">
+                <a:solidFill>
+                  <a:schemeClr val="dk2"/>
+                </a:solidFill>
+                <a:latin typeface="Arial"/>
+                <a:ea typeface="Arial"/>
+                <a:cs typeface="Arial"/>
+                <a:sym typeface="Arial"/>
+              </a:defRPr>
             </a:lvl7pPr>
-            <a:lvl8pPr lvl="7">
-              <a:buNone/>
-              <a:defRPr/>
+            <a:lvl8pPr indent="0" lvl="7" marL="0" marR="0" algn="r">
+              <a:lnSpc>
+                <a:spcPct val="100000"/>
+              </a:lnSpc>
+              <a:spcBef>
+                <a:spcPts val="0"/>
+              </a:spcBef>
+              <a:spcAft>
+                <a:spcPts val="0"/>
+              </a:spcAft>
+              <a:buClr>
+                <a:srgbClr val="000000"/>
+              </a:buClr>
+              <a:buSzPts val="1000"/>
+              <a:buFont typeface="Arial"/>
+              <a:buNone/>
+              <a:defRPr b="0" i="0" sz="1000" u="none" cap="none" strike="noStrike">
+                <a:solidFill>
+                  <a:schemeClr val="dk2"/>
+                </a:solidFill>
+                <a:latin typeface="Arial"/>
+                <a:ea typeface="Arial"/>
+                <a:cs typeface="Arial"/>
+                <a:sym typeface="Arial"/>
+              </a:defRPr>
             </a:lvl8pPr>
-            <a:lvl9pPr lvl="8">
-              <a:buNone/>
-              <a:defRPr/>
+            <a:lvl9pPr indent="0" lvl="8" marL="0" marR="0" algn="r">
+              <a:lnSpc>
+                <a:spcPct val="100000"/>
+              </a:lnSpc>
+              <a:spcBef>
+                <a:spcPts val="0"/>
+              </a:spcBef>
+              <a:spcAft>
+                <a:spcPts val="0"/>
+              </a:spcAft>
+              <a:buClr>
+                <a:srgbClr val="000000"/>
+              </a:buClr>
+              <a:buSzPts val="1000"/>
+              <a:buFont typeface="Arial"/>
+              <a:buNone/>
+              <a:defRPr b="0" i="0" sz="1000" u="none" cap="none" strike="noStrike">
+                <a:solidFill>
+                  <a:schemeClr val="dk2"/>
+                </a:solidFill>
+                <a:latin typeface="Arial"/>
+                <a:ea typeface="Arial"/>
+                <a:cs typeface="Arial"/>
+                <a:sym typeface="Arial"/>
+              </a:defRPr>
             </a:lvl9pPr>
           </a:lstStyle>
           <a:p>
@@ -2475,11 +2928,11 @@
 </file>
 
 <file path=ppt/slideLayouts/slideLayout2.xml><?xml version="1.0" encoding="utf-8"?>
-<p:sldLayout xmlns:a="http://schemas.openxmlformats.org/drawingml/2006/main" xmlns:r="http://schemas.openxmlformats.org/officeDocument/2006/relationships" xmlns:mc="http://schemas.openxmlformats.org/markup-compatibility/2006" xmlns:mv="urn:schemas-microsoft-com:mac:vml" xmlns:p="http://schemas.openxmlformats.org/presentationml/2006/main" xmlns:c="http://schemas.openxmlformats.org/drawingml/2006/chart" xmlns:dgm="http://schemas.openxmlformats.org/drawingml/2006/diagram" xmlns:o="urn:schemas-microsoft-com:office:office" xmlns:v="urn:schemas-microsoft-com:vml" xmlns:pvml="urn:schemas-microsoft-com:office:powerpoint" xmlns:com="http://schemas.openxmlformats.org/drawingml/2006/compatibility" xmlns:p14="http://schemas.microsoft.com/office/powerpoint/2010/main" xmlns:p15="http://schemas.microsoft.com/office/powerpoint/2012/main" xmlns:ahyp="http://schemas.microsoft.com/office/drawing/2018/hyperlinkcolor" matchingName="Section header" type="secHead">
-  <p:cSld name="SECTION_HEADER">
+<p:sldLayout xmlns:a="http://schemas.openxmlformats.org/drawingml/2006/main" xmlns:r="http://schemas.openxmlformats.org/officeDocument/2006/relationships" xmlns:mc="http://schemas.openxmlformats.org/markup-compatibility/2006" xmlns:mv="urn:schemas-microsoft-com:mac:vml" xmlns:p="http://schemas.openxmlformats.org/presentationml/2006/main" xmlns:c="http://schemas.openxmlformats.org/drawingml/2006/chart" xmlns:dgm="http://schemas.openxmlformats.org/drawingml/2006/diagram" xmlns:o="urn:schemas-microsoft-com:office:office" xmlns:v="urn:schemas-microsoft-com:vml" xmlns:pvml="urn:schemas-microsoft-com:office:powerpoint" xmlns:com="http://schemas.openxmlformats.org/drawingml/2006/compatibility" xmlns:p14="http://schemas.microsoft.com/office/powerpoint/2010/main" xmlns:p15="http://schemas.microsoft.com/office/powerpoint/2012/main" xmlns:ahyp="http://schemas.microsoft.com/office/drawing/2018/hyperlinkcolor" matchingName="Title and body" type="tx">
+  <p:cSld name="TITLE_AND_BODY">
     <p:spTree>
       <p:nvGrpSpPr>
-        <p:cNvPr id="13" name="Shape 13"/>
+        <p:cNvPr id="11" name="Shape 11"/>
         <p:cNvGrpSpPr/>
         <p:nvPr/>
       </p:nvGrpSpPr>
@@ -2493,7 +2946,7 @@
       </p:grpSpPr>
       <p:sp>
         <p:nvSpPr>
-          <p:cNvPr id="14" name="Google Shape;14;p3"/>
+          <p:cNvPr id="12" name="Google Shape;12;p3"/>
           <p:cNvSpPr txBox="1"/>
           <p:nvPr>
             <p:ph type="title"/>
@@ -2501,116 +2954,147 @@
         </p:nvSpPr>
         <p:spPr>
           <a:xfrm>
-            <a:off x="311700" y="2150850"/>
-            <a:ext cx="8520600" cy="841800"/>
+            <a:off x="311700" y="445025"/>
+            <a:ext cx="8520600" cy="572700"/>
           </a:xfrm>
           <a:prstGeom prst="rect">
             <a:avLst/>
           </a:prstGeom>
+          <a:noFill/>
+          <a:ln>
+            <a:noFill/>
+          </a:ln>
         </p:spPr>
         <p:txBody>
-          <a:bodyPr anchorCtr="0" anchor="ctr" bIns="91425" lIns="91425" spcFirstLastPara="1" rIns="91425" wrap="square" tIns="91425">
+          <a:bodyPr anchorCtr="0" anchor="t" bIns="91425" lIns="91425" spcFirstLastPara="1" rIns="91425" wrap="square" tIns="91425">
             <a:normAutofit/>
           </a:bodyPr>
           <a:lstStyle>
-            <a:lvl1pPr lvl="0" algn="ctr">
-              <a:spcBef>
-                <a:spcPts val="0"/>
-              </a:spcBef>
-              <a:spcAft>
-                <a:spcPts val="0"/>
-              </a:spcAft>
-              <a:buSzPts val="3600"/>
-              <a:buNone/>
-              <a:defRPr sz="3600"/>
+            <a:lvl1pPr lvl="0" algn="l">
+              <a:lnSpc>
+                <a:spcPct val="100000"/>
+              </a:lnSpc>
+              <a:spcBef>
+                <a:spcPts val="0"/>
+              </a:spcBef>
+              <a:spcAft>
+                <a:spcPts val="0"/>
+              </a:spcAft>
+              <a:buSzPts val="2800"/>
+              <a:buNone/>
+              <a:defRPr/>
             </a:lvl1pPr>
-            <a:lvl2pPr lvl="1" algn="ctr">
-              <a:spcBef>
-                <a:spcPts val="0"/>
-              </a:spcBef>
-              <a:spcAft>
-                <a:spcPts val="0"/>
-              </a:spcAft>
-              <a:buSzPts val="3600"/>
-              <a:buNone/>
-              <a:defRPr sz="3600"/>
+            <a:lvl2pPr lvl="1" algn="l">
+              <a:lnSpc>
+                <a:spcPct val="100000"/>
+              </a:lnSpc>
+              <a:spcBef>
+                <a:spcPts val="0"/>
+              </a:spcBef>
+              <a:spcAft>
+                <a:spcPts val="0"/>
+              </a:spcAft>
+              <a:buSzPts val="2800"/>
+              <a:buNone/>
+              <a:defRPr/>
             </a:lvl2pPr>
-            <a:lvl3pPr lvl="2" algn="ctr">
-              <a:spcBef>
-                <a:spcPts val="0"/>
-              </a:spcBef>
-              <a:spcAft>
-                <a:spcPts val="0"/>
-              </a:spcAft>
-              <a:buSzPts val="3600"/>
-              <a:buNone/>
-              <a:defRPr sz="3600"/>
+            <a:lvl3pPr lvl="2" algn="l">
+              <a:lnSpc>
+                <a:spcPct val="100000"/>
+              </a:lnSpc>
+              <a:spcBef>
+                <a:spcPts val="0"/>
+              </a:spcBef>
+              <a:spcAft>
+                <a:spcPts val="0"/>
+              </a:spcAft>
+              <a:buSzPts val="2800"/>
+              <a:buNone/>
+              <a:defRPr/>
             </a:lvl3pPr>
-            <a:lvl4pPr lvl="3" algn="ctr">
-              <a:spcBef>
-                <a:spcPts val="0"/>
-              </a:spcBef>
-              <a:spcAft>
-                <a:spcPts val="0"/>
-              </a:spcAft>
-              <a:buSzPts val="3600"/>
-              <a:buNone/>
-              <a:defRPr sz="3600"/>
+            <a:lvl4pPr lvl="3" algn="l">
+              <a:lnSpc>
+                <a:spcPct val="100000"/>
+              </a:lnSpc>
+              <a:spcBef>
+                <a:spcPts val="0"/>
+              </a:spcBef>
+              <a:spcAft>
+                <a:spcPts val="0"/>
+              </a:spcAft>
+              <a:buSzPts val="2800"/>
+              <a:buNone/>
+              <a:defRPr/>
             </a:lvl4pPr>
-            <a:lvl5pPr lvl="4" algn="ctr">
-              <a:spcBef>
-                <a:spcPts val="0"/>
-              </a:spcBef>
-              <a:spcAft>
-                <a:spcPts val="0"/>
-              </a:spcAft>
-              <a:buSzPts val="3600"/>
-              <a:buNone/>
-              <a:defRPr sz="3600"/>
+            <a:lvl5pPr lvl="4" algn="l">
+              <a:lnSpc>
+                <a:spcPct val="100000"/>
+              </a:lnSpc>
+              <a:spcBef>
+                <a:spcPts val="0"/>
+              </a:spcBef>
+              <a:spcAft>
+                <a:spcPts val="0"/>
+              </a:spcAft>
+              <a:buSzPts val="2800"/>
+              <a:buNone/>
+              <a:defRPr/>
             </a:lvl5pPr>
-            <a:lvl6pPr lvl="5" algn="ctr">
-              <a:spcBef>
-                <a:spcPts val="0"/>
-              </a:spcBef>
-              <a:spcAft>
-                <a:spcPts val="0"/>
-              </a:spcAft>
-              <a:buSzPts val="3600"/>
-              <a:buNone/>
-              <a:defRPr sz="3600"/>
+            <a:lvl6pPr lvl="5" algn="l">
+              <a:lnSpc>
+                <a:spcPct val="100000"/>
+              </a:lnSpc>
+              <a:spcBef>
+                <a:spcPts val="0"/>
+              </a:spcBef>
+              <a:spcAft>
+                <a:spcPts val="0"/>
+              </a:spcAft>
+              <a:buSzPts val="2800"/>
+              <a:buNone/>
+              <a:defRPr/>
             </a:lvl6pPr>
-            <a:lvl7pPr lvl="6" algn="ctr">
-              <a:spcBef>
-                <a:spcPts val="0"/>
-              </a:spcBef>
-              <a:spcAft>
-                <a:spcPts val="0"/>
-              </a:spcAft>
-              <a:buSzPts val="3600"/>
-              <a:buNone/>
-              <a:defRPr sz="3600"/>
+            <a:lvl7pPr lvl="6" algn="l">
+              <a:lnSpc>
+                <a:spcPct val="100000"/>
+              </a:lnSpc>
+              <a:spcBef>
+                <a:spcPts val="0"/>
+              </a:spcBef>
+              <a:spcAft>
+                <a:spcPts val="0"/>
+              </a:spcAft>
+              <a:buSzPts val="2800"/>
+              <a:buNone/>
+              <a:defRPr/>
             </a:lvl7pPr>
-            <a:lvl8pPr lvl="7" algn="ctr">
-              <a:spcBef>
-                <a:spcPts val="0"/>
-              </a:spcBef>
-              <a:spcAft>
-                <a:spcPts val="0"/>
-              </a:spcAft>
-              <a:buSzPts val="3600"/>
-              <a:buNone/>
-              <a:defRPr sz="3600"/>
+            <a:lvl8pPr lvl="7" algn="l">
+              <a:lnSpc>
+                <a:spcPct val="100000"/>
+              </a:lnSpc>
+              <a:spcBef>
+                <a:spcPts val="0"/>
+              </a:spcBef>
+              <a:spcAft>
+                <a:spcPts val="0"/>
+              </a:spcAft>
+              <a:buSzPts val="2800"/>
+              <a:buNone/>
+              <a:defRPr/>
             </a:lvl8pPr>
-            <a:lvl9pPr lvl="8" algn="ctr">
-              <a:spcBef>
-                <a:spcPts val="0"/>
-              </a:spcBef>
-              <a:spcAft>
-                <a:spcPts val="0"/>
-              </a:spcAft>
-              <a:buSzPts val="3600"/>
-              <a:buNone/>
-              <a:defRPr sz="3600"/>
+            <a:lvl9pPr lvl="8" algn="l">
+              <a:lnSpc>
+                <a:spcPct val="100000"/>
+              </a:lnSpc>
+              <a:spcBef>
+                <a:spcPts val="0"/>
+              </a:spcBef>
+              <a:spcAft>
+                <a:spcPts val="0"/>
+              </a:spcAft>
+              <a:buSzPts val="2800"/>
+              <a:buNone/>
+              <a:defRPr/>
             </a:lvl9pPr>
           </a:lstStyle>
           <a:p/>
@@ -2618,7 +3102,163 @@
       </p:sp>
       <p:sp>
         <p:nvSpPr>
-          <p:cNvPr id="15" name="Google Shape;15;p3"/>
+          <p:cNvPr id="13" name="Google Shape;13;p3"/>
+          <p:cNvSpPr txBox="1"/>
+          <p:nvPr>
+            <p:ph idx="1" type="body"/>
+          </p:nvPr>
+        </p:nvSpPr>
+        <p:spPr>
+          <a:xfrm>
+            <a:off x="311700" y="1152475"/>
+            <a:ext cx="8520600" cy="3416400"/>
+          </a:xfrm>
+          <a:prstGeom prst="rect">
+            <a:avLst/>
+          </a:prstGeom>
+          <a:noFill/>
+          <a:ln>
+            <a:noFill/>
+          </a:ln>
+        </p:spPr>
+        <p:txBody>
+          <a:bodyPr anchorCtr="0" anchor="t" bIns="91425" lIns="91425" spcFirstLastPara="1" rIns="91425" wrap="square" tIns="91425">
+            <a:normAutofit/>
+          </a:bodyPr>
+          <a:lstStyle>
+            <a:lvl1pPr indent="-342900" lvl="0" marL="457200" algn="l">
+              <a:lnSpc>
+                <a:spcPct val="115000"/>
+              </a:lnSpc>
+              <a:spcBef>
+                <a:spcPts val="0"/>
+              </a:spcBef>
+              <a:spcAft>
+                <a:spcPts val="0"/>
+              </a:spcAft>
+              <a:buSzPts val="1800"/>
+              <a:buChar char="●"/>
+              <a:defRPr/>
+            </a:lvl1pPr>
+            <a:lvl2pPr indent="-317500" lvl="1" marL="914400" algn="l">
+              <a:lnSpc>
+                <a:spcPct val="115000"/>
+              </a:lnSpc>
+              <a:spcBef>
+                <a:spcPts val="0"/>
+              </a:spcBef>
+              <a:spcAft>
+                <a:spcPts val="0"/>
+              </a:spcAft>
+              <a:buSzPts val="1400"/>
+              <a:buChar char="○"/>
+              <a:defRPr/>
+            </a:lvl2pPr>
+            <a:lvl3pPr indent="-317500" lvl="2" marL="1371600" algn="l">
+              <a:lnSpc>
+                <a:spcPct val="115000"/>
+              </a:lnSpc>
+              <a:spcBef>
+                <a:spcPts val="0"/>
+              </a:spcBef>
+              <a:spcAft>
+                <a:spcPts val="0"/>
+              </a:spcAft>
+              <a:buSzPts val="1400"/>
+              <a:buChar char="■"/>
+              <a:defRPr/>
+            </a:lvl3pPr>
+            <a:lvl4pPr indent="-317500" lvl="3" marL="1828800" algn="l">
+              <a:lnSpc>
+                <a:spcPct val="115000"/>
+              </a:lnSpc>
+              <a:spcBef>
+                <a:spcPts val="0"/>
+              </a:spcBef>
+              <a:spcAft>
+                <a:spcPts val="0"/>
+              </a:spcAft>
+              <a:buSzPts val="1400"/>
+              <a:buChar char="●"/>
+              <a:defRPr/>
+            </a:lvl4pPr>
+            <a:lvl5pPr indent="-317500" lvl="4" marL="2286000" algn="l">
+              <a:lnSpc>
+                <a:spcPct val="115000"/>
+              </a:lnSpc>
+              <a:spcBef>
+                <a:spcPts val="0"/>
+              </a:spcBef>
+              <a:spcAft>
+                <a:spcPts val="0"/>
+              </a:spcAft>
+              <a:buSzPts val="1400"/>
+              <a:buChar char="○"/>
+              <a:defRPr/>
+            </a:lvl5pPr>
+            <a:lvl6pPr indent="-317500" lvl="5" marL="2743200" algn="l">
+              <a:lnSpc>
+                <a:spcPct val="115000"/>
+              </a:lnSpc>
+              <a:spcBef>
+                <a:spcPts val="0"/>
+              </a:spcBef>
+              <a:spcAft>
+                <a:spcPts val="0"/>
+              </a:spcAft>
+              <a:buSzPts val="1400"/>
+              <a:buChar char="■"/>
+              <a:defRPr/>
+            </a:lvl6pPr>
+            <a:lvl7pPr indent="-317500" lvl="6" marL="3200400" algn="l">
+              <a:lnSpc>
+                <a:spcPct val="115000"/>
+              </a:lnSpc>
+              <a:spcBef>
+                <a:spcPts val="0"/>
+              </a:spcBef>
+              <a:spcAft>
+                <a:spcPts val="0"/>
+              </a:spcAft>
+              <a:buSzPts val="1400"/>
+              <a:buChar char="●"/>
+              <a:defRPr/>
+            </a:lvl7pPr>
+            <a:lvl8pPr indent="-317500" lvl="7" marL="3657600" algn="l">
+              <a:lnSpc>
+                <a:spcPct val="115000"/>
+              </a:lnSpc>
+              <a:spcBef>
+                <a:spcPts val="0"/>
+              </a:spcBef>
+              <a:spcAft>
+                <a:spcPts val="0"/>
+              </a:spcAft>
+              <a:buSzPts val="1400"/>
+              <a:buChar char="○"/>
+              <a:defRPr/>
+            </a:lvl8pPr>
+            <a:lvl9pPr indent="-317500" lvl="8" marL="4114800" algn="l">
+              <a:lnSpc>
+                <a:spcPct val="115000"/>
+              </a:lnSpc>
+              <a:spcBef>
+                <a:spcPts val="0"/>
+              </a:spcBef>
+              <a:spcAft>
+                <a:spcPts val="0"/>
+              </a:spcAft>
+              <a:buSzPts val="1400"/>
+              <a:buChar char="■"/>
+              <a:defRPr/>
+            </a:lvl9pPr>
+          </a:lstStyle>
+          <a:p/>
+        </p:txBody>
+      </p:sp>
+      <p:sp>
+        <p:nvSpPr>
+          <p:cNvPr id="14" name="Google Shape;14;p3"/>
           <p:cNvSpPr txBox="1"/>
           <p:nvPr>
             <p:ph idx="12" type="sldNum"/>
@@ -2632,47 +3272,249 @@
           <a:prstGeom prst="rect">
             <a:avLst/>
           </a:prstGeom>
+          <a:noFill/>
+          <a:ln>
+            <a:noFill/>
+          </a:ln>
         </p:spPr>
         <p:txBody>
           <a:bodyPr anchorCtr="0" anchor="ctr" bIns="91425" lIns="91425" spcFirstLastPara="1" rIns="91425" wrap="square" tIns="91425">
             <a:normAutofit/>
           </a:bodyPr>
           <a:lstStyle>
-            <a:lvl1pPr lvl="0">
-              <a:buNone/>
-              <a:defRPr/>
+            <a:lvl1pPr indent="0" lvl="0" marL="0" marR="0" algn="r">
+              <a:lnSpc>
+                <a:spcPct val="100000"/>
+              </a:lnSpc>
+              <a:spcBef>
+                <a:spcPts val="0"/>
+              </a:spcBef>
+              <a:spcAft>
+                <a:spcPts val="0"/>
+              </a:spcAft>
+              <a:buClr>
+                <a:srgbClr val="000000"/>
+              </a:buClr>
+              <a:buSzPts val="1000"/>
+              <a:buFont typeface="Arial"/>
+              <a:buNone/>
+              <a:defRPr b="0" i="0" sz="1000" u="none" cap="none" strike="noStrike">
+                <a:solidFill>
+                  <a:schemeClr val="dk2"/>
+                </a:solidFill>
+                <a:latin typeface="Arial"/>
+                <a:ea typeface="Arial"/>
+                <a:cs typeface="Arial"/>
+                <a:sym typeface="Arial"/>
+              </a:defRPr>
             </a:lvl1pPr>
-            <a:lvl2pPr lvl="1">
-              <a:buNone/>
-              <a:defRPr/>
+            <a:lvl2pPr indent="0" lvl="1" marL="0" marR="0" algn="r">
+              <a:lnSpc>
+                <a:spcPct val="100000"/>
+              </a:lnSpc>
+              <a:spcBef>
+                <a:spcPts val="0"/>
+              </a:spcBef>
+              <a:spcAft>
+                <a:spcPts val="0"/>
+              </a:spcAft>
+              <a:buClr>
+                <a:srgbClr val="000000"/>
+              </a:buClr>
+              <a:buSzPts val="1000"/>
+              <a:buFont typeface="Arial"/>
+              <a:buNone/>
+              <a:defRPr b="0" i="0" sz="1000" u="none" cap="none" strike="noStrike">
+                <a:solidFill>
+                  <a:schemeClr val="dk2"/>
+                </a:solidFill>
+                <a:latin typeface="Arial"/>
+                <a:ea typeface="Arial"/>
+                <a:cs typeface="Arial"/>
+                <a:sym typeface="Arial"/>
+              </a:defRPr>
             </a:lvl2pPr>
-            <a:lvl3pPr lvl="2">
-              <a:buNone/>
-              <a:defRPr/>
+            <a:lvl3pPr indent="0" lvl="2" marL="0" marR="0" algn="r">
+              <a:lnSpc>
+                <a:spcPct val="100000"/>
+              </a:lnSpc>
+              <a:spcBef>
+                <a:spcPts val="0"/>
+              </a:spcBef>
+              <a:spcAft>
+                <a:spcPts val="0"/>
+              </a:spcAft>
+              <a:buClr>
+                <a:srgbClr val="000000"/>
+              </a:buClr>
+              <a:buSzPts val="1000"/>
+              <a:buFont typeface="Arial"/>
+              <a:buNone/>
+              <a:defRPr b="0" i="0" sz="1000" u="none" cap="none" strike="noStrike">
+                <a:solidFill>
+                  <a:schemeClr val="dk2"/>
+                </a:solidFill>
+                <a:latin typeface="Arial"/>
+                <a:ea typeface="Arial"/>
+                <a:cs typeface="Arial"/>
+                <a:sym typeface="Arial"/>
+              </a:defRPr>
             </a:lvl3pPr>
-            <a:lvl4pPr lvl="3">
-              <a:buNone/>
-              <a:defRPr/>
+            <a:lvl4pPr indent="0" lvl="3" marL="0" marR="0" algn="r">
+              <a:lnSpc>
+                <a:spcPct val="100000"/>
+              </a:lnSpc>
+              <a:spcBef>
+                <a:spcPts val="0"/>
+              </a:spcBef>
+              <a:spcAft>
+                <a:spcPts val="0"/>
+              </a:spcAft>
+              <a:buClr>
+                <a:srgbClr val="000000"/>
+              </a:buClr>
+              <a:buSzPts val="1000"/>
+              <a:buFont typeface="Arial"/>
+              <a:buNone/>
+              <a:defRPr b="0" i="0" sz="1000" u="none" cap="none" strike="noStrike">
+                <a:solidFill>
+                  <a:schemeClr val="dk2"/>
+                </a:solidFill>
+                <a:latin typeface="Arial"/>
+                <a:ea typeface="Arial"/>
+                <a:cs typeface="Arial"/>
+                <a:sym typeface="Arial"/>
+              </a:defRPr>
             </a:lvl4pPr>
-            <a:lvl5pPr lvl="4">
-              <a:buNone/>
-              <a:defRPr/>
+            <a:lvl5pPr indent="0" lvl="4" marL="0" marR="0" algn="r">
+              <a:lnSpc>
+                <a:spcPct val="100000"/>
+              </a:lnSpc>
+              <a:spcBef>
+                <a:spcPts val="0"/>
+              </a:spcBef>
+              <a:spcAft>
+                <a:spcPts val="0"/>
+              </a:spcAft>
+              <a:buClr>
+                <a:srgbClr val="000000"/>
+              </a:buClr>
+              <a:buSzPts val="1000"/>
+              <a:buFont typeface="Arial"/>
+              <a:buNone/>
+              <a:defRPr b="0" i="0" sz="1000" u="none" cap="none" strike="noStrike">
+                <a:solidFill>
+                  <a:schemeClr val="dk2"/>
+                </a:solidFill>
+                <a:latin typeface="Arial"/>
+                <a:ea typeface="Arial"/>
+                <a:cs typeface="Arial"/>
+                <a:sym typeface="Arial"/>
+              </a:defRPr>
             </a:lvl5pPr>
-            <a:lvl6pPr lvl="5">
-              <a:buNone/>
-              <a:defRPr/>
+            <a:lvl6pPr indent="0" lvl="5" marL="0" marR="0" algn="r">
+              <a:lnSpc>
+                <a:spcPct val="100000"/>
+              </a:lnSpc>
+              <a:spcBef>
+                <a:spcPts val="0"/>
+              </a:spcBef>
+              <a:spcAft>
+                <a:spcPts val="0"/>
+              </a:spcAft>
+              <a:buClr>
+                <a:srgbClr val="000000"/>
+              </a:buClr>
+              <a:buSzPts val="1000"/>
+              <a:buFont typeface="Arial"/>
+              <a:buNone/>
+              <a:defRPr b="0" i="0" sz="1000" u="none" cap="none" strike="noStrike">
+                <a:solidFill>
+                  <a:schemeClr val="dk2"/>
+                </a:solidFill>
+                <a:latin typeface="Arial"/>
+                <a:ea typeface="Arial"/>
+                <a:cs typeface="Arial"/>
+                <a:sym typeface="Arial"/>
+              </a:defRPr>
             </a:lvl6pPr>
-            <a:lvl7pPr lvl="6">
-              <a:buNone/>
-              <a:defRPr/>
+            <a:lvl7pPr indent="0" lvl="6" marL="0" marR="0" algn="r">
+              <a:lnSpc>
+                <a:spcPct val="100000"/>
+              </a:lnSpc>
+              <a:spcBef>
+                <a:spcPts val="0"/>
+              </a:spcBef>
+              <a:spcAft>
+                <a:spcPts val="0"/>
+              </a:spcAft>
+              <a:buClr>
+                <a:srgbClr val="000000"/>
+              </a:buClr>
+              <a:buSzPts val="1000"/>
+              <a:buFont typeface="Arial"/>
+              <a:buNone/>
+              <a:defRPr b="0" i="0" sz="1000" u="none" cap="none" strike="noStrike">
+                <a:solidFill>
+                  <a:schemeClr val="dk2"/>
+                </a:solidFill>
+                <a:latin typeface="Arial"/>
+                <a:ea typeface="Arial"/>
+                <a:cs typeface="Arial"/>
+                <a:sym typeface="Arial"/>
+              </a:defRPr>
             </a:lvl7pPr>
-            <a:lvl8pPr lvl="7">
-              <a:buNone/>
-              <a:defRPr/>
+            <a:lvl8pPr indent="0" lvl="7" marL="0" marR="0" algn="r">
+              <a:lnSpc>
+                <a:spcPct val="100000"/>
+              </a:lnSpc>
+              <a:spcBef>
+                <a:spcPts val="0"/>
+              </a:spcBef>
+              <a:spcAft>
+                <a:spcPts val="0"/>
+              </a:spcAft>
+              <a:buClr>
+                <a:srgbClr val="000000"/>
+              </a:buClr>
+              <a:buSzPts val="1000"/>
+              <a:buFont typeface="Arial"/>
+              <a:buNone/>
+              <a:defRPr b="0" i="0" sz="1000" u="none" cap="none" strike="noStrike">
+                <a:solidFill>
+                  <a:schemeClr val="dk2"/>
+                </a:solidFill>
+                <a:latin typeface="Arial"/>
+                <a:ea typeface="Arial"/>
+                <a:cs typeface="Arial"/>
+                <a:sym typeface="Arial"/>
+              </a:defRPr>
             </a:lvl8pPr>
-            <a:lvl9pPr lvl="8">
-              <a:buNone/>
-              <a:defRPr/>
+            <a:lvl9pPr indent="0" lvl="8" marL="0" marR="0" algn="r">
+              <a:lnSpc>
+                <a:spcPct val="100000"/>
+              </a:lnSpc>
+              <a:spcBef>
+                <a:spcPts val="0"/>
+              </a:spcBef>
+              <a:spcAft>
+                <a:spcPts val="0"/>
+              </a:spcAft>
+              <a:buClr>
+                <a:srgbClr val="000000"/>
+              </a:buClr>
+              <a:buSzPts val="1000"/>
+              <a:buFont typeface="Arial"/>
+              <a:buNone/>
+              <a:defRPr b="0" i="0" sz="1000" u="none" cap="none" strike="noStrike">
+                <a:solidFill>
+                  <a:schemeClr val="dk2"/>
+                </a:solidFill>
+                <a:latin typeface="Arial"/>
+                <a:ea typeface="Arial"/>
+                <a:cs typeface="Arial"/>
+                <a:sym typeface="Arial"/>
+              </a:defRPr>
             </a:lvl9pPr>
           </a:lstStyle>
           <a:p>
@@ -2702,11 +3544,11 @@
 </file>
 
 <file path=ppt/slideLayouts/slideLayout3.xml><?xml version="1.0" encoding="utf-8"?>
-<p:sldLayout xmlns:a="http://schemas.openxmlformats.org/drawingml/2006/main" xmlns:r="http://schemas.openxmlformats.org/officeDocument/2006/relationships" xmlns:mc="http://schemas.openxmlformats.org/markup-compatibility/2006" xmlns:mv="urn:schemas-microsoft-com:mac:vml" xmlns:p="http://schemas.openxmlformats.org/presentationml/2006/main" xmlns:c="http://schemas.openxmlformats.org/drawingml/2006/chart" xmlns:dgm="http://schemas.openxmlformats.org/drawingml/2006/diagram" xmlns:o="urn:schemas-microsoft-com:office:office" xmlns:v="urn:schemas-microsoft-com:vml" xmlns:pvml="urn:schemas-microsoft-com:office:powerpoint" xmlns:com="http://schemas.openxmlformats.org/drawingml/2006/compatibility" xmlns:p14="http://schemas.microsoft.com/office/powerpoint/2010/main" xmlns:p15="http://schemas.microsoft.com/office/powerpoint/2012/main" xmlns:ahyp="http://schemas.microsoft.com/office/drawing/2018/hyperlinkcolor" matchingName="Title and body" type="tx">
-  <p:cSld name="TITLE_AND_BODY">
+<p:sldLayout xmlns:a="http://schemas.openxmlformats.org/drawingml/2006/main" xmlns:r="http://schemas.openxmlformats.org/officeDocument/2006/relationships" xmlns:mc="http://schemas.openxmlformats.org/markup-compatibility/2006" xmlns:mv="urn:schemas-microsoft-com:mac:vml" xmlns:p="http://schemas.openxmlformats.org/presentationml/2006/main" xmlns:c="http://schemas.openxmlformats.org/drawingml/2006/chart" xmlns:dgm="http://schemas.openxmlformats.org/drawingml/2006/diagram" xmlns:o="urn:schemas-microsoft-com:office:office" xmlns:v="urn:schemas-microsoft-com:vml" xmlns:pvml="urn:schemas-microsoft-com:office:powerpoint" xmlns:com="http://schemas.openxmlformats.org/drawingml/2006/compatibility" xmlns:p14="http://schemas.microsoft.com/office/powerpoint/2010/main" xmlns:p15="http://schemas.microsoft.com/office/powerpoint/2012/main" xmlns:ahyp="http://schemas.microsoft.com/office/drawing/2018/hyperlinkcolor" matchingName="Title slide" type="title">
+  <p:cSld name="TITLE">
     <p:spTree>
       <p:nvGrpSpPr>
-        <p:cNvPr id="16" name="Shape 16"/>
+        <p:cNvPr id="15" name="Shape 15"/>
         <p:cNvGrpSpPr/>
         <p:nvPr/>
       </p:nvGrpSpPr>
@@ -2720,27 +3562,190 @@
       </p:grpSpPr>
       <p:sp>
         <p:nvSpPr>
-          <p:cNvPr id="17" name="Google Shape;17;p4"/>
+          <p:cNvPr id="16" name="Google Shape;16;p4"/>
           <p:cNvSpPr txBox="1"/>
           <p:nvPr>
-            <p:ph type="title"/>
+            <p:ph type="ctrTitle"/>
           </p:nvPr>
         </p:nvSpPr>
         <p:spPr>
           <a:xfrm>
-            <a:off x="311700" y="445025"/>
-            <a:ext cx="8520600" cy="572700"/>
+            <a:off x="311708" y="744575"/>
+            <a:ext cx="8520600" cy="2052600"/>
           </a:xfrm>
           <a:prstGeom prst="rect">
             <a:avLst/>
           </a:prstGeom>
+          <a:noFill/>
+          <a:ln>
+            <a:noFill/>
+          </a:ln>
+        </p:spPr>
+        <p:txBody>
+          <a:bodyPr anchorCtr="0" anchor="b" bIns="91425" lIns="91425" spcFirstLastPara="1" rIns="91425" wrap="square" tIns="91425">
+            <a:normAutofit/>
+          </a:bodyPr>
+          <a:lstStyle>
+            <a:lvl1pPr lvl="0" algn="ctr">
+              <a:lnSpc>
+                <a:spcPct val="100000"/>
+              </a:lnSpc>
+              <a:spcBef>
+                <a:spcPts val="0"/>
+              </a:spcBef>
+              <a:spcAft>
+                <a:spcPts val="0"/>
+              </a:spcAft>
+              <a:buSzPts val="5200"/>
+              <a:buNone/>
+              <a:defRPr sz="5200"/>
+            </a:lvl1pPr>
+            <a:lvl2pPr lvl="1" algn="ctr">
+              <a:lnSpc>
+                <a:spcPct val="100000"/>
+              </a:lnSpc>
+              <a:spcBef>
+                <a:spcPts val="0"/>
+              </a:spcBef>
+              <a:spcAft>
+                <a:spcPts val="0"/>
+              </a:spcAft>
+              <a:buSzPts val="5200"/>
+              <a:buNone/>
+              <a:defRPr sz="5200"/>
+            </a:lvl2pPr>
+            <a:lvl3pPr lvl="2" algn="ctr">
+              <a:lnSpc>
+                <a:spcPct val="100000"/>
+              </a:lnSpc>
+              <a:spcBef>
+                <a:spcPts val="0"/>
+              </a:spcBef>
+              <a:spcAft>
+                <a:spcPts val="0"/>
+              </a:spcAft>
+              <a:buSzPts val="5200"/>
+              <a:buNone/>
+              <a:defRPr sz="5200"/>
+            </a:lvl3pPr>
+            <a:lvl4pPr lvl="3" algn="ctr">
+              <a:lnSpc>
+                <a:spcPct val="100000"/>
+              </a:lnSpc>
+              <a:spcBef>
+                <a:spcPts val="0"/>
+              </a:spcBef>
+              <a:spcAft>
+                <a:spcPts val="0"/>
+              </a:spcAft>
+              <a:buSzPts val="5200"/>
+              <a:buNone/>
+              <a:defRPr sz="5200"/>
+            </a:lvl4pPr>
+            <a:lvl5pPr lvl="4" algn="ctr">
+              <a:lnSpc>
+                <a:spcPct val="100000"/>
+              </a:lnSpc>
+              <a:spcBef>
+                <a:spcPts val="0"/>
+              </a:spcBef>
+              <a:spcAft>
+                <a:spcPts val="0"/>
+              </a:spcAft>
+              <a:buSzPts val="5200"/>
+              <a:buNone/>
+              <a:defRPr sz="5200"/>
+            </a:lvl5pPr>
+            <a:lvl6pPr lvl="5" algn="ctr">
+              <a:lnSpc>
+                <a:spcPct val="100000"/>
+              </a:lnSpc>
+              <a:spcBef>
+                <a:spcPts val="0"/>
+              </a:spcBef>
+              <a:spcAft>
+                <a:spcPts val="0"/>
+              </a:spcAft>
+              <a:buSzPts val="5200"/>
+              <a:buNone/>
+              <a:defRPr sz="5200"/>
+            </a:lvl6pPr>
+            <a:lvl7pPr lvl="6" algn="ctr">
+              <a:lnSpc>
+                <a:spcPct val="100000"/>
+              </a:lnSpc>
+              <a:spcBef>
+                <a:spcPts val="0"/>
+              </a:spcBef>
+              <a:spcAft>
+                <a:spcPts val="0"/>
+              </a:spcAft>
+              <a:buSzPts val="5200"/>
+              <a:buNone/>
+              <a:defRPr sz="5200"/>
+            </a:lvl7pPr>
+            <a:lvl8pPr lvl="7" algn="ctr">
+              <a:lnSpc>
+                <a:spcPct val="100000"/>
+              </a:lnSpc>
+              <a:spcBef>
+                <a:spcPts val="0"/>
+              </a:spcBef>
+              <a:spcAft>
+                <a:spcPts val="0"/>
+              </a:spcAft>
+              <a:buSzPts val="5200"/>
+              <a:buNone/>
+              <a:defRPr sz="5200"/>
+            </a:lvl8pPr>
+            <a:lvl9pPr lvl="8" algn="ctr">
+              <a:lnSpc>
+                <a:spcPct val="100000"/>
+              </a:lnSpc>
+              <a:spcBef>
+                <a:spcPts val="0"/>
+              </a:spcBef>
+              <a:spcAft>
+                <a:spcPts val="0"/>
+              </a:spcAft>
+              <a:buSzPts val="5200"/>
+              <a:buNone/>
+              <a:defRPr sz="5200"/>
+            </a:lvl9pPr>
+          </a:lstStyle>
+          <a:p/>
+        </p:txBody>
+      </p:sp>
+      <p:sp>
+        <p:nvSpPr>
+          <p:cNvPr id="17" name="Google Shape;17;p4"/>
+          <p:cNvSpPr txBox="1"/>
+          <p:nvPr>
+            <p:ph idx="1" type="subTitle"/>
+          </p:nvPr>
+        </p:nvSpPr>
+        <p:spPr>
+          <a:xfrm>
+            <a:off x="311700" y="2834125"/>
+            <a:ext cx="8520600" cy="792600"/>
+          </a:xfrm>
+          <a:prstGeom prst="rect">
+            <a:avLst/>
+          </a:prstGeom>
+          <a:noFill/>
+          <a:ln>
+            <a:noFill/>
+          </a:ln>
         </p:spPr>
         <p:txBody>
           <a:bodyPr anchorCtr="0" anchor="t" bIns="91425" lIns="91425" spcFirstLastPara="1" rIns="91425" wrap="square" tIns="91425">
             <a:normAutofit/>
           </a:bodyPr>
           <a:lstStyle>
-            <a:lvl1pPr lvl="0">
+            <a:lvl1pPr lvl="0" algn="ctr">
+              <a:lnSpc>
+                <a:spcPct val="100000"/>
+              </a:lnSpc>
               <a:spcBef>
                 <a:spcPts val="0"/>
               </a:spcBef>
@@ -2749,9 +3754,12 @@
               </a:spcAft>
               <a:buSzPts val="2800"/>
               <a:buNone/>
-              <a:defRPr/>
+              <a:defRPr sz="2800"/>
             </a:lvl1pPr>
-            <a:lvl2pPr lvl="1">
+            <a:lvl2pPr lvl="1" algn="ctr">
+              <a:lnSpc>
+                <a:spcPct val="100000"/>
+              </a:lnSpc>
               <a:spcBef>
                 <a:spcPts val="0"/>
               </a:spcBef>
@@ -2760,9 +3768,12 @@
               </a:spcAft>
               <a:buSzPts val="2800"/>
               <a:buNone/>
-              <a:defRPr/>
+              <a:defRPr sz="2800"/>
             </a:lvl2pPr>
-            <a:lvl3pPr lvl="2">
+            <a:lvl3pPr lvl="2" algn="ctr">
+              <a:lnSpc>
+                <a:spcPct val="100000"/>
+              </a:lnSpc>
               <a:spcBef>
                 <a:spcPts val="0"/>
               </a:spcBef>
@@ -2771,9 +3782,12 @@
               </a:spcAft>
               <a:buSzPts val="2800"/>
               <a:buNone/>
-              <a:defRPr/>
+              <a:defRPr sz="2800"/>
             </a:lvl3pPr>
-            <a:lvl4pPr lvl="3">
+            <a:lvl4pPr lvl="3" algn="ctr">
+              <a:lnSpc>
+                <a:spcPct val="100000"/>
+              </a:lnSpc>
               <a:spcBef>
                 <a:spcPts val="0"/>
               </a:spcBef>
@@ -2782,9 +3796,12 @@
               </a:spcAft>
               <a:buSzPts val="2800"/>
               <a:buNone/>
-              <a:defRPr/>
+              <a:defRPr sz="2800"/>
             </a:lvl4pPr>
-            <a:lvl5pPr lvl="4">
+            <a:lvl5pPr lvl="4" algn="ctr">
+              <a:lnSpc>
+                <a:spcPct val="100000"/>
+              </a:lnSpc>
               <a:spcBef>
                 <a:spcPts val="0"/>
               </a:spcBef>
@@ -2793,9 +3810,12 @@
               </a:spcAft>
               <a:buSzPts val="2800"/>
               <a:buNone/>
-              <a:defRPr/>
+              <a:defRPr sz="2800"/>
             </a:lvl5pPr>
-            <a:lvl6pPr lvl="5">
+            <a:lvl6pPr lvl="5" algn="ctr">
+              <a:lnSpc>
+                <a:spcPct val="100000"/>
+              </a:lnSpc>
               <a:spcBef>
                 <a:spcPts val="0"/>
               </a:spcBef>
@@ -2804,9 +3824,12 @@
               </a:spcAft>
               <a:buSzPts val="2800"/>
               <a:buNone/>
-              <a:defRPr/>
+              <a:defRPr sz="2800"/>
             </a:lvl6pPr>
-            <a:lvl7pPr lvl="6">
+            <a:lvl7pPr lvl="6" algn="ctr">
+              <a:lnSpc>
+                <a:spcPct val="100000"/>
+              </a:lnSpc>
               <a:spcBef>
                 <a:spcPts val="0"/>
               </a:spcBef>
@@ -2815,9 +3838,12 @@
               </a:spcAft>
               <a:buSzPts val="2800"/>
               <a:buNone/>
-              <a:defRPr/>
+              <a:defRPr sz="2800"/>
             </a:lvl7pPr>
-            <a:lvl8pPr lvl="7">
+            <a:lvl8pPr lvl="7" algn="ctr">
+              <a:lnSpc>
+                <a:spcPct val="100000"/>
+              </a:lnSpc>
               <a:spcBef>
                 <a:spcPts val="0"/>
               </a:spcBef>
@@ -2826,9 +3852,12 @@
               </a:spcAft>
               <a:buSzPts val="2800"/>
               <a:buNone/>
-              <a:defRPr/>
+              <a:defRPr sz="2800"/>
             </a:lvl8pPr>
-            <a:lvl9pPr lvl="8">
+            <a:lvl9pPr lvl="8" algn="ctr">
+              <a:lnSpc>
+                <a:spcPct val="100000"/>
+              </a:lnSpc>
               <a:spcBef>
                 <a:spcPts val="0"/>
               </a:spcBef>
@@ -2837,7 +3866,7 @@
               </a:spcAft>
               <a:buSzPts val="2800"/>
               <a:buNone/>
-              <a:defRPr/>
+              <a:defRPr sz="2800"/>
             </a:lvl9pPr>
           </a:lstStyle>
           <a:p/>
@@ -2846,131 +3875,6 @@
       <p:sp>
         <p:nvSpPr>
           <p:cNvPr id="18" name="Google Shape;18;p4"/>
-          <p:cNvSpPr txBox="1"/>
-          <p:nvPr>
-            <p:ph idx="1" type="body"/>
-          </p:nvPr>
-        </p:nvSpPr>
-        <p:spPr>
-          <a:xfrm>
-            <a:off x="311700" y="1152475"/>
-            <a:ext cx="8520600" cy="3416400"/>
-          </a:xfrm>
-          <a:prstGeom prst="rect">
-            <a:avLst/>
-          </a:prstGeom>
-        </p:spPr>
-        <p:txBody>
-          <a:bodyPr anchorCtr="0" anchor="t" bIns="91425" lIns="91425" spcFirstLastPara="1" rIns="91425" wrap="square" tIns="91425">
-            <a:normAutofit/>
-          </a:bodyPr>
-          <a:lstStyle>
-            <a:lvl1pPr indent="-342900" lvl="0" marL="457200">
-              <a:spcBef>
-                <a:spcPts val="0"/>
-              </a:spcBef>
-              <a:spcAft>
-                <a:spcPts val="0"/>
-              </a:spcAft>
-              <a:buSzPts val="1800"/>
-              <a:buChar char="●"/>
-              <a:defRPr/>
-            </a:lvl1pPr>
-            <a:lvl2pPr indent="-317500" lvl="1" marL="914400">
-              <a:spcBef>
-                <a:spcPts val="0"/>
-              </a:spcBef>
-              <a:spcAft>
-                <a:spcPts val="0"/>
-              </a:spcAft>
-              <a:buSzPts val="1400"/>
-              <a:buChar char="○"/>
-              <a:defRPr/>
-            </a:lvl2pPr>
-            <a:lvl3pPr indent="-317500" lvl="2" marL="1371600">
-              <a:spcBef>
-                <a:spcPts val="0"/>
-              </a:spcBef>
-              <a:spcAft>
-                <a:spcPts val="0"/>
-              </a:spcAft>
-              <a:buSzPts val="1400"/>
-              <a:buChar char="■"/>
-              <a:defRPr/>
-            </a:lvl3pPr>
-            <a:lvl4pPr indent="-317500" lvl="3" marL="1828800">
-              <a:spcBef>
-                <a:spcPts val="0"/>
-              </a:spcBef>
-              <a:spcAft>
-                <a:spcPts val="0"/>
-              </a:spcAft>
-              <a:buSzPts val="1400"/>
-              <a:buChar char="●"/>
-              <a:defRPr/>
-            </a:lvl4pPr>
-            <a:lvl5pPr indent="-317500" lvl="4" marL="2286000">
-              <a:spcBef>
-                <a:spcPts val="0"/>
-              </a:spcBef>
-              <a:spcAft>
-                <a:spcPts val="0"/>
-              </a:spcAft>
-              <a:buSzPts val="1400"/>
-              <a:buChar char="○"/>
-              <a:defRPr/>
-            </a:lvl5pPr>
-            <a:lvl6pPr indent="-317500" lvl="5" marL="2743200">
-              <a:spcBef>
-                <a:spcPts val="0"/>
-              </a:spcBef>
-              <a:spcAft>
-                <a:spcPts val="0"/>
-              </a:spcAft>
-              <a:buSzPts val="1400"/>
-              <a:buChar char="■"/>
-              <a:defRPr/>
-            </a:lvl6pPr>
-            <a:lvl7pPr indent="-317500" lvl="6" marL="3200400">
-              <a:spcBef>
-                <a:spcPts val="0"/>
-              </a:spcBef>
-              <a:spcAft>
-                <a:spcPts val="0"/>
-              </a:spcAft>
-              <a:buSzPts val="1400"/>
-              <a:buChar char="●"/>
-              <a:defRPr/>
-            </a:lvl7pPr>
-            <a:lvl8pPr indent="-317500" lvl="7" marL="3657600">
-              <a:spcBef>
-                <a:spcPts val="0"/>
-              </a:spcBef>
-              <a:spcAft>
-                <a:spcPts val="0"/>
-              </a:spcAft>
-              <a:buSzPts val="1400"/>
-              <a:buChar char="○"/>
-              <a:defRPr/>
-            </a:lvl8pPr>
-            <a:lvl9pPr indent="-317500" lvl="8" marL="4114800">
-              <a:spcBef>
-                <a:spcPts val="0"/>
-              </a:spcBef>
-              <a:spcAft>
-                <a:spcPts val="0"/>
-              </a:spcAft>
-              <a:buSzPts val="1400"/>
-              <a:buChar char="■"/>
-              <a:defRPr/>
-            </a:lvl9pPr>
-          </a:lstStyle>
-          <a:p/>
-        </p:txBody>
-      </p:sp>
-      <p:sp>
-        <p:nvSpPr>
-          <p:cNvPr id="19" name="Google Shape;19;p4"/>
           <p:cNvSpPr txBox="1"/>
           <p:nvPr>
             <p:ph idx="12" type="sldNum"/>
@@ -2984,47 +3888,249 @@
           <a:prstGeom prst="rect">
             <a:avLst/>
           </a:prstGeom>
+          <a:noFill/>
+          <a:ln>
+            <a:noFill/>
+          </a:ln>
         </p:spPr>
         <p:txBody>
           <a:bodyPr anchorCtr="0" anchor="ctr" bIns="91425" lIns="91425" spcFirstLastPara="1" rIns="91425" wrap="square" tIns="91425">
             <a:normAutofit/>
           </a:bodyPr>
           <a:lstStyle>
-            <a:lvl1pPr lvl="0">
-              <a:buNone/>
-              <a:defRPr/>
+            <a:lvl1pPr indent="0" lvl="0" marL="0" marR="0" algn="r">
+              <a:lnSpc>
+                <a:spcPct val="100000"/>
+              </a:lnSpc>
+              <a:spcBef>
+                <a:spcPts val="0"/>
+              </a:spcBef>
+              <a:spcAft>
+                <a:spcPts val="0"/>
+              </a:spcAft>
+              <a:buClr>
+                <a:srgbClr val="000000"/>
+              </a:buClr>
+              <a:buSzPts val="1000"/>
+              <a:buFont typeface="Arial"/>
+              <a:buNone/>
+              <a:defRPr b="0" i="0" sz="1000" u="none" cap="none" strike="noStrike">
+                <a:solidFill>
+                  <a:schemeClr val="dk2"/>
+                </a:solidFill>
+                <a:latin typeface="Arial"/>
+                <a:ea typeface="Arial"/>
+                <a:cs typeface="Arial"/>
+                <a:sym typeface="Arial"/>
+              </a:defRPr>
             </a:lvl1pPr>
-            <a:lvl2pPr lvl="1">
-              <a:buNone/>
-              <a:defRPr/>
+            <a:lvl2pPr indent="0" lvl="1" marL="0" marR="0" algn="r">
+              <a:lnSpc>
+                <a:spcPct val="100000"/>
+              </a:lnSpc>
+              <a:spcBef>
+                <a:spcPts val="0"/>
+              </a:spcBef>
+              <a:spcAft>
+                <a:spcPts val="0"/>
+              </a:spcAft>
+              <a:buClr>
+                <a:srgbClr val="000000"/>
+              </a:buClr>
+              <a:buSzPts val="1000"/>
+              <a:buFont typeface="Arial"/>
+              <a:buNone/>
+              <a:defRPr b="0" i="0" sz="1000" u="none" cap="none" strike="noStrike">
+                <a:solidFill>
+                  <a:schemeClr val="dk2"/>
+                </a:solidFill>
+                <a:latin typeface="Arial"/>
+                <a:ea typeface="Arial"/>
+                <a:cs typeface="Arial"/>
+                <a:sym typeface="Arial"/>
+              </a:defRPr>
             </a:lvl2pPr>
-            <a:lvl3pPr lvl="2">
-              <a:buNone/>
-              <a:defRPr/>
+            <a:lvl3pPr indent="0" lvl="2" marL="0" marR="0" algn="r">
+              <a:lnSpc>
+                <a:spcPct val="100000"/>
+              </a:lnSpc>
+              <a:spcBef>
+                <a:spcPts val="0"/>
+              </a:spcBef>
+              <a:spcAft>
+                <a:spcPts val="0"/>
+              </a:spcAft>
+              <a:buClr>
+                <a:srgbClr val="000000"/>
+              </a:buClr>
+              <a:buSzPts val="1000"/>
+              <a:buFont typeface="Arial"/>
+              <a:buNone/>
+              <a:defRPr b="0" i="0" sz="1000" u="none" cap="none" strike="noStrike">
+                <a:solidFill>
+                  <a:schemeClr val="dk2"/>
+                </a:solidFill>
+                <a:latin typeface="Arial"/>
+                <a:ea typeface="Arial"/>
+                <a:cs typeface="Arial"/>
+                <a:sym typeface="Arial"/>
+              </a:defRPr>
             </a:lvl3pPr>
-            <a:lvl4pPr lvl="3">
-              <a:buNone/>
-              <a:defRPr/>
+            <a:lvl4pPr indent="0" lvl="3" marL="0" marR="0" algn="r">
+              <a:lnSpc>
+                <a:spcPct val="100000"/>
+              </a:lnSpc>
+              <a:spcBef>
+                <a:spcPts val="0"/>
+              </a:spcBef>
+              <a:spcAft>
+                <a:spcPts val="0"/>
+              </a:spcAft>
+              <a:buClr>
+                <a:srgbClr val="000000"/>
+              </a:buClr>
+              <a:buSzPts val="1000"/>
+              <a:buFont typeface="Arial"/>
+              <a:buNone/>
+              <a:defRPr b="0" i="0" sz="1000" u="none" cap="none" strike="noStrike">
+                <a:solidFill>
+                  <a:schemeClr val="dk2"/>
+                </a:solidFill>
+                <a:latin typeface="Arial"/>
+                <a:ea typeface="Arial"/>
+                <a:cs typeface="Arial"/>
+                <a:sym typeface="Arial"/>
+              </a:defRPr>
             </a:lvl4pPr>
-            <a:lvl5pPr lvl="4">
-              <a:buNone/>
-              <a:defRPr/>
+            <a:lvl5pPr indent="0" lvl="4" marL="0" marR="0" algn="r">
+              <a:lnSpc>
+                <a:spcPct val="100000"/>
+              </a:lnSpc>
+              <a:spcBef>
+                <a:spcPts val="0"/>
+              </a:spcBef>
+              <a:spcAft>
+                <a:spcPts val="0"/>
+              </a:spcAft>
+              <a:buClr>
+                <a:srgbClr val="000000"/>
+              </a:buClr>
+              <a:buSzPts val="1000"/>
+              <a:buFont typeface="Arial"/>
+              <a:buNone/>
+              <a:defRPr b="0" i="0" sz="1000" u="none" cap="none" strike="noStrike">
+                <a:solidFill>
+                  <a:schemeClr val="dk2"/>
+                </a:solidFill>
+                <a:latin typeface="Arial"/>
+                <a:ea typeface="Arial"/>
+                <a:cs typeface="Arial"/>
+                <a:sym typeface="Arial"/>
+              </a:defRPr>
             </a:lvl5pPr>
-            <a:lvl6pPr lvl="5">
-              <a:buNone/>
-              <a:defRPr/>
+            <a:lvl6pPr indent="0" lvl="5" marL="0" marR="0" algn="r">
+              <a:lnSpc>
+                <a:spcPct val="100000"/>
+              </a:lnSpc>
+              <a:spcBef>
+                <a:spcPts val="0"/>
+              </a:spcBef>
+              <a:spcAft>
+                <a:spcPts val="0"/>
+              </a:spcAft>
+              <a:buClr>
+                <a:srgbClr val="000000"/>
+              </a:buClr>
+              <a:buSzPts val="1000"/>
+              <a:buFont typeface="Arial"/>
+              <a:buNone/>
+              <a:defRPr b="0" i="0" sz="1000" u="none" cap="none" strike="noStrike">
+                <a:solidFill>
+                  <a:schemeClr val="dk2"/>
+                </a:solidFill>
+                <a:latin typeface="Arial"/>
+                <a:ea typeface="Arial"/>
+                <a:cs typeface="Arial"/>
+                <a:sym typeface="Arial"/>
+              </a:defRPr>
             </a:lvl6pPr>
-            <a:lvl7pPr lvl="6">
-              <a:buNone/>
-              <a:defRPr/>
+            <a:lvl7pPr indent="0" lvl="6" marL="0" marR="0" algn="r">
+              <a:lnSpc>
+                <a:spcPct val="100000"/>
+              </a:lnSpc>
+              <a:spcBef>
+                <a:spcPts val="0"/>
+              </a:spcBef>
+              <a:spcAft>
+                <a:spcPts val="0"/>
+              </a:spcAft>
+              <a:buClr>
+                <a:srgbClr val="000000"/>
+              </a:buClr>
+              <a:buSzPts val="1000"/>
+              <a:buFont typeface="Arial"/>
+              <a:buNone/>
+              <a:defRPr b="0" i="0" sz="1000" u="none" cap="none" strike="noStrike">
+                <a:solidFill>
+                  <a:schemeClr val="dk2"/>
+                </a:solidFill>
+                <a:latin typeface="Arial"/>
+                <a:ea typeface="Arial"/>
+                <a:cs typeface="Arial"/>
+                <a:sym typeface="Arial"/>
+              </a:defRPr>
             </a:lvl7pPr>
-            <a:lvl8pPr lvl="7">
-              <a:buNone/>
-              <a:defRPr/>
+            <a:lvl8pPr indent="0" lvl="7" marL="0" marR="0" algn="r">
+              <a:lnSpc>
+                <a:spcPct val="100000"/>
+              </a:lnSpc>
+              <a:spcBef>
+                <a:spcPts val="0"/>
+              </a:spcBef>
+              <a:spcAft>
+                <a:spcPts val="0"/>
+              </a:spcAft>
+              <a:buClr>
+                <a:srgbClr val="000000"/>
+              </a:buClr>
+              <a:buSzPts val="1000"/>
+              <a:buFont typeface="Arial"/>
+              <a:buNone/>
+              <a:defRPr b="0" i="0" sz="1000" u="none" cap="none" strike="noStrike">
+                <a:solidFill>
+                  <a:schemeClr val="dk2"/>
+                </a:solidFill>
+                <a:latin typeface="Arial"/>
+                <a:ea typeface="Arial"/>
+                <a:cs typeface="Arial"/>
+                <a:sym typeface="Arial"/>
+              </a:defRPr>
             </a:lvl8pPr>
-            <a:lvl9pPr lvl="8">
-              <a:buNone/>
-              <a:defRPr/>
+            <a:lvl9pPr indent="0" lvl="8" marL="0" marR="0" algn="r">
+              <a:lnSpc>
+                <a:spcPct val="100000"/>
+              </a:lnSpc>
+              <a:spcBef>
+                <a:spcPts val="0"/>
+              </a:spcBef>
+              <a:spcAft>
+                <a:spcPts val="0"/>
+              </a:spcAft>
+              <a:buClr>
+                <a:srgbClr val="000000"/>
+              </a:buClr>
+              <a:buSzPts val="1000"/>
+              <a:buFont typeface="Arial"/>
+              <a:buNone/>
+              <a:defRPr b="0" i="0" sz="1000" u="none" cap="none" strike="noStrike">
+                <a:solidFill>
+                  <a:schemeClr val="dk2"/>
+                </a:solidFill>
+                <a:latin typeface="Arial"/>
+                <a:ea typeface="Arial"/>
+                <a:cs typeface="Arial"/>
+                <a:sym typeface="Arial"/>
+              </a:defRPr>
             </a:lvl9pPr>
           </a:lstStyle>
           <a:p>
@@ -3054,11 +4160,11 @@
 </file>
 
 <file path=ppt/slideLayouts/slideLayout4.xml><?xml version="1.0" encoding="utf-8"?>
-<p:sldLayout xmlns:a="http://schemas.openxmlformats.org/drawingml/2006/main" xmlns:r="http://schemas.openxmlformats.org/officeDocument/2006/relationships" xmlns:mc="http://schemas.openxmlformats.org/markup-compatibility/2006" xmlns:mv="urn:schemas-microsoft-com:mac:vml" xmlns:p="http://schemas.openxmlformats.org/presentationml/2006/main" xmlns:c="http://schemas.openxmlformats.org/drawingml/2006/chart" xmlns:dgm="http://schemas.openxmlformats.org/drawingml/2006/diagram" xmlns:o="urn:schemas-microsoft-com:office:office" xmlns:v="urn:schemas-microsoft-com:vml" xmlns:pvml="urn:schemas-microsoft-com:office:powerpoint" xmlns:com="http://schemas.openxmlformats.org/drawingml/2006/compatibility" xmlns:p14="http://schemas.microsoft.com/office/powerpoint/2010/main" xmlns:p15="http://schemas.microsoft.com/office/powerpoint/2012/main" xmlns:ahyp="http://schemas.microsoft.com/office/drawing/2018/hyperlinkcolor" matchingName="Title and two columns" type="twoColTx">
-  <p:cSld name="TITLE_AND_TWO_COLUMNS">
+<p:sldLayout xmlns:a="http://schemas.openxmlformats.org/drawingml/2006/main" xmlns:r="http://schemas.openxmlformats.org/officeDocument/2006/relationships" xmlns:mc="http://schemas.openxmlformats.org/markup-compatibility/2006" xmlns:mv="urn:schemas-microsoft-com:mac:vml" xmlns:p="http://schemas.openxmlformats.org/presentationml/2006/main" xmlns:c="http://schemas.openxmlformats.org/drawingml/2006/chart" xmlns:dgm="http://schemas.openxmlformats.org/drawingml/2006/diagram" xmlns:o="urn:schemas-microsoft-com:office:office" xmlns:v="urn:schemas-microsoft-com:vml" xmlns:pvml="urn:schemas-microsoft-com:office:powerpoint" xmlns:com="http://schemas.openxmlformats.org/drawingml/2006/compatibility" xmlns:p14="http://schemas.microsoft.com/office/powerpoint/2010/main" xmlns:p15="http://schemas.microsoft.com/office/powerpoint/2012/main" xmlns:ahyp="http://schemas.microsoft.com/office/drawing/2018/hyperlinkcolor" matchingName="Section header" type="secHead">
+  <p:cSld name="SECTION_HEADER">
     <p:spTree>
       <p:nvGrpSpPr>
-        <p:cNvPr id="20" name="Shape 20"/>
+        <p:cNvPr id="19" name="Shape 19"/>
         <p:cNvGrpSpPr/>
         <p:nvPr/>
       </p:nvGrpSpPr>
@@ -3072,7 +4178,7 @@
       </p:grpSpPr>
       <p:sp>
         <p:nvSpPr>
-          <p:cNvPr id="21" name="Google Shape;21;p5"/>
+          <p:cNvPr id="20" name="Google Shape;20;p5"/>
           <p:cNvSpPr txBox="1"/>
           <p:nvPr>
             <p:ph type="title"/>
@@ -3080,116 +4186,147 @@
         </p:nvSpPr>
         <p:spPr>
           <a:xfrm>
-            <a:off x="311700" y="445025"/>
-            <a:ext cx="8520600" cy="572700"/>
+            <a:off x="311700" y="2150850"/>
+            <a:ext cx="8520600" cy="841800"/>
           </a:xfrm>
           <a:prstGeom prst="rect">
             <a:avLst/>
           </a:prstGeom>
+          <a:noFill/>
+          <a:ln>
+            <a:noFill/>
+          </a:ln>
         </p:spPr>
         <p:txBody>
-          <a:bodyPr anchorCtr="0" anchor="t" bIns="91425" lIns="91425" spcFirstLastPara="1" rIns="91425" wrap="square" tIns="91425">
+          <a:bodyPr anchorCtr="0" anchor="ctr" bIns="91425" lIns="91425" spcFirstLastPara="1" rIns="91425" wrap="square" tIns="91425">
             <a:normAutofit/>
           </a:bodyPr>
           <a:lstStyle>
-            <a:lvl1pPr lvl="0">
-              <a:spcBef>
-                <a:spcPts val="0"/>
-              </a:spcBef>
-              <a:spcAft>
-                <a:spcPts val="0"/>
-              </a:spcAft>
-              <a:buSzPts val="2800"/>
-              <a:buNone/>
-              <a:defRPr/>
+            <a:lvl1pPr lvl="0" algn="ctr">
+              <a:lnSpc>
+                <a:spcPct val="100000"/>
+              </a:lnSpc>
+              <a:spcBef>
+                <a:spcPts val="0"/>
+              </a:spcBef>
+              <a:spcAft>
+                <a:spcPts val="0"/>
+              </a:spcAft>
+              <a:buSzPts val="3600"/>
+              <a:buNone/>
+              <a:defRPr sz="3600"/>
             </a:lvl1pPr>
-            <a:lvl2pPr lvl="1">
-              <a:spcBef>
-                <a:spcPts val="0"/>
-              </a:spcBef>
-              <a:spcAft>
-                <a:spcPts val="0"/>
-              </a:spcAft>
-              <a:buSzPts val="2800"/>
-              <a:buNone/>
-              <a:defRPr/>
+            <a:lvl2pPr lvl="1" algn="ctr">
+              <a:lnSpc>
+                <a:spcPct val="100000"/>
+              </a:lnSpc>
+              <a:spcBef>
+                <a:spcPts val="0"/>
+              </a:spcBef>
+              <a:spcAft>
+                <a:spcPts val="0"/>
+              </a:spcAft>
+              <a:buSzPts val="3600"/>
+              <a:buNone/>
+              <a:defRPr sz="3600"/>
             </a:lvl2pPr>
-            <a:lvl3pPr lvl="2">
-              <a:spcBef>
-                <a:spcPts val="0"/>
-              </a:spcBef>
-              <a:spcAft>
-                <a:spcPts val="0"/>
-              </a:spcAft>
-              <a:buSzPts val="2800"/>
-              <a:buNone/>
-              <a:defRPr/>
+            <a:lvl3pPr lvl="2" algn="ctr">
+              <a:lnSpc>
+                <a:spcPct val="100000"/>
+              </a:lnSpc>
+              <a:spcBef>
+                <a:spcPts val="0"/>
+              </a:spcBef>
+              <a:spcAft>
+                <a:spcPts val="0"/>
+              </a:spcAft>
+              <a:buSzPts val="3600"/>
+              <a:buNone/>
+              <a:defRPr sz="3600"/>
             </a:lvl3pPr>
-            <a:lvl4pPr lvl="3">
-              <a:spcBef>
-                <a:spcPts val="0"/>
-              </a:spcBef>
-              <a:spcAft>
-                <a:spcPts val="0"/>
-              </a:spcAft>
-              <a:buSzPts val="2800"/>
-              <a:buNone/>
-              <a:defRPr/>
+            <a:lvl4pPr lvl="3" algn="ctr">
+              <a:lnSpc>
+                <a:spcPct val="100000"/>
+              </a:lnSpc>
+              <a:spcBef>
+                <a:spcPts val="0"/>
+              </a:spcBef>
+              <a:spcAft>
+                <a:spcPts val="0"/>
+              </a:spcAft>
+              <a:buSzPts val="3600"/>
+              <a:buNone/>
+              <a:defRPr sz="3600"/>
             </a:lvl4pPr>
-            <a:lvl5pPr lvl="4">
-              <a:spcBef>
-                <a:spcPts val="0"/>
-              </a:spcBef>
-              <a:spcAft>
-                <a:spcPts val="0"/>
-              </a:spcAft>
-              <a:buSzPts val="2800"/>
-              <a:buNone/>
-              <a:defRPr/>
+            <a:lvl5pPr lvl="4" algn="ctr">
+              <a:lnSpc>
+                <a:spcPct val="100000"/>
+              </a:lnSpc>
+              <a:spcBef>
+                <a:spcPts val="0"/>
+              </a:spcBef>
+              <a:spcAft>
+                <a:spcPts val="0"/>
+              </a:spcAft>
+              <a:buSzPts val="3600"/>
+              <a:buNone/>
+              <a:defRPr sz="3600"/>
             </a:lvl5pPr>
-            <a:lvl6pPr lvl="5">
-              <a:spcBef>
-                <a:spcPts val="0"/>
-              </a:spcBef>
-              <a:spcAft>
-                <a:spcPts val="0"/>
-              </a:spcAft>
-              <a:buSzPts val="2800"/>
-              <a:buNone/>
-              <a:defRPr/>
+            <a:lvl6pPr lvl="5" algn="ctr">
+              <a:lnSpc>
+                <a:spcPct val="100000"/>
+              </a:lnSpc>
+              <a:spcBef>
+                <a:spcPts val="0"/>
+              </a:spcBef>
+              <a:spcAft>
+                <a:spcPts val="0"/>
+              </a:spcAft>
+              <a:buSzPts val="3600"/>
+              <a:buNone/>
+              <a:defRPr sz="3600"/>
             </a:lvl6pPr>
-            <a:lvl7pPr lvl="6">
-              <a:spcBef>
-                <a:spcPts val="0"/>
-              </a:spcBef>
-              <a:spcAft>
-                <a:spcPts val="0"/>
-              </a:spcAft>
-              <a:buSzPts val="2800"/>
-              <a:buNone/>
-              <a:defRPr/>
+            <a:lvl7pPr lvl="6" algn="ctr">
+              <a:lnSpc>
+                <a:spcPct val="100000"/>
+              </a:lnSpc>
+              <a:spcBef>
+                <a:spcPts val="0"/>
+              </a:spcBef>
+              <a:spcAft>
+                <a:spcPts val="0"/>
+              </a:spcAft>
+              <a:buSzPts val="3600"/>
+              <a:buNone/>
+              <a:defRPr sz="3600"/>
             </a:lvl7pPr>
-            <a:lvl8pPr lvl="7">
-              <a:spcBef>
-                <a:spcPts val="0"/>
-              </a:spcBef>
-              <a:spcAft>
-                <a:spcPts val="0"/>
-              </a:spcAft>
-              <a:buSzPts val="2800"/>
-              <a:buNone/>
-              <a:defRPr/>
+            <a:lvl8pPr lvl="7" algn="ctr">
+              <a:lnSpc>
+                <a:spcPct val="100000"/>
+              </a:lnSpc>
+              <a:spcBef>
+                <a:spcPts val="0"/>
+              </a:spcBef>
+              <a:spcAft>
+                <a:spcPts val="0"/>
+              </a:spcAft>
+              <a:buSzPts val="3600"/>
+              <a:buNone/>
+              <a:defRPr sz="3600"/>
             </a:lvl8pPr>
-            <a:lvl9pPr lvl="8">
-              <a:spcBef>
-                <a:spcPts val="0"/>
-              </a:spcBef>
-              <a:spcAft>
-                <a:spcPts val="0"/>
-              </a:spcAft>
-              <a:buSzPts val="2800"/>
-              <a:buNone/>
-              <a:defRPr/>
+            <a:lvl9pPr lvl="8" algn="ctr">
+              <a:lnSpc>
+                <a:spcPct val="100000"/>
+              </a:lnSpc>
+              <a:spcBef>
+                <a:spcPts val="0"/>
+              </a:spcBef>
+              <a:spcAft>
+                <a:spcPts val="0"/>
+              </a:spcAft>
+              <a:buSzPts val="3600"/>
+              <a:buNone/>
+              <a:defRPr sz="3600"/>
             </a:lvl9pPr>
           </a:lstStyle>
           <a:p/>
@@ -3197,257 +4334,7 @@
       </p:sp>
       <p:sp>
         <p:nvSpPr>
-          <p:cNvPr id="22" name="Google Shape;22;p5"/>
-          <p:cNvSpPr txBox="1"/>
-          <p:nvPr>
-            <p:ph idx="1" type="body"/>
-          </p:nvPr>
-        </p:nvSpPr>
-        <p:spPr>
-          <a:xfrm>
-            <a:off x="311700" y="1152475"/>
-            <a:ext cx="3999900" cy="3416400"/>
-          </a:xfrm>
-          <a:prstGeom prst="rect">
-            <a:avLst/>
-          </a:prstGeom>
-        </p:spPr>
-        <p:txBody>
-          <a:bodyPr anchorCtr="0" anchor="t" bIns="91425" lIns="91425" spcFirstLastPara="1" rIns="91425" wrap="square" tIns="91425">
-            <a:normAutofit/>
-          </a:bodyPr>
-          <a:lstStyle>
-            <a:lvl1pPr indent="-317500" lvl="0" marL="457200">
-              <a:spcBef>
-                <a:spcPts val="0"/>
-              </a:spcBef>
-              <a:spcAft>
-                <a:spcPts val="0"/>
-              </a:spcAft>
-              <a:buSzPts val="1400"/>
-              <a:buChar char="●"/>
-              <a:defRPr sz="1400"/>
-            </a:lvl1pPr>
-            <a:lvl2pPr indent="-304800" lvl="1" marL="914400">
-              <a:spcBef>
-                <a:spcPts val="0"/>
-              </a:spcBef>
-              <a:spcAft>
-                <a:spcPts val="0"/>
-              </a:spcAft>
-              <a:buSzPts val="1200"/>
-              <a:buChar char="○"/>
-              <a:defRPr sz="1200"/>
-            </a:lvl2pPr>
-            <a:lvl3pPr indent="-304800" lvl="2" marL="1371600">
-              <a:spcBef>
-                <a:spcPts val="0"/>
-              </a:spcBef>
-              <a:spcAft>
-                <a:spcPts val="0"/>
-              </a:spcAft>
-              <a:buSzPts val="1200"/>
-              <a:buChar char="■"/>
-              <a:defRPr sz="1200"/>
-            </a:lvl3pPr>
-            <a:lvl4pPr indent="-304800" lvl="3" marL="1828800">
-              <a:spcBef>
-                <a:spcPts val="0"/>
-              </a:spcBef>
-              <a:spcAft>
-                <a:spcPts val="0"/>
-              </a:spcAft>
-              <a:buSzPts val="1200"/>
-              <a:buChar char="●"/>
-              <a:defRPr sz="1200"/>
-            </a:lvl4pPr>
-            <a:lvl5pPr indent="-304800" lvl="4" marL="2286000">
-              <a:spcBef>
-                <a:spcPts val="0"/>
-              </a:spcBef>
-              <a:spcAft>
-                <a:spcPts val="0"/>
-              </a:spcAft>
-              <a:buSzPts val="1200"/>
-              <a:buChar char="○"/>
-              <a:defRPr sz="1200"/>
-            </a:lvl5pPr>
-            <a:lvl6pPr indent="-304800" lvl="5" marL="2743200">
-              <a:spcBef>
-                <a:spcPts val="0"/>
-              </a:spcBef>
-              <a:spcAft>
-                <a:spcPts val="0"/>
-              </a:spcAft>
-              <a:buSzPts val="1200"/>
-              <a:buChar char="■"/>
-              <a:defRPr sz="1200"/>
-            </a:lvl6pPr>
-            <a:lvl7pPr indent="-304800" lvl="6" marL="3200400">
-              <a:spcBef>
-                <a:spcPts val="0"/>
-              </a:spcBef>
-              <a:spcAft>
-                <a:spcPts val="0"/>
-              </a:spcAft>
-              <a:buSzPts val="1200"/>
-              <a:buChar char="●"/>
-              <a:defRPr sz="1200"/>
-            </a:lvl7pPr>
-            <a:lvl8pPr indent="-304800" lvl="7" marL="3657600">
-              <a:spcBef>
-                <a:spcPts val="0"/>
-              </a:spcBef>
-              <a:spcAft>
-                <a:spcPts val="0"/>
-              </a:spcAft>
-              <a:buSzPts val="1200"/>
-              <a:buChar char="○"/>
-              <a:defRPr sz="1200"/>
-            </a:lvl8pPr>
-            <a:lvl9pPr indent="-304800" lvl="8" marL="4114800">
-              <a:spcBef>
-                <a:spcPts val="0"/>
-              </a:spcBef>
-              <a:spcAft>
-                <a:spcPts val="0"/>
-              </a:spcAft>
-              <a:buSzPts val="1200"/>
-              <a:buChar char="■"/>
-              <a:defRPr sz="1200"/>
-            </a:lvl9pPr>
-          </a:lstStyle>
-          <a:p/>
-        </p:txBody>
-      </p:sp>
-      <p:sp>
-        <p:nvSpPr>
-          <p:cNvPr id="23" name="Google Shape;23;p5"/>
-          <p:cNvSpPr txBox="1"/>
-          <p:nvPr>
-            <p:ph idx="2" type="body"/>
-          </p:nvPr>
-        </p:nvSpPr>
-        <p:spPr>
-          <a:xfrm>
-            <a:off x="4832400" y="1152475"/>
-            <a:ext cx="3999900" cy="3416400"/>
-          </a:xfrm>
-          <a:prstGeom prst="rect">
-            <a:avLst/>
-          </a:prstGeom>
-        </p:spPr>
-        <p:txBody>
-          <a:bodyPr anchorCtr="0" anchor="t" bIns="91425" lIns="91425" spcFirstLastPara="1" rIns="91425" wrap="square" tIns="91425">
-            <a:normAutofit/>
-          </a:bodyPr>
-          <a:lstStyle>
-            <a:lvl1pPr indent="-317500" lvl="0" marL="457200">
-              <a:spcBef>
-                <a:spcPts val="0"/>
-              </a:spcBef>
-              <a:spcAft>
-                <a:spcPts val="0"/>
-              </a:spcAft>
-              <a:buSzPts val="1400"/>
-              <a:buChar char="●"/>
-              <a:defRPr sz="1400"/>
-            </a:lvl1pPr>
-            <a:lvl2pPr indent="-304800" lvl="1" marL="914400">
-              <a:spcBef>
-                <a:spcPts val="0"/>
-              </a:spcBef>
-              <a:spcAft>
-                <a:spcPts val="0"/>
-              </a:spcAft>
-              <a:buSzPts val="1200"/>
-              <a:buChar char="○"/>
-              <a:defRPr sz="1200"/>
-            </a:lvl2pPr>
-            <a:lvl3pPr indent="-304800" lvl="2" marL="1371600">
-              <a:spcBef>
-                <a:spcPts val="0"/>
-              </a:spcBef>
-              <a:spcAft>
-                <a:spcPts val="0"/>
-              </a:spcAft>
-              <a:buSzPts val="1200"/>
-              <a:buChar char="■"/>
-              <a:defRPr sz="1200"/>
-            </a:lvl3pPr>
-            <a:lvl4pPr indent="-304800" lvl="3" marL="1828800">
-              <a:spcBef>
-                <a:spcPts val="0"/>
-              </a:spcBef>
-              <a:spcAft>
-                <a:spcPts val="0"/>
-              </a:spcAft>
-              <a:buSzPts val="1200"/>
-              <a:buChar char="●"/>
-              <a:defRPr sz="1200"/>
-            </a:lvl4pPr>
-            <a:lvl5pPr indent="-304800" lvl="4" marL="2286000">
-              <a:spcBef>
-                <a:spcPts val="0"/>
-              </a:spcBef>
-              <a:spcAft>
-                <a:spcPts val="0"/>
-              </a:spcAft>
-              <a:buSzPts val="1200"/>
-              <a:buChar char="○"/>
-              <a:defRPr sz="1200"/>
-            </a:lvl5pPr>
-            <a:lvl6pPr indent="-304800" lvl="5" marL="2743200">
-              <a:spcBef>
-                <a:spcPts val="0"/>
-              </a:spcBef>
-              <a:spcAft>
-                <a:spcPts val="0"/>
-              </a:spcAft>
-              <a:buSzPts val="1200"/>
-              <a:buChar char="■"/>
-              <a:defRPr sz="1200"/>
-            </a:lvl6pPr>
-            <a:lvl7pPr indent="-304800" lvl="6" marL="3200400">
-              <a:spcBef>
-                <a:spcPts val="0"/>
-              </a:spcBef>
-              <a:spcAft>
-                <a:spcPts val="0"/>
-              </a:spcAft>
-              <a:buSzPts val="1200"/>
-              <a:buChar char="●"/>
-              <a:defRPr sz="1200"/>
-            </a:lvl7pPr>
-            <a:lvl8pPr indent="-304800" lvl="7" marL="3657600">
-              <a:spcBef>
-                <a:spcPts val="0"/>
-              </a:spcBef>
-              <a:spcAft>
-                <a:spcPts val="0"/>
-              </a:spcAft>
-              <a:buSzPts val="1200"/>
-              <a:buChar char="○"/>
-              <a:defRPr sz="1200"/>
-            </a:lvl8pPr>
-            <a:lvl9pPr indent="-304800" lvl="8" marL="4114800">
-              <a:spcBef>
-                <a:spcPts val="0"/>
-              </a:spcBef>
-              <a:spcAft>
-                <a:spcPts val="0"/>
-              </a:spcAft>
-              <a:buSzPts val="1200"/>
-              <a:buChar char="■"/>
-              <a:defRPr sz="1200"/>
-            </a:lvl9pPr>
-          </a:lstStyle>
-          <a:p/>
-        </p:txBody>
-      </p:sp>
-      <p:sp>
-        <p:nvSpPr>
-          <p:cNvPr id="24" name="Google Shape;24;p5"/>
+          <p:cNvPr id="21" name="Google Shape;21;p5"/>
           <p:cNvSpPr txBox="1"/>
           <p:nvPr>
             <p:ph idx="12" type="sldNum"/>
@@ -3461,47 +4348,249 @@
           <a:prstGeom prst="rect">
             <a:avLst/>
           </a:prstGeom>
+          <a:noFill/>
+          <a:ln>
+            <a:noFill/>
+          </a:ln>
         </p:spPr>
         <p:txBody>
           <a:bodyPr anchorCtr="0" anchor="ctr" bIns="91425" lIns="91425" spcFirstLastPara="1" rIns="91425" wrap="square" tIns="91425">
             <a:normAutofit/>
           </a:bodyPr>
           <a:lstStyle>
-            <a:lvl1pPr lvl="0">
-              <a:buNone/>
-              <a:defRPr/>
+            <a:lvl1pPr indent="0" lvl="0" marL="0" marR="0" algn="r">
+              <a:lnSpc>
+                <a:spcPct val="100000"/>
+              </a:lnSpc>
+              <a:spcBef>
+                <a:spcPts val="0"/>
+              </a:spcBef>
+              <a:spcAft>
+                <a:spcPts val="0"/>
+              </a:spcAft>
+              <a:buClr>
+                <a:srgbClr val="000000"/>
+              </a:buClr>
+              <a:buSzPts val="1000"/>
+              <a:buFont typeface="Arial"/>
+              <a:buNone/>
+              <a:defRPr b="0" i="0" sz="1000" u="none" cap="none" strike="noStrike">
+                <a:solidFill>
+                  <a:schemeClr val="dk2"/>
+                </a:solidFill>
+                <a:latin typeface="Arial"/>
+                <a:ea typeface="Arial"/>
+                <a:cs typeface="Arial"/>
+                <a:sym typeface="Arial"/>
+              </a:defRPr>
             </a:lvl1pPr>
-            <a:lvl2pPr lvl="1">
-              <a:buNone/>
-              <a:defRPr/>
+            <a:lvl2pPr indent="0" lvl="1" marL="0" marR="0" algn="r">
+              <a:lnSpc>
+                <a:spcPct val="100000"/>
+              </a:lnSpc>
+              <a:spcBef>
+                <a:spcPts val="0"/>
+              </a:spcBef>
+              <a:spcAft>
+                <a:spcPts val="0"/>
+              </a:spcAft>
+              <a:buClr>
+                <a:srgbClr val="000000"/>
+              </a:buClr>
+              <a:buSzPts val="1000"/>
+              <a:buFont typeface="Arial"/>
+              <a:buNone/>
+              <a:defRPr b="0" i="0" sz="1000" u="none" cap="none" strike="noStrike">
+                <a:solidFill>
+                  <a:schemeClr val="dk2"/>
+                </a:solidFill>
+                <a:latin typeface="Arial"/>
+                <a:ea typeface="Arial"/>
+                <a:cs typeface="Arial"/>
+                <a:sym typeface="Arial"/>
+              </a:defRPr>
             </a:lvl2pPr>
-            <a:lvl3pPr lvl="2">
-              <a:buNone/>
-              <a:defRPr/>
+            <a:lvl3pPr indent="0" lvl="2" marL="0" marR="0" algn="r">
+              <a:lnSpc>
+                <a:spcPct val="100000"/>
+              </a:lnSpc>
+              <a:spcBef>
+                <a:spcPts val="0"/>
+              </a:spcBef>
+              <a:spcAft>
+                <a:spcPts val="0"/>
+              </a:spcAft>
+              <a:buClr>
+                <a:srgbClr val="000000"/>
+              </a:buClr>
+              <a:buSzPts val="1000"/>
+              <a:buFont typeface="Arial"/>
+              <a:buNone/>
+              <a:defRPr b="0" i="0" sz="1000" u="none" cap="none" strike="noStrike">
+                <a:solidFill>
+                  <a:schemeClr val="dk2"/>
+                </a:solidFill>
+                <a:latin typeface="Arial"/>
+                <a:ea typeface="Arial"/>
+                <a:cs typeface="Arial"/>
+                <a:sym typeface="Arial"/>
+              </a:defRPr>
             </a:lvl3pPr>
-            <a:lvl4pPr lvl="3">
-              <a:buNone/>
-              <a:defRPr/>
+            <a:lvl4pPr indent="0" lvl="3" marL="0" marR="0" algn="r">
+              <a:lnSpc>
+                <a:spcPct val="100000"/>
+              </a:lnSpc>
+              <a:spcBef>
+                <a:spcPts val="0"/>
+              </a:spcBef>
+              <a:spcAft>
+                <a:spcPts val="0"/>
+              </a:spcAft>
+              <a:buClr>
+                <a:srgbClr val="000000"/>
+              </a:buClr>
+              <a:buSzPts val="1000"/>
+              <a:buFont typeface="Arial"/>
+              <a:buNone/>
+              <a:defRPr b="0" i="0" sz="1000" u="none" cap="none" strike="noStrike">
+                <a:solidFill>
+                  <a:schemeClr val="dk2"/>
+                </a:solidFill>
+                <a:latin typeface="Arial"/>
+                <a:ea typeface="Arial"/>
+                <a:cs typeface="Arial"/>
+                <a:sym typeface="Arial"/>
+              </a:defRPr>
             </a:lvl4pPr>
-            <a:lvl5pPr lvl="4">
-              <a:buNone/>
-              <a:defRPr/>
+            <a:lvl5pPr indent="0" lvl="4" marL="0" marR="0" algn="r">
+              <a:lnSpc>
+                <a:spcPct val="100000"/>
+              </a:lnSpc>
+              <a:spcBef>
+                <a:spcPts val="0"/>
+              </a:spcBef>
+              <a:spcAft>
+                <a:spcPts val="0"/>
+              </a:spcAft>
+              <a:buClr>
+                <a:srgbClr val="000000"/>
+              </a:buClr>
+              <a:buSzPts val="1000"/>
+              <a:buFont typeface="Arial"/>
+              <a:buNone/>
+              <a:defRPr b="0" i="0" sz="1000" u="none" cap="none" strike="noStrike">
+                <a:solidFill>
+                  <a:schemeClr val="dk2"/>
+                </a:solidFill>
+                <a:latin typeface="Arial"/>
+                <a:ea typeface="Arial"/>
+                <a:cs typeface="Arial"/>
+                <a:sym typeface="Arial"/>
+              </a:defRPr>
             </a:lvl5pPr>
-            <a:lvl6pPr lvl="5">
-              <a:buNone/>
-              <a:defRPr/>
+            <a:lvl6pPr indent="0" lvl="5" marL="0" marR="0" algn="r">
+              <a:lnSpc>
+                <a:spcPct val="100000"/>
+              </a:lnSpc>
+              <a:spcBef>
+                <a:spcPts val="0"/>
+              </a:spcBef>
+              <a:spcAft>
+                <a:spcPts val="0"/>
+              </a:spcAft>
+              <a:buClr>
+                <a:srgbClr val="000000"/>
+              </a:buClr>
+              <a:buSzPts val="1000"/>
+              <a:buFont typeface="Arial"/>
+              <a:buNone/>
+              <a:defRPr b="0" i="0" sz="1000" u="none" cap="none" strike="noStrike">
+                <a:solidFill>
+                  <a:schemeClr val="dk2"/>
+                </a:solidFill>
+                <a:latin typeface="Arial"/>
+                <a:ea typeface="Arial"/>
+                <a:cs typeface="Arial"/>
+                <a:sym typeface="Arial"/>
+              </a:defRPr>
             </a:lvl6pPr>
-            <a:lvl7pPr lvl="6">
-              <a:buNone/>
-              <a:defRPr/>
+            <a:lvl7pPr indent="0" lvl="6" marL="0" marR="0" algn="r">
+              <a:lnSpc>
+                <a:spcPct val="100000"/>
+              </a:lnSpc>
+              <a:spcBef>
+                <a:spcPts val="0"/>
+              </a:spcBef>
+              <a:spcAft>
+                <a:spcPts val="0"/>
+              </a:spcAft>
+              <a:buClr>
+                <a:srgbClr val="000000"/>
+              </a:buClr>
+              <a:buSzPts val="1000"/>
+              <a:buFont typeface="Arial"/>
+              <a:buNone/>
+              <a:defRPr b="0" i="0" sz="1000" u="none" cap="none" strike="noStrike">
+                <a:solidFill>
+                  <a:schemeClr val="dk2"/>
+                </a:solidFill>
+                <a:latin typeface="Arial"/>
+                <a:ea typeface="Arial"/>
+                <a:cs typeface="Arial"/>
+                <a:sym typeface="Arial"/>
+              </a:defRPr>
             </a:lvl7pPr>
-            <a:lvl8pPr lvl="7">
-              <a:buNone/>
-              <a:defRPr/>
+            <a:lvl8pPr indent="0" lvl="7" marL="0" marR="0" algn="r">
+              <a:lnSpc>
+                <a:spcPct val="100000"/>
+              </a:lnSpc>
+              <a:spcBef>
+                <a:spcPts val="0"/>
+              </a:spcBef>
+              <a:spcAft>
+                <a:spcPts val="0"/>
+              </a:spcAft>
+              <a:buClr>
+                <a:srgbClr val="000000"/>
+              </a:buClr>
+              <a:buSzPts val="1000"/>
+              <a:buFont typeface="Arial"/>
+              <a:buNone/>
+              <a:defRPr b="0" i="0" sz="1000" u="none" cap="none" strike="noStrike">
+                <a:solidFill>
+                  <a:schemeClr val="dk2"/>
+                </a:solidFill>
+                <a:latin typeface="Arial"/>
+                <a:ea typeface="Arial"/>
+                <a:cs typeface="Arial"/>
+                <a:sym typeface="Arial"/>
+              </a:defRPr>
             </a:lvl8pPr>
-            <a:lvl9pPr lvl="8">
-              <a:buNone/>
-              <a:defRPr/>
+            <a:lvl9pPr indent="0" lvl="8" marL="0" marR="0" algn="r">
+              <a:lnSpc>
+                <a:spcPct val="100000"/>
+              </a:lnSpc>
+              <a:spcBef>
+                <a:spcPts val="0"/>
+              </a:spcBef>
+              <a:spcAft>
+                <a:spcPts val="0"/>
+              </a:spcAft>
+              <a:buClr>
+                <a:srgbClr val="000000"/>
+              </a:buClr>
+              <a:buSzPts val="1000"/>
+              <a:buFont typeface="Arial"/>
+              <a:buNone/>
+              <a:defRPr b="0" i="0" sz="1000" u="none" cap="none" strike="noStrike">
+                <a:solidFill>
+                  <a:schemeClr val="dk2"/>
+                </a:solidFill>
+                <a:latin typeface="Arial"/>
+                <a:ea typeface="Arial"/>
+                <a:cs typeface="Arial"/>
+                <a:sym typeface="Arial"/>
+              </a:defRPr>
             </a:lvl9pPr>
           </a:lstStyle>
           <a:p>
@@ -3531,11 +4620,11 @@
 </file>
 
 <file path=ppt/slideLayouts/slideLayout5.xml><?xml version="1.0" encoding="utf-8"?>
-<p:sldLayout xmlns:a="http://schemas.openxmlformats.org/drawingml/2006/main" xmlns:r="http://schemas.openxmlformats.org/officeDocument/2006/relationships" xmlns:mc="http://schemas.openxmlformats.org/markup-compatibility/2006" xmlns:mv="urn:schemas-microsoft-com:mac:vml" xmlns:p="http://schemas.openxmlformats.org/presentationml/2006/main" xmlns:c="http://schemas.openxmlformats.org/drawingml/2006/chart" xmlns:dgm="http://schemas.openxmlformats.org/drawingml/2006/diagram" xmlns:o="urn:schemas-microsoft-com:office:office" xmlns:v="urn:schemas-microsoft-com:vml" xmlns:pvml="urn:schemas-microsoft-com:office:powerpoint" xmlns:com="http://schemas.openxmlformats.org/drawingml/2006/compatibility" xmlns:p14="http://schemas.microsoft.com/office/powerpoint/2010/main" xmlns:p15="http://schemas.microsoft.com/office/powerpoint/2012/main" xmlns:ahyp="http://schemas.microsoft.com/office/drawing/2018/hyperlinkcolor" matchingName="Title only" type="titleOnly">
-  <p:cSld name="TITLE_ONLY">
+<p:sldLayout xmlns:a="http://schemas.openxmlformats.org/drawingml/2006/main" xmlns:r="http://schemas.openxmlformats.org/officeDocument/2006/relationships" xmlns:mc="http://schemas.openxmlformats.org/markup-compatibility/2006" xmlns:mv="urn:schemas-microsoft-com:mac:vml" xmlns:p="http://schemas.openxmlformats.org/presentationml/2006/main" xmlns:c="http://schemas.openxmlformats.org/drawingml/2006/chart" xmlns:dgm="http://schemas.openxmlformats.org/drawingml/2006/diagram" xmlns:o="urn:schemas-microsoft-com:office:office" xmlns:v="urn:schemas-microsoft-com:vml" xmlns:pvml="urn:schemas-microsoft-com:office:powerpoint" xmlns:com="http://schemas.openxmlformats.org/drawingml/2006/compatibility" xmlns:p14="http://schemas.microsoft.com/office/powerpoint/2010/main" xmlns:p15="http://schemas.microsoft.com/office/powerpoint/2012/main" xmlns:ahyp="http://schemas.microsoft.com/office/drawing/2018/hyperlinkcolor" matchingName="Title and two columns" type="twoColTx">
+  <p:cSld name="TITLE_AND_TWO_COLUMNS">
     <p:spTree>
       <p:nvGrpSpPr>
-        <p:cNvPr id="25" name="Shape 25"/>
+        <p:cNvPr id="22" name="Shape 22"/>
         <p:cNvGrpSpPr/>
         <p:nvPr/>
       </p:nvGrpSpPr>
@@ -3549,7 +4638,7 @@
       </p:grpSpPr>
       <p:sp>
         <p:nvSpPr>
-          <p:cNvPr id="26" name="Google Shape;26;p6"/>
+          <p:cNvPr id="23" name="Google Shape;23;p6"/>
           <p:cNvSpPr txBox="1"/>
           <p:nvPr>
             <p:ph type="title"/>
@@ -3563,13 +4652,20 @@
           <a:prstGeom prst="rect">
             <a:avLst/>
           </a:prstGeom>
+          <a:noFill/>
+          <a:ln>
+            <a:noFill/>
+          </a:ln>
         </p:spPr>
         <p:txBody>
           <a:bodyPr anchorCtr="0" anchor="t" bIns="91425" lIns="91425" spcFirstLastPara="1" rIns="91425" wrap="square" tIns="91425">
             <a:normAutofit/>
           </a:bodyPr>
           <a:lstStyle>
-            <a:lvl1pPr lvl="0">
+            <a:lvl1pPr lvl="0" algn="l">
+              <a:lnSpc>
+                <a:spcPct val="100000"/>
+              </a:lnSpc>
               <a:spcBef>
                 <a:spcPts val="0"/>
               </a:spcBef>
@@ -3580,7 +4676,10 @@
               <a:buNone/>
               <a:defRPr/>
             </a:lvl1pPr>
-            <a:lvl2pPr lvl="1">
+            <a:lvl2pPr lvl="1" algn="l">
+              <a:lnSpc>
+                <a:spcPct val="100000"/>
+              </a:lnSpc>
               <a:spcBef>
                 <a:spcPts val="0"/>
               </a:spcBef>
@@ -3591,7 +4690,10 @@
               <a:buNone/>
               <a:defRPr/>
             </a:lvl2pPr>
-            <a:lvl3pPr lvl="2">
+            <a:lvl3pPr lvl="2" algn="l">
+              <a:lnSpc>
+                <a:spcPct val="100000"/>
+              </a:lnSpc>
               <a:spcBef>
                 <a:spcPts val="0"/>
               </a:spcBef>
@@ -3602,7 +4704,10 @@
               <a:buNone/>
               <a:defRPr/>
             </a:lvl3pPr>
-            <a:lvl4pPr lvl="3">
+            <a:lvl4pPr lvl="3" algn="l">
+              <a:lnSpc>
+                <a:spcPct val="100000"/>
+              </a:lnSpc>
               <a:spcBef>
                 <a:spcPts val="0"/>
               </a:spcBef>
@@ -3613,7 +4718,10 @@
               <a:buNone/>
               <a:defRPr/>
             </a:lvl4pPr>
-            <a:lvl5pPr lvl="4">
+            <a:lvl5pPr lvl="4" algn="l">
+              <a:lnSpc>
+                <a:spcPct val="100000"/>
+              </a:lnSpc>
               <a:spcBef>
                 <a:spcPts val="0"/>
               </a:spcBef>
@@ -3624,7 +4732,10 @@
               <a:buNone/>
               <a:defRPr/>
             </a:lvl5pPr>
-            <a:lvl6pPr lvl="5">
+            <a:lvl6pPr lvl="5" algn="l">
+              <a:lnSpc>
+                <a:spcPct val="100000"/>
+              </a:lnSpc>
               <a:spcBef>
                 <a:spcPts val="0"/>
               </a:spcBef>
@@ -3635,7 +4746,10 @@
               <a:buNone/>
               <a:defRPr/>
             </a:lvl6pPr>
-            <a:lvl7pPr lvl="6">
+            <a:lvl7pPr lvl="6" algn="l">
+              <a:lnSpc>
+                <a:spcPct val="100000"/>
+              </a:lnSpc>
               <a:spcBef>
                 <a:spcPts val="0"/>
               </a:spcBef>
@@ -3646,7 +4760,10 @@
               <a:buNone/>
               <a:defRPr/>
             </a:lvl7pPr>
-            <a:lvl8pPr lvl="7">
+            <a:lvl8pPr lvl="7" algn="l">
+              <a:lnSpc>
+                <a:spcPct val="100000"/>
+              </a:lnSpc>
               <a:spcBef>
                 <a:spcPts val="0"/>
               </a:spcBef>
@@ -3657,7 +4774,10 @@
               <a:buNone/>
               <a:defRPr/>
             </a:lvl8pPr>
-            <a:lvl9pPr lvl="8">
+            <a:lvl9pPr lvl="8" algn="l">
+              <a:lnSpc>
+                <a:spcPct val="100000"/>
+              </a:lnSpc>
               <a:spcBef>
                 <a:spcPts val="0"/>
               </a:spcBef>
@@ -3674,7 +4794,319 @@
       </p:sp>
       <p:sp>
         <p:nvSpPr>
-          <p:cNvPr id="27" name="Google Shape;27;p6"/>
+          <p:cNvPr id="24" name="Google Shape;24;p6"/>
+          <p:cNvSpPr txBox="1"/>
+          <p:nvPr>
+            <p:ph idx="1" type="body"/>
+          </p:nvPr>
+        </p:nvSpPr>
+        <p:spPr>
+          <a:xfrm>
+            <a:off x="311700" y="1152475"/>
+            <a:ext cx="3999900" cy="3416400"/>
+          </a:xfrm>
+          <a:prstGeom prst="rect">
+            <a:avLst/>
+          </a:prstGeom>
+          <a:noFill/>
+          <a:ln>
+            <a:noFill/>
+          </a:ln>
+        </p:spPr>
+        <p:txBody>
+          <a:bodyPr anchorCtr="0" anchor="t" bIns="91425" lIns="91425" spcFirstLastPara="1" rIns="91425" wrap="square" tIns="91425">
+            <a:normAutofit/>
+          </a:bodyPr>
+          <a:lstStyle>
+            <a:lvl1pPr indent="-317500" lvl="0" marL="457200" algn="l">
+              <a:lnSpc>
+                <a:spcPct val="115000"/>
+              </a:lnSpc>
+              <a:spcBef>
+                <a:spcPts val="0"/>
+              </a:spcBef>
+              <a:spcAft>
+                <a:spcPts val="0"/>
+              </a:spcAft>
+              <a:buSzPts val="1400"/>
+              <a:buChar char="●"/>
+              <a:defRPr sz="1400"/>
+            </a:lvl1pPr>
+            <a:lvl2pPr indent="-304800" lvl="1" marL="914400" algn="l">
+              <a:lnSpc>
+                <a:spcPct val="115000"/>
+              </a:lnSpc>
+              <a:spcBef>
+                <a:spcPts val="0"/>
+              </a:spcBef>
+              <a:spcAft>
+                <a:spcPts val="0"/>
+              </a:spcAft>
+              <a:buSzPts val="1200"/>
+              <a:buChar char="○"/>
+              <a:defRPr sz="1200"/>
+            </a:lvl2pPr>
+            <a:lvl3pPr indent="-304800" lvl="2" marL="1371600" algn="l">
+              <a:lnSpc>
+                <a:spcPct val="115000"/>
+              </a:lnSpc>
+              <a:spcBef>
+                <a:spcPts val="0"/>
+              </a:spcBef>
+              <a:spcAft>
+                <a:spcPts val="0"/>
+              </a:spcAft>
+              <a:buSzPts val="1200"/>
+              <a:buChar char="■"/>
+              <a:defRPr sz="1200"/>
+            </a:lvl3pPr>
+            <a:lvl4pPr indent="-304800" lvl="3" marL="1828800" algn="l">
+              <a:lnSpc>
+                <a:spcPct val="115000"/>
+              </a:lnSpc>
+              <a:spcBef>
+                <a:spcPts val="0"/>
+              </a:spcBef>
+              <a:spcAft>
+                <a:spcPts val="0"/>
+              </a:spcAft>
+              <a:buSzPts val="1200"/>
+              <a:buChar char="●"/>
+              <a:defRPr sz="1200"/>
+            </a:lvl4pPr>
+            <a:lvl5pPr indent="-304800" lvl="4" marL="2286000" algn="l">
+              <a:lnSpc>
+                <a:spcPct val="115000"/>
+              </a:lnSpc>
+              <a:spcBef>
+                <a:spcPts val="0"/>
+              </a:spcBef>
+              <a:spcAft>
+                <a:spcPts val="0"/>
+              </a:spcAft>
+              <a:buSzPts val="1200"/>
+              <a:buChar char="○"/>
+              <a:defRPr sz="1200"/>
+            </a:lvl5pPr>
+            <a:lvl6pPr indent="-304800" lvl="5" marL="2743200" algn="l">
+              <a:lnSpc>
+                <a:spcPct val="115000"/>
+              </a:lnSpc>
+              <a:spcBef>
+                <a:spcPts val="0"/>
+              </a:spcBef>
+              <a:spcAft>
+                <a:spcPts val="0"/>
+              </a:spcAft>
+              <a:buSzPts val="1200"/>
+              <a:buChar char="■"/>
+              <a:defRPr sz="1200"/>
+            </a:lvl6pPr>
+            <a:lvl7pPr indent="-304800" lvl="6" marL="3200400" algn="l">
+              <a:lnSpc>
+                <a:spcPct val="115000"/>
+              </a:lnSpc>
+              <a:spcBef>
+                <a:spcPts val="0"/>
+              </a:spcBef>
+              <a:spcAft>
+                <a:spcPts val="0"/>
+              </a:spcAft>
+              <a:buSzPts val="1200"/>
+              <a:buChar char="●"/>
+              <a:defRPr sz="1200"/>
+            </a:lvl7pPr>
+            <a:lvl8pPr indent="-304800" lvl="7" marL="3657600" algn="l">
+              <a:lnSpc>
+                <a:spcPct val="115000"/>
+              </a:lnSpc>
+              <a:spcBef>
+                <a:spcPts val="0"/>
+              </a:spcBef>
+              <a:spcAft>
+                <a:spcPts val="0"/>
+              </a:spcAft>
+              <a:buSzPts val="1200"/>
+              <a:buChar char="○"/>
+              <a:defRPr sz="1200"/>
+            </a:lvl8pPr>
+            <a:lvl9pPr indent="-304800" lvl="8" marL="4114800" algn="l">
+              <a:lnSpc>
+                <a:spcPct val="115000"/>
+              </a:lnSpc>
+              <a:spcBef>
+                <a:spcPts val="0"/>
+              </a:spcBef>
+              <a:spcAft>
+                <a:spcPts val="0"/>
+              </a:spcAft>
+              <a:buSzPts val="1200"/>
+              <a:buChar char="■"/>
+              <a:defRPr sz="1200"/>
+            </a:lvl9pPr>
+          </a:lstStyle>
+          <a:p/>
+        </p:txBody>
+      </p:sp>
+      <p:sp>
+        <p:nvSpPr>
+          <p:cNvPr id="25" name="Google Shape;25;p6"/>
+          <p:cNvSpPr txBox="1"/>
+          <p:nvPr>
+            <p:ph idx="2" type="body"/>
+          </p:nvPr>
+        </p:nvSpPr>
+        <p:spPr>
+          <a:xfrm>
+            <a:off x="4832400" y="1152475"/>
+            <a:ext cx="3999900" cy="3416400"/>
+          </a:xfrm>
+          <a:prstGeom prst="rect">
+            <a:avLst/>
+          </a:prstGeom>
+          <a:noFill/>
+          <a:ln>
+            <a:noFill/>
+          </a:ln>
+        </p:spPr>
+        <p:txBody>
+          <a:bodyPr anchorCtr="0" anchor="t" bIns="91425" lIns="91425" spcFirstLastPara="1" rIns="91425" wrap="square" tIns="91425">
+            <a:normAutofit/>
+          </a:bodyPr>
+          <a:lstStyle>
+            <a:lvl1pPr indent="-317500" lvl="0" marL="457200" algn="l">
+              <a:lnSpc>
+                <a:spcPct val="115000"/>
+              </a:lnSpc>
+              <a:spcBef>
+                <a:spcPts val="0"/>
+              </a:spcBef>
+              <a:spcAft>
+                <a:spcPts val="0"/>
+              </a:spcAft>
+              <a:buSzPts val="1400"/>
+              <a:buChar char="●"/>
+              <a:defRPr sz="1400"/>
+            </a:lvl1pPr>
+            <a:lvl2pPr indent="-304800" lvl="1" marL="914400" algn="l">
+              <a:lnSpc>
+                <a:spcPct val="115000"/>
+              </a:lnSpc>
+              <a:spcBef>
+                <a:spcPts val="0"/>
+              </a:spcBef>
+              <a:spcAft>
+                <a:spcPts val="0"/>
+              </a:spcAft>
+              <a:buSzPts val="1200"/>
+              <a:buChar char="○"/>
+              <a:defRPr sz="1200"/>
+            </a:lvl2pPr>
+            <a:lvl3pPr indent="-304800" lvl="2" marL="1371600" algn="l">
+              <a:lnSpc>
+                <a:spcPct val="115000"/>
+              </a:lnSpc>
+              <a:spcBef>
+                <a:spcPts val="0"/>
+              </a:spcBef>
+              <a:spcAft>
+                <a:spcPts val="0"/>
+              </a:spcAft>
+              <a:buSzPts val="1200"/>
+              <a:buChar char="■"/>
+              <a:defRPr sz="1200"/>
+            </a:lvl3pPr>
+            <a:lvl4pPr indent="-304800" lvl="3" marL="1828800" algn="l">
+              <a:lnSpc>
+                <a:spcPct val="115000"/>
+              </a:lnSpc>
+              <a:spcBef>
+                <a:spcPts val="0"/>
+              </a:spcBef>
+              <a:spcAft>
+                <a:spcPts val="0"/>
+              </a:spcAft>
+              <a:buSzPts val="1200"/>
+              <a:buChar char="●"/>
+              <a:defRPr sz="1200"/>
+            </a:lvl4pPr>
+            <a:lvl5pPr indent="-304800" lvl="4" marL="2286000" algn="l">
+              <a:lnSpc>
+                <a:spcPct val="115000"/>
+              </a:lnSpc>
+              <a:spcBef>
+                <a:spcPts val="0"/>
+              </a:spcBef>
+              <a:spcAft>
+                <a:spcPts val="0"/>
+              </a:spcAft>
+              <a:buSzPts val="1200"/>
+              <a:buChar char="○"/>
+              <a:defRPr sz="1200"/>
+            </a:lvl5pPr>
+            <a:lvl6pPr indent="-304800" lvl="5" marL="2743200" algn="l">
+              <a:lnSpc>
+                <a:spcPct val="115000"/>
+              </a:lnSpc>
+              <a:spcBef>
+                <a:spcPts val="0"/>
+              </a:spcBef>
+              <a:spcAft>
+                <a:spcPts val="0"/>
+              </a:spcAft>
+              <a:buSzPts val="1200"/>
+              <a:buChar char="■"/>
+              <a:defRPr sz="1200"/>
+            </a:lvl6pPr>
+            <a:lvl7pPr indent="-304800" lvl="6" marL="3200400" algn="l">
+              <a:lnSpc>
+                <a:spcPct val="115000"/>
+              </a:lnSpc>
+              <a:spcBef>
+                <a:spcPts val="0"/>
+              </a:spcBef>
+              <a:spcAft>
+                <a:spcPts val="0"/>
+              </a:spcAft>
+              <a:buSzPts val="1200"/>
+              <a:buChar char="●"/>
+              <a:defRPr sz="1200"/>
+            </a:lvl7pPr>
+            <a:lvl8pPr indent="-304800" lvl="7" marL="3657600" algn="l">
+              <a:lnSpc>
+                <a:spcPct val="115000"/>
+              </a:lnSpc>
+              <a:spcBef>
+                <a:spcPts val="0"/>
+              </a:spcBef>
+              <a:spcAft>
+                <a:spcPts val="0"/>
+              </a:spcAft>
+              <a:buSzPts val="1200"/>
+              <a:buChar char="○"/>
+              <a:defRPr sz="1200"/>
+            </a:lvl8pPr>
+            <a:lvl9pPr indent="-304800" lvl="8" marL="4114800" algn="l">
+              <a:lnSpc>
+                <a:spcPct val="115000"/>
+              </a:lnSpc>
+              <a:spcBef>
+                <a:spcPts val="0"/>
+              </a:spcBef>
+              <a:spcAft>
+                <a:spcPts val="0"/>
+              </a:spcAft>
+              <a:buSzPts val="1200"/>
+              <a:buChar char="■"/>
+              <a:defRPr sz="1200"/>
+            </a:lvl9pPr>
+          </a:lstStyle>
+          <a:p/>
+        </p:txBody>
+      </p:sp>
+      <p:sp>
+        <p:nvSpPr>
+          <p:cNvPr id="26" name="Google Shape;26;p6"/>
           <p:cNvSpPr txBox="1"/>
           <p:nvPr>
             <p:ph idx="12" type="sldNum"/>
@@ -3688,47 +5120,249 @@
           <a:prstGeom prst="rect">
             <a:avLst/>
           </a:prstGeom>
+          <a:noFill/>
+          <a:ln>
+            <a:noFill/>
+          </a:ln>
         </p:spPr>
         <p:txBody>
           <a:bodyPr anchorCtr="0" anchor="ctr" bIns="91425" lIns="91425" spcFirstLastPara="1" rIns="91425" wrap="square" tIns="91425">
             <a:normAutofit/>
           </a:bodyPr>
           <a:lstStyle>
-            <a:lvl1pPr lvl="0">
-              <a:buNone/>
-              <a:defRPr/>
+            <a:lvl1pPr indent="0" lvl="0" marL="0" marR="0" algn="r">
+              <a:lnSpc>
+                <a:spcPct val="100000"/>
+              </a:lnSpc>
+              <a:spcBef>
+                <a:spcPts val="0"/>
+              </a:spcBef>
+              <a:spcAft>
+                <a:spcPts val="0"/>
+              </a:spcAft>
+              <a:buClr>
+                <a:srgbClr val="000000"/>
+              </a:buClr>
+              <a:buSzPts val="1000"/>
+              <a:buFont typeface="Arial"/>
+              <a:buNone/>
+              <a:defRPr b="0" i="0" sz="1000" u="none" cap="none" strike="noStrike">
+                <a:solidFill>
+                  <a:schemeClr val="dk2"/>
+                </a:solidFill>
+                <a:latin typeface="Arial"/>
+                <a:ea typeface="Arial"/>
+                <a:cs typeface="Arial"/>
+                <a:sym typeface="Arial"/>
+              </a:defRPr>
             </a:lvl1pPr>
-            <a:lvl2pPr lvl="1">
-              <a:buNone/>
-              <a:defRPr/>
+            <a:lvl2pPr indent="0" lvl="1" marL="0" marR="0" algn="r">
+              <a:lnSpc>
+                <a:spcPct val="100000"/>
+              </a:lnSpc>
+              <a:spcBef>
+                <a:spcPts val="0"/>
+              </a:spcBef>
+              <a:spcAft>
+                <a:spcPts val="0"/>
+              </a:spcAft>
+              <a:buClr>
+                <a:srgbClr val="000000"/>
+              </a:buClr>
+              <a:buSzPts val="1000"/>
+              <a:buFont typeface="Arial"/>
+              <a:buNone/>
+              <a:defRPr b="0" i="0" sz="1000" u="none" cap="none" strike="noStrike">
+                <a:solidFill>
+                  <a:schemeClr val="dk2"/>
+                </a:solidFill>
+                <a:latin typeface="Arial"/>
+                <a:ea typeface="Arial"/>
+                <a:cs typeface="Arial"/>
+                <a:sym typeface="Arial"/>
+              </a:defRPr>
             </a:lvl2pPr>
-            <a:lvl3pPr lvl="2">
-              <a:buNone/>
-              <a:defRPr/>
+            <a:lvl3pPr indent="0" lvl="2" marL="0" marR="0" algn="r">
+              <a:lnSpc>
+                <a:spcPct val="100000"/>
+              </a:lnSpc>
+              <a:spcBef>
+                <a:spcPts val="0"/>
+              </a:spcBef>
+              <a:spcAft>
+                <a:spcPts val="0"/>
+              </a:spcAft>
+              <a:buClr>
+                <a:srgbClr val="000000"/>
+              </a:buClr>
+              <a:buSzPts val="1000"/>
+              <a:buFont typeface="Arial"/>
+              <a:buNone/>
+              <a:defRPr b="0" i="0" sz="1000" u="none" cap="none" strike="noStrike">
+                <a:solidFill>
+                  <a:schemeClr val="dk2"/>
+                </a:solidFill>
+                <a:latin typeface="Arial"/>
+                <a:ea typeface="Arial"/>
+                <a:cs typeface="Arial"/>
+                <a:sym typeface="Arial"/>
+              </a:defRPr>
             </a:lvl3pPr>
-            <a:lvl4pPr lvl="3">
-              <a:buNone/>
-              <a:defRPr/>
+            <a:lvl4pPr indent="0" lvl="3" marL="0" marR="0" algn="r">
+              <a:lnSpc>
+                <a:spcPct val="100000"/>
+              </a:lnSpc>
+              <a:spcBef>
+                <a:spcPts val="0"/>
+              </a:spcBef>
+              <a:spcAft>
+                <a:spcPts val="0"/>
+              </a:spcAft>
+              <a:buClr>
+                <a:srgbClr val="000000"/>
+              </a:buClr>
+              <a:buSzPts val="1000"/>
+              <a:buFont typeface="Arial"/>
+              <a:buNone/>
+              <a:defRPr b="0" i="0" sz="1000" u="none" cap="none" strike="noStrike">
+                <a:solidFill>
+                  <a:schemeClr val="dk2"/>
+                </a:solidFill>
+                <a:latin typeface="Arial"/>
+                <a:ea typeface="Arial"/>
+                <a:cs typeface="Arial"/>
+                <a:sym typeface="Arial"/>
+              </a:defRPr>
             </a:lvl4pPr>
-            <a:lvl5pPr lvl="4">
-              <a:buNone/>
-              <a:defRPr/>
+            <a:lvl5pPr indent="0" lvl="4" marL="0" marR="0" algn="r">
+              <a:lnSpc>
+                <a:spcPct val="100000"/>
+              </a:lnSpc>
+              <a:spcBef>
+                <a:spcPts val="0"/>
+              </a:spcBef>
+              <a:spcAft>
+                <a:spcPts val="0"/>
+              </a:spcAft>
+              <a:buClr>
+                <a:srgbClr val="000000"/>
+              </a:buClr>
+              <a:buSzPts val="1000"/>
+              <a:buFont typeface="Arial"/>
+              <a:buNone/>
+              <a:defRPr b="0" i="0" sz="1000" u="none" cap="none" strike="noStrike">
+                <a:solidFill>
+                  <a:schemeClr val="dk2"/>
+                </a:solidFill>
+                <a:latin typeface="Arial"/>
+                <a:ea typeface="Arial"/>
+                <a:cs typeface="Arial"/>
+                <a:sym typeface="Arial"/>
+              </a:defRPr>
             </a:lvl5pPr>
-            <a:lvl6pPr lvl="5">
-              <a:buNone/>
-              <a:defRPr/>
+            <a:lvl6pPr indent="0" lvl="5" marL="0" marR="0" algn="r">
+              <a:lnSpc>
+                <a:spcPct val="100000"/>
+              </a:lnSpc>
+              <a:spcBef>
+                <a:spcPts val="0"/>
+              </a:spcBef>
+              <a:spcAft>
+                <a:spcPts val="0"/>
+              </a:spcAft>
+              <a:buClr>
+                <a:srgbClr val="000000"/>
+              </a:buClr>
+              <a:buSzPts val="1000"/>
+              <a:buFont typeface="Arial"/>
+              <a:buNone/>
+              <a:defRPr b="0" i="0" sz="1000" u="none" cap="none" strike="noStrike">
+                <a:solidFill>
+                  <a:schemeClr val="dk2"/>
+                </a:solidFill>
+                <a:latin typeface="Arial"/>
+                <a:ea typeface="Arial"/>
+                <a:cs typeface="Arial"/>
+                <a:sym typeface="Arial"/>
+              </a:defRPr>
             </a:lvl6pPr>
-            <a:lvl7pPr lvl="6">
-              <a:buNone/>
-              <a:defRPr/>
+            <a:lvl7pPr indent="0" lvl="6" marL="0" marR="0" algn="r">
+              <a:lnSpc>
+                <a:spcPct val="100000"/>
+              </a:lnSpc>
+              <a:spcBef>
+                <a:spcPts val="0"/>
+              </a:spcBef>
+              <a:spcAft>
+                <a:spcPts val="0"/>
+              </a:spcAft>
+              <a:buClr>
+                <a:srgbClr val="000000"/>
+              </a:buClr>
+              <a:buSzPts val="1000"/>
+              <a:buFont typeface="Arial"/>
+              <a:buNone/>
+              <a:defRPr b="0" i="0" sz="1000" u="none" cap="none" strike="noStrike">
+                <a:solidFill>
+                  <a:schemeClr val="dk2"/>
+                </a:solidFill>
+                <a:latin typeface="Arial"/>
+                <a:ea typeface="Arial"/>
+                <a:cs typeface="Arial"/>
+                <a:sym typeface="Arial"/>
+              </a:defRPr>
             </a:lvl7pPr>
-            <a:lvl8pPr lvl="7">
-              <a:buNone/>
-              <a:defRPr/>
+            <a:lvl8pPr indent="0" lvl="7" marL="0" marR="0" algn="r">
+              <a:lnSpc>
+                <a:spcPct val="100000"/>
+              </a:lnSpc>
+              <a:spcBef>
+                <a:spcPts val="0"/>
+              </a:spcBef>
+              <a:spcAft>
+                <a:spcPts val="0"/>
+              </a:spcAft>
+              <a:buClr>
+                <a:srgbClr val="000000"/>
+              </a:buClr>
+              <a:buSzPts val="1000"/>
+              <a:buFont typeface="Arial"/>
+              <a:buNone/>
+              <a:defRPr b="0" i="0" sz="1000" u="none" cap="none" strike="noStrike">
+                <a:solidFill>
+                  <a:schemeClr val="dk2"/>
+                </a:solidFill>
+                <a:latin typeface="Arial"/>
+                <a:ea typeface="Arial"/>
+                <a:cs typeface="Arial"/>
+                <a:sym typeface="Arial"/>
+              </a:defRPr>
             </a:lvl8pPr>
-            <a:lvl9pPr lvl="8">
-              <a:buNone/>
-              <a:defRPr/>
+            <a:lvl9pPr indent="0" lvl="8" marL="0" marR="0" algn="r">
+              <a:lnSpc>
+                <a:spcPct val="100000"/>
+              </a:lnSpc>
+              <a:spcBef>
+                <a:spcPts val="0"/>
+              </a:spcBef>
+              <a:spcAft>
+                <a:spcPts val="0"/>
+              </a:spcAft>
+              <a:buClr>
+                <a:srgbClr val="000000"/>
+              </a:buClr>
+              <a:buSzPts val="1000"/>
+              <a:buFont typeface="Arial"/>
+              <a:buNone/>
+              <a:defRPr b="0" i="0" sz="1000" u="none" cap="none" strike="noStrike">
+                <a:solidFill>
+                  <a:schemeClr val="dk2"/>
+                </a:solidFill>
+                <a:latin typeface="Arial"/>
+                <a:ea typeface="Arial"/>
+                <a:cs typeface="Arial"/>
+                <a:sym typeface="Arial"/>
+              </a:defRPr>
             </a:lvl9pPr>
           </a:lstStyle>
           <a:p>
@@ -3758,11 +5392,11 @@
 </file>
 
 <file path=ppt/slideLayouts/slideLayout6.xml><?xml version="1.0" encoding="utf-8"?>
-<p:sldLayout xmlns:a="http://schemas.openxmlformats.org/drawingml/2006/main" xmlns:r="http://schemas.openxmlformats.org/officeDocument/2006/relationships" xmlns:mc="http://schemas.openxmlformats.org/markup-compatibility/2006" xmlns:mv="urn:schemas-microsoft-com:mac:vml" xmlns:p="http://schemas.openxmlformats.org/presentationml/2006/main" xmlns:c="http://schemas.openxmlformats.org/drawingml/2006/chart" xmlns:dgm="http://schemas.openxmlformats.org/drawingml/2006/diagram" xmlns:o="urn:schemas-microsoft-com:office:office" xmlns:v="urn:schemas-microsoft-com:vml" xmlns:pvml="urn:schemas-microsoft-com:office:powerpoint" xmlns:com="http://schemas.openxmlformats.org/drawingml/2006/compatibility" xmlns:p14="http://schemas.microsoft.com/office/powerpoint/2010/main" xmlns:p15="http://schemas.microsoft.com/office/powerpoint/2012/main" xmlns:ahyp="http://schemas.microsoft.com/office/drawing/2018/hyperlinkcolor" matchingName="One column text">
-  <p:cSld name="ONE_COLUMN_TEXT">
+<p:sldLayout xmlns:a="http://schemas.openxmlformats.org/drawingml/2006/main" xmlns:r="http://schemas.openxmlformats.org/officeDocument/2006/relationships" xmlns:mc="http://schemas.openxmlformats.org/markup-compatibility/2006" xmlns:mv="urn:schemas-microsoft-com:mac:vml" xmlns:p="http://schemas.openxmlformats.org/presentationml/2006/main" xmlns:c="http://schemas.openxmlformats.org/drawingml/2006/chart" xmlns:dgm="http://schemas.openxmlformats.org/drawingml/2006/diagram" xmlns:o="urn:schemas-microsoft-com:office:office" xmlns:v="urn:schemas-microsoft-com:vml" xmlns:pvml="urn:schemas-microsoft-com:office:powerpoint" xmlns:com="http://schemas.openxmlformats.org/drawingml/2006/compatibility" xmlns:p14="http://schemas.microsoft.com/office/powerpoint/2010/main" xmlns:p15="http://schemas.microsoft.com/office/powerpoint/2012/main" xmlns:ahyp="http://schemas.microsoft.com/office/drawing/2018/hyperlinkcolor" matchingName="Title only" type="titleOnly">
+  <p:cSld name="TITLE_ONLY">
     <p:spTree>
       <p:nvGrpSpPr>
-        <p:cNvPr id="28" name="Shape 28"/>
+        <p:cNvPr id="27" name="Shape 27"/>
         <p:cNvGrpSpPr/>
         <p:nvPr/>
       </p:nvGrpSpPr>
@@ -3776,7 +5410,7 @@
       </p:grpSpPr>
       <p:sp>
         <p:nvSpPr>
-          <p:cNvPr id="29" name="Google Shape;29;p7"/>
+          <p:cNvPr id="28" name="Google Shape;28;p7"/>
           <p:cNvSpPr txBox="1"/>
           <p:nvPr>
             <p:ph type="title"/>
@@ -3784,116 +5418,147 @@
         </p:nvSpPr>
         <p:spPr>
           <a:xfrm>
-            <a:off x="311700" y="555600"/>
-            <a:ext cx="2808000" cy="755700"/>
+            <a:off x="311700" y="445025"/>
+            <a:ext cx="8520600" cy="572700"/>
           </a:xfrm>
           <a:prstGeom prst="rect">
             <a:avLst/>
           </a:prstGeom>
+          <a:noFill/>
+          <a:ln>
+            <a:noFill/>
+          </a:ln>
         </p:spPr>
         <p:txBody>
-          <a:bodyPr anchorCtr="0" anchor="b" bIns="91425" lIns="91425" spcFirstLastPara="1" rIns="91425" wrap="square" tIns="91425">
+          <a:bodyPr anchorCtr="0" anchor="t" bIns="91425" lIns="91425" spcFirstLastPara="1" rIns="91425" wrap="square" tIns="91425">
             <a:normAutofit/>
           </a:bodyPr>
           <a:lstStyle>
-            <a:lvl1pPr lvl="0">
-              <a:spcBef>
-                <a:spcPts val="0"/>
-              </a:spcBef>
-              <a:spcAft>
-                <a:spcPts val="0"/>
-              </a:spcAft>
-              <a:buSzPts val="2400"/>
-              <a:buNone/>
-              <a:defRPr sz="2400"/>
+            <a:lvl1pPr lvl="0" algn="l">
+              <a:lnSpc>
+                <a:spcPct val="100000"/>
+              </a:lnSpc>
+              <a:spcBef>
+                <a:spcPts val="0"/>
+              </a:spcBef>
+              <a:spcAft>
+                <a:spcPts val="0"/>
+              </a:spcAft>
+              <a:buSzPts val="2800"/>
+              <a:buNone/>
+              <a:defRPr/>
             </a:lvl1pPr>
-            <a:lvl2pPr lvl="1">
-              <a:spcBef>
-                <a:spcPts val="0"/>
-              </a:spcBef>
-              <a:spcAft>
-                <a:spcPts val="0"/>
-              </a:spcAft>
-              <a:buSzPts val="2400"/>
-              <a:buNone/>
-              <a:defRPr sz="2400"/>
+            <a:lvl2pPr lvl="1" algn="l">
+              <a:lnSpc>
+                <a:spcPct val="100000"/>
+              </a:lnSpc>
+              <a:spcBef>
+                <a:spcPts val="0"/>
+              </a:spcBef>
+              <a:spcAft>
+                <a:spcPts val="0"/>
+              </a:spcAft>
+              <a:buSzPts val="2800"/>
+              <a:buNone/>
+              <a:defRPr/>
             </a:lvl2pPr>
-            <a:lvl3pPr lvl="2">
-              <a:spcBef>
-                <a:spcPts val="0"/>
-              </a:spcBef>
-              <a:spcAft>
-                <a:spcPts val="0"/>
-              </a:spcAft>
-              <a:buSzPts val="2400"/>
-              <a:buNone/>
-              <a:defRPr sz="2400"/>
+            <a:lvl3pPr lvl="2" algn="l">
+              <a:lnSpc>
+                <a:spcPct val="100000"/>
+              </a:lnSpc>
+              <a:spcBef>
+                <a:spcPts val="0"/>
+              </a:spcBef>
+              <a:spcAft>
+                <a:spcPts val="0"/>
+              </a:spcAft>
+              <a:buSzPts val="2800"/>
+              <a:buNone/>
+              <a:defRPr/>
             </a:lvl3pPr>
-            <a:lvl4pPr lvl="3">
-              <a:spcBef>
-                <a:spcPts val="0"/>
-              </a:spcBef>
-              <a:spcAft>
-                <a:spcPts val="0"/>
-              </a:spcAft>
-              <a:buSzPts val="2400"/>
-              <a:buNone/>
-              <a:defRPr sz="2400"/>
+            <a:lvl4pPr lvl="3" algn="l">
+              <a:lnSpc>
+                <a:spcPct val="100000"/>
+              </a:lnSpc>
+              <a:spcBef>
+                <a:spcPts val="0"/>
+              </a:spcBef>
+              <a:spcAft>
+                <a:spcPts val="0"/>
+              </a:spcAft>
+              <a:buSzPts val="2800"/>
+              <a:buNone/>
+              <a:defRPr/>
             </a:lvl4pPr>
-            <a:lvl5pPr lvl="4">
-              <a:spcBef>
-                <a:spcPts val="0"/>
-              </a:spcBef>
-              <a:spcAft>
-                <a:spcPts val="0"/>
-              </a:spcAft>
-              <a:buSzPts val="2400"/>
-              <a:buNone/>
-              <a:defRPr sz="2400"/>
+            <a:lvl5pPr lvl="4" algn="l">
+              <a:lnSpc>
+                <a:spcPct val="100000"/>
+              </a:lnSpc>
+              <a:spcBef>
+                <a:spcPts val="0"/>
+              </a:spcBef>
+              <a:spcAft>
+                <a:spcPts val="0"/>
+              </a:spcAft>
+              <a:buSzPts val="2800"/>
+              <a:buNone/>
+              <a:defRPr/>
             </a:lvl5pPr>
-            <a:lvl6pPr lvl="5">
-              <a:spcBef>
-                <a:spcPts val="0"/>
-              </a:spcBef>
-              <a:spcAft>
-                <a:spcPts val="0"/>
-              </a:spcAft>
-              <a:buSzPts val="2400"/>
-              <a:buNone/>
-              <a:defRPr sz="2400"/>
+            <a:lvl6pPr lvl="5" algn="l">
+              <a:lnSpc>
+                <a:spcPct val="100000"/>
+              </a:lnSpc>
+              <a:spcBef>
+                <a:spcPts val="0"/>
+              </a:spcBef>
+              <a:spcAft>
+                <a:spcPts val="0"/>
+              </a:spcAft>
+              <a:buSzPts val="2800"/>
+              <a:buNone/>
+              <a:defRPr/>
             </a:lvl6pPr>
-            <a:lvl7pPr lvl="6">
-              <a:spcBef>
-                <a:spcPts val="0"/>
-              </a:spcBef>
-              <a:spcAft>
-                <a:spcPts val="0"/>
-              </a:spcAft>
-              <a:buSzPts val="2400"/>
-              <a:buNone/>
-              <a:defRPr sz="2400"/>
+            <a:lvl7pPr lvl="6" algn="l">
+              <a:lnSpc>
+                <a:spcPct val="100000"/>
+              </a:lnSpc>
+              <a:spcBef>
+                <a:spcPts val="0"/>
+              </a:spcBef>
+              <a:spcAft>
+                <a:spcPts val="0"/>
+              </a:spcAft>
+              <a:buSzPts val="2800"/>
+              <a:buNone/>
+              <a:defRPr/>
             </a:lvl7pPr>
-            <a:lvl8pPr lvl="7">
-              <a:spcBef>
-                <a:spcPts val="0"/>
-              </a:spcBef>
-              <a:spcAft>
-                <a:spcPts val="0"/>
-              </a:spcAft>
-              <a:buSzPts val="2400"/>
-              <a:buNone/>
-              <a:defRPr sz="2400"/>
+            <a:lvl8pPr lvl="7" algn="l">
+              <a:lnSpc>
+                <a:spcPct val="100000"/>
+              </a:lnSpc>
+              <a:spcBef>
+                <a:spcPts val="0"/>
+              </a:spcBef>
+              <a:spcAft>
+                <a:spcPts val="0"/>
+              </a:spcAft>
+              <a:buSzPts val="2800"/>
+              <a:buNone/>
+              <a:defRPr/>
             </a:lvl8pPr>
-            <a:lvl9pPr lvl="8">
-              <a:spcBef>
-                <a:spcPts val="0"/>
-              </a:spcBef>
-              <a:spcAft>
-                <a:spcPts val="0"/>
-              </a:spcAft>
-              <a:buSzPts val="2400"/>
-              <a:buNone/>
-              <a:defRPr sz="2400"/>
+            <a:lvl9pPr lvl="8" algn="l">
+              <a:lnSpc>
+                <a:spcPct val="100000"/>
+              </a:lnSpc>
+              <a:spcBef>
+                <a:spcPts val="0"/>
+              </a:spcBef>
+              <a:spcAft>
+                <a:spcPts val="0"/>
+              </a:spcAft>
+              <a:buSzPts val="2800"/>
+              <a:buNone/>
+              <a:defRPr/>
             </a:lvl9pPr>
           </a:lstStyle>
           <a:p/>
@@ -3901,132 +5566,7 @@
       </p:sp>
       <p:sp>
         <p:nvSpPr>
-          <p:cNvPr id="30" name="Google Shape;30;p7"/>
-          <p:cNvSpPr txBox="1"/>
-          <p:nvPr>
-            <p:ph idx="1" type="body"/>
-          </p:nvPr>
-        </p:nvSpPr>
-        <p:spPr>
-          <a:xfrm>
-            <a:off x="311700" y="1389600"/>
-            <a:ext cx="2808000" cy="3179400"/>
-          </a:xfrm>
-          <a:prstGeom prst="rect">
-            <a:avLst/>
-          </a:prstGeom>
-        </p:spPr>
-        <p:txBody>
-          <a:bodyPr anchorCtr="0" anchor="t" bIns="91425" lIns="91425" spcFirstLastPara="1" rIns="91425" wrap="square" tIns="91425">
-            <a:normAutofit/>
-          </a:bodyPr>
-          <a:lstStyle>
-            <a:lvl1pPr indent="-304800" lvl="0" marL="457200">
-              <a:spcBef>
-                <a:spcPts val="0"/>
-              </a:spcBef>
-              <a:spcAft>
-                <a:spcPts val="0"/>
-              </a:spcAft>
-              <a:buSzPts val="1200"/>
-              <a:buChar char="●"/>
-              <a:defRPr sz="1200"/>
-            </a:lvl1pPr>
-            <a:lvl2pPr indent="-304800" lvl="1" marL="914400">
-              <a:spcBef>
-                <a:spcPts val="0"/>
-              </a:spcBef>
-              <a:spcAft>
-                <a:spcPts val="0"/>
-              </a:spcAft>
-              <a:buSzPts val="1200"/>
-              <a:buChar char="○"/>
-              <a:defRPr sz="1200"/>
-            </a:lvl2pPr>
-            <a:lvl3pPr indent="-304800" lvl="2" marL="1371600">
-              <a:spcBef>
-                <a:spcPts val="0"/>
-              </a:spcBef>
-              <a:spcAft>
-                <a:spcPts val="0"/>
-              </a:spcAft>
-              <a:buSzPts val="1200"/>
-              <a:buChar char="■"/>
-              <a:defRPr sz="1200"/>
-            </a:lvl3pPr>
-            <a:lvl4pPr indent="-304800" lvl="3" marL="1828800">
-              <a:spcBef>
-                <a:spcPts val="0"/>
-              </a:spcBef>
-              <a:spcAft>
-                <a:spcPts val="0"/>
-              </a:spcAft>
-              <a:buSzPts val="1200"/>
-              <a:buChar char="●"/>
-              <a:defRPr sz="1200"/>
-            </a:lvl4pPr>
-            <a:lvl5pPr indent="-304800" lvl="4" marL="2286000">
-              <a:spcBef>
-                <a:spcPts val="0"/>
-              </a:spcBef>
-              <a:spcAft>
-                <a:spcPts val="0"/>
-              </a:spcAft>
-              <a:buSzPts val="1200"/>
-              <a:buChar char="○"/>
-              <a:defRPr sz="1200"/>
-            </a:lvl5pPr>
-            <a:lvl6pPr indent="-304800" lvl="5" marL="2743200">
-              <a:spcBef>
-                <a:spcPts val="0"/>
-              </a:spcBef>
-              <a:spcAft>
-                <a:spcPts val="0"/>
-              </a:spcAft>
-              <a:buSzPts val="1200"/>
-              <a:buChar char="■"/>
-              <a:defRPr sz="1200"/>
-            </a:lvl6pPr>
-            <a:lvl7pPr indent="-304800" lvl="6" marL="3200400">
-              <a:spcBef>
-                <a:spcPts val="0"/>
-              </a:spcBef>
-              <a:spcAft>
-                <a:spcPts val="0"/>
-              </a:spcAft>
-              <a:buSzPts val="1200"/>
-              <a:buChar char="●"/>
-              <a:defRPr sz="1200"/>
-            </a:lvl7pPr>
-            <a:lvl8pPr indent="-304800" lvl="7" marL="3657600">
-              <a:spcBef>
-                <a:spcPts val="0"/>
-              </a:spcBef>
-              <a:spcAft>
-                <a:spcPts val="0"/>
-              </a:spcAft>
-              <a:buSzPts val="1200"/>
-              <a:buChar char="○"/>
-              <a:defRPr sz="1200"/>
-            </a:lvl8pPr>
-            <a:lvl9pPr indent="-304800" lvl="8" marL="4114800">
-              <a:spcBef>
-                <a:spcPts val="0"/>
-              </a:spcBef>
-              <a:spcAft>
-                <a:spcPts val="0"/>
-              </a:spcAft>
-              <a:buSzPts val="1200"/>
-              <a:buChar char="■"/>
-              <a:defRPr sz="1200"/>
-            </a:lvl9pPr>
-          </a:lstStyle>
-          <a:p/>
-        </p:txBody>
-      </p:sp>
-      <p:sp>
-        <p:nvSpPr>
-          <p:cNvPr id="31" name="Google Shape;31;p7"/>
+          <p:cNvPr id="29" name="Google Shape;29;p7"/>
           <p:cNvSpPr txBox="1"/>
           <p:nvPr>
             <p:ph idx="12" type="sldNum"/>
@@ -4040,47 +5580,249 @@
           <a:prstGeom prst="rect">
             <a:avLst/>
           </a:prstGeom>
+          <a:noFill/>
+          <a:ln>
+            <a:noFill/>
+          </a:ln>
         </p:spPr>
         <p:txBody>
           <a:bodyPr anchorCtr="0" anchor="ctr" bIns="91425" lIns="91425" spcFirstLastPara="1" rIns="91425" wrap="square" tIns="91425">
             <a:normAutofit/>
           </a:bodyPr>
           <a:lstStyle>
-            <a:lvl1pPr lvl="0">
-              <a:buNone/>
-              <a:defRPr/>
+            <a:lvl1pPr indent="0" lvl="0" marL="0" marR="0" algn="r">
+              <a:lnSpc>
+                <a:spcPct val="100000"/>
+              </a:lnSpc>
+              <a:spcBef>
+                <a:spcPts val="0"/>
+              </a:spcBef>
+              <a:spcAft>
+                <a:spcPts val="0"/>
+              </a:spcAft>
+              <a:buClr>
+                <a:srgbClr val="000000"/>
+              </a:buClr>
+              <a:buSzPts val="1000"/>
+              <a:buFont typeface="Arial"/>
+              <a:buNone/>
+              <a:defRPr b="0" i="0" sz="1000" u="none" cap="none" strike="noStrike">
+                <a:solidFill>
+                  <a:schemeClr val="dk2"/>
+                </a:solidFill>
+                <a:latin typeface="Arial"/>
+                <a:ea typeface="Arial"/>
+                <a:cs typeface="Arial"/>
+                <a:sym typeface="Arial"/>
+              </a:defRPr>
             </a:lvl1pPr>
-            <a:lvl2pPr lvl="1">
-              <a:buNone/>
-              <a:defRPr/>
+            <a:lvl2pPr indent="0" lvl="1" marL="0" marR="0" algn="r">
+              <a:lnSpc>
+                <a:spcPct val="100000"/>
+              </a:lnSpc>
+              <a:spcBef>
+                <a:spcPts val="0"/>
+              </a:spcBef>
+              <a:spcAft>
+                <a:spcPts val="0"/>
+              </a:spcAft>
+              <a:buClr>
+                <a:srgbClr val="000000"/>
+              </a:buClr>
+              <a:buSzPts val="1000"/>
+              <a:buFont typeface="Arial"/>
+              <a:buNone/>
+              <a:defRPr b="0" i="0" sz="1000" u="none" cap="none" strike="noStrike">
+                <a:solidFill>
+                  <a:schemeClr val="dk2"/>
+                </a:solidFill>
+                <a:latin typeface="Arial"/>
+                <a:ea typeface="Arial"/>
+                <a:cs typeface="Arial"/>
+                <a:sym typeface="Arial"/>
+              </a:defRPr>
             </a:lvl2pPr>
-            <a:lvl3pPr lvl="2">
-              <a:buNone/>
-              <a:defRPr/>
+            <a:lvl3pPr indent="0" lvl="2" marL="0" marR="0" algn="r">
+              <a:lnSpc>
+                <a:spcPct val="100000"/>
+              </a:lnSpc>
+              <a:spcBef>
+                <a:spcPts val="0"/>
+              </a:spcBef>
+              <a:spcAft>
+                <a:spcPts val="0"/>
+              </a:spcAft>
+              <a:buClr>
+                <a:srgbClr val="000000"/>
+              </a:buClr>
+              <a:buSzPts val="1000"/>
+              <a:buFont typeface="Arial"/>
+              <a:buNone/>
+              <a:defRPr b="0" i="0" sz="1000" u="none" cap="none" strike="noStrike">
+                <a:solidFill>
+                  <a:schemeClr val="dk2"/>
+                </a:solidFill>
+                <a:latin typeface="Arial"/>
+                <a:ea typeface="Arial"/>
+                <a:cs typeface="Arial"/>
+                <a:sym typeface="Arial"/>
+              </a:defRPr>
             </a:lvl3pPr>
-            <a:lvl4pPr lvl="3">
-              <a:buNone/>
-              <a:defRPr/>
+            <a:lvl4pPr indent="0" lvl="3" marL="0" marR="0" algn="r">
+              <a:lnSpc>
+                <a:spcPct val="100000"/>
+              </a:lnSpc>
+              <a:spcBef>
+                <a:spcPts val="0"/>
+              </a:spcBef>
+              <a:spcAft>
+                <a:spcPts val="0"/>
+              </a:spcAft>
+              <a:buClr>
+                <a:srgbClr val="000000"/>
+              </a:buClr>
+              <a:buSzPts val="1000"/>
+              <a:buFont typeface="Arial"/>
+              <a:buNone/>
+              <a:defRPr b="0" i="0" sz="1000" u="none" cap="none" strike="noStrike">
+                <a:solidFill>
+                  <a:schemeClr val="dk2"/>
+                </a:solidFill>
+                <a:latin typeface="Arial"/>
+                <a:ea typeface="Arial"/>
+                <a:cs typeface="Arial"/>
+                <a:sym typeface="Arial"/>
+              </a:defRPr>
             </a:lvl4pPr>
-            <a:lvl5pPr lvl="4">
-              <a:buNone/>
-              <a:defRPr/>
+            <a:lvl5pPr indent="0" lvl="4" marL="0" marR="0" algn="r">
+              <a:lnSpc>
+                <a:spcPct val="100000"/>
+              </a:lnSpc>
+              <a:spcBef>
+                <a:spcPts val="0"/>
+              </a:spcBef>
+              <a:spcAft>
+                <a:spcPts val="0"/>
+              </a:spcAft>
+              <a:buClr>
+                <a:srgbClr val="000000"/>
+              </a:buClr>
+              <a:buSzPts val="1000"/>
+              <a:buFont typeface="Arial"/>
+              <a:buNone/>
+              <a:defRPr b="0" i="0" sz="1000" u="none" cap="none" strike="noStrike">
+                <a:solidFill>
+                  <a:schemeClr val="dk2"/>
+                </a:solidFill>
+                <a:latin typeface="Arial"/>
+                <a:ea typeface="Arial"/>
+                <a:cs typeface="Arial"/>
+                <a:sym typeface="Arial"/>
+              </a:defRPr>
             </a:lvl5pPr>
-            <a:lvl6pPr lvl="5">
-              <a:buNone/>
-              <a:defRPr/>
+            <a:lvl6pPr indent="0" lvl="5" marL="0" marR="0" algn="r">
+              <a:lnSpc>
+                <a:spcPct val="100000"/>
+              </a:lnSpc>
+              <a:spcBef>
+                <a:spcPts val="0"/>
+              </a:spcBef>
+              <a:spcAft>
+                <a:spcPts val="0"/>
+              </a:spcAft>
+              <a:buClr>
+                <a:srgbClr val="000000"/>
+              </a:buClr>
+              <a:buSzPts val="1000"/>
+              <a:buFont typeface="Arial"/>
+              <a:buNone/>
+              <a:defRPr b="0" i="0" sz="1000" u="none" cap="none" strike="noStrike">
+                <a:solidFill>
+                  <a:schemeClr val="dk2"/>
+                </a:solidFill>
+                <a:latin typeface="Arial"/>
+                <a:ea typeface="Arial"/>
+                <a:cs typeface="Arial"/>
+                <a:sym typeface="Arial"/>
+              </a:defRPr>
             </a:lvl6pPr>
-            <a:lvl7pPr lvl="6">
-              <a:buNone/>
-              <a:defRPr/>
+            <a:lvl7pPr indent="0" lvl="6" marL="0" marR="0" algn="r">
+              <a:lnSpc>
+                <a:spcPct val="100000"/>
+              </a:lnSpc>
+              <a:spcBef>
+                <a:spcPts val="0"/>
+              </a:spcBef>
+              <a:spcAft>
+                <a:spcPts val="0"/>
+              </a:spcAft>
+              <a:buClr>
+                <a:srgbClr val="000000"/>
+              </a:buClr>
+              <a:buSzPts val="1000"/>
+              <a:buFont typeface="Arial"/>
+              <a:buNone/>
+              <a:defRPr b="0" i="0" sz="1000" u="none" cap="none" strike="noStrike">
+                <a:solidFill>
+                  <a:schemeClr val="dk2"/>
+                </a:solidFill>
+                <a:latin typeface="Arial"/>
+                <a:ea typeface="Arial"/>
+                <a:cs typeface="Arial"/>
+                <a:sym typeface="Arial"/>
+              </a:defRPr>
             </a:lvl7pPr>
-            <a:lvl8pPr lvl="7">
-              <a:buNone/>
-              <a:defRPr/>
+            <a:lvl8pPr indent="0" lvl="7" marL="0" marR="0" algn="r">
+              <a:lnSpc>
+                <a:spcPct val="100000"/>
+              </a:lnSpc>
+              <a:spcBef>
+                <a:spcPts val="0"/>
+              </a:spcBef>
+              <a:spcAft>
+                <a:spcPts val="0"/>
+              </a:spcAft>
+              <a:buClr>
+                <a:srgbClr val="000000"/>
+              </a:buClr>
+              <a:buSzPts val="1000"/>
+              <a:buFont typeface="Arial"/>
+              <a:buNone/>
+              <a:defRPr b="0" i="0" sz="1000" u="none" cap="none" strike="noStrike">
+                <a:solidFill>
+                  <a:schemeClr val="dk2"/>
+                </a:solidFill>
+                <a:latin typeface="Arial"/>
+                <a:ea typeface="Arial"/>
+                <a:cs typeface="Arial"/>
+                <a:sym typeface="Arial"/>
+              </a:defRPr>
             </a:lvl8pPr>
-            <a:lvl9pPr lvl="8">
-              <a:buNone/>
-              <a:defRPr/>
+            <a:lvl9pPr indent="0" lvl="8" marL="0" marR="0" algn="r">
+              <a:lnSpc>
+                <a:spcPct val="100000"/>
+              </a:lnSpc>
+              <a:spcBef>
+                <a:spcPts val="0"/>
+              </a:spcBef>
+              <a:spcAft>
+                <a:spcPts val="0"/>
+              </a:spcAft>
+              <a:buClr>
+                <a:srgbClr val="000000"/>
+              </a:buClr>
+              <a:buSzPts val="1000"/>
+              <a:buFont typeface="Arial"/>
+              <a:buNone/>
+              <a:defRPr b="0" i="0" sz="1000" u="none" cap="none" strike="noStrike">
+                <a:solidFill>
+                  <a:schemeClr val="dk2"/>
+                </a:solidFill>
+                <a:latin typeface="Arial"/>
+                <a:ea typeface="Arial"/>
+                <a:cs typeface="Arial"/>
+                <a:sym typeface="Arial"/>
+              </a:defRPr>
             </a:lvl9pPr>
           </a:lstStyle>
           <a:p>
@@ -4110,11 +5852,11 @@
 </file>
 
 <file path=ppt/slideLayouts/slideLayout7.xml><?xml version="1.0" encoding="utf-8"?>
-<p:sldLayout xmlns:a="http://schemas.openxmlformats.org/drawingml/2006/main" xmlns:r="http://schemas.openxmlformats.org/officeDocument/2006/relationships" xmlns:mc="http://schemas.openxmlformats.org/markup-compatibility/2006" xmlns:mv="urn:schemas-microsoft-com:mac:vml" xmlns:p="http://schemas.openxmlformats.org/presentationml/2006/main" xmlns:c="http://schemas.openxmlformats.org/drawingml/2006/chart" xmlns:dgm="http://schemas.openxmlformats.org/drawingml/2006/diagram" xmlns:o="urn:schemas-microsoft-com:office:office" xmlns:v="urn:schemas-microsoft-com:vml" xmlns:pvml="urn:schemas-microsoft-com:office:powerpoint" xmlns:com="http://schemas.openxmlformats.org/drawingml/2006/compatibility" xmlns:p14="http://schemas.microsoft.com/office/powerpoint/2010/main" xmlns:p15="http://schemas.microsoft.com/office/powerpoint/2012/main" xmlns:ahyp="http://schemas.microsoft.com/office/drawing/2018/hyperlinkcolor" matchingName="Main point">
-  <p:cSld name="MAIN_POINT">
+<p:sldLayout xmlns:a="http://schemas.openxmlformats.org/drawingml/2006/main" xmlns:r="http://schemas.openxmlformats.org/officeDocument/2006/relationships" xmlns:mc="http://schemas.openxmlformats.org/markup-compatibility/2006" xmlns:mv="urn:schemas-microsoft-com:mac:vml" xmlns:p="http://schemas.openxmlformats.org/presentationml/2006/main" xmlns:c="http://schemas.openxmlformats.org/drawingml/2006/chart" xmlns:dgm="http://schemas.openxmlformats.org/drawingml/2006/diagram" xmlns:o="urn:schemas-microsoft-com:office:office" xmlns:v="urn:schemas-microsoft-com:vml" xmlns:pvml="urn:schemas-microsoft-com:office:powerpoint" xmlns:com="http://schemas.openxmlformats.org/drawingml/2006/compatibility" xmlns:p14="http://schemas.microsoft.com/office/powerpoint/2010/main" xmlns:p15="http://schemas.microsoft.com/office/powerpoint/2012/main" xmlns:ahyp="http://schemas.microsoft.com/office/drawing/2018/hyperlinkcolor" matchingName="One column text">
+  <p:cSld name="ONE_COLUMN_TEXT">
     <p:spTree>
       <p:nvGrpSpPr>
-        <p:cNvPr id="32" name="Shape 32"/>
+        <p:cNvPr id="30" name="Shape 30"/>
         <p:cNvGrpSpPr/>
         <p:nvPr/>
       </p:nvGrpSpPr>
@@ -4128,7 +5870,7 @@
       </p:grpSpPr>
       <p:sp>
         <p:nvSpPr>
-          <p:cNvPr id="33" name="Google Shape;33;p8"/>
+          <p:cNvPr id="31" name="Google Shape;31;p8"/>
           <p:cNvSpPr txBox="1"/>
           <p:nvPr>
             <p:ph type="title"/>
@@ -4136,116 +5878,147 @@
         </p:nvSpPr>
         <p:spPr>
           <a:xfrm>
-            <a:off x="490250" y="450150"/>
-            <a:ext cx="6367800" cy="4090800"/>
+            <a:off x="311700" y="555600"/>
+            <a:ext cx="2808000" cy="755700"/>
           </a:xfrm>
           <a:prstGeom prst="rect">
             <a:avLst/>
           </a:prstGeom>
+          <a:noFill/>
+          <a:ln>
+            <a:noFill/>
+          </a:ln>
         </p:spPr>
         <p:txBody>
-          <a:bodyPr anchorCtr="0" anchor="ctr" bIns="91425" lIns="91425" spcFirstLastPara="1" rIns="91425" wrap="square" tIns="91425">
+          <a:bodyPr anchorCtr="0" anchor="b" bIns="91425" lIns="91425" spcFirstLastPara="1" rIns="91425" wrap="square" tIns="91425">
             <a:normAutofit/>
           </a:bodyPr>
           <a:lstStyle>
-            <a:lvl1pPr lvl="0">
-              <a:spcBef>
-                <a:spcPts val="0"/>
-              </a:spcBef>
-              <a:spcAft>
-                <a:spcPts val="0"/>
-              </a:spcAft>
-              <a:buSzPts val="4800"/>
-              <a:buNone/>
-              <a:defRPr sz="4800"/>
+            <a:lvl1pPr lvl="0" algn="l">
+              <a:lnSpc>
+                <a:spcPct val="100000"/>
+              </a:lnSpc>
+              <a:spcBef>
+                <a:spcPts val="0"/>
+              </a:spcBef>
+              <a:spcAft>
+                <a:spcPts val="0"/>
+              </a:spcAft>
+              <a:buSzPts val="2400"/>
+              <a:buNone/>
+              <a:defRPr sz="2400"/>
             </a:lvl1pPr>
-            <a:lvl2pPr lvl="1">
-              <a:spcBef>
-                <a:spcPts val="0"/>
-              </a:spcBef>
-              <a:spcAft>
-                <a:spcPts val="0"/>
-              </a:spcAft>
-              <a:buSzPts val="4800"/>
-              <a:buNone/>
-              <a:defRPr sz="4800"/>
+            <a:lvl2pPr lvl="1" algn="l">
+              <a:lnSpc>
+                <a:spcPct val="100000"/>
+              </a:lnSpc>
+              <a:spcBef>
+                <a:spcPts val="0"/>
+              </a:spcBef>
+              <a:spcAft>
+                <a:spcPts val="0"/>
+              </a:spcAft>
+              <a:buSzPts val="2400"/>
+              <a:buNone/>
+              <a:defRPr sz="2400"/>
             </a:lvl2pPr>
-            <a:lvl3pPr lvl="2">
-              <a:spcBef>
-                <a:spcPts val="0"/>
-              </a:spcBef>
-              <a:spcAft>
-                <a:spcPts val="0"/>
-              </a:spcAft>
-              <a:buSzPts val="4800"/>
-              <a:buNone/>
-              <a:defRPr sz="4800"/>
+            <a:lvl3pPr lvl="2" algn="l">
+              <a:lnSpc>
+                <a:spcPct val="100000"/>
+              </a:lnSpc>
+              <a:spcBef>
+                <a:spcPts val="0"/>
+              </a:spcBef>
+              <a:spcAft>
+                <a:spcPts val="0"/>
+              </a:spcAft>
+              <a:buSzPts val="2400"/>
+              <a:buNone/>
+              <a:defRPr sz="2400"/>
             </a:lvl3pPr>
-            <a:lvl4pPr lvl="3">
-              <a:spcBef>
-                <a:spcPts val="0"/>
-              </a:spcBef>
-              <a:spcAft>
-                <a:spcPts val="0"/>
-              </a:spcAft>
-              <a:buSzPts val="4800"/>
-              <a:buNone/>
-              <a:defRPr sz="4800"/>
+            <a:lvl4pPr lvl="3" algn="l">
+              <a:lnSpc>
+                <a:spcPct val="100000"/>
+              </a:lnSpc>
+              <a:spcBef>
+                <a:spcPts val="0"/>
+              </a:spcBef>
+              <a:spcAft>
+                <a:spcPts val="0"/>
+              </a:spcAft>
+              <a:buSzPts val="2400"/>
+              <a:buNone/>
+              <a:defRPr sz="2400"/>
             </a:lvl4pPr>
-            <a:lvl5pPr lvl="4">
-              <a:spcBef>
-                <a:spcPts val="0"/>
-              </a:spcBef>
-              <a:spcAft>
-                <a:spcPts val="0"/>
-              </a:spcAft>
-              <a:buSzPts val="4800"/>
-              <a:buNone/>
-              <a:defRPr sz="4800"/>
+            <a:lvl5pPr lvl="4" algn="l">
+              <a:lnSpc>
+                <a:spcPct val="100000"/>
+              </a:lnSpc>
+              <a:spcBef>
+                <a:spcPts val="0"/>
+              </a:spcBef>
+              <a:spcAft>
+                <a:spcPts val="0"/>
+              </a:spcAft>
+              <a:buSzPts val="2400"/>
+              <a:buNone/>
+              <a:defRPr sz="2400"/>
             </a:lvl5pPr>
-            <a:lvl6pPr lvl="5">
-              <a:spcBef>
-                <a:spcPts val="0"/>
-              </a:spcBef>
-              <a:spcAft>
-                <a:spcPts val="0"/>
-              </a:spcAft>
-              <a:buSzPts val="4800"/>
-              <a:buNone/>
-              <a:defRPr sz="4800"/>
+            <a:lvl6pPr lvl="5" algn="l">
+              <a:lnSpc>
+                <a:spcPct val="100000"/>
+              </a:lnSpc>
+              <a:spcBef>
+                <a:spcPts val="0"/>
+              </a:spcBef>
+              <a:spcAft>
+                <a:spcPts val="0"/>
+              </a:spcAft>
+              <a:buSzPts val="2400"/>
+              <a:buNone/>
+              <a:defRPr sz="2400"/>
             </a:lvl6pPr>
-            <a:lvl7pPr lvl="6">
-              <a:spcBef>
-                <a:spcPts val="0"/>
-              </a:spcBef>
-              <a:spcAft>
-                <a:spcPts val="0"/>
-              </a:spcAft>
-              <a:buSzPts val="4800"/>
-              <a:buNone/>
-              <a:defRPr sz="4800"/>
+            <a:lvl7pPr lvl="6" algn="l">
+              <a:lnSpc>
+                <a:spcPct val="100000"/>
+              </a:lnSpc>
+              <a:spcBef>
+                <a:spcPts val="0"/>
+              </a:spcBef>
+              <a:spcAft>
+                <a:spcPts val="0"/>
+              </a:spcAft>
+              <a:buSzPts val="2400"/>
+              <a:buNone/>
+              <a:defRPr sz="2400"/>
             </a:lvl7pPr>
-            <a:lvl8pPr lvl="7">
-              <a:spcBef>
-                <a:spcPts val="0"/>
-              </a:spcBef>
-              <a:spcAft>
-                <a:spcPts val="0"/>
-              </a:spcAft>
-              <a:buSzPts val="4800"/>
-              <a:buNone/>
-              <a:defRPr sz="4800"/>
+            <a:lvl8pPr lvl="7" algn="l">
+              <a:lnSpc>
+                <a:spcPct val="100000"/>
+              </a:lnSpc>
+              <a:spcBef>
+                <a:spcPts val="0"/>
+              </a:spcBef>
+              <a:spcAft>
+                <a:spcPts val="0"/>
+              </a:spcAft>
+              <a:buSzPts val="2400"/>
+              <a:buNone/>
+              <a:defRPr sz="2400"/>
             </a:lvl8pPr>
-            <a:lvl9pPr lvl="8">
-              <a:spcBef>
-                <a:spcPts val="0"/>
-              </a:spcBef>
-              <a:spcAft>
-                <a:spcPts val="0"/>
-              </a:spcAft>
-              <a:buSzPts val="4800"/>
-              <a:buNone/>
-              <a:defRPr sz="4800"/>
+            <a:lvl9pPr lvl="8" algn="l">
+              <a:lnSpc>
+                <a:spcPct val="100000"/>
+              </a:lnSpc>
+              <a:spcBef>
+                <a:spcPts val="0"/>
+              </a:spcBef>
+              <a:spcAft>
+                <a:spcPts val="0"/>
+              </a:spcAft>
+              <a:buSzPts val="2400"/>
+              <a:buNone/>
+              <a:defRPr sz="2400"/>
             </a:lvl9pPr>
           </a:lstStyle>
           <a:p/>
@@ -4253,7 +6026,163 @@
       </p:sp>
       <p:sp>
         <p:nvSpPr>
-          <p:cNvPr id="34" name="Google Shape;34;p8"/>
+          <p:cNvPr id="32" name="Google Shape;32;p8"/>
+          <p:cNvSpPr txBox="1"/>
+          <p:nvPr>
+            <p:ph idx="1" type="body"/>
+          </p:nvPr>
+        </p:nvSpPr>
+        <p:spPr>
+          <a:xfrm>
+            <a:off x="311700" y="1389600"/>
+            <a:ext cx="2808000" cy="3179400"/>
+          </a:xfrm>
+          <a:prstGeom prst="rect">
+            <a:avLst/>
+          </a:prstGeom>
+          <a:noFill/>
+          <a:ln>
+            <a:noFill/>
+          </a:ln>
+        </p:spPr>
+        <p:txBody>
+          <a:bodyPr anchorCtr="0" anchor="t" bIns="91425" lIns="91425" spcFirstLastPara="1" rIns="91425" wrap="square" tIns="91425">
+            <a:normAutofit/>
+          </a:bodyPr>
+          <a:lstStyle>
+            <a:lvl1pPr indent="-304800" lvl="0" marL="457200" algn="l">
+              <a:lnSpc>
+                <a:spcPct val="115000"/>
+              </a:lnSpc>
+              <a:spcBef>
+                <a:spcPts val="0"/>
+              </a:spcBef>
+              <a:spcAft>
+                <a:spcPts val="0"/>
+              </a:spcAft>
+              <a:buSzPts val="1200"/>
+              <a:buChar char="●"/>
+              <a:defRPr sz="1200"/>
+            </a:lvl1pPr>
+            <a:lvl2pPr indent="-304800" lvl="1" marL="914400" algn="l">
+              <a:lnSpc>
+                <a:spcPct val="115000"/>
+              </a:lnSpc>
+              <a:spcBef>
+                <a:spcPts val="0"/>
+              </a:spcBef>
+              <a:spcAft>
+                <a:spcPts val="0"/>
+              </a:spcAft>
+              <a:buSzPts val="1200"/>
+              <a:buChar char="○"/>
+              <a:defRPr sz="1200"/>
+            </a:lvl2pPr>
+            <a:lvl3pPr indent="-304800" lvl="2" marL="1371600" algn="l">
+              <a:lnSpc>
+                <a:spcPct val="115000"/>
+              </a:lnSpc>
+              <a:spcBef>
+                <a:spcPts val="0"/>
+              </a:spcBef>
+              <a:spcAft>
+                <a:spcPts val="0"/>
+              </a:spcAft>
+              <a:buSzPts val="1200"/>
+              <a:buChar char="■"/>
+              <a:defRPr sz="1200"/>
+            </a:lvl3pPr>
+            <a:lvl4pPr indent="-304800" lvl="3" marL="1828800" algn="l">
+              <a:lnSpc>
+                <a:spcPct val="115000"/>
+              </a:lnSpc>
+              <a:spcBef>
+                <a:spcPts val="0"/>
+              </a:spcBef>
+              <a:spcAft>
+                <a:spcPts val="0"/>
+              </a:spcAft>
+              <a:buSzPts val="1200"/>
+              <a:buChar char="●"/>
+              <a:defRPr sz="1200"/>
+            </a:lvl4pPr>
+            <a:lvl5pPr indent="-304800" lvl="4" marL="2286000" algn="l">
+              <a:lnSpc>
+                <a:spcPct val="115000"/>
+              </a:lnSpc>
+              <a:spcBef>
+                <a:spcPts val="0"/>
+              </a:spcBef>
+              <a:spcAft>
+                <a:spcPts val="0"/>
+              </a:spcAft>
+              <a:buSzPts val="1200"/>
+              <a:buChar char="○"/>
+              <a:defRPr sz="1200"/>
+            </a:lvl5pPr>
+            <a:lvl6pPr indent="-304800" lvl="5" marL="2743200" algn="l">
+              <a:lnSpc>
+                <a:spcPct val="115000"/>
+              </a:lnSpc>
+              <a:spcBef>
+                <a:spcPts val="0"/>
+              </a:spcBef>
+              <a:spcAft>
+                <a:spcPts val="0"/>
+              </a:spcAft>
+              <a:buSzPts val="1200"/>
+              <a:buChar char="■"/>
+              <a:defRPr sz="1200"/>
+            </a:lvl6pPr>
+            <a:lvl7pPr indent="-304800" lvl="6" marL="3200400" algn="l">
+              <a:lnSpc>
+                <a:spcPct val="115000"/>
+              </a:lnSpc>
+              <a:spcBef>
+                <a:spcPts val="0"/>
+              </a:spcBef>
+              <a:spcAft>
+                <a:spcPts val="0"/>
+              </a:spcAft>
+              <a:buSzPts val="1200"/>
+              <a:buChar char="●"/>
+              <a:defRPr sz="1200"/>
+            </a:lvl7pPr>
+            <a:lvl8pPr indent="-304800" lvl="7" marL="3657600" algn="l">
+              <a:lnSpc>
+                <a:spcPct val="115000"/>
+              </a:lnSpc>
+              <a:spcBef>
+                <a:spcPts val="0"/>
+              </a:spcBef>
+              <a:spcAft>
+                <a:spcPts val="0"/>
+              </a:spcAft>
+              <a:buSzPts val="1200"/>
+              <a:buChar char="○"/>
+              <a:defRPr sz="1200"/>
+            </a:lvl8pPr>
+            <a:lvl9pPr indent="-304800" lvl="8" marL="4114800" algn="l">
+              <a:lnSpc>
+                <a:spcPct val="115000"/>
+              </a:lnSpc>
+              <a:spcBef>
+                <a:spcPts val="0"/>
+              </a:spcBef>
+              <a:spcAft>
+                <a:spcPts val="0"/>
+              </a:spcAft>
+              <a:buSzPts val="1200"/>
+              <a:buChar char="■"/>
+              <a:defRPr sz="1200"/>
+            </a:lvl9pPr>
+          </a:lstStyle>
+          <a:p/>
+        </p:txBody>
+      </p:sp>
+      <p:sp>
+        <p:nvSpPr>
+          <p:cNvPr id="33" name="Google Shape;33;p8"/>
           <p:cNvSpPr txBox="1"/>
           <p:nvPr>
             <p:ph idx="12" type="sldNum"/>
@@ -4267,47 +6196,249 @@
           <a:prstGeom prst="rect">
             <a:avLst/>
           </a:prstGeom>
+          <a:noFill/>
+          <a:ln>
+            <a:noFill/>
+          </a:ln>
         </p:spPr>
         <p:txBody>
           <a:bodyPr anchorCtr="0" anchor="ctr" bIns="91425" lIns="91425" spcFirstLastPara="1" rIns="91425" wrap="square" tIns="91425">
             <a:normAutofit/>
           </a:bodyPr>
           <a:lstStyle>
-            <a:lvl1pPr lvl="0">
-              <a:buNone/>
-              <a:defRPr/>
+            <a:lvl1pPr indent="0" lvl="0" marL="0" marR="0" algn="r">
+              <a:lnSpc>
+                <a:spcPct val="100000"/>
+              </a:lnSpc>
+              <a:spcBef>
+                <a:spcPts val="0"/>
+              </a:spcBef>
+              <a:spcAft>
+                <a:spcPts val="0"/>
+              </a:spcAft>
+              <a:buClr>
+                <a:srgbClr val="000000"/>
+              </a:buClr>
+              <a:buSzPts val="1000"/>
+              <a:buFont typeface="Arial"/>
+              <a:buNone/>
+              <a:defRPr b="0" i="0" sz="1000" u="none" cap="none" strike="noStrike">
+                <a:solidFill>
+                  <a:schemeClr val="dk2"/>
+                </a:solidFill>
+                <a:latin typeface="Arial"/>
+                <a:ea typeface="Arial"/>
+                <a:cs typeface="Arial"/>
+                <a:sym typeface="Arial"/>
+              </a:defRPr>
             </a:lvl1pPr>
-            <a:lvl2pPr lvl="1">
-              <a:buNone/>
-              <a:defRPr/>
+            <a:lvl2pPr indent="0" lvl="1" marL="0" marR="0" algn="r">
+              <a:lnSpc>
+                <a:spcPct val="100000"/>
+              </a:lnSpc>
+              <a:spcBef>
+                <a:spcPts val="0"/>
+              </a:spcBef>
+              <a:spcAft>
+                <a:spcPts val="0"/>
+              </a:spcAft>
+              <a:buClr>
+                <a:srgbClr val="000000"/>
+              </a:buClr>
+              <a:buSzPts val="1000"/>
+              <a:buFont typeface="Arial"/>
+              <a:buNone/>
+              <a:defRPr b="0" i="0" sz="1000" u="none" cap="none" strike="noStrike">
+                <a:solidFill>
+                  <a:schemeClr val="dk2"/>
+                </a:solidFill>
+                <a:latin typeface="Arial"/>
+                <a:ea typeface="Arial"/>
+                <a:cs typeface="Arial"/>
+                <a:sym typeface="Arial"/>
+              </a:defRPr>
             </a:lvl2pPr>
-            <a:lvl3pPr lvl="2">
-              <a:buNone/>
-              <a:defRPr/>
+            <a:lvl3pPr indent="0" lvl="2" marL="0" marR="0" algn="r">
+              <a:lnSpc>
+                <a:spcPct val="100000"/>
+              </a:lnSpc>
+              <a:spcBef>
+                <a:spcPts val="0"/>
+              </a:spcBef>
+              <a:spcAft>
+                <a:spcPts val="0"/>
+              </a:spcAft>
+              <a:buClr>
+                <a:srgbClr val="000000"/>
+              </a:buClr>
+              <a:buSzPts val="1000"/>
+              <a:buFont typeface="Arial"/>
+              <a:buNone/>
+              <a:defRPr b="0" i="0" sz="1000" u="none" cap="none" strike="noStrike">
+                <a:solidFill>
+                  <a:schemeClr val="dk2"/>
+                </a:solidFill>
+                <a:latin typeface="Arial"/>
+                <a:ea typeface="Arial"/>
+                <a:cs typeface="Arial"/>
+                <a:sym typeface="Arial"/>
+              </a:defRPr>
             </a:lvl3pPr>
-            <a:lvl4pPr lvl="3">
-              <a:buNone/>
-              <a:defRPr/>
+            <a:lvl4pPr indent="0" lvl="3" marL="0" marR="0" algn="r">
+              <a:lnSpc>
+                <a:spcPct val="100000"/>
+              </a:lnSpc>
+              <a:spcBef>
+                <a:spcPts val="0"/>
+              </a:spcBef>
+              <a:spcAft>
+                <a:spcPts val="0"/>
+              </a:spcAft>
+              <a:buClr>
+                <a:srgbClr val="000000"/>
+              </a:buClr>
+              <a:buSzPts val="1000"/>
+              <a:buFont typeface="Arial"/>
+              <a:buNone/>
+              <a:defRPr b="0" i="0" sz="1000" u="none" cap="none" strike="noStrike">
+                <a:solidFill>
+                  <a:schemeClr val="dk2"/>
+                </a:solidFill>
+                <a:latin typeface="Arial"/>
+                <a:ea typeface="Arial"/>
+                <a:cs typeface="Arial"/>
+                <a:sym typeface="Arial"/>
+              </a:defRPr>
             </a:lvl4pPr>
-            <a:lvl5pPr lvl="4">
-              <a:buNone/>
-              <a:defRPr/>
+            <a:lvl5pPr indent="0" lvl="4" marL="0" marR="0" algn="r">
+              <a:lnSpc>
+                <a:spcPct val="100000"/>
+              </a:lnSpc>
+              <a:spcBef>
+                <a:spcPts val="0"/>
+              </a:spcBef>
+              <a:spcAft>
+                <a:spcPts val="0"/>
+              </a:spcAft>
+              <a:buClr>
+                <a:srgbClr val="000000"/>
+              </a:buClr>
+              <a:buSzPts val="1000"/>
+              <a:buFont typeface="Arial"/>
+              <a:buNone/>
+              <a:defRPr b="0" i="0" sz="1000" u="none" cap="none" strike="noStrike">
+                <a:solidFill>
+                  <a:schemeClr val="dk2"/>
+                </a:solidFill>
+                <a:latin typeface="Arial"/>
+                <a:ea typeface="Arial"/>
+                <a:cs typeface="Arial"/>
+                <a:sym typeface="Arial"/>
+              </a:defRPr>
             </a:lvl5pPr>
-            <a:lvl6pPr lvl="5">
-              <a:buNone/>
-              <a:defRPr/>
+            <a:lvl6pPr indent="0" lvl="5" marL="0" marR="0" algn="r">
+              <a:lnSpc>
+                <a:spcPct val="100000"/>
+              </a:lnSpc>
+              <a:spcBef>
+                <a:spcPts val="0"/>
+              </a:spcBef>
+              <a:spcAft>
+                <a:spcPts val="0"/>
+              </a:spcAft>
+              <a:buClr>
+                <a:srgbClr val="000000"/>
+              </a:buClr>
+              <a:buSzPts val="1000"/>
+              <a:buFont typeface="Arial"/>
+              <a:buNone/>
+              <a:defRPr b="0" i="0" sz="1000" u="none" cap="none" strike="noStrike">
+                <a:solidFill>
+                  <a:schemeClr val="dk2"/>
+                </a:solidFill>
+                <a:latin typeface="Arial"/>
+                <a:ea typeface="Arial"/>
+                <a:cs typeface="Arial"/>
+                <a:sym typeface="Arial"/>
+              </a:defRPr>
             </a:lvl6pPr>
-            <a:lvl7pPr lvl="6">
-              <a:buNone/>
-              <a:defRPr/>
+            <a:lvl7pPr indent="0" lvl="6" marL="0" marR="0" algn="r">
+              <a:lnSpc>
+                <a:spcPct val="100000"/>
+              </a:lnSpc>
+              <a:spcBef>
+                <a:spcPts val="0"/>
+              </a:spcBef>
+              <a:spcAft>
+                <a:spcPts val="0"/>
+              </a:spcAft>
+              <a:buClr>
+                <a:srgbClr val="000000"/>
+              </a:buClr>
+              <a:buSzPts val="1000"/>
+              <a:buFont typeface="Arial"/>
+              <a:buNone/>
+              <a:defRPr b="0" i="0" sz="1000" u="none" cap="none" strike="noStrike">
+                <a:solidFill>
+                  <a:schemeClr val="dk2"/>
+                </a:solidFill>
+                <a:latin typeface="Arial"/>
+                <a:ea typeface="Arial"/>
+                <a:cs typeface="Arial"/>
+                <a:sym typeface="Arial"/>
+              </a:defRPr>
             </a:lvl7pPr>
-            <a:lvl8pPr lvl="7">
-              <a:buNone/>
-              <a:defRPr/>
+            <a:lvl8pPr indent="0" lvl="7" marL="0" marR="0" algn="r">
+              <a:lnSpc>
+                <a:spcPct val="100000"/>
+              </a:lnSpc>
+              <a:spcBef>
+                <a:spcPts val="0"/>
+              </a:spcBef>
+              <a:spcAft>
+                <a:spcPts val="0"/>
+              </a:spcAft>
+              <a:buClr>
+                <a:srgbClr val="000000"/>
+              </a:buClr>
+              <a:buSzPts val="1000"/>
+              <a:buFont typeface="Arial"/>
+              <a:buNone/>
+              <a:defRPr b="0" i="0" sz="1000" u="none" cap="none" strike="noStrike">
+                <a:solidFill>
+                  <a:schemeClr val="dk2"/>
+                </a:solidFill>
+                <a:latin typeface="Arial"/>
+                <a:ea typeface="Arial"/>
+                <a:cs typeface="Arial"/>
+                <a:sym typeface="Arial"/>
+              </a:defRPr>
             </a:lvl8pPr>
-            <a:lvl9pPr lvl="8">
-              <a:buNone/>
-              <a:defRPr/>
+            <a:lvl9pPr indent="0" lvl="8" marL="0" marR="0" algn="r">
+              <a:lnSpc>
+                <a:spcPct val="100000"/>
+              </a:lnSpc>
+              <a:spcBef>
+                <a:spcPts val="0"/>
+              </a:spcBef>
+              <a:spcAft>
+                <a:spcPts val="0"/>
+              </a:spcAft>
+              <a:buClr>
+                <a:srgbClr val="000000"/>
+              </a:buClr>
+              <a:buSzPts val="1000"/>
+              <a:buFont typeface="Arial"/>
+              <a:buNone/>
+              <a:defRPr b="0" i="0" sz="1000" u="none" cap="none" strike="noStrike">
+                <a:solidFill>
+                  <a:schemeClr val="dk2"/>
+                </a:solidFill>
+                <a:latin typeface="Arial"/>
+                <a:ea typeface="Arial"/>
+                <a:cs typeface="Arial"/>
+                <a:sym typeface="Arial"/>
+              </a:defRPr>
             </a:lvl9pPr>
           </a:lstStyle>
           <a:p>
@@ -4337,11 +6468,11 @@
 </file>
 
 <file path=ppt/slideLayouts/slideLayout8.xml><?xml version="1.0" encoding="utf-8"?>
-<p:sldLayout xmlns:a="http://schemas.openxmlformats.org/drawingml/2006/main" xmlns:r="http://schemas.openxmlformats.org/officeDocument/2006/relationships" xmlns:mc="http://schemas.openxmlformats.org/markup-compatibility/2006" xmlns:mv="urn:schemas-microsoft-com:mac:vml" xmlns:p="http://schemas.openxmlformats.org/presentationml/2006/main" xmlns:c="http://schemas.openxmlformats.org/drawingml/2006/chart" xmlns:dgm="http://schemas.openxmlformats.org/drawingml/2006/diagram" xmlns:o="urn:schemas-microsoft-com:office:office" xmlns:v="urn:schemas-microsoft-com:vml" xmlns:pvml="urn:schemas-microsoft-com:office:powerpoint" xmlns:com="http://schemas.openxmlformats.org/drawingml/2006/compatibility" xmlns:p14="http://schemas.microsoft.com/office/powerpoint/2010/main" xmlns:p15="http://schemas.microsoft.com/office/powerpoint/2012/main" xmlns:ahyp="http://schemas.microsoft.com/office/drawing/2018/hyperlinkcolor" matchingName="Section title and description">
-  <p:cSld name="SECTION_TITLE_AND_DESCRIPTION">
+<p:sldLayout xmlns:a="http://schemas.openxmlformats.org/drawingml/2006/main" xmlns:r="http://schemas.openxmlformats.org/officeDocument/2006/relationships" xmlns:mc="http://schemas.openxmlformats.org/markup-compatibility/2006" xmlns:mv="urn:schemas-microsoft-com:mac:vml" xmlns:p="http://schemas.openxmlformats.org/presentationml/2006/main" xmlns:c="http://schemas.openxmlformats.org/drawingml/2006/chart" xmlns:dgm="http://schemas.openxmlformats.org/drawingml/2006/diagram" xmlns:o="urn:schemas-microsoft-com:office:office" xmlns:v="urn:schemas-microsoft-com:vml" xmlns:pvml="urn:schemas-microsoft-com:office:powerpoint" xmlns:com="http://schemas.openxmlformats.org/drawingml/2006/compatibility" xmlns:p14="http://schemas.microsoft.com/office/powerpoint/2010/main" xmlns:p15="http://schemas.microsoft.com/office/powerpoint/2012/main" xmlns:ahyp="http://schemas.microsoft.com/office/drawing/2018/hyperlinkcolor" matchingName="Main point">
+  <p:cSld name="MAIN_POINT">
     <p:spTree>
       <p:nvGrpSpPr>
-        <p:cNvPr id="35" name="Shape 35"/>
+        <p:cNvPr id="34" name="Shape 34"/>
         <p:cNvGrpSpPr/>
         <p:nvPr/>
       </p:nvGrpSpPr>
@@ -4355,7 +6486,467 @@
       </p:grpSpPr>
       <p:sp>
         <p:nvSpPr>
+          <p:cNvPr id="35" name="Google Shape;35;p9"/>
+          <p:cNvSpPr txBox="1"/>
+          <p:nvPr>
+            <p:ph type="title"/>
+          </p:nvPr>
+        </p:nvSpPr>
+        <p:spPr>
+          <a:xfrm>
+            <a:off x="490250" y="450150"/>
+            <a:ext cx="6367800" cy="4090800"/>
+          </a:xfrm>
+          <a:prstGeom prst="rect">
+            <a:avLst/>
+          </a:prstGeom>
+          <a:noFill/>
+          <a:ln>
+            <a:noFill/>
+          </a:ln>
+        </p:spPr>
+        <p:txBody>
+          <a:bodyPr anchorCtr="0" anchor="ctr" bIns="91425" lIns="91425" spcFirstLastPara="1" rIns="91425" wrap="square" tIns="91425">
+            <a:normAutofit/>
+          </a:bodyPr>
+          <a:lstStyle>
+            <a:lvl1pPr lvl="0" algn="l">
+              <a:lnSpc>
+                <a:spcPct val="100000"/>
+              </a:lnSpc>
+              <a:spcBef>
+                <a:spcPts val="0"/>
+              </a:spcBef>
+              <a:spcAft>
+                <a:spcPts val="0"/>
+              </a:spcAft>
+              <a:buSzPts val="4800"/>
+              <a:buNone/>
+              <a:defRPr sz="4800"/>
+            </a:lvl1pPr>
+            <a:lvl2pPr lvl="1" algn="l">
+              <a:lnSpc>
+                <a:spcPct val="100000"/>
+              </a:lnSpc>
+              <a:spcBef>
+                <a:spcPts val="0"/>
+              </a:spcBef>
+              <a:spcAft>
+                <a:spcPts val="0"/>
+              </a:spcAft>
+              <a:buSzPts val="4800"/>
+              <a:buNone/>
+              <a:defRPr sz="4800"/>
+            </a:lvl2pPr>
+            <a:lvl3pPr lvl="2" algn="l">
+              <a:lnSpc>
+                <a:spcPct val="100000"/>
+              </a:lnSpc>
+              <a:spcBef>
+                <a:spcPts val="0"/>
+              </a:spcBef>
+              <a:spcAft>
+                <a:spcPts val="0"/>
+              </a:spcAft>
+              <a:buSzPts val="4800"/>
+              <a:buNone/>
+              <a:defRPr sz="4800"/>
+            </a:lvl3pPr>
+            <a:lvl4pPr lvl="3" algn="l">
+              <a:lnSpc>
+                <a:spcPct val="100000"/>
+              </a:lnSpc>
+              <a:spcBef>
+                <a:spcPts val="0"/>
+              </a:spcBef>
+              <a:spcAft>
+                <a:spcPts val="0"/>
+              </a:spcAft>
+              <a:buSzPts val="4800"/>
+              <a:buNone/>
+              <a:defRPr sz="4800"/>
+            </a:lvl4pPr>
+            <a:lvl5pPr lvl="4" algn="l">
+              <a:lnSpc>
+                <a:spcPct val="100000"/>
+              </a:lnSpc>
+              <a:spcBef>
+                <a:spcPts val="0"/>
+              </a:spcBef>
+              <a:spcAft>
+                <a:spcPts val="0"/>
+              </a:spcAft>
+              <a:buSzPts val="4800"/>
+              <a:buNone/>
+              <a:defRPr sz="4800"/>
+            </a:lvl5pPr>
+            <a:lvl6pPr lvl="5" algn="l">
+              <a:lnSpc>
+                <a:spcPct val="100000"/>
+              </a:lnSpc>
+              <a:spcBef>
+                <a:spcPts val="0"/>
+              </a:spcBef>
+              <a:spcAft>
+                <a:spcPts val="0"/>
+              </a:spcAft>
+              <a:buSzPts val="4800"/>
+              <a:buNone/>
+              <a:defRPr sz="4800"/>
+            </a:lvl6pPr>
+            <a:lvl7pPr lvl="6" algn="l">
+              <a:lnSpc>
+                <a:spcPct val="100000"/>
+              </a:lnSpc>
+              <a:spcBef>
+                <a:spcPts val="0"/>
+              </a:spcBef>
+              <a:spcAft>
+                <a:spcPts val="0"/>
+              </a:spcAft>
+              <a:buSzPts val="4800"/>
+              <a:buNone/>
+              <a:defRPr sz="4800"/>
+            </a:lvl7pPr>
+            <a:lvl8pPr lvl="7" algn="l">
+              <a:lnSpc>
+                <a:spcPct val="100000"/>
+              </a:lnSpc>
+              <a:spcBef>
+                <a:spcPts val="0"/>
+              </a:spcBef>
+              <a:spcAft>
+                <a:spcPts val="0"/>
+              </a:spcAft>
+              <a:buSzPts val="4800"/>
+              <a:buNone/>
+              <a:defRPr sz="4800"/>
+            </a:lvl8pPr>
+            <a:lvl9pPr lvl="8" algn="l">
+              <a:lnSpc>
+                <a:spcPct val="100000"/>
+              </a:lnSpc>
+              <a:spcBef>
+                <a:spcPts val="0"/>
+              </a:spcBef>
+              <a:spcAft>
+                <a:spcPts val="0"/>
+              </a:spcAft>
+              <a:buSzPts val="4800"/>
+              <a:buNone/>
+              <a:defRPr sz="4800"/>
+            </a:lvl9pPr>
+          </a:lstStyle>
+          <a:p/>
+        </p:txBody>
+      </p:sp>
+      <p:sp>
+        <p:nvSpPr>
           <p:cNvPr id="36" name="Google Shape;36;p9"/>
+          <p:cNvSpPr txBox="1"/>
+          <p:nvPr>
+            <p:ph idx="12" type="sldNum"/>
+          </p:nvPr>
+        </p:nvSpPr>
+        <p:spPr>
+          <a:xfrm>
+            <a:off x="8472458" y="4663217"/>
+            <a:ext cx="548700" cy="393600"/>
+          </a:xfrm>
+          <a:prstGeom prst="rect">
+            <a:avLst/>
+          </a:prstGeom>
+          <a:noFill/>
+          <a:ln>
+            <a:noFill/>
+          </a:ln>
+        </p:spPr>
+        <p:txBody>
+          <a:bodyPr anchorCtr="0" anchor="ctr" bIns="91425" lIns="91425" spcFirstLastPara="1" rIns="91425" wrap="square" tIns="91425">
+            <a:normAutofit/>
+          </a:bodyPr>
+          <a:lstStyle>
+            <a:lvl1pPr indent="0" lvl="0" marL="0" marR="0" algn="r">
+              <a:lnSpc>
+                <a:spcPct val="100000"/>
+              </a:lnSpc>
+              <a:spcBef>
+                <a:spcPts val="0"/>
+              </a:spcBef>
+              <a:spcAft>
+                <a:spcPts val="0"/>
+              </a:spcAft>
+              <a:buClr>
+                <a:srgbClr val="000000"/>
+              </a:buClr>
+              <a:buSzPts val="1000"/>
+              <a:buFont typeface="Arial"/>
+              <a:buNone/>
+              <a:defRPr b="0" i="0" sz="1000" u="none" cap="none" strike="noStrike">
+                <a:solidFill>
+                  <a:schemeClr val="dk2"/>
+                </a:solidFill>
+                <a:latin typeface="Arial"/>
+                <a:ea typeface="Arial"/>
+                <a:cs typeface="Arial"/>
+                <a:sym typeface="Arial"/>
+              </a:defRPr>
+            </a:lvl1pPr>
+            <a:lvl2pPr indent="0" lvl="1" marL="0" marR="0" algn="r">
+              <a:lnSpc>
+                <a:spcPct val="100000"/>
+              </a:lnSpc>
+              <a:spcBef>
+                <a:spcPts val="0"/>
+              </a:spcBef>
+              <a:spcAft>
+                <a:spcPts val="0"/>
+              </a:spcAft>
+              <a:buClr>
+                <a:srgbClr val="000000"/>
+              </a:buClr>
+              <a:buSzPts val="1000"/>
+              <a:buFont typeface="Arial"/>
+              <a:buNone/>
+              <a:defRPr b="0" i="0" sz="1000" u="none" cap="none" strike="noStrike">
+                <a:solidFill>
+                  <a:schemeClr val="dk2"/>
+                </a:solidFill>
+                <a:latin typeface="Arial"/>
+                <a:ea typeface="Arial"/>
+                <a:cs typeface="Arial"/>
+                <a:sym typeface="Arial"/>
+              </a:defRPr>
+            </a:lvl2pPr>
+            <a:lvl3pPr indent="0" lvl="2" marL="0" marR="0" algn="r">
+              <a:lnSpc>
+                <a:spcPct val="100000"/>
+              </a:lnSpc>
+              <a:spcBef>
+                <a:spcPts val="0"/>
+              </a:spcBef>
+              <a:spcAft>
+                <a:spcPts val="0"/>
+              </a:spcAft>
+              <a:buClr>
+                <a:srgbClr val="000000"/>
+              </a:buClr>
+              <a:buSzPts val="1000"/>
+              <a:buFont typeface="Arial"/>
+              <a:buNone/>
+              <a:defRPr b="0" i="0" sz="1000" u="none" cap="none" strike="noStrike">
+                <a:solidFill>
+                  <a:schemeClr val="dk2"/>
+                </a:solidFill>
+                <a:latin typeface="Arial"/>
+                <a:ea typeface="Arial"/>
+                <a:cs typeface="Arial"/>
+                <a:sym typeface="Arial"/>
+              </a:defRPr>
+            </a:lvl3pPr>
+            <a:lvl4pPr indent="0" lvl="3" marL="0" marR="0" algn="r">
+              <a:lnSpc>
+                <a:spcPct val="100000"/>
+              </a:lnSpc>
+              <a:spcBef>
+                <a:spcPts val="0"/>
+              </a:spcBef>
+              <a:spcAft>
+                <a:spcPts val="0"/>
+              </a:spcAft>
+              <a:buClr>
+                <a:srgbClr val="000000"/>
+              </a:buClr>
+              <a:buSzPts val="1000"/>
+              <a:buFont typeface="Arial"/>
+              <a:buNone/>
+              <a:defRPr b="0" i="0" sz="1000" u="none" cap="none" strike="noStrike">
+                <a:solidFill>
+                  <a:schemeClr val="dk2"/>
+                </a:solidFill>
+                <a:latin typeface="Arial"/>
+                <a:ea typeface="Arial"/>
+                <a:cs typeface="Arial"/>
+                <a:sym typeface="Arial"/>
+              </a:defRPr>
+            </a:lvl4pPr>
+            <a:lvl5pPr indent="0" lvl="4" marL="0" marR="0" algn="r">
+              <a:lnSpc>
+                <a:spcPct val="100000"/>
+              </a:lnSpc>
+              <a:spcBef>
+                <a:spcPts val="0"/>
+              </a:spcBef>
+              <a:spcAft>
+                <a:spcPts val="0"/>
+              </a:spcAft>
+              <a:buClr>
+                <a:srgbClr val="000000"/>
+              </a:buClr>
+              <a:buSzPts val="1000"/>
+              <a:buFont typeface="Arial"/>
+              <a:buNone/>
+              <a:defRPr b="0" i="0" sz="1000" u="none" cap="none" strike="noStrike">
+                <a:solidFill>
+                  <a:schemeClr val="dk2"/>
+                </a:solidFill>
+                <a:latin typeface="Arial"/>
+                <a:ea typeface="Arial"/>
+                <a:cs typeface="Arial"/>
+                <a:sym typeface="Arial"/>
+              </a:defRPr>
+            </a:lvl5pPr>
+            <a:lvl6pPr indent="0" lvl="5" marL="0" marR="0" algn="r">
+              <a:lnSpc>
+                <a:spcPct val="100000"/>
+              </a:lnSpc>
+              <a:spcBef>
+                <a:spcPts val="0"/>
+              </a:spcBef>
+              <a:spcAft>
+                <a:spcPts val="0"/>
+              </a:spcAft>
+              <a:buClr>
+                <a:srgbClr val="000000"/>
+              </a:buClr>
+              <a:buSzPts val="1000"/>
+              <a:buFont typeface="Arial"/>
+              <a:buNone/>
+              <a:defRPr b="0" i="0" sz="1000" u="none" cap="none" strike="noStrike">
+                <a:solidFill>
+                  <a:schemeClr val="dk2"/>
+                </a:solidFill>
+                <a:latin typeface="Arial"/>
+                <a:ea typeface="Arial"/>
+                <a:cs typeface="Arial"/>
+                <a:sym typeface="Arial"/>
+              </a:defRPr>
+            </a:lvl6pPr>
+            <a:lvl7pPr indent="0" lvl="6" marL="0" marR="0" algn="r">
+              <a:lnSpc>
+                <a:spcPct val="100000"/>
+              </a:lnSpc>
+              <a:spcBef>
+                <a:spcPts val="0"/>
+              </a:spcBef>
+              <a:spcAft>
+                <a:spcPts val="0"/>
+              </a:spcAft>
+              <a:buClr>
+                <a:srgbClr val="000000"/>
+              </a:buClr>
+              <a:buSzPts val="1000"/>
+              <a:buFont typeface="Arial"/>
+              <a:buNone/>
+              <a:defRPr b="0" i="0" sz="1000" u="none" cap="none" strike="noStrike">
+                <a:solidFill>
+                  <a:schemeClr val="dk2"/>
+                </a:solidFill>
+                <a:latin typeface="Arial"/>
+                <a:ea typeface="Arial"/>
+                <a:cs typeface="Arial"/>
+                <a:sym typeface="Arial"/>
+              </a:defRPr>
+            </a:lvl7pPr>
+            <a:lvl8pPr indent="0" lvl="7" marL="0" marR="0" algn="r">
+              <a:lnSpc>
+                <a:spcPct val="100000"/>
+              </a:lnSpc>
+              <a:spcBef>
+                <a:spcPts val="0"/>
+              </a:spcBef>
+              <a:spcAft>
+                <a:spcPts val="0"/>
+              </a:spcAft>
+              <a:buClr>
+                <a:srgbClr val="000000"/>
+              </a:buClr>
+              <a:buSzPts val="1000"/>
+              <a:buFont typeface="Arial"/>
+              <a:buNone/>
+              <a:defRPr b="0" i="0" sz="1000" u="none" cap="none" strike="noStrike">
+                <a:solidFill>
+                  <a:schemeClr val="dk2"/>
+                </a:solidFill>
+                <a:latin typeface="Arial"/>
+                <a:ea typeface="Arial"/>
+                <a:cs typeface="Arial"/>
+                <a:sym typeface="Arial"/>
+              </a:defRPr>
+            </a:lvl8pPr>
+            <a:lvl9pPr indent="0" lvl="8" marL="0" marR="0" algn="r">
+              <a:lnSpc>
+                <a:spcPct val="100000"/>
+              </a:lnSpc>
+              <a:spcBef>
+                <a:spcPts val="0"/>
+              </a:spcBef>
+              <a:spcAft>
+                <a:spcPts val="0"/>
+              </a:spcAft>
+              <a:buClr>
+                <a:srgbClr val="000000"/>
+              </a:buClr>
+              <a:buSzPts val="1000"/>
+              <a:buFont typeface="Arial"/>
+              <a:buNone/>
+              <a:defRPr b="0" i="0" sz="1000" u="none" cap="none" strike="noStrike">
+                <a:solidFill>
+                  <a:schemeClr val="dk2"/>
+                </a:solidFill>
+                <a:latin typeface="Arial"/>
+                <a:ea typeface="Arial"/>
+                <a:cs typeface="Arial"/>
+                <a:sym typeface="Arial"/>
+              </a:defRPr>
+            </a:lvl9pPr>
+          </a:lstStyle>
+          <a:p>
+            <a:pPr indent="0" lvl="0" marL="0" rtl="0" algn="r">
+              <a:spcBef>
+                <a:spcPts val="0"/>
+              </a:spcBef>
+              <a:spcAft>
+                <a:spcPts val="0"/>
+              </a:spcAft>
+              <a:buNone/>
+            </a:pPr>
+            <a:fld id="{00000000-1234-1234-1234-123412341234}" type="slidenum">
+              <a:rPr lang="pt-BR"/>
+              <a:t>‹#›</a:t>
+            </a:fld>
+            <a:endParaRPr/>
+          </a:p>
+        </p:txBody>
+      </p:sp>
+    </p:spTree>
+  </p:cSld>
+  <p:clrMapOvr>
+    <a:masterClrMapping/>
+  </p:clrMapOvr>
+</p:sldLayout>
+</file>
+
+<file path=ppt/slideLayouts/slideLayout9.xml><?xml version="1.0" encoding="utf-8"?>
+<p:sldLayout xmlns:a="http://schemas.openxmlformats.org/drawingml/2006/main" xmlns:r="http://schemas.openxmlformats.org/officeDocument/2006/relationships" xmlns:mc="http://schemas.openxmlformats.org/markup-compatibility/2006" xmlns:mv="urn:schemas-microsoft-com:mac:vml" xmlns:p="http://schemas.openxmlformats.org/presentationml/2006/main" xmlns:c="http://schemas.openxmlformats.org/drawingml/2006/chart" xmlns:dgm="http://schemas.openxmlformats.org/drawingml/2006/diagram" xmlns:o="urn:schemas-microsoft-com:office:office" xmlns:v="urn:schemas-microsoft-com:vml" xmlns:pvml="urn:schemas-microsoft-com:office:powerpoint" xmlns:com="http://schemas.openxmlformats.org/drawingml/2006/compatibility" xmlns:p14="http://schemas.microsoft.com/office/powerpoint/2010/main" xmlns:p15="http://schemas.microsoft.com/office/powerpoint/2012/main" xmlns:ahyp="http://schemas.microsoft.com/office/drawing/2018/hyperlinkcolor" matchingName="Section title and description">
+  <p:cSld name="SECTION_TITLE_AND_DESCRIPTION">
+    <p:spTree>
+      <p:nvGrpSpPr>
+        <p:cNvPr id="37" name="Shape 37"/>
+        <p:cNvGrpSpPr/>
+        <p:nvPr/>
+      </p:nvGrpSpPr>
+      <p:grpSpPr>
+        <a:xfrm>
+          <a:off x="0" y="0"/>
+          <a:ext cx="0" cy="0"/>
+          <a:chOff x="0" y="0"/>
+          <a:chExt cx="0" cy="0"/>
+        </a:xfrm>
+      </p:grpSpPr>
+      <p:sp>
+        <p:nvSpPr>
+          <p:cNvPr id="38" name="Google Shape;38;p10"/>
           <p:cNvSpPr/>
           <p:nvPr/>
         </p:nvSpPr>
@@ -4380,25 +6971,41 @@
           </a:bodyPr>
           <a:lstStyle/>
           <a:p>
-            <a:pPr indent="0" lvl="0" marL="0" rtl="0" algn="l">
-              <a:spcBef>
-                <a:spcPts val="0"/>
-              </a:spcBef>
-              <a:spcAft>
-                <a:spcPts val="0"/>
-              </a:spcAft>
+            <a:pPr indent="0" lvl="0" marL="0" marR="0" rtl="0" algn="l">
+              <a:lnSpc>
+                <a:spcPct val="100000"/>
+              </a:lnSpc>
+              <a:spcBef>
+                <a:spcPts val="0"/>
+              </a:spcBef>
+              <a:spcAft>
+                <a:spcPts val="0"/>
+              </a:spcAft>
+              <a:buClr>
+                <a:srgbClr val="000000"/>
+              </a:buClr>
+              <a:buSzPts val="1400"/>
+              <a:buFont typeface="Arial"/>
               <a:buNone/>
             </a:pPr>
             <a:r>
               <a:t/>
             </a:r>
-            <a:endParaRPr/>
+            <a:endParaRPr b="0" i="0" sz="1400" u="none" cap="none" strike="noStrike">
+              <a:solidFill>
+                <a:srgbClr val="000000"/>
+              </a:solidFill>
+              <a:latin typeface="Arial"/>
+              <a:ea typeface="Arial"/>
+              <a:cs typeface="Arial"/>
+              <a:sym typeface="Arial"/>
+            </a:endParaRPr>
           </a:p>
         </p:txBody>
       </p:sp>
       <p:sp>
         <p:nvSpPr>
-          <p:cNvPr id="37" name="Google Shape;37;p9"/>
+          <p:cNvPr id="39" name="Google Shape;39;p10"/>
           <p:cNvSpPr txBox="1"/>
           <p:nvPr>
             <p:ph type="title"/>
@@ -4412,6 +7019,10 @@
           <a:prstGeom prst="rect">
             <a:avLst/>
           </a:prstGeom>
+          <a:noFill/>
+          <a:ln>
+            <a:noFill/>
+          </a:ln>
         </p:spPr>
         <p:txBody>
           <a:bodyPr anchorCtr="0" anchor="b" bIns="91425" lIns="91425" spcFirstLastPara="1" rIns="91425" wrap="square" tIns="91425">
@@ -4419,6 +7030,9 @@
           </a:bodyPr>
           <a:lstStyle>
             <a:lvl1pPr lvl="0" algn="ctr">
+              <a:lnSpc>
+                <a:spcPct val="100000"/>
+              </a:lnSpc>
               <a:spcBef>
                 <a:spcPts val="0"/>
               </a:spcBef>
@@ -4430,6 +7044,9 @@
               <a:defRPr sz="4200"/>
             </a:lvl1pPr>
             <a:lvl2pPr lvl="1" algn="ctr">
+              <a:lnSpc>
+                <a:spcPct val="100000"/>
+              </a:lnSpc>
               <a:spcBef>
                 <a:spcPts val="0"/>
               </a:spcBef>
@@ -4441,6 +7058,9 @@
               <a:defRPr sz="4200"/>
             </a:lvl2pPr>
             <a:lvl3pPr lvl="2" algn="ctr">
+              <a:lnSpc>
+                <a:spcPct val="100000"/>
+              </a:lnSpc>
               <a:spcBef>
                 <a:spcPts val="0"/>
               </a:spcBef>
@@ -4452,6 +7072,9 @@
               <a:defRPr sz="4200"/>
             </a:lvl3pPr>
             <a:lvl4pPr lvl="3" algn="ctr">
+              <a:lnSpc>
+                <a:spcPct val="100000"/>
+              </a:lnSpc>
               <a:spcBef>
                 <a:spcPts val="0"/>
               </a:spcBef>
@@ -4463,6 +7086,9 @@
               <a:defRPr sz="4200"/>
             </a:lvl4pPr>
             <a:lvl5pPr lvl="4" algn="ctr">
+              <a:lnSpc>
+                <a:spcPct val="100000"/>
+              </a:lnSpc>
               <a:spcBef>
                 <a:spcPts val="0"/>
               </a:spcBef>
@@ -4474,6 +7100,9 @@
               <a:defRPr sz="4200"/>
             </a:lvl5pPr>
             <a:lvl6pPr lvl="5" algn="ctr">
+              <a:lnSpc>
+                <a:spcPct val="100000"/>
+              </a:lnSpc>
               <a:spcBef>
                 <a:spcPts val="0"/>
               </a:spcBef>
@@ -4485,6 +7114,9 @@
               <a:defRPr sz="4200"/>
             </a:lvl6pPr>
             <a:lvl7pPr lvl="6" algn="ctr">
+              <a:lnSpc>
+                <a:spcPct val="100000"/>
+              </a:lnSpc>
               <a:spcBef>
                 <a:spcPts val="0"/>
               </a:spcBef>
@@ -4496,6 +7128,9 @@
               <a:defRPr sz="4200"/>
             </a:lvl7pPr>
             <a:lvl8pPr lvl="7" algn="ctr">
+              <a:lnSpc>
+                <a:spcPct val="100000"/>
+              </a:lnSpc>
               <a:spcBef>
                 <a:spcPts val="0"/>
               </a:spcBef>
@@ -4507,6 +7142,9 @@
               <a:defRPr sz="4200"/>
             </a:lvl8pPr>
             <a:lvl9pPr lvl="8" algn="ctr">
+              <a:lnSpc>
+                <a:spcPct val="100000"/>
+              </a:lnSpc>
               <a:spcBef>
                 <a:spcPts val="0"/>
               </a:spcBef>
@@ -4523,7 +7161,7 @@
       </p:sp>
       <p:sp>
         <p:nvSpPr>
-          <p:cNvPr id="38" name="Google Shape;38;p9"/>
+          <p:cNvPr id="40" name="Google Shape;40;p10"/>
           <p:cNvSpPr txBox="1"/>
           <p:nvPr>
             <p:ph idx="1" type="subTitle"/>
@@ -4537,6 +7175,10 @@
           <a:prstGeom prst="rect">
             <a:avLst/>
           </a:prstGeom>
+          <a:noFill/>
+          <a:ln>
+            <a:noFill/>
+          </a:ln>
         </p:spPr>
         <p:txBody>
           <a:bodyPr anchorCtr="0" anchor="t" bIns="91425" lIns="91425" spcFirstLastPara="1" rIns="91425" wrap="square" tIns="91425">
@@ -4675,7 +7317,7 @@
       </p:sp>
       <p:sp>
         <p:nvSpPr>
-          <p:cNvPr id="39" name="Google Shape;39;p9"/>
+          <p:cNvPr id="41" name="Google Shape;41;p10"/>
           <p:cNvSpPr txBox="1"/>
           <p:nvPr>
             <p:ph idx="2" type="body"/>
@@ -4689,13 +7331,20 @@
           <a:prstGeom prst="rect">
             <a:avLst/>
           </a:prstGeom>
+          <a:noFill/>
+          <a:ln>
+            <a:noFill/>
+          </a:ln>
         </p:spPr>
         <p:txBody>
           <a:bodyPr anchorCtr="0" anchor="ctr" bIns="91425" lIns="91425" spcFirstLastPara="1" rIns="91425" wrap="square" tIns="91425">
             <a:normAutofit/>
           </a:bodyPr>
           <a:lstStyle>
-            <a:lvl1pPr indent="-342900" lvl="0" marL="457200">
+            <a:lvl1pPr indent="-342900" lvl="0" marL="457200" algn="l">
+              <a:lnSpc>
+                <a:spcPct val="115000"/>
+              </a:lnSpc>
               <a:spcBef>
                 <a:spcPts val="0"/>
               </a:spcBef>
@@ -4706,7 +7355,10 @@
               <a:buChar char="●"/>
               <a:defRPr/>
             </a:lvl1pPr>
-            <a:lvl2pPr indent="-317500" lvl="1" marL="914400">
+            <a:lvl2pPr indent="-317500" lvl="1" marL="914400" algn="l">
+              <a:lnSpc>
+                <a:spcPct val="115000"/>
+              </a:lnSpc>
               <a:spcBef>
                 <a:spcPts val="0"/>
               </a:spcBef>
@@ -4717,7 +7369,10 @@
               <a:buChar char="○"/>
               <a:defRPr/>
             </a:lvl2pPr>
-            <a:lvl3pPr indent="-317500" lvl="2" marL="1371600">
+            <a:lvl3pPr indent="-317500" lvl="2" marL="1371600" algn="l">
+              <a:lnSpc>
+                <a:spcPct val="115000"/>
+              </a:lnSpc>
               <a:spcBef>
                 <a:spcPts val="0"/>
               </a:spcBef>
@@ -4728,7 +7383,10 @@
               <a:buChar char="■"/>
               <a:defRPr/>
             </a:lvl3pPr>
-            <a:lvl4pPr indent="-317500" lvl="3" marL="1828800">
+            <a:lvl4pPr indent="-317500" lvl="3" marL="1828800" algn="l">
+              <a:lnSpc>
+                <a:spcPct val="115000"/>
+              </a:lnSpc>
               <a:spcBef>
                 <a:spcPts val="0"/>
               </a:spcBef>
@@ -4739,7 +7397,10 @@
               <a:buChar char="●"/>
               <a:defRPr/>
             </a:lvl4pPr>
-            <a:lvl5pPr indent="-317500" lvl="4" marL="2286000">
+            <a:lvl5pPr indent="-317500" lvl="4" marL="2286000" algn="l">
+              <a:lnSpc>
+                <a:spcPct val="115000"/>
+              </a:lnSpc>
               <a:spcBef>
                 <a:spcPts val="0"/>
               </a:spcBef>
@@ -4750,7 +7411,10 @@
               <a:buChar char="○"/>
               <a:defRPr/>
             </a:lvl5pPr>
-            <a:lvl6pPr indent="-317500" lvl="5" marL="2743200">
+            <a:lvl6pPr indent="-317500" lvl="5" marL="2743200" algn="l">
+              <a:lnSpc>
+                <a:spcPct val="115000"/>
+              </a:lnSpc>
               <a:spcBef>
                 <a:spcPts val="0"/>
               </a:spcBef>
@@ -4761,7 +7425,10 @@
               <a:buChar char="■"/>
               <a:defRPr/>
             </a:lvl6pPr>
-            <a:lvl7pPr indent="-317500" lvl="6" marL="3200400">
+            <a:lvl7pPr indent="-317500" lvl="6" marL="3200400" algn="l">
+              <a:lnSpc>
+                <a:spcPct val="115000"/>
+              </a:lnSpc>
               <a:spcBef>
                 <a:spcPts val="0"/>
               </a:spcBef>
@@ -4772,7 +7439,10 @@
               <a:buChar char="●"/>
               <a:defRPr/>
             </a:lvl7pPr>
-            <a:lvl8pPr indent="-317500" lvl="7" marL="3657600">
+            <a:lvl8pPr indent="-317500" lvl="7" marL="3657600" algn="l">
+              <a:lnSpc>
+                <a:spcPct val="115000"/>
+              </a:lnSpc>
               <a:spcBef>
                 <a:spcPts val="0"/>
               </a:spcBef>
@@ -4783,7 +7453,10 @@
               <a:buChar char="○"/>
               <a:defRPr/>
             </a:lvl8pPr>
-            <a:lvl9pPr indent="-317500" lvl="8" marL="4114800">
+            <a:lvl9pPr indent="-317500" lvl="8" marL="4114800" algn="l">
+              <a:lnSpc>
+                <a:spcPct val="115000"/>
+              </a:lnSpc>
               <a:spcBef>
                 <a:spcPts val="0"/>
               </a:spcBef>
@@ -4800,7 +7473,7 @@
       </p:sp>
       <p:sp>
         <p:nvSpPr>
-          <p:cNvPr id="40" name="Google Shape;40;p9"/>
+          <p:cNvPr id="42" name="Google Shape;42;p10"/>
           <p:cNvSpPr txBox="1"/>
           <p:nvPr>
             <p:ph idx="12" type="sldNum"/>
@@ -4814,189 +7487,249 @@
           <a:prstGeom prst="rect">
             <a:avLst/>
           </a:prstGeom>
+          <a:noFill/>
+          <a:ln>
+            <a:noFill/>
+          </a:ln>
         </p:spPr>
         <p:txBody>
           <a:bodyPr anchorCtr="0" anchor="ctr" bIns="91425" lIns="91425" spcFirstLastPara="1" rIns="91425" wrap="square" tIns="91425">
             <a:normAutofit/>
           </a:bodyPr>
           <a:lstStyle>
-            <a:lvl1pPr lvl="0">
-              <a:buNone/>
-              <a:defRPr/>
+            <a:lvl1pPr indent="0" lvl="0" marL="0" marR="0" algn="r">
+              <a:lnSpc>
+                <a:spcPct val="100000"/>
+              </a:lnSpc>
+              <a:spcBef>
+                <a:spcPts val="0"/>
+              </a:spcBef>
+              <a:spcAft>
+                <a:spcPts val="0"/>
+              </a:spcAft>
+              <a:buClr>
+                <a:srgbClr val="000000"/>
+              </a:buClr>
+              <a:buSzPts val="1000"/>
+              <a:buFont typeface="Arial"/>
+              <a:buNone/>
+              <a:defRPr b="0" i="0" sz="1000" u="none" cap="none" strike="noStrike">
+                <a:solidFill>
+                  <a:schemeClr val="dk2"/>
+                </a:solidFill>
+                <a:latin typeface="Arial"/>
+                <a:ea typeface="Arial"/>
+                <a:cs typeface="Arial"/>
+                <a:sym typeface="Arial"/>
+              </a:defRPr>
             </a:lvl1pPr>
-            <a:lvl2pPr lvl="1">
-              <a:buNone/>
-              <a:defRPr/>
+            <a:lvl2pPr indent="0" lvl="1" marL="0" marR="0" algn="r">
+              <a:lnSpc>
+                <a:spcPct val="100000"/>
+              </a:lnSpc>
+              <a:spcBef>
+                <a:spcPts val="0"/>
+              </a:spcBef>
+              <a:spcAft>
+                <a:spcPts val="0"/>
+              </a:spcAft>
+              <a:buClr>
+                <a:srgbClr val="000000"/>
+              </a:buClr>
+              <a:buSzPts val="1000"/>
+              <a:buFont typeface="Arial"/>
+              <a:buNone/>
+              <a:defRPr b="0" i="0" sz="1000" u="none" cap="none" strike="noStrike">
+                <a:solidFill>
+                  <a:schemeClr val="dk2"/>
+                </a:solidFill>
+                <a:latin typeface="Arial"/>
+                <a:ea typeface="Arial"/>
+                <a:cs typeface="Arial"/>
+                <a:sym typeface="Arial"/>
+              </a:defRPr>
             </a:lvl2pPr>
-            <a:lvl3pPr lvl="2">
-              <a:buNone/>
-              <a:defRPr/>
+            <a:lvl3pPr indent="0" lvl="2" marL="0" marR="0" algn="r">
+              <a:lnSpc>
+                <a:spcPct val="100000"/>
+              </a:lnSpc>
+              <a:spcBef>
+                <a:spcPts val="0"/>
+              </a:spcBef>
+              <a:spcAft>
+                <a:spcPts val="0"/>
+              </a:spcAft>
+              <a:buClr>
+                <a:srgbClr val="000000"/>
+              </a:buClr>
+              <a:buSzPts val="1000"/>
+              <a:buFont typeface="Arial"/>
+              <a:buNone/>
+              <a:defRPr b="0" i="0" sz="1000" u="none" cap="none" strike="noStrike">
+                <a:solidFill>
+                  <a:schemeClr val="dk2"/>
+                </a:solidFill>
+                <a:latin typeface="Arial"/>
+                <a:ea typeface="Arial"/>
+                <a:cs typeface="Arial"/>
+                <a:sym typeface="Arial"/>
+              </a:defRPr>
             </a:lvl3pPr>
-            <a:lvl4pPr lvl="3">
-              <a:buNone/>
-              <a:defRPr/>
+            <a:lvl4pPr indent="0" lvl="3" marL="0" marR="0" algn="r">
+              <a:lnSpc>
+                <a:spcPct val="100000"/>
+              </a:lnSpc>
+              <a:spcBef>
+                <a:spcPts val="0"/>
+              </a:spcBef>
+              <a:spcAft>
+                <a:spcPts val="0"/>
+              </a:spcAft>
+              <a:buClr>
+                <a:srgbClr val="000000"/>
+              </a:buClr>
+              <a:buSzPts val="1000"/>
+              <a:buFont typeface="Arial"/>
+              <a:buNone/>
+              <a:defRPr b="0" i="0" sz="1000" u="none" cap="none" strike="noStrike">
+                <a:solidFill>
+                  <a:schemeClr val="dk2"/>
+                </a:solidFill>
+                <a:latin typeface="Arial"/>
+                <a:ea typeface="Arial"/>
+                <a:cs typeface="Arial"/>
+                <a:sym typeface="Arial"/>
+              </a:defRPr>
             </a:lvl4pPr>
-            <a:lvl5pPr lvl="4">
-              <a:buNone/>
-              <a:defRPr/>
+            <a:lvl5pPr indent="0" lvl="4" marL="0" marR="0" algn="r">
+              <a:lnSpc>
+                <a:spcPct val="100000"/>
+              </a:lnSpc>
+              <a:spcBef>
+                <a:spcPts val="0"/>
+              </a:spcBef>
+              <a:spcAft>
+                <a:spcPts val="0"/>
+              </a:spcAft>
+              <a:buClr>
+                <a:srgbClr val="000000"/>
+              </a:buClr>
+              <a:buSzPts val="1000"/>
+              <a:buFont typeface="Arial"/>
+              <a:buNone/>
+              <a:defRPr b="0" i="0" sz="1000" u="none" cap="none" strike="noStrike">
+                <a:solidFill>
+                  <a:schemeClr val="dk2"/>
+                </a:solidFill>
+                <a:latin typeface="Arial"/>
+                <a:ea typeface="Arial"/>
+                <a:cs typeface="Arial"/>
+                <a:sym typeface="Arial"/>
+              </a:defRPr>
             </a:lvl5pPr>
-            <a:lvl6pPr lvl="5">
-              <a:buNone/>
-              <a:defRPr/>
+            <a:lvl6pPr indent="0" lvl="5" marL="0" marR="0" algn="r">
+              <a:lnSpc>
+                <a:spcPct val="100000"/>
+              </a:lnSpc>
+              <a:spcBef>
+                <a:spcPts val="0"/>
+              </a:spcBef>
+              <a:spcAft>
+                <a:spcPts val="0"/>
+              </a:spcAft>
+              <a:buClr>
+                <a:srgbClr val="000000"/>
+              </a:buClr>
+              <a:buSzPts val="1000"/>
+              <a:buFont typeface="Arial"/>
+              <a:buNone/>
+              <a:defRPr b="0" i="0" sz="1000" u="none" cap="none" strike="noStrike">
+                <a:solidFill>
+                  <a:schemeClr val="dk2"/>
+                </a:solidFill>
+                <a:latin typeface="Arial"/>
+                <a:ea typeface="Arial"/>
+                <a:cs typeface="Arial"/>
+                <a:sym typeface="Arial"/>
+              </a:defRPr>
             </a:lvl6pPr>
-            <a:lvl7pPr lvl="6">
-              <a:buNone/>
-              <a:defRPr/>
+            <a:lvl7pPr indent="0" lvl="6" marL="0" marR="0" algn="r">
+              <a:lnSpc>
+                <a:spcPct val="100000"/>
+              </a:lnSpc>
+              <a:spcBef>
+                <a:spcPts val="0"/>
+              </a:spcBef>
+              <a:spcAft>
+                <a:spcPts val="0"/>
+              </a:spcAft>
+              <a:buClr>
+                <a:srgbClr val="000000"/>
+              </a:buClr>
+              <a:buSzPts val="1000"/>
+              <a:buFont typeface="Arial"/>
+              <a:buNone/>
+              <a:defRPr b="0" i="0" sz="1000" u="none" cap="none" strike="noStrike">
+                <a:solidFill>
+                  <a:schemeClr val="dk2"/>
+                </a:solidFill>
+                <a:latin typeface="Arial"/>
+                <a:ea typeface="Arial"/>
+                <a:cs typeface="Arial"/>
+                <a:sym typeface="Arial"/>
+              </a:defRPr>
             </a:lvl7pPr>
-            <a:lvl8pPr lvl="7">
-              <a:buNone/>
-              <a:defRPr/>
+            <a:lvl8pPr indent="0" lvl="7" marL="0" marR="0" algn="r">
+              <a:lnSpc>
+                <a:spcPct val="100000"/>
+              </a:lnSpc>
+              <a:spcBef>
+                <a:spcPts val="0"/>
+              </a:spcBef>
+              <a:spcAft>
+                <a:spcPts val="0"/>
+              </a:spcAft>
+              <a:buClr>
+                <a:srgbClr val="000000"/>
+              </a:buClr>
+              <a:buSzPts val="1000"/>
+              <a:buFont typeface="Arial"/>
+              <a:buNone/>
+              <a:defRPr b="0" i="0" sz="1000" u="none" cap="none" strike="noStrike">
+                <a:solidFill>
+                  <a:schemeClr val="dk2"/>
+                </a:solidFill>
+                <a:latin typeface="Arial"/>
+                <a:ea typeface="Arial"/>
+                <a:cs typeface="Arial"/>
+                <a:sym typeface="Arial"/>
+              </a:defRPr>
             </a:lvl8pPr>
-            <a:lvl9pPr lvl="8">
-              <a:buNone/>
-              <a:defRPr/>
-            </a:lvl9pPr>
-          </a:lstStyle>
-          <a:p>
-            <a:pPr indent="0" lvl="0" marL="0" rtl="0" algn="r">
-              <a:spcBef>
-                <a:spcPts val="0"/>
-              </a:spcBef>
-              <a:spcAft>
-                <a:spcPts val="0"/>
-              </a:spcAft>
-              <a:buNone/>
-            </a:pPr>
-            <a:fld id="{00000000-1234-1234-1234-123412341234}" type="slidenum">
-              <a:rPr lang="pt-BR"/>
-              <a:t>‹#›</a:t>
-            </a:fld>
-            <a:endParaRPr/>
-          </a:p>
-        </p:txBody>
-      </p:sp>
-    </p:spTree>
-  </p:cSld>
-  <p:clrMapOvr>
-    <a:masterClrMapping/>
-  </p:clrMapOvr>
-</p:sldLayout>
-</file>
-
-<file path=ppt/slideLayouts/slideLayout9.xml><?xml version="1.0" encoding="utf-8"?>
-<p:sldLayout xmlns:a="http://schemas.openxmlformats.org/drawingml/2006/main" xmlns:r="http://schemas.openxmlformats.org/officeDocument/2006/relationships" xmlns:mc="http://schemas.openxmlformats.org/markup-compatibility/2006" xmlns:mv="urn:schemas-microsoft-com:mac:vml" xmlns:p="http://schemas.openxmlformats.org/presentationml/2006/main" xmlns:c="http://schemas.openxmlformats.org/drawingml/2006/chart" xmlns:dgm="http://schemas.openxmlformats.org/drawingml/2006/diagram" xmlns:o="urn:schemas-microsoft-com:office:office" xmlns:v="urn:schemas-microsoft-com:vml" xmlns:pvml="urn:schemas-microsoft-com:office:powerpoint" xmlns:com="http://schemas.openxmlformats.org/drawingml/2006/compatibility" xmlns:p14="http://schemas.microsoft.com/office/powerpoint/2010/main" xmlns:p15="http://schemas.microsoft.com/office/powerpoint/2012/main" xmlns:ahyp="http://schemas.microsoft.com/office/drawing/2018/hyperlinkcolor" matchingName="Caption">
-  <p:cSld name="CAPTION_ONLY">
-    <p:spTree>
-      <p:nvGrpSpPr>
-        <p:cNvPr id="41" name="Shape 41"/>
-        <p:cNvGrpSpPr/>
-        <p:nvPr/>
-      </p:nvGrpSpPr>
-      <p:grpSpPr>
-        <a:xfrm>
-          <a:off x="0" y="0"/>
-          <a:ext cx="0" cy="0"/>
-          <a:chOff x="0" y="0"/>
-          <a:chExt cx="0" cy="0"/>
-        </a:xfrm>
-      </p:grpSpPr>
-      <p:sp>
-        <p:nvSpPr>
-          <p:cNvPr id="42" name="Google Shape;42;p10"/>
-          <p:cNvSpPr txBox="1"/>
-          <p:nvPr>
-            <p:ph idx="1" type="body"/>
-          </p:nvPr>
-        </p:nvSpPr>
-        <p:spPr>
-          <a:xfrm>
-            <a:off x="311700" y="4230575"/>
-            <a:ext cx="5998800" cy="605100"/>
-          </a:xfrm>
-          <a:prstGeom prst="rect">
-            <a:avLst/>
-          </a:prstGeom>
-        </p:spPr>
-        <p:txBody>
-          <a:bodyPr anchorCtr="0" anchor="ctr" bIns="91425" lIns="91425" spcFirstLastPara="1" rIns="91425" wrap="square" tIns="91425">
-            <a:normAutofit/>
-          </a:bodyPr>
-          <a:lstStyle>
-            <a:lvl1pPr indent="-228600" lvl="0" marL="457200">
-              <a:lnSpc>
-                <a:spcPct val="100000"/>
-              </a:lnSpc>
-              <a:spcBef>
-                <a:spcPts val="0"/>
-              </a:spcBef>
-              <a:spcAft>
-                <a:spcPts val="0"/>
-              </a:spcAft>
-              <a:buSzPts val="1800"/>
-              <a:buNone/>
-              <a:defRPr/>
-            </a:lvl1pPr>
-          </a:lstStyle>
-          <a:p/>
-        </p:txBody>
-      </p:sp>
-      <p:sp>
-        <p:nvSpPr>
-          <p:cNvPr id="43" name="Google Shape;43;p10"/>
-          <p:cNvSpPr txBox="1"/>
-          <p:nvPr>
-            <p:ph idx="12" type="sldNum"/>
-          </p:nvPr>
-        </p:nvSpPr>
-        <p:spPr>
-          <a:xfrm>
-            <a:off x="8472458" y="4663217"/>
-            <a:ext cx="548700" cy="393600"/>
-          </a:xfrm>
-          <a:prstGeom prst="rect">
-            <a:avLst/>
-          </a:prstGeom>
-        </p:spPr>
-        <p:txBody>
-          <a:bodyPr anchorCtr="0" anchor="ctr" bIns="91425" lIns="91425" spcFirstLastPara="1" rIns="91425" wrap="square" tIns="91425">
-            <a:normAutofit/>
-          </a:bodyPr>
-          <a:lstStyle>
-            <a:lvl1pPr lvl="0">
-              <a:buNone/>
-              <a:defRPr/>
-            </a:lvl1pPr>
-            <a:lvl2pPr lvl="1">
-              <a:buNone/>
-              <a:defRPr/>
-            </a:lvl2pPr>
-            <a:lvl3pPr lvl="2">
-              <a:buNone/>
-              <a:defRPr/>
-            </a:lvl3pPr>
-            <a:lvl4pPr lvl="3">
-              <a:buNone/>
-              <a:defRPr/>
-            </a:lvl4pPr>
-            <a:lvl5pPr lvl="4">
-              <a:buNone/>
-              <a:defRPr/>
-            </a:lvl5pPr>
-            <a:lvl6pPr lvl="5">
-              <a:buNone/>
-              <a:defRPr/>
-            </a:lvl6pPr>
-            <a:lvl7pPr lvl="6">
-              <a:buNone/>
-              <a:defRPr/>
-            </a:lvl7pPr>
-            <a:lvl8pPr lvl="7">
-              <a:buNone/>
-              <a:defRPr/>
-            </a:lvl8pPr>
-            <a:lvl9pPr lvl="8">
-              <a:buNone/>
-              <a:defRPr/>
+            <a:lvl9pPr indent="0" lvl="8" marL="0" marR="0" algn="r">
+              <a:lnSpc>
+                <a:spcPct val="100000"/>
+              </a:lnSpc>
+              <a:spcBef>
+                <a:spcPts val="0"/>
+              </a:spcBef>
+              <a:spcAft>
+                <a:spcPts val="0"/>
+              </a:spcAft>
+              <a:buClr>
+                <a:srgbClr val="000000"/>
+              </a:buClr>
+              <a:buSzPts val="1000"/>
+              <a:buFont typeface="Arial"/>
+              <a:buNone/>
+              <a:defRPr b="0" i="0" sz="1000" u="none" cap="none" strike="noStrike">
+                <a:solidFill>
+                  <a:schemeClr val="dk2"/>
+                </a:solidFill>
+                <a:latin typeface="Arial"/>
+                <a:ea typeface="Arial"/>
+                <a:cs typeface="Arial"/>
+                <a:sym typeface="Arial"/>
+              </a:defRPr>
             </a:lvl9pPr>
           </a:lstStyle>
           <a:p>
@@ -5075,7 +7808,10 @@
             <a:normAutofit/>
           </a:bodyPr>
           <a:lstStyle>
-            <a:lvl1pPr lvl="0">
+            <a:lvl1pPr lvl="0" marR="0" rtl="0" algn="l">
+              <a:lnSpc>
+                <a:spcPct val="100000"/>
+              </a:lnSpc>
               <a:spcBef>
                 <a:spcPts val="0"/>
               </a:spcBef>
@@ -5086,14 +7822,22 @@
                 <a:schemeClr val="dk1"/>
               </a:buClr>
               <a:buSzPts val="2800"/>
-              <a:buNone/>
-              <a:defRPr sz="2800">
+              <a:buFont typeface="Arial"/>
+              <a:buNone/>
+              <a:defRPr b="0" i="0" sz="2800" u="none" cap="none" strike="noStrike">
                 <a:solidFill>
                   <a:schemeClr val="dk1"/>
                 </a:solidFill>
+                <a:latin typeface="Arial"/>
+                <a:ea typeface="Arial"/>
+                <a:cs typeface="Arial"/>
+                <a:sym typeface="Arial"/>
               </a:defRPr>
             </a:lvl1pPr>
-            <a:lvl2pPr lvl="1">
+            <a:lvl2pPr lvl="1" marR="0" rtl="0" algn="l">
+              <a:lnSpc>
+                <a:spcPct val="100000"/>
+              </a:lnSpc>
               <a:spcBef>
                 <a:spcPts val="0"/>
               </a:spcBef>
@@ -5104,14 +7848,22 @@
                 <a:schemeClr val="dk1"/>
               </a:buClr>
               <a:buSzPts val="2800"/>
-              <a:buNone/>
-              <a:defRPr sz="2800">
+              <a:buFont typeface="Arial"/>
+              <a:buNone/>
+              <a:defRPr b="0" i="0" sz="2800" u="none" cap="none" strike="noStrike">
                 <a:solidFill>
                   <a:schemeClr val="dk1"/>
                 </a:solidFill>
+                <a:latin typeface="Arial"/>
+                <a:ea typeface="Arial"/>
+                <a:cs typeface="Arial"/>
+                <a:sym typeface="Arial"/>
               </a:defRPr>
             </a:lvl2pPr>
-            <a:lvl3pPr lvl="2">
+            <a:lvl3pPr lvl="2" marR="0" rtl="0" algn="l">
+              <a:lnSpc>
+                <a:spcPct val="100000"/>
+              </a:lnSpc>
               <a:spcBef>
                 <a:spcPts val="0"/>
               </a:spcBef>
@@ -5122,14 +7874,22 @@
                 <a:schemeClr val="dk1"/>
               </a:buClr>
               <a:buSzPts val="2800"/>
-              <a:buNone/>
-              <a:defRPr sz="2800">
+              <a:buFont typeface="Arial"/>
+              <a:buNone/>
+              <a:defRPr b="0" i="0" sz="2800" u="none" cap="none" strike="noStrike">
                 <a:solidFill>
                   <a:schemeClr val="dk1"/>
                 </a:solidFill>
+                <a:latin typeface="Arial"/>
+                <a:ea typeface="Arial"/>
+                <a:cs typeface="Arial"/>
+                <a:sym typeface="Arial"/>
               </a:defRPr>
             </a:lvl3pPr>
-            <a:lvl4pPr lvl="3">
+            <a:lvl4pPr lvl="3" marR="0" rtl="0" algn="l">
+              <a:lnSpc>
+                <a:spcPct val="100000"/>
+              </a:lnSpc>
               <a:spcBef>
                 <a:spcPts val="0"/>
               </a:spcBef>
@@ -5140,14 +7900,22 @@
                 <a:schemeClr val="dk1"/>
               </a:buClr>
               <a:buSzPts val="2800"/>
-              <a:buNone/>
-              <a:defRPr sz="2800">
+              <a:buFont typeface="Arial"/>
+              <a:buNone/>
+              <a:defRPr b="0" i="0" sz="2800" u="none" cap="none" strike="noStrike">
                 <a:solidFill>
                   <a:schemeClr val="dk1"/>
                 </a:solidFill>
+                <a:latin typeface="Arial"/>
+                <a:ea typeface="Arial"/>
+                <a:cs typeface="Arial"/>
+                <a:sym typeface="Arial"/>
               </a:defRPr>
             </a:lvl4pPr>
-            <a:lvl5pPr lvl="4">
+            <a:lvl5pPr lvl="4" marR="0" rtl="0" algn="l">
+              <a:lnSpc>
+                <a:spcPct val="100000"/>
+              </a:lnSpc>
               <a:spcBef>
                 <a:spcPts val="0"/>
               </a:spcBef>
@@ -5158,14 +7926,22 @@
                 <a:schemeClr val="dk1"/>
               </a:buClr>
               <a:buSzPts val="2800"/>
-              <a:buNone/>
-              <a:defRPr sz="2800">
+              <a:buFont typeface="Arial"/>
+              <a:buNone/>
+              <a:defRPr b="0" i="0" sz="2800" u="none" cap="none" strike="noStrike">
                 <a:solidFill>
                   <a:schemeClr val="dk1"/>
                 </a:solidFill>
+                <a:latin typeface="Arial"/>
+                <a:ea typeface="Arial"/>
+                <a:cs typeface="Arial"/>
+                <a:sym typeface="Arial"/>
               </a:defRPr>
             </a:lvl5pPr>
-            <a:lvl6pPr lvl="5">
+            <a:lvl6pPr lvl="5" marR="0" rtl="0" algn="l">
+              <a:lnSpc>
+                <a:spcPct val="100000"/>
+              </a:lnSpc>
               <a:spcBef>
                 <a:spcPts val="0"/>
               </a:spcBef>
@@ -5176,14 +7952,22 @@
                 <a:schemeClr val="dk1"/>
               </a:buClr>
               <a:buSzPts val="2800"/>
-              <a:buNone/>
-              <a:defRPr sz="2800">
+              <a:buFont typeface="Arial"/>
+              <a:buNone/>
+              <a:defRPr b="0" i="0" sz="2800" u="none" cap="none" strike="noStrike">
                 <a:solidFill>
                   <a:schemeClr val="dk1"/>
                 </a:solidFill>
+                <a:latin typeface="Arial"/>
+                <a:ea typeface="Arial"/>
+                <a:cs typeface="Arial"/>
+                <a:sym typeface="Arial"/>
               </a:defRPr>
             </a:lvl6pPr>
-            <a:lvl7pPr lvl="6">
+            <a:lvl7pPr lvl="6" marR="0" rtl="0" algn="l">
+              <a:lnSpc>
+                <a:spcPct val="100000"/>
+              </a:lnSpc>
               <a:spcBef>
                 <a:spcPts val="0"/>
               </a:spcBef>
@@ -5194,14 +7978,22 @@
                 <a:schemeClr val="dk1"/>
               </a:buClr>
               <a:buSzPts val="2800"/>
-              <a:buNone/>
-              <a:defRPr sz="2800">
+              <a:buFont typeface="Arial"/>
+              <a:buNone/>
+              <a:defRPr b="0" i="0" sz="2800" u="none" cap="none" strike="noStrike">
                 <a:solidFill>
                   <a:schemeClr val="dk1"/>
                 </a:solidFill>
+                <a:latin typeface="Arial"/>
+                <a:ea typeface="Arial"/>
+                <a:cs typeface="Arial"/>
+                <a:sym typeface="Arial"/>
               </a:defRPr>
             </a:lvl7pPr>
-            <a:lvl8pPr lvl="7">
+            <a:lvl8pPr lvl="7" marR="0" rtl="0" algn="l">
+              <a:lnSpc>
+                <a:spcPct val="100000"/>
+              </a:lnSpc>
               <a:spcBef>
                 <a:spcPts val="0"/>
               </a:spcBef>
@@ -5212,14 +8004,22 @@
                 <a:schemeClr val="dk1"/>
               </a:buClr>
               <a:buSzPts val="2800"/>
-              <a:buNone/>
-              <a:defRPr sz="2800">
+              <a:buFont typeface="Arial"/>
+              <a:buNone/>
+              <a:defRPr b="0" i="0" sz="2800" u="none" cap="none" strike="noStrike">
                 <a:solidFill>
                   <a:schemeClr val="dk1"/>
                 </a:solidFill>
+                <a:latin typeface="Arial"/>
+                <a:ea typeface="Arial"/>
+                <a:cs typeface="Arial"/>
+                <a:sym typeface="Arial"/>
               </a:defRPr>
             </a:lvl8pPr>
-            <a:lvl9pPr lvl="8">
+            <a:lvl9pPr lvl="8" marR="0" rtl="0" algn="l">
+              <a:lnSpc>
+                <a:spcPct val="100000"/>
+              </a:lnSpc>
               <a:spcBef>
                 <a:spcPts val="0"/>
               </a:spcBef>
@@ -5230,11 +8030,16 @@
                 <a:schemeClr val="dk1"/>
               </a:buClr>
               <a:buSzPts val="2800"/>
-              <a:buNone/>
-              <a:defRPr sz="2800">
+              <a:buFont typeface="Arial"/>
+              <a:buNone/>
+              <a:defRPr b="0" i="0" sz="2800" u="none" cap="none" strike="noStrike">
                 <a:solidFill>
                   <a:schemeClr val="dk1"/>
                 </a:solidFill>
+                <a:latin typeface="Arial"/>
+                <a:ea typeface="Arial"/>
+                <a:cs typeface="Arial"/>
+                <a:sym typeface="Arial"/>
               </a:defRPr>
             </a:lvl9pPr>
           </a:lstStyle>
@@ -5267,7 +8072,7 @@
             <a:normAutofit/>
           </a:bodyPr>
           <a:lstStyle>
-            <a:lvl1pPr indent="-342900" lvl="0" marL="457200">
+            <a:lvl1pPr indent="-342900" lvl="0" marL="457200" marR="0" rtl="0" algn="l">
               <a:lnSpc>
                 <a:spcPct val="115000"/>
               </a:lnSpc>
@@ -5281,14 +8086,19 @@
                 <a:schemeClr val="dk2"/>
               </a:buClr>
               <a:buSzPts val="1800"/>
+              <a:buFont typeface="Arial"/>
               <a:buChar char="●"/>
-              <a:defRPr sz="1800">
+              <a:defRPr b="0" i="0" sz="1800" u="none" cap="none" strike="noStrike">
                 <a:solidFill>
                   <a:schemeClr val="dk2"/>
                 </a:solidFill>
+                <a:latin typeface="Arial"/>
+                <a:ea typeface="Arial"/>
+                <a:cs typeface="Arial"/>
+                <a:sym typeface="Arial"/>
               </a:defRPr>
             </a:lvl1pPr>
-            <a:lvl2pPr indent="-317500" lvl="1" marL="914400">
+            <a:lvl2pPr indent="-317500" lvl="1" marL="914400" marR="0" rtl="0" algn="l">
               <a:lnSpc>
                 <a:spcPct val="115000"/>
               </a:lnSpc>
@@ -5302,14 +8112,19 @@
                 <a:schemeClr val="dk2"/>
               </a:buClr>
               <a:buSzPts val="1400"/>
+              <a:buFont typeface="Arial"/>
               <a:buChar char="○"/>
-              <a:defRPr>
+              <a:defRPr b="0" i="0" sz="1400" u="none" cap="none" strike="noStrike">
                 <a:solidFill>
                   <a:schemeClr val="dk2"/>
                 </a:solidFill>
+                <a:latin typeface="Arial"/>
+                <a:ea typeface="Arial"/>
+                <a:cs typeface="Arial"/>
+                <a:sym typeface="Arial"/>
               </a:defRPr>
             </a:lvl2pPr>
-            <a:lvl3pPr indent="-317500" lvl="2" marL="1371600">
+            <a:lvl3pPr indent="-317500" lvl="2" marL="1371600" marR="0" rtl="0" algn="l">
               <a:lnSpc>
                 <a:spcPct val="115000"/>
               </a:lnSpc>
@@ -5323,14 +8138,19 @@
                 <a:schemeClr val="dk2"/>
               </a:buClr>
               <a:buSzPts val="1400"/>
+              <a:buFont typeface="Arial"/>
               <a:buChar char="■"/>
-              <a:defRPr>
+              <a:defRPr b="0" i="0" sz="1400" u="none" cap="none" strike="noStrike">
                 <a:solidFill>
                   <a:schemeClr val="dk2"/>
                 </a:solidFill>
+                <a:latin typeface="Arial"/>
+                <a:ea typeface="Arial"/>
+                <a:cs typeface="Arial"/>
+                <a:sym typeface="Arial"/>
               </a:defRPr>
             </a:lvl3pPr>
-            <a:lvl4pPr indent="-317500" lvl="3" marL="1828800">
+            <a:lvl4pPr indent="-317500" lvl="3" marL="1828800" marR="0" rtl="0" algn="l">
               <a:lnSpc>
                 <a:spcPct val="115000"/>
               </a:lnSpc>
@@ -5344,14 +8164,19 @@
                 <a:schemeClr val="dk2"/>
               </a:buClr>
               <a:buSzPts val="1400"/>
+              <a:buFont typeface="Arial"/>
               <a:buChar char="●"/>
-              <a:defRPr>
+              <a:defRPr b="0" i="0" sz="1400" u="none" cap="none" strike="noStrike">
                 <a:solidFill>
                   <a:schemeClr val="dk2"/>
                 </a:solidFill>
+                <a:latin typeface="Arial"/>
+                <a:ea typeface="Arial"/>
+                <a:cs typeface="Arial"/>
+                <a:sym typeface="Arial"/>
               </a:defRPr>
             </a:lvl4pPr>
-            <a:lvl5pPr indent="-317500" lvl="4" marL="2286000">
+            <a:lvl5pPr indent="-317500" lvl="4" marL="2286000" marR="0" rtl="0" algn="l">
               <a:lnSpc>
                 <a:spcPct val="115000"/>
               </a:lnSpc>
@@ -5365,14 +8190,19 @@
                 <a:schemeClr val="dk2"/>
               </a:buClr>
               <a:buSzPts val="1400"/>
+              <a:buFont typeface="Arial"/>
               <a:buChar char="○"/>
-              <a:defRPr>
+              <a:defRPr b="0" i="0" sz="1400" u="none" cap="none" strike="noStrike">
                 <a:solidFill>
                   <a:schemeClr val="dk2"/>
                 </a:solidFill>
+                <a:latin typeface="Arial"/>
+                <a:ea typeface="Arial"/>
+                <a:cs typeface="Arial"/>
+                <a:sym typeface="Arial"/>
               </a:defRPr>
             </a:lvl5pPr>
-            <a:lvl6pPr indent="-317500" lvl="5" marL="2743200">
+            <a:lvl6pPr indent="-317500" lvl="5" marL="2743200" marR="0" rtl="0" algn="l">
               <a:lnSpc>
                 <a:spcPct val="115000"/>
               </a:lnSpc>
@@ -5386,14 +8216,19 @@
                 <a:schemeClr val="dk2"/>
               </a:buClr>
               <a:buSzPts val="1400"/>
+              <a:buFont typeface="Arial"/>
               <a:buChar char="■"/>
-              <a:defRPr>
+              <a:defRPr b="0" i="0" sz="1400" u="none" cap="none" strike="noStrike">
                 <a:solidFill>
                   <a:schemeClr val="dk2"/>
                 </a:solidFill>
+                <a:latin typeface="Arial"/>
+                <a:ea typeface="Arial"/>
+                <a:cs typeface="Arial"/>
+                <a:sym typeface="Arial"/>
               </a:defRPr>
             </a:lvl6pPr>
-            <a:lvl7pPr indent="-317500" lvl="6" marL="3200400">
+            <a:lvl7pPr indent="-317500" lvl="6" marL="3200400" marR="0" rtl="0" algn="l">
               <a:lnSpc>
                 <a:spcPct val="115000"/>
               </a:lnSpc>
@@ -5407,14 +8242,19 @@
                 <a:schemeClr val="dk2"/>
               </a:buClr>
               <a:buSzPts val="1400"/>
+              <a:buFont typeface="Arial"/>
               <a:buChar char="●"/>
-              <a:defRPr>
+              <a:defRPr b="0" i="0" sz="1400" u="none" cap="none" strike="noStrike">
                 <a:solidFill>
                   <a:schemeClr val="dk2"/>
                 </a:solidFill>
+                <a:latin typeface="Arial"/>
+                <a:ea typeface="Arial"/>
+                <a:cs typeface="Arial"/>
+                <a:sym typeface="Arial"/>
               </a:defRPr>
             </a:lvl7pPr>
-            <a:lvl8pPr indent="-317500" lvl="7" marL="3657600">
+            <a:lvl8pPr indent="-317500" lvl="7" marL="3657600" marR="0" rtl="0" algn="l">
               <a:lnSpc>
                 <a:spcPct val="115000"/>
               </a:lnSpc>
@@ -5428,14 +8268,19 @@
                 <a:schemeClr val="dk2"/>
               </a:buClr>
               <a:buSzPts val="1400"/>
+              <a:buFont typeface="Arial"/>
               <a:buChar char="○"/>
-              <a:defRPr>
+              <a:defRPr b="0" i="0" sz="1400" u="none" cap="none" strike="noStrike">
                 <a:solidFill>
                   <a:schemeClr val="dk2"/>
                 </a:solidFill>
+                <a:latin typeface="Arial"/>
+                <a:ea typeface="Arial"/>
+                <a:cs typeface="Arial"/>
+                <a:sym typeface="Arial"/>
               </a:defRPr>
             </a:lvl8pPr>
-            <a:lvl9pPr indent="-317500" lvl="8" marL="4114800">
+            <a:lvl9pPr indent="-317500" lvl="8" marL="4114800" marR="0" rtl="0" algn="l">
               <a:lnSpc>
                 <a:spcPct val="115000"/>
               </a:lnSpc>
@@ -5449,11 +8294,16 @@
                 <a:schemeClr val="dk2"/>
               </a:buClr>
               <a:buSzPts val="1400"/>
+              <a:buFont typeface="Arial"/>
               <a:buChar char="■"/>
-              <a:defRPr>
+              <a:defRPr b="0" i="0" sz="1400" u="none" cap="none" strike="noStrike">
                 <a:solidFill>
                   <a:schemeClr val="dk2"/>
                 </a:solidFill>
+                <a:latin typeface="Arial"/>
+                <a:ea typeface="Arial"/>
+                <a:cs typeface="Arial"/>
+                <a:sym typeface="Arial"/>
               </a:defRPr>
             </a:lvl9pPr>
           </a:lstStyle>
@@ -5486,76 +8336,238 @@
             <a:normAutofit/>
           </a:bodyPr>
           <a:lstStyle>
-            <a:lvl1pPr lvl="0" algn="r">
-              <a:buNone/>
-              <a:defRPr sz="1000">
+            <a:lvl1pPr indent="0" lvl="0" marL="0" marR="0" rtl="0" algn="r">
+              <a:lnSpc>
+                <a:spcPct val="100000"/>
+              </a:lnSpc>
+              <a:spcBef>
+                <a:spcPts val="0"/>
+              </a:spcBef>
+              <a:spcAft>
+                <a:spcPts val="0"/>
+              </a:spcAft>
+              <a:buClr>
+                <a:srgbClr val="000000"/>
+              </a:buClr>
+              <a:buSzPts val="1000"/>
+              <a:buFont typeface="Arial"/>
+              <a:buNone/>
+              <a:defRPr b="0" i="0" sz="1000" u="none" cap="none" strike="noStrike">
                 <a:solidFill>
                   <a:schemeClr val="dk2"/>
                 </a:solidFill>
+                <a:latin typeface="Arial"/>
+                <a:ea typeface="Arial"/>
+                <a:cs typeface="Arial"/>
+                <a:sym typeface="Arial"/>
               </a:defRPr>
             </a:lvl1pPr>
-            <a:lvl2pPr lvl="1" algn="r">
-              <a:buNone/>
-              <a:defRPr sz="1000">
+            <a:lvl2pPr indent="0" lvl="1" marL="0" marR="0" rtl="0" algn="r">
+              <a:lnSpc>
+                <a:spcPct val="100000"/>
+              </a:lnSpc>
+              <a:spcBef>
+                <a:spcPts val="0"/>
+              </a:spcBef>
+              <a:spcAft>
+                <a:spcPts val="0"/>
+              </a:spcAft>
+              <a:buClr>
+                <a:srgbClr val="000000"/>
+              </a:buClr>
+              <a:buSzPts val="1000"/>
+              <a:buFont typeface="Arial"/>
+              <a:buNone/>
+              <a:defRPr b="0" i="0" sz="1000" u="none" cap="none" strike="noStrike">
                 <a:solidFill>
                   <a:schemeClr val="dk2"/>
                 </a:solidFill>
+                <a:latin typeface="Arial"/>
+                <a:ea typeface="Arial"/>
+                <a:cs typeface="Arial"/>
+                <a:sym typeface="Arial"/>
               </a:defRPr>
             </a:lvl2pPr>
-            <a:lvl3pPr lvl="2" algn="r">
-              <a:buNone/>
-              <a:defRPr sz="1000">
+            <a:lvl3pPr indent="0" lvl="2" marL="0" marR="0" rtl="0" algn="r">
+              <a:lnSpc>
+                <a:spcPct val="100000"/>
+              </a:lnSpc>
+              <a:spcBef>
+                <a:spcPts val="0"/>
+              </a:spcBef>
+              <a:spcAft>
+                <a:spcPts val="0"/>
+              </a:spcAft>
+              <a:buClr>
+                <a:srgbClr val="000000"/>
+              </a:buClr>
+              <a:buSzPts val="1000"/>
+              <a:buFont typeface="Arial"/>
+              <a:buNone/>
+              <a:defRPr b="0" i="0" sz="1000" u="none" cap="none" strike="noStrike">
                 <a:solidFill>
                   <a:schemeClr val="dk2"/>
                 </a:solidFill>
+                <a:latin typeface="Arial"/>
+                <a:ea typeface="Arial"/>
+                <a:cs typeface="Arial"/>
+                <a:sym typeface="Arial"/>
               </a:defRPr>
             </a:lvl3pPr>
-            <a:lvl4pPr lvl="3" algn="r">
-              <a:buNone/>
-              <a:defRPr sz="1000">
+            <a:lvl4pPr indent="0" lvl="3" marL="0" marR="0" rtl="0" algn="r">
+              <a:lnSpc>
+                <a:spcPct val="100000"/>
+              </a:lnSpc>
+              <a:spcBef>
+                <a:spcPts val="0"/>
+              </a:spcBef>
+              <a:spcAft>
+                <a:spcPts val="0"/>
+              </a:spcAft>
+              <a:buClr>
+                <a:srgbClr val="000000"/>
+              </a:buClr>
+              <a:buSzPts val="1000"/>
+              <a:buFont typeface="Arial"/>
+              <a:buNone/>
+              <a:defRPr b="0" i="0" sz="1000" u="none" cap="none" strike="noStrike">
                 <a:solidFill>
                   <a:schemeClr val="dk2"/>
                 </a:solidFill>
+                <a:latin typeface="Arial"/>
+                <a:ea typeface="Arial"/>
+                <a:cs typeface="Arial"/>
+                <a:sym typeface="Arial"/>
               </a:defRPr>
             </a:lvl4pPr>
-            <a:lvl5pPr lvl="4" algn="r">
-              <a:buNone/>
-              <a:defRPr sz="1000">
+            <a:lvl5pPr indent="0" lvl="4" marL="0" marR="0" rtl="0" algn="r">
+              <a:lnSpc>
+                <a:spcPct val="100000"/>
+              </a:lnSpc>
+              <a:spcBef>
+                <a:spcPts val="0"/>
+              </a:spcBef>
+              <a:spcAft>
+                <a:spcPts val="0"/>
+              </a:spcAft>
+              <a:buClr>
+                <a:srgbClr val="000000"/>
+              </a:buClr>
+              <a:buSzPts val="1000"/>
+              <a:buFont typeface="Arial"/>
+              <a:buNone/>
+              <a:defRPr b="0" i="0" sz="1000" u="none" cap="none" strike="noStrike">
                 <a:solidFill>
                   <a:schemeClr val="dk2"/>
                 </a:solidFill>
+                <a:latin typeface="Arial"/>
+                <a:ea typeface="Arial"/>
+                <a:cs typeface="Arial"/>
+                <a:sym typeface="Arial"/>
               </a:defRPr>
             </a:lvl5pPr>
-            <a:lvl6pPr lvl="5" algn="r">
-              <a:buNone/>
-              <a:defRPr sz="1000">
+            <a:lvl6pPr indent="0" lvl="5" marL="0" marR="0" rtl="0" algn="r">
+              <a:lnSpc>
+                <a:spcPct val="100000"/>
+              </a:lnSpc>
+              <a:spcBef>
+                <a:spcPts val="0"/>
+              </a:spcBef>
+              <a:spcAft>
+                <a:spcPts val="0"/>
+              </a:spcAft>
+              <a:buClr>
+                <a:srgbClr val="000000"/>
+              </a:buClr>
+              <a:buSzPts val="1000"/>
+              <a:buFont typeface="Arial"/>
+              <a:buNone/>
+              <a:defRPr b="0" i="0" sz="1000" u="none" cap="none" strike="noStrike">
                 <a:solidFill>
                   <a:schemeClr val="dk2"/>
                 </a:solidFill>
+                <a:latin typeface="Arial"/>
+                <a:ea typeface="Arial"/>
+                <a:cs typeface="Arial"/>
+                <a:sym typeface="Arial"/>
               </a:defRPr>
             </a:lvl6pPr>
-            <a:lvl7pPr lvl="6" algn="r">
-              <a:buNone/>
-              <a:defRPr sz="1000">
+            <a:lvl7pPr indent="0" lvl="6" marL="0" marR="0" rtl="0" algn="r">
+              <a:lnSpc>
+                <a:spcPct val="100000"/>
+              </a:lnSpc>
+              <a:spcBef>
+                <a:spcPts val="0"/>
+              </a:spcBef>
+              <a:spcAft>
+                <a:spcPts val="0"/>
+              </a:spcAft>
+              <a:buClr>
+                <a:srgbClr val="000000"/>
+              </a:buClr>
+              <a:buSzPts val="1000"/>
+              <a:buFont typeface="Arial"/>
+              <a:buNone/>
+              <a:defRPr b="0" i="0" sz="1000" u="none" cap="none" strike="noStrike">
                 <a:solidFill>
                   <a:schemeClr val="dk2"/>
                 </a:solidFill>
+                <a:latin typeface="Arial"/>
+                <a:ea typeface="Arial"/>
+                <a:cs typeface="Arial"/>
+                <a:sym typeface="Arial"/>
               </a:defRPr>
             </a:lvl7pPr>
-            <a:lvl8pPr lvl="7" algn="r">
-              <a:buNone/>
-              <a:defRPr sz="1000">
+            <a:lvl8pPr indent="0" lvl="7" marL="0" marR="0" rtl="0" algn="r">
+              <a:lnSpc>
+                <a:spcPct val="100000"/>
+              </a:lnSpc>
+              <a:spcBef>
+                <a:spcPts val="0"/>
+              </a:spcBef>
+              <a:spcAft>
+                <a:spcPts val="0"/>
+              </a:spcAft>
+              <a:buClr>
+                <a:srgbClr val="000000"/>
+              </a:buClr>
+              <a:buSzPts val="1000"/>
+              <a:buFont typeface="Arial"/>
+              <a:buNone/>
+              <a:defRPr b="0" i="0" sz="1000" u="none" cap="none" strike="noStrike">
                 <a:solidFill>
                   <a:schemeClr val="dk2"/>
                 </a:solidFill>
+                <a:latin typeface="Arial"/>
+                <a:ea typeface="Arial"/>
+                <a:cs typeface="Arial"/>
+                <a:sym typeface="Arial"/>
               </a:defRPr>
             </a:lvl8pPr>
-            <a:lvl9pPr lvl="8" algn="r">
-              <a:buNone/>
-              <a:defRPr sz="1000">
+            <a:lvl9pPr indent="0" lvl="8" marL="0" marR="0" rtl="0" algn="r">
+              <a:lnSpc>
+                <a:spcPct val="100000"/>
+              </a:lnSpc>
+              <a:spcBef>
+                <a:spcPts val="0"/>
+              </a:spcBef>
+              <a:spcAft>
+                <a:spcPts val="0"/>
+              </a:spcAft>
+              <a:buClr>
+                <a:srgbClr val="000000"/>
+              </a:buClr>
+              <a:buSzPts val="1000"/>
+              <a:buFont typeface="Arial"/>
+              <a:buNone/>
+              <a:defRPr b="0" i="0" sz="1000" u="none" cap="none" strike="noStrike">
                 <a:solidFill>
                   <a:schemeClr val="dk2"/>
                 </a:solidFill>
+                <a:latin typeface="Arial"/>
+                <a:ea typeface="Arial"/>
+                <a:cs typeface="Arial"/>
+                <a:sym typeface="Arial"/>
               </a:defRPr>
             </a:lvl9pPr>
           </a:lstStyle>
@@ -6329,7 +9341,7 @@
           <a:solidFill>
             <a:srgbClr val="FFFFFF"/>
           </a:solidFill>
-          <a:ln cap="flat" cmpd="sng" w="7150">
+          <a:ln cap="flat" cmpd="sng" w="9525">
             <a:solidFill>
               <a:srgbClr val="E2E8F0"/>
             </a:solidFill>
@@ -6346,12 +9358,20 @@
           <a:lstStyle/>
           <a:p>
             <a:pPr indent="0" lvl="0" marL="0" marR="0" rtl="0" algn="ctr">
-              <a:spcBef>
-                <a:spcPts val="0"/>
-              </a:spcBef>
-              <a:spcAft>
-                <a:spcPts val="0"/>
-              </a:spcAft>
+              <a:lnSpc>
+                <a:spcPct val="100000"/>
+              </a:lnSpc>
+              <a:spcBef>
+                <a:spcPts val="0"/>
+              </a:spcBef>
+              <a:spcAft>
+                <a:spcPts val="0"/>
+              </a:spcAft>
+              <a:buClr>
+                <a:srgbClr val="000000"/>
+              </a:buClr>
+              <a:buSzPts val="1400"/>
+              <a:buFont typeface="Arial"/>
               <a:buNone/>
             </a:pPr>
             <a:r>
@@ -6388,7 +9408,7 @@
           <a:solidFill>
             <a:srgbClr val="FFFFFF"/>
           </a:solidFill>
-          <a:ln cap="flat" cmpd="sng" w="7150">
+          <a:ln cap="flat" cmpd="sng" w="9525">
             <a:solidFill>
               <a:srgbClr val="E2E8F0"/>
             </a:solidFill>
@@ -6405,12 +9425,20 @@
           <a:lstStyle/>
           <a:p>
             <a:pPr indent="0" lvl="0" marL="0" marR="0" rtl="0" algn="ctr">
-              <a:spcBef>
-                <a:spcPts val="0"/>
-              </a:spcBef>
-              <a:spcAft>
-                <a:spcPts val="0"/>
-              </a:spcAft>
+              <a:lnSpc>
+                <a:spcPct val="100000"/>
+              </a:lnSpc>
+              <a:spcBef>
+                <a:spcPts val="0"/>
+              </a:spcBef>
+              <a:spcAft>
+                <a:spcPts val="0"/>
+              </a:spcAft>
+              <a:buClr>
+                <a:srgbClr val="000000"/>
+              </a:buClr>
+              <a:buSzPts val="1400"/>
+              <a:buFont typeface="Arial"/>
               <a:buNone/>
             </a:pPr>
             <a:r>
@@ -6447,7 +9475,7 @@
           <a:solidFill>
             <a:srgbClr val="FFFFFF"/>
           </a:solidFill>
-          <a:ln cap="flat" cmpd="sng" w="7150">
+          <a:ln cap="flat" cmpd="sng" w="9525">
             <a:solidFill>
               <a:srgbClr val="E2E8F0"/>
             </a:solidFill>
@@ -6464,12 +9492,20 @@
           <a:lstStyle/>
           <a:p>
             <a:pPr indent="0" lvl="0" marL="0" marR="0" rtl="0" algn="ctr">
-              <a:spcBef>
-                <a:spcPts val="0"/>
-              </a:spcBef>
-              <a:spcAft>
-                <a:spcPts val="0"/>
-              </a:spcAft>
+              <a:lnSpc>
+                <a:spcPct val="100000"/>
+              </a:lnSpc>
+              <a:spcBef>
+                <a:spcPts val="0"/>
+              </a:spcBef>
+              <a:spcAft>
+                <a:spcPts val="0"/>
+              </a:spcAft>
+              <a:buClr>
+                <a:srgbClr val="000000"/>
+              </a:buClr>
+              <a:buSzPts val="1400"/>
+              <a:buFont typeface="Arial"/>
               <a:buNone/>
             </a:pPr>
             <a:r>
@@ -6506,7 +9542,7 @@
           <a:solidFill>
             <a:srgbClr val="FFFFFF"/>
           </a:solidFill>
-          <a:ln cap="flat" cmpd="sng" w="7150">
+          <a:ln cap="flat" cmpd="sng" w="9525">
             <a:solidFill>
               <a:srgbClr val="E2E8F0"/>
             </a:solidFill>
@@ -6523,12 +9559,20 @@
           <a:lstStyle/>
           <a:p>
             <a:pPr indent="0" lvl="0" marL="0" marR="0" rtl="0" algn="ctr">
-              <a:spcBef>
-                <a:spcPts val="0"/>
-              </a:spcBef>
-              <a:spcAft>
-                <a:spcPts val="0"/>
-              </a:spcAft>
+              <a:lnSpc>
+                <a:spcPct val="100000"/>
+              </a:lnSpc>
+              <a:spcBef>
+                <a:spcPts val="0"/>
+              </a:spcBef>
+              <a:spcAft>
+                <a:spcPts val="0"/>
+              </a:spcAft>
+              <a:buClr>
+                <a:srgbClr val="000000"/>
+              </a:buClr>
+              <a:buSzPts val="1400"/>
+              <a:buFont typeface="Arial"/>
               <a:buNone/>
             </a:pPr>
             <a:r>
@@ -6815,12 +9859,20 @@
           <a:lstStyle/>
           <a:p>
             <a:pPr indent="0" lvl="0" marL="0" marR="0" rtl="0" algn="l">
-              <a:spcBef>
-                <a:spcPts val="0"/>
-              </a:spcBef>
-              <a:spcAft>
-                <a:spcPts val="0"/>
-              </a:spcAft>
+              <a:lnSpc>
+                <a:spcPct val="100000"/>
+              </a:lnSpc>
+              <a:spcBef>
+                <a:spcPts val="0"/>
+              </a:spcBef>
+              <a:spcAft>
+                <a:spcPts val="0"/>
+              </a:spcAft>
+              <a:buClr>
+                <a:srgbClr val="000000"/>
+              </a:buClr>
+              <a:buSzPts val="800"/>
+              <a:buFont typeface="Arial"/>
               <a:buNone/>
             </a:pPr>
             <a:r>
@@ -6835,7 +9887,15 @@
               </a:rPr>
               <a:t>QUEM SOU EU</a:t>
             </a:r>
-            <a:endParaRPr sz="1100"/>
+            <a:endParaRPr b="0" i="0" sz="1100" u="none" cap="none" strike="noStrike">
+              <a:solidFill>
+                <a:srgbClr val="000000"/>
+              </a:solidFill>
+              <a:latin typeface="Arial"/>
+              <a:ea typeface="Arial"/>
+              <a:cs typeface="Arial"/>
+              <a:sym typeface="Arial"/>
+            </a:endParaRPr>
           </a:p>
         </p:txBody>
       </p:sp>
@@ -6874,6 +9934,11 @@
               <a:spcAft>
                 <a:spcPts val="0"/>
               </a:spcAft>
+              <a:buClr>
+                <a:srgbClr val="000000"/>
+              </a:buClr>
+              <a:buSzPts val="2400"/>
+              <a:buFont typeface="Arial"/>
               <a:buNone/>
             </a:pPr>
             <a:r>
@@ -6886,33 +9951,17 @@
                 <a:cs typeface="Plus Jakarta Sans"/>
                 <a:sym typeface="Plus Jakarta Sans"/>
               </a:rPr>
-              <a:t>Muito prazer, </a:t>
+              <a:t>Muito prazer, Fernanda!</a:t>
             </a:r>
-            <a:r>
-              <a:rPr b="1" lang="pt-BR" sz="2400">
-                <a:solidFill>
-                  <a:srgbClr val="0F172A"/>
-                </a:solidFill>
-                <a:latin typeface="Plus Jakarta Sans"/>
-                <a:ea typeface="Plus Jakarta Sans"/>
-                <a:cs typeface="Plus Jakarta Sans"/>
-                <a:sym typeface="Plus Jakarta Sans"/>
-              </a:rPr>
-              <a:t>Fernanda</a:t>
-            </a:r>
-            <a:r>
-              <a:rPr b="1" i="0" lang="pt-BR" sz="2400" u="none" cap="none" strike="noStrike">
-                <a:solidFill>
-                  <a:srgbClr val="0F172A"/>
-                </a:solidFill>
-                <a:latin typeface="Plus Jakarta Sans"/>
-                <a:ea typeface="Plus Jakarta Sans"/>
-                <a:cs typeface="Plus Jakarta Sans"/>
-                <a:sym typeface="Plus Jakarta Sans"/>
-              </a:rPr>
-              <a:t>!</a:t>
-            </a:r>
-            <a:endParaRPr sz="1100"/>
+            <a:endParaRPr b="0" i="0" sz="1100" u="none" cap="none" strike="noStrike">
+              <a:solidFill>
+                <a:srgbClr val="000000"/>
+              </a:solidFill>
+              <a:latin typeface="Arial"/>
+              <a:ea typeface="Arial"/>
+              <a:cs typeface="Arial"/>
+              <a:sym typeface="Arial"/>
+            </a:endParaRPr>
           </a:p>
         </p:txBody>
       </p:sp>
@@ -6942,16 +9991,24 @@
           <a:lstStyle/>
           <a:p>
             <a:pPr indent="0" lvl="0" marL="0" marR="0" rtl="0" algn="l">
-              <a:spcBef>
-                <a:spcPts val="0"/>
-              </a:spcBef>
-              <a:spcAft>
-                <a:spcPts val="0"/>
-              </a:spcAft>
+              <a:lnSpc>
+                <a:spcPct val="100000"/>
+              </a:lnSpc>
+              <a:spcBef>
+                <a:spcPts val="0"/>
+              </a:spcBef>
+              <a:spcAft>
+                <a:spcPts val="0"/>
+              </a:spcAft>
+              <a:buClr>
+                <a:srgbClr val="000000"/>
+              </a:buClr>
+              <a:buSzPts val="1000"/>
+              <a:buFont typeface="Arial"/>
               <a:buNone/>
             </a:pPr>
             <a:r>
-              <a:rPr b="1" lang="pt-BR" sz="1000">
+              <a:rPr b="1" i="0" lang="pt-BR" sz="1000" u="none" cap="none" strike="noStrike">
                 <a:solidFill>
                   <a:srgbClr val="0F172A"/>
                 </a:solidFill>
@@ -6960,21 +10017,17 @@
                 <a:cs typeface="Plus Jakarta Sans"/>
                 <a:sym typeface="Plus Jakarta Sans"/>
               </a:rPr>
-              <a:t>Como tudo começou</a:t>
+              <a:t>Como tudo começou </a:t>
             </a:r>
-            <a:r>
-              <a:rPr b="1" lang="pt-BR" sz="1000">
-                <a:solidFill>
-                  <a:srgbClr val="0F172A"/>
-                </a:solidFill>
-                <a:latin typeface="Plus Jakarta Sans"/>
-                <a:ea typeface="Plus Jakarta Sans"/>
-                <a:cs typeface="Plus Jakarta Sans"/>
-                <a:sym typeface="Plus Jakarta Sans"/>
-              </a:rPr>
-              <a:t> </a:t>
-            </a:r>
-            <a:endParaRPr sz="1100"/>
+            <a:endParaRPr b="0" i="0" sz="1100" u="none" cap="none" strike="noStrike">
+              <a:solidFill>
+                <a:srgbClr val="000000"/>
+              </a:solidFill>
+              <a:latin typeface="Arial"/>
+              <a:ea typeface="Arial"/>
+              <a:cs typeface="Arial"/>
+              <a:sym typeface="Arial"/>
+            </a:endParaRPr>
           </a:p>
         </p:txBody>
       </p:sp>
@@ -7013,10 +10066,15 @@
               <a:spcAft>
                 <a:spcPts val="0"/>
               </a:spcAft>
+              <a:buClr>
+                <a:srgbClr val="000000"/>
+              </a:buClr>
+              <a:buSzPts val="800"/>
+              <a:buFont typeface="Arial"/>
               <a:buNone/>
             </a:pPr>
             <a:r>
-              <a:rPr lang="pt-BR" sz="800">
+              <a:rPr b="0" i="0" lang="pt-BR" sz="800" u="none" cap="none" strike="noStrike">
                 <a:solidFill>
                   <a:srgbClr val="475569"/>
                 </a:solidFill>
@@ -7025,9 +10083,17 @@
                 <a:cs typeface="Plus Jakarta Sans"/>
                 <a:sym typeface="Plus Jakarta Sans"/>
               </a:rPr>
-              <a:t>Nascida em 1978, em SP, filha de um comerciante e de uma dona de casa. Estudei em colégio de freiras na minha infância e início de adolescência. E nas aulas de comércio , conheci o ensino técnico, então no ano de 1994,  tive o primeiro contato com  TI, no colégio técnico de Processamento de Dados.  </a:t>
+              <a:t>Nascida em 1978, em SP, filha de um comerciante e de uma dona de casa. Estudei em colégio de freiras na minha infância e início de adolescência. E nas aulas de comércio , conheci o ensino técnico, então, no ano de 1994,  tive o primeiro contato com  TI, no colégio técnico de Processamento de Dados.  </a:t>
             </a:r>
-            <a:endParaRPr sz="1100"/>
+            <a:endParaRPr b="0" i="0" sz="1100" u="none" cap="none" strike="noStrike">
+              <a:solidFill>
+                <a:srgbClr val="000000"/>
+              </a:solidFill>
+              <a:latin typeface="Arial"/>
+              <a:ea typeface="Arial"/>
+              <a:cs typeface="Arial"/>
+              <a:sym typeface="Arial"/>
+            </a:endParaRPr>
           </a:p>
         </p:txBody>
       </p:sp>
@@ -7057,12 +10123,20 @@
           <a:lstStyle/>
           <a:p>
             <a:pPr indent="0" lvl="0" marL="0" marR="0" rtl="0" algn="l">
-              <a:spcBef>
-                <a:spcPts val="0"/>
-              </a:spcBef>
-              <a:spcAft>
-                <a:spcPts val="0"/>
-              </a:spcAft>
+              <a:lnSpc>
+                <a:spcPct val="100000"/>
+              </a:lnSpc>
+              <a:spcBef>
+                <a:spcPts val="0"/>
+              </a:spcBef>
+              <a:spcAft>
+                <a:spcPts val="0"/>
+              </a:spcAft>
+              <a:buClr>
+                <a:srgbClr val="000000"/>
+              </a:buClr>
+              <a:buSzPts val="1000"/>
+              <a:buFont typeface="Arial"/>
               <a:buNone/>
             </a:pPr>
             <a:r>
@@ -7077,7 +10151,15 @@
               </a:rPr>
               <a:t>Fatos Curiosos</a:t>
             </a:r>
-            <a:endParaRPr sz="1100"/>
+            <a:endParaRPr b="0" i="0" sz="1100" u="none" cap="none" strike="noStrike">
+              <a:solidFill>
+                <a:srgbClr val="000000"/>
+              </a:solidFill>
+              <a:latin typeface="Arial"/>
+              <a:ea typeface="Arial"/>
+              <a:cs typeface="Arial"/>
+              <a:sym typeface="Arial"/>
+            </a:endParaRPr>
           </a:p>
         </p:txBody>
       </p:sp>
@@ -7116,10 +10198,15 @@
               <a:spcAft>
                 <a:spcPts val="0"/>
               </a:spcAft>
+              <a:buClr>
+                <a:srgbClr val="000000"/>
+              </a:buClr>
+              <a:buSzPts val="800"/>
+              <a:buFont typeface="Arial"/>
               <a:buNone/>
             </a:pPr>
             <a:r>
-              <a:rPr lang="pt-BR" sz="800">
+              <a:rPr b="0" i="0" lang="pt-BR" sz="800" u="none" cap="none" strike="noStrike">
                 <a:solidFill>
                   <a:srgbClr val="475569"/>
                 </a:solidFill>
@@ -7128,21 +10215,17 @@
                 <a:cs typeface="Plus Jakarta Sans"/>
                 <a:sym typeface="Plus Jakarta Sans"/>
               </a:rPr>
-              <a:t>Apesar de ser da área de exatas, gosto muito de</a:t>
+              <a:t>Apesar de ser da área de exatas, gosto muito de história, e sempre que posso , procuro conhecer in loco,  lugares históricos. O lugar histórico mais impressionante que conheci ,  foi  Pompéia .</a:t>
             </a:r>
-            <a:r>
-              <a:rPr lang="pt-BR" sz="800">
-                <a:solidFill>
-                  <a:srgbClr val="475569"/>
-                </a:solidFill>
-                <a:latin typeface="Plus Jakarta Sans"/>
-                <a:ea typeface="Plus Jakarta Sans"/>
-                <a:cs typeface="Plus Jakarta Sans"/>
-                <a:sym typeface="Plus Jakarta Sans"/>
-              </a:rPr>
-              <a:t> história, e sempre que posso , procuro conhecer in loco,  lugares históricos. O lugar histórico mais impressionante que conheci ,  foi  Pompéia .</a:t>
-            </a:r>
-            <a:endParaRPr sz="1100"/>
+            <a:endParaRPr b="0" i="0" sz="1100" u="none" cap="none" strike="noStrike">
+              <a:solidFill>
+                <a:srgbClr val="000000"/>
+              </a:solidFill>
+              <a:latin typeface="Arial"/>
+              <a:ea typeface="Arial"/>
+              <a:cs typeface="Arial"/>
+              <a:sym typeface="Arial"/>
+            </a:endParaRPr>
           </a:p>
         </p:txBody>
       </p:sp>
@@ -7172,12 +10255,20 @@
           <a:lstStyle/>
           <a:p>
             <a:pPr indent="0" lvl="0" marL="0" marR="0" rtl="0" algn="l">
-              <a:spcBef>
-                <a:spcPts val="0"/>
-              </a:spcBef>
-              <a:spcAft>
-                <a:spcPts val="0"/>
-              </a:spcAft>
+              <a:lnSpc>
+                <a:spcPct val="100000"/>
+              </a:lnSpc>
+              <a:spcBef>
+                <a:spcPts val="0"/>
+              </a:spcBef>
+              <a:spcAft>
+                <a:spcPts val="0"/>
+              </a:spcAft>
+              <a:buClr>
+                <a:srgbClr val="000000"/>
+              </a:buClr>
+              <a:buSzPts val="1000"/>
+              <a:buFont typeface="Arial"/>
               <a:buNone/>
             </a:pPr>
             <a:r>
@@ -7192,7 +10283,15 @@
               </a:rPr>
               <a:t>Fora do Trabalho</a:t>
             </a:r>
-            <a:endParaRPr sz="1100"/>
+            <a:endParaRPr b="0" i="0" sz="1100" u="none" cap="none" strike="noStrike">
+              <a:solidFill>
+                <a:srgbClr val="000000"/>
+              </a:solidFill>
+              <a:latin typeface="Arial"/>
+              <a:ea typeface="Arial"/>
+              <a:cs typeface="Arial"/>
+              <a:sym typeface="Arial"/>
+            </a:endParaRPr>
           </a:p>
         </p:txBody>
       </p:sp>
@@ -7231,10 +10330,15 @@
               <a:spcAft>
                 <a:spcPts val="0"/>
               </a:spcAft>
+              <a:buClr>
+                <a:srgbClr val="000000"/>
+              </a:buClr>
+              <a:buSzPts val="800"/>
+              <a:buFont typeface="Arial"/>
               <a:buNone/>
             </a:pPr>
             <a:r>
-              <a:rPr lang="pt-BR" sz="800">
+              <a:rPr b="0" i="0" lang="pt-BR" sz="800" u="none" cap="none" strike="noStrike">
                 <a:solidFill>
                   <a:srgbClr val="475569"/>
                 </a:solidFill>
@@ -7243,21 +10347,17 @@
                 <a:cs typeface="Plus Jakarta Sans"/>
                 <a:sym typeface="Plus Jakarta Sans"/>
               </a:rPr>
-              <a:t>No dia a dia, g</a:t>
+              <a:t>No dia a dia, gosto de  praticar esportes. Regularmente  pratico musculação , patinação e pilates, e quando possível, gosto de praticar kitesurf e ski. Atualmente além dos esportes ,  estou viciada também em criar agentes de  IA.</a:t>
             </a:r>
-            <a:r>
-              <a:rPr lang="pt-BR" sz="800">
-                <a:solidFill>
-                  <a:srgbClr val="475569"/>
-                </a:solidFill>
-                <a:latin typeface="Plus Jakarta Sans"/>
-                <a:ea typeface="Plus Jakarta Sans"/>
-                <a:cs typeface="Plus Jakarta Sans"/>
-                <a:sym typeface="Plus Jakarta Sans"/>
-              </a:rPr>
-              <a:t>osto de  praticar esportes. Regularmente  pratico musculação , patinação e pilates, e quando possível, gosto de praticar kitesurf e ski. Atualmente além dos esportes ,  estou viciada também em criar agentes de  IA.</a:t>
-            </a:r>
-            <a:endParaRPr sz="1100"/>
+            <a:endParaRPr b="0" i="0" sz="1100" u="none" cap="none" strike="noStrike">
+              <a:solidFill>
+                <a:srgbClr val="000000"/>
+              </a:solidFill>
+              <a:latin typeface="Arial"/>
+              <a:ea typeface="Arial"/>
+              <a:cs typeface="Arial"/>
+              <a:sym typeface="Arial"/>
+            </a:endParaRPr>
           </a:p>
         </p:txBody>
       </p:sp>
@@ -7287,16 +10387,24 @@
           <a:lstStyle/>
           <a:p>
             <a:pPr indent="0" lvl="0" marL="0" marR="0" rtl="0" algn="l">
-              <a:spcBef>
-                <a:spcPts val="0"/>
-              </a:spcBef>
-              <a:spcAft>
-                <a:spcPts val="0"/>
-              </a:spcAft>
+              <a:lnSpc>
+                <a:spcPct val="100000"/>
+              </a:lnSpc>
+              <a:spcBef>
+                <a:spcPts val="0"/>
+              </a:spcBef>
+              <a:spcAft>
+                <a:spcPts val="0"/>
+              </a:spcAft>
+              <a:buClr>
+                <a:srgbClr val="000000"/>
+              </a:buClr>
+              <a:buSzPts val="1000"/>
+              <a:buFont typeface="Arial"/>
               <a:buNone/>
             </a:pPr>
             <a:r>
-              <a:rPr b="1" lang="pt-BR" sz="1000">
+              <a:rPr b="1" i="0" lang="pt-BR" sz="1000" u="none" cap="none" strike="noStrike">
                 <a:solidFill>
                   <a:srgbClr val="0F172A"/>
                 </a:solidFill>
@@ -7307,7 +10415,15 @@
               </a:rPr>
               <a:t>Dono da minha casa, e do meu coração</a:t>
             </a:r>
-            <a:endParaRPr sz="1100"/>
+            <a:endParaRPr b="0" i="0" sz="1100" u="none" cap="none" strike="noStrike">
+              <a:solidFill>
+                <a:srgbClr val="000000"/>
+              </a:solidFill>
+              <a:latin typeface="Arial"/>
+              <a:ea typeface="Arial"/>
+              <a:cs typeface="Arial"/>
+              <a:sym typeface="Arial"/>
+            </a:endParaRPr>
           </a:p>
         </p:txBody>
       </p:sp>
@@ -7346,10 +10462,15 @@
               <a:spcAft>
                 <a:spcPts val="0"/>
               </a:spcAft>
+              <a:buClr>
+                <a:srgbClr val="000000"/>
+              </a:buClr>
+              <a:buSzPts val="800"/>
+              <a:buFont typeface="Arial"/>
               <a:buNone/>
             </a:pPr>
             <a:r>
-              <a:rPr lang="pt-BR" sz="800">
+              <a:rPr b="0" i="0" lang="pt-BR" sz="800" u="none" cap="none" strike="noStrike">
                 <a:solidFill>
                   <a:srgbClr val="475569"/>
                 </a:solidFill>
@@ -7358,105 +10479,17 @@
                 <a:cs typeface="Plus Jakarta Sans"/>
                 <a:sym typeface="Plus Jakarta Sans"/>
               </a:rPr>
-              <a:t>Não tenho filhos, mas tenho um anjo em casa , sou t</a:t>
+              <a:t>Não tenho filhos, mas tenho um anjo em casa , sou tutora do Yuki, um lulu da pomerânia que as vezes  faz aparições especiais nas reuniões remotas</a:t>
             </a:r>
-            <a:r>
-              <a:rPr b="0" i="0" lang="pt-BR" sz="800" u="none" cap="none" strike="noStrike">
-                <a:solidFill>
-                  <a:srgbClr val="475569"/>
-                </a:solidFill>
-                <a:latin typeface="Plus Jakarta Sans"/>
-                <a:ea typeface="Plus Jakarta Sans"/>
-                <a:cs typeface="Plus Jakarta Sans"/>
-                <a:sym typeface="Plus Jakarta Sans"/>
-              </a:rPr>
-              <a:t>utora d</a:t>
-            </a:r>
-            <a:r>
-              <a:rPr lang="pt-BR" sz="800">
-                <a:solidFill>
-                  <a:srgbClr val="475569"/>
-                </a:solidFill>
-                <a:latin typeface="Plus Jakarta Sans"/>
-                <a:ea typeface="Plus Jakarta Sans"/>
-                <a:cs typeface="Plus Jakarta Sans"/>
-                <a:sym typeface="Plus Jakarta Sans"/>
-              </a:rPr>
-              <a:t>o</a:t>
-            </a:r>
-            <a:r>
-              <a:rPr b="0" i="0" lang="pt-BR" sz="800" u="none" cap="none" strike="noStrike">
-                <a:solidFill>
-                  <a:srgbClr val="475569"/>
-                </a:solidFill>
-                <a:latin typeface="Plus Jakarta Sans"/>
-                <a:ea typeface="Plus Jakarta Sans"/>
-                <a:cs typeface="Plus Jakarta Sans"/>
-                <a:sym typeface="Plus Jakarta Sans"/>
-              </a:rPr>
-              <a:t> </a:t>
-            </a:r>
-            <a:r>
-              <a:rPr lang="pt-BR" sz="800">
-                <a:solidFill>
-                  <a:srgbClr val="475569"/>
-                </a:solidFill>
-                <a:latin typeface="Plus Jakarta Sans"/>
-                <a:ea typeface="Plus Jakarta Sans"/>
-                <a:cs typeface="Plus Jakarta Sans"/>
-                <a:sym typeface="Plus Jakarta Sans"/>
-              </a:rPr>
-              <a:t>Yuki</a:t>
-            </a:r>
-            <a:r>
-              <a:rPr b="0" i="0" lang="pt-BR" sz="800" u="none" cap="none" strike="noStrike">
-                <a:solidFill>
-                  <a:srgbClr val="475569"/>
-                </a:solidFill>
-                <a:latin typeface="Plus Jakarta Sans"/>
-                <a:ea typeface="Plus Jakarta Sans"/>
-                <a:cs typeface="Plus Jakarta Sans"/>
-                <a:sym typeface="Plus Jakarta Sans"/>
-              </a:rPr>
-              <a:t>, um lulu da pomerânia que </a:t>
-            </a:r>
-            <a:r>
-              <a:rPr lang="pt-BR" sz="800">
-                <a:solidFill>
-                  <a:srgbClr val="475569"/>
-                </a:solidFill>
-                <a:latin typeface="Plus Jakarta Sans"/>
-                <a:ea typeface="Plus Jakarta Sans"/>
-                <a:cs typeface="Plus Jakarta Sans"/>
-                <a:sym typeface="Plus Jakarta Sans"/>
-              </a:rPr>
-              <a:t>as vezes </a:t>
-            </a:r>
-            <a:r>
-              <a:rPr b="0" i="0" lang="pt-BR" sz="800" u="none" cap="none" strike="noStrike">
-                <a:solidFill>
-                  <a:srgbClr val="475569"/>
-                </a:solidFill>
-                <a:latin typeface="Plus Jakarta Sans"/>
-                <a:ea typeface="Plus Jakarta Sans"/>
-                <a:cs typeface="Plus Jakarta Sans"/>
-                <a:sym typeface="Plus Jakarta Sans"/>
-              </a:rPr>
-              <a:t> faz aparições especiais nas reuniões remota</a:t>
-            </a:r>
-            <a:r>
-              <a:rPr lang="pt-BR" sz="800">
-                <a:solidFill>
-                  <a:srgbClr val="475569"/>
-                </a:solidFill>
-                <a:latin typeface="Plus Jakarta Sans"/>
-                <a:ea typeface="Plus Jakarta Sans"/>
-                <a:cs typeface="Plus Jakarta Sans"/>
-                <a:sym typeface="Plus Jakarta Sans"/>
-              </a:rPr>
-              <a:t>s</a:t>
-            </a:r>
-            <a:endParaRPr sz="1100"/>
+            <a:endParaRPr b="0" i="0" sz="1100" u="none" cap="none" strike="noStrike">
+              <a:solidFill>
+                <a:srgbClr val="000000"/>
+              </a:solidFill>
+              <a:latin typeface="Arial"/>
+              <a:ea typeface="Arial"/>
+              <a:cs typeface="Arial"/>
+              <a:sym typeface="Arial"/>
+            </a:endParaRPr>
           </a:p>
         </p:txBody>
       </p:sp>
@@ -7466,13 +10499,12 @@
           <p:cNvPicPr preferRelativeResize="0"/>
           <p:nvPr/>
         </p:nvPicPr>
-        <p:blipFill>
+        <p:blipFill rotWithShape="1">
           <a:blip r:embed="rId10">
             <a:alphaModFix/>
           </a:blip>
-          <a:stretch>
-            <a:fillRect/>
-          </a:stretch>
+          <a:srcRect b="0" l="0" r="0" t="0"/>
+          <a:stretch/>
         </p:blipFill>
         <p:spPr>
           <a:xfrm rot="-1475084">
@@ -7494,13 +10526,12 @@
           <p:cNvPicPr preferRelativeResize="0"/>
           <p:nvPr/>
         </p:nvPicPr>
-        <p:blipFill>
+        <p:blipFill rotWithShape="1">
           <a:blip r:embed="rId11">
             <a:alphaModFix/>
           </a:blip>
-          <a:stretch>
-            <a:fillRect/>
-          </a:stretch>
+          <a:srcRect b="0" l="0" r="0" t="0"/>
+          <a:stretch/>
         </p:blipFill>
         <p:spPr>
           <a:xfrm rot="-1730043">
@@ -7522,13 +10553,12 @@
           <p:cNvPicPr preferRelativeResize="0"/>
           <p:nvPr/>
         </p:nvPicPr>
-        <p:blipFill>
+        <p:blipFill rotWithShape="1">
           <a:blip r:embed="rId12">
             <a:alphaModFix/>
           </a:blip>
-          <a:stretch>
-            <a:fillRect/>
-          </a:stretch>
+          <a:srcRect b="0" l="0" r="0" t="0"/>
+          <a:stretch/>
         </p:blipFill>
         <p:spPr>
           <a:xfrm rot="-1217383">
@@ -7546,45 +10576,16 @@
       </p:pic>
       <p:pic>
         <p:nvPicPr>
-          <p:cNvPr id="80" name="Google Shape;80;p13" title="kite2.jpg"/>
+          <p:cNvPr id="80" name="Google Shape;80;p13" title="IMG_0265.jpeg"/>
           <p:cNvPicPr preferRelativeResize="0"/>
           <p:nvPr/>
         </p:nvPicPr>
-        <p:blipFill>
+        <p:blipFill rotWithShape="1">
           <a:blip r:embed="rId13">
             <a:alphaModFix/>
           </a:blip>
-          <a:stretch>
-            <a:fillRect/>
-          </a:stretch>
-        </p:blipFill>
-        <p:spPr>
-          <a:xfrm rot="-1361049">
-            <a:off x="1460245" y="1125702"/>
-            <a:ext cx="1243622" cy="1079666"/>
-          </a:xfrm>
-          <a:prstGeom prst="rect">
-            <a:avLst/>
-          </a:prstGeom>
-          <a:noFill/>
-          <a:ln>
-            <a:noFill/>
-          </a:ln>
-        </p:spPr>
-      </p:pic>
-      <p:pic>
-        <p:nvPicPr>
-          <p:cNvPr id="81" name="Google Shape;81;p13" title="IMG_0265.jpeg"/>
-          <p:cNvPicPr preferRelativeResize="0"/>
-          <p:nvPr/>
-        </p:nvPicPr>
-        <p:blipFill>
-          <a:blip r:embed="rId14">
-            <a:alphaModFix/>
-          </a:blip>
-          <a:stretch>
-            <a:fillRect/>
-          </a:stretch>
+          <a:srcRect b="0" l="0" r="0" t="0"/>
+          <a:stretch/>
         </p:blipFill>
         <p:spPr>
           <a:xfrm rot="-1196168">
@@ -7602,17 +10603,43 @@
       </p:pic>
       <p:pic>
         <p:nvPicPr>
+          <p:cNvPr id="81" name="Google Shape;81;p13" title="Neve.jpeg"/>
+          <p:cNvPicPr preferRelativeResize="0"/>
+          <p:nvPr/>
+        </p:nvPicPr>
+        <p:blipFill rotWithShape="1">
+          <a:blip r:embed="rId14">
+            <a:alphaModFix/>
+          </a:blip>
+          <a:srcRect b="0" l="0" r="0" t="0"/>
+          <a:stretch/>
+        </p:blipFill>
+        <p:spPr>
+          <a:xfrm rot="-1656401">
+            <a:off x="2054147" y="2937957"/>
+            <a:ext cx="1039423" cy="1385887"/>
+          </a:xfrm>
+          <a:prstGeom prst="rect">
+            <a:avLst/>
+          </a:prstGeom>
+          <a:noFill/>
+          <a:ln>
+            <a:noFill/>
+          </a:ln>
+        </p:spPr>
+      </p:pic>
+      <p:pic>
+        <p:nvPicPr>
           <p:cNvPr id="82" name="Google Shape;82;p13" title="IMG_0267.jpeg"/>
           <p:cNvPicPr preferRelativeResize="0"/>
           <p:nvPr/>
         </p:nvPicPr>
-        <p:blipFill>
+        <p:blipFill rotWithShape="1">
           <a:blip r:embed="rId15">
             <a:alphaModFix/>
           </a:blip>
-          <a:stretch>
-            <a:fillRect/>
-          </a:stretch>
+          <a:srcRect b="0" l="0" r="0" t="0"/>
+          <a:stretch/>
         </p:blipFill>
         <p:spPr>
           <a:xfrm rot="-1683757">
@@ -7630,7 +10657,7 @@
       </p:pic>
       <p:pic>
         <p:nvPicPr>
-          <p:cNvPr id="83" name="Google Shape;83;p13" title="Neve.jpeg"/>
+          <p:cNvPr id="83" name="Google Shape;83;p13" title="yuki.jpg"/>
           <p:cNvPicPr preferRelativeResize="0"/>
           <p:nvPr/>
         </p:nvPicPr>
@@ -7643,9 +10670,9 @@
           </a:stretch>
         </p:blipFill>
         <p:spPr>
-          <a:xfrm rot="-1656401">
-            <a:off x="2054147" y="2937957"/>
-            <a:ext cx="1039423" cy="1385887"/>
+          <a:xfrm rot="-1681550">
+            <a:off x="1552964" y="1135232"/>
+            <a:ext cx="1202525" cy="1403536"/>
           </a:xfrm>
           <a:prstGeom prst="rect">
             <a:avLst/>
@@ -7662,13 +10689,12 @@
           <p:cNvPicPr preferRelativeResize="0"/>
           <p:nvPr/>
         </p:nvPicPr>
-        <p:blipFill>
+        <p:blipFill rotWithShape="1">
           <a:blip r:embed="rId17">
             <a:alphaModFix/>
           </a:blip>
-          <a:stretch>
-            <a:fillRect/>
-          </a:stretch>
+          <a:srcRect b="0" l="0" r="0" t="0"/>
+          <a:stretch/>
         </p:blipFill>
         <p:spPr>
           <a:xfrm rot="-1701587">
@@ -8022,7 +11048,7 @@
                   <a:schemeClr val="dk1"/>
                 </a:solidFill>
               </a:rPr>
-              <a:t>o limite de valor por tipo de transação é diário ,  ou seja no dia seguinte os limites são retomados aos valores iniciais e um novo ciclo de consumo começa</a:t>
+              <a:t>o limite de valor por tipo de transação é diário, ou seja no dia seguinte os limites são retomados aos valores iniciais e um novo ciclo de consumo começa</a:t>
             </a:r>
             <a:endParaRPr sz="1100">
               <a:solidFill>
@@ -8136,7 +11162,7 @@
                   <a:schemeClr val="dk1"/>
                 </a:solidFill>
               </a:rPr>
-              <a:t>- Não está declarada a necessidade de ambiente de DR (Disaster Recovery), por conta disso a proposta só cobre HA (High Availability).</a:t>
+              <a:t>- Apesar de ser um cenário aparentemente crítico , não coloquei na solução ambiente de DR, pois haveria necessidade de outras informações (RTO,RPO, etc)</a:t>
             </a:r>
             <a:endParaRPr sz="1100">
               <a:solidFill>
@@ -8233,13 +11259,12 @@
           <p:cNvPicPr preferRelativeResize="0"/>
           <p:nvPr/>
         </p:nvPicPr>
-        <p:blipFill>
+        <p:blipFill rotWithShape="1">
           <a:blip r:embed="rId3">
             <a:alphaModFix/>
           </a:blip>
-          <a:stretch>
-            <a:fillRect/>
-          </a:stretch>
+          <a:srcRect b="0" l="0" r="0" t="0"/>
+          <a:stretch/>
         </p:blipFill>
         <p:spPr>
           <a:xfrm>
@@ -8338,17 +11363,18 @@
       </p:sp>
       <p:pic>
         <p:nvPicPr>
-          <p:cNvPr id="104" name="Google Shape;104;p16"/>
+          <p:cNvPr id="104" name="Google Shape;104;p16">
+            <a:hlinkClick r:id="rId3"/>
+          </p:cNvPr>
           <p:cNvPicPr preferRelativeResize="0"/>
           <p:nvPr/>
         </p:nvPicPr>
-        <p:blipFill>
-          <a:blip r:embed="rId3">
+        <p:blipFill rotWithShape="1">
+          <a:blip r:embed="rId4">
             <a:alphaModFix/>
           </a:blip>
-          <a:stretch>
-            <a:fillRect/>
-          </a:stretch>
+          <a:srcRect b="0" l="0" r="0" t="0"/>
+          <a:stretch/>
         </p:blipFill>
         <p:spPr>
           <a:xfrm>
@@ -8478,13 +11504,12 @@
           <p:cNvPicPr preferRelativeResize="0"/>
           <p:nvPr/>
         </p:nvPicPr>
-        <p:blipFill>
+        <p:blipFill rotWithShape="1">
           <a:blip r:embed="rId4">
             <a:alphaModFix/>
           </a:blip>
-          <a:stretch>
-            <a:fillRect/>
-          </a:stretch>
+          <a:srcRect b="0" l="0" r="0" t="0"/>
+          <a:stretch/>
         </p:blipFill>
         <p:spPr>
           <a:xfrm>

--- a/NandaPay.pptx
+++ b/NandaPay.pptx
@@ -1426,7 +1426,7 @@
   <p:cSld>
     <p:spTree>
       <p:nvGrpSpPr>
-        <p:cNvPr id="112" name="Shape 112"/>
+        <p:cNvPr id="113" name="Shape 113"/>
         <p:cNvGrpSpPr/>
         <p:nvPr/>
       </p:nvGrpSpPr>
@@ -1440,7 +1440,7 @@
       </p:grpSpPr>
       <p:sp>
         <p:nvSpPr>
-          <p:cNvPr id="113" name="Google Shape;113;p6:notes"/>
+          <p:cNvPr id="114" name="Google Shape;114;p6:notes"/>
           <p:cNvSpPr/>
           <p:nvPr>
             <p:ph idx="2" type="sldImg"/>
@@ -1485,7 +1485,7 @@
       </p:sp>
       <p:sp>
         <p:nvSpPr>
-          <p:cNvPr id="114" name="Google Shape;114;p6:notes"/>
+          <p:cNvPr id="115" name="Google Shape;115;p6:notes"/>
           <p:cNvSpPr txBox="1"/>
           <p:nvPr>
             <p:ph idx="1" type="body"/>
@@ -1543,7 +1543,7 @@
   <p:cSld>
     <p:spTree>
       <p:nvGrpSpPr>
-        <p:cNvPr id="118" name="Shape 118"/>
+        <p:cNvPr id="119" name="Shape 119"/>
         <p:cNvGrpSpPr/>
         <p:nvPr/>
       </p:nvGrpSpPr>
@@ -1557,7 +1557,7 @@
       </p:grpSpPr>
       <p:sp>
         <p:nvSpPr>
-          <p:cNvPr id="119" name="Google Shape;119;p7:notes"/>
+          <p:cNvPr id="120" name="Google Shape;120;p7:notes"/>
           <p:cNvSpPr/>
           <p:nvPr>
             <p:ph idx="2" type="sldImg"/>
@@ -1602,7 +1602,7 @@
       </p:sp>
       <p:sp>
         <p:nvSpPr>
-          <p:cNvPr id="120" name="Google Shape;120;p7:notes"/>
+          <p:cNvPr id="121" name="Google Shape;121;p7:notes"/>
           <p:cNvSpPr txBox="1"/>
           <p:nvPr>
             <p:ph idx="1" type="body"/>
@@ -10661,13 +10661,12 @@
           <p:cNvPicPr preferRelativeResize="0"/>
           <p:nvPr/>
         </p:nvPicPr>
-        <p:blipFill>
+        <p:blipFill rotWithShape="1">
           <a:blip r:embed="rId16">
             <a:alphaModFix/>
           </a:blip>
-          <a:stretch>
-            <a:fillRect/>
-          </a:stretch>
+          <a:srcRect b="0" l="0" r="0" t="0"/>
+          <a:stretch/>
         </p:blipFill>
         <p:spPr>
           <a:xfrm rot="-1681550">
@@ -10969,7 +10968,7 @@
                   <a:schemeClr val="dk1"/>
                 </a:solidFill>
               </a:rPr>
-              <a:t> Como não é indicado se outros dados históricos serão consumidos , estou assumindo que a necessidade de dados históricos , se limita apenas as transações e as regras de limite</a:t>
+              <a:t> A necessidade de dados históricos , se limita apenas as transações e as regras de limite;</a:t>
             </a:r>
             <a:endParaRPr sz="1100">
               <a:solidFill>
@@ -11032,15 +11031,7 @@
                   <a:schemeClr val="dk1"/>
                 </a:solidFill>
               </a:rPr>
-              <a:t>Não está informado, mas estou assumindo que</a:t>
-            </a:r>
-            <a:r>
-              <a:rPr b="1" lang="pt-BR" sz="1100">
-                <a:solidFill>
-                  <a:schemeClr val="dk1"/>
-                </a:solidFill>
-              </a:rPr>
-              <a:t> </a:t>
+              <a:t>O</a:t>
             </a:r>
             <a:r>
               <a:rPr lang="pt-BR" sz="1100">
@@ -11048,7 +11039,7 @@
                   <a:schemeClr val="dk1"/>
                 </a:solidFill>
               </a:rPr>
-              <a:t>o limite de valor por tipo de transação é diário, ou seja no dia seguinte os limites são retomados aos valores iniciais e um novo ciclo de consumo começa</a:t>
+              <a:t> limite de valor por tipo de transação é diário, ou seja no dia seguinte os limites são retomados aos valores iniciais e um novo ciclo de consumo começa;</a:t>
             </a:r>
             <a:endParaRPr sz="1100">
               <a:solidFill>
@@ -11111,7 +11102,15 @@
                   <a:schemeClr val="dk1"/>
                 </a:solidFill>
               </a:rPr>
-              <a:t>Não está informado , mas por conta da natureza do serviço , estou assumindo que há necessidade de dados em near real time , e para isso a solução envolve ferramenta de cdc e stream</a:t>
+              <a:t>P</a:t>
+            </a:r>
+            <a:r>
+              <a:rPr lang="pt-BR" sz="1100">
+                <a:solidFill>
+                  <a:schemeClr val="dk1"/>
+                </a:solidFill>
+              </a:rPr>
+              <a:t>or conta da natureza do serviço , estou assumindo que há necessidade de dados em near real time;</a:t>
             </a:r>
             <a:endParaRPr sz="1100">
               <a:solidFill>
@@ -11259,17 +11258,18 @@
           <p:cNvPicPr preferRelativeResize="0"/>
           <p:nvPr/>
         </p:nvPicPr>
-        <p:blipFill rotWithShape="1">
+        <p:blipFill>
           <a:blip r:embed="rId3">
             <a:alphaModFix/>
           </a:blip>
-          <a:srcRect b="0" l="0" r="0" t="0"/>
-          <a:stretch/>
+          <a:stretch>
+            <a:fillRect/>
+          </a:stretch>
         </p:blipFill>
         <p:spPr>
           <a:xfrm>
-            <a:off x="198475" y="586238"/>
-            <a:ext cx="8839198" cy="3971021"/>
+            <a:off x="152400" y="929500"/>
+            <a:ext cx="8839200" cy="3996400"/>
           </a:xfrm>
           <a:prstGeom prst="rect">
             <a:avLst/>
@@ -11363,23 +11363,22 @@
       </p:sp>
       <p:pic>
         <p:nvPicPr>
-          <p:cNvPr id="104" name="Google Shape;104;p16">
-            <a:hlinkClick r:id="rId3"/>
-          </p:cNvPr>
+          <p:cNvPr id="104" name="Google Shape;104;p16"/>
           <p:cNvPicPr preferRelativeResize="0"/>
           <p:nvPr/>
         </p:nvPicPr>
-        <p:blipFill rotWithShape="1">
-          <a:blip r:embed="rId4">
+        <p:blipFill>
+          <a:blip r:embed="rId3">
             <a:alphaModFix/>
           </a:blip>
-          <a:srcRect b="0" l="0" r="0" t="0"/>
-          <a:stretch/>
+          <a:stretch>
+            <a:fillRect/>
+          </a:stretch>
         </p:blipFill>
         <p:spPr>
           <a:xfrm>
-            <a:off x="363375" y="653275"/>
-            <a:ext cx="8614674" cy="4156850"/>
+            <a:off x="152400" y="929500"/>
+            <a:ext cx="8679901" cy="4061600"/>
           </a:xfrm>
           <a:prstGeom prst="rect">
             <a:avLst/>
@@ -11477,17 +11476,18 @@
           <p:cNvPicPr preferRelativeResize="0"/>
           <p:nvPr/>
         </p:nvPicPr>
-        <p:blipFill rotWithShape="1">
+        <p:blipFill>
           <a:blip r:embed="rId3">
             <a:alphaModFix/>
           </a:blip>
-          <a:srcRect b="0" l="0" r="0" t="0"/>
-          <a:stretch/>
+          <a:stretch>
+            <a:fillRect/>
+          </a:stretch>
         </p:blipFill>
         <p:spPr>
           <a:xfrm>
-            <a:off x="152400" y="3115250"/>
-            <a:ext cx="3991170" cy="1875850"/>
+            <a:off x="152400" y="3192675"/>
+            <a:ext cx="4110686" cy="1798425"/>
           </a:xfrm>
           <a:prstGeom prst="rect">
             <a:avLst/>
@@ -11498,23 +11498,233 @@
           </a:ln>
         </p:spPr>
       </p:pic>
+      <p:sp>
+        <p:nvSpPr>
+          <p:cNvPr id="111" name="Google Shape;111;p17"/>
+          <p:cNvSpPr txBox="1"/>
+          <p:nvPr/>
+        </p:nvSpPr>
+        <p:spPr>
+          <a:xfrm>
+            <a:off x="4695825" y="2990850"/>
+            <a:ext cx="4110600" cy="1943100"/>
+          </a:xfrm>
+          <a:prstGeom prst="rect">
+            <a:avLst/>
+          </a:prstGeom>
+          <a:noFill/>
+          <a:ln>
+            <a:noFill/>
+          </a:ln>
+        </p:spPr>
+        <p:txBody>
+          <a:bodyPr anchorCtr="0" anchor="t" bIns="91425" lIns="91425" spcFirstLastPara="1" rIns="91425" wrap="square" tIns="91425">
+            <a:noAutofit/>
+          </a:bodyPr>
+          <a:lstStyle/>
+          <a:p>
+            <a:pPr indent="0" lvl="0" marL="457200" rtl="0" algn="l">
+              <a:spcBef>
+                <a:spcPts val="0"/>
+              </a:spcBef>
+              <a:spcAft>
+                <a:spcPts val="0"/>
+              </a:spcAft>
+              <a:buNone/>
+            </a:pPr>
+            <a:r>
+              <a:rPr lang="pt-BR" sz="1000">
+                <a:solidFill>
+                  <a:schemeClr val="dk2"/>
+                </a:solidFill>
+              </a:rPr>
+              <a:t>O que não deve constar no json do evento</a:t>
+            </a:r>
+            <a:endParaRPr sz="1000">
+              <a:solidFill>
+                <a:schemeClr val="dk2"/>
+              </a:solidFill>
+            </a:endParaRPr>
+          </a:p>
+          <a:p>
+            <a:pPr indent="0" lvl="0" marL="457200" rtl="0" algn="l">
+              <a:spcBef>
+                <a:spcPts val="0"/>
+              </a:spcBef>
+              <a:spcAft>
+                <a:spcPts val="0"/>
+              </a:spcAft>
+              <a:buNone/>
+            </a:pPr>
+            <a:r>
+              <a:t/>
+            </a:r>
+            <a:endParaRPr sz="1000">
+              <a:solidFill>
+                <a:schemeClr val="dk2"/>
+              </a:solidFill>
+            </a:endParaRPr>
+          </a:p>
+          <a:p>
+            <a:pPr indent="-292100" lvl="0" marL="457200" rtl="0" algn="l">
+              <a:spcBef>
+                <a:spcPts val="0"/>
+              </a:spcBef>
+              <a:spcAft>
+                <a:spcPts val="0"/>
+              </a:spcAft>
+              <a:buClr>
+                <a:schemeClr val="dk2"/>
+              </a:buClr>
+              <a:buSzPts val="1000"/>
+              <a:buChar char="-"/>
+            </a:pPr>
+            <a:r>
+              <a:rPr lang="pt-BR" sz="1000">
+                <a:solidFill>
+                  <a:schemeClr val="dk2"/>
+                </a:solidFill>
+              </a:rPr>
+              <a:t>Dados sensíveis e PII: Riscos de vazamento</a:t>
+            </a:r>
+            <a:endParaRPr sz="1000">
+              <a:solidFill>
+                <a:schemeClr val="dk2"/>
+              </a:solidFill>
+            </a:endParaRPr>
+          </a:p>
+          <a:p>
+            <a:pPr indent="-292100" lvl="0" marL="457200" rtl="0" algn="l">
+              <a:spcBef>
+                <a:spcPts val="0"/>
+              </a:spcBef>
+              <a:spcAft>
+                <a:spcPts val="0"/>
+              </a:spcAft>
+              <a:buClr>
+                <a:schemeClr val="dk2"/>
+              </a:buClr>
+              <a:buSzPts val="1000"/>
+              <a:buChar char="-"/>
+            </a:pPr>
+            <a:r>
+              <a:rPr lang="pt-BR" sz="1000">
+                <a:solidFill>
+                  <a:schemeClr val="dk2"/>
+                </a:solidFill>
+              </a:rPr>
+              <a:t>Ids auto incrementais: expõe volumetria do negócio</a:t>
+            </a:r>
+            <a:endParaRPr sz="1000">
+              <a:solidFill>
+                <a:schemeClr val="dk2"/>
+              </a:solidFill>
+            </a:endParaRPr>
+          </a:p>
+          <a:p>
+            <a:pPr indent="-292100" lvl="0" marL="457200" rtl="0" algn="l">
+              <a:spcBef>
+                <a:spcPts val="0"/>
+              </a:spcBef>
+              <a:spcAft>
+                <a:spcPts val="0"/>
+              </a:spcAft>
+              <a:buClr>
+                <a:schemeClr val="dk2"/>
+              </a:buClr>
+              <a:buSzPts val="1000"/>
+              <a:buChar char="-"/>
+            </a:pPr>
+            <a:r>
+              <a:rPr lang="pt-BR" sz="1000">
+                <a:solidFill>
+                  <a:schemeClr val="dk2"/>
+                </a:solidFill>
+              </a:rPr>
+              <a:t>Registro inteiro (Fat events): gera alto acoplamento, se o produtor mudar a estrutura do registro, pode quebrar os consumidores.</a:t>
+            </a:r>
+            <a:endParaRPr sz="1000">
+              <a:solidFill>
+                <a:schemeClr val="dk2"/>
+              </a:solidFill>
+            </a:endParaRPr>
+          </a:p>
+          <a:p>
+            <a:pPr indent="-292100" lvl="0" marL="457200" rtl="0" algn="l">
+              <a:spcBef>
+                <a:spcPts val="0"/>
+              </a:spcBef>
+              <a:spcAft>
+                <a:spcPts val="0"/>
+              </a:spcAft>
+              <a:buClr>
+                <a:schemeClr val="dk2"/>
+              </a:buClr>
+              <a:buSzPts val="1000"/>
+              <a:buChar char="-"/>
+            </a:pPr>
+            <a:r>
+              <a:rPr lang="pt-BR" sz="1000">
+                <a:solidFill>
+                  <a:schemeClr val="dk2"/>
+                </a:solidFill>
+              </a:rPr>
+              <a:t>Arquivos pesados ou Blobs: problemas de performance e estouro de limite</a:t>
+            </a:r>
+            <a:endParaRPr sz="1000">
+              <a:solidFill>
+                <a:schemeClr val="dk2"/>
+              </a:solidFill>
+            </a:endParaRPr>
+          </a:p>
+          <a:p>
+            <a:pPr indent="-292100" lvl="0" marL="457200" rtl="0" algn="l">
+              <a:spcBef>
+                <a:spcPts val="0"/>
+              </a:spcBef>
+              <a:spcAft>
+                <a:spcPts val="0"/>
+              </a:spcAft>
+              <a:buClr>
+                <a:schemeClr val="dk2"/>
+              </a:buClr>
+              <a:buSzPts val="1000"/>
+              <a:buChar char="-"/>
+            </a:pPr>
+            <a:r>
+              <a:rPr lang="pt-BR" sz="1000">
+                <a:solidFill>
+                  <a:schemeClr val="dk2"/>
+                </a:solidFill>
+              </a:rPr>
+              <a:t>Detalhes de implementação técnica (flags, tokens , etc) - Não agregam valor a quem está consumindo o evento</a:t>
+            </a:r>
+            <a:endParaRPr sz="1000">
+              <a:solidFill>
+                <a:schemeClr val="dk2"/>
+              </a:solidFill>
+            </a:endParaRPr>
+          </a:p>
+        </p:txBody>
+      </p:sp>
       <p:pic>
         <p:nvPicPr>
-          <p:cNvPr id="111" name="Google Shape;111;p17"/>
+          <p:cNvPr id="112" name="Google Shape;112;p17"/>
           <p:cNvPicPr preferRelativeResize="0"/>
           <p:nvPr/>
         </p:nvPicPr>
-        <p:blipFill rotWithShape="1">
+        <p:blipFill>
           <a:blip r:embed="rId4">
             <a:alphaModFix/>
           </a:blip>
-          <a:srcRect b="0" l="0" r="0" t="0"/>
-          <a:stretch/>
+          <a:stretch>
+            <a:fillRect/>
+          </a:stretch>
         </p:blipFill>
         <p:spPr>
           <a:xfrm>
             <a:off x="152400" y="152400"/>
-            <a:ext cx="8839201" cy="2509575"/>
+            <a:ext cx="8591549" cy="2733675"/>
           </a:xfrm>
           <a:prstGeom prst="rect">
             <a:avLst/>
@@ -11538,7 +11748,7 @@
   <p:cSld>
     <p:spTree>
       <p:nvGrpSpPr>
-        <p:cNvPr id="115" name="Shape 115"/>
+        <p:cNvPr id="116" name="Shape 116"/>
         <p:cNvGrpSpPr/>
         <p:nvPr/>
       </p:nvGrpSpPr>
@@ -11552,7 +11762,7 @@
       </p:grpSpPr>
       <p:sp>
         <p:nvSpPr>
-          <p:cNvPr id="116" name="Google Shape;116;p18"/>
+          <p:cNvPr id="117" name="Google Shape;117;p18"/>
           <p:cNvSpPr txBox="1"/>
           <p:nvPr/>
         </p:nvSpPr>
@@ -11678,7 +11888,7 @@
                 <a:cs typeface="Arial"/>
                 <a:sym typeface="Arial"/>
               </a:rPr>
-              <a:t> de um banco de dados relacional e enviar eventos de manipulação de dados para um barramento de streaming.</a:t>
+              <a:t> de um banco de dados relacional e enviar eventos de manipulação de dados para um barramento de streaming e para as tabelas de histórico.</a:t>
             </a:r>
             <a:endParaRPr b="0" i="0" sz="800" u="none" cap="none" strike="noStrike">
               <a:solidFill>
@@ -12748,7 +12958,7 @@
       </p:sp>
       <p:sp>
         <p:nvSpPr>
-          <p:cNvPr id="117" name="Google Shape;117;p18"/>
+          <p:cNvPr id="118" name="Google Shape;118;p18"/>
           <p:cNvSpPr txBox="1"/>
           <p:nvPr>
             <p:ph idx="4294967295" type="title"/>
@@ -12815,7 +13025,7 @@
   <p:cSld>
     <p:spTree>
       <p:nvGrpSpPr>
-        <p:cNvPr id="121" name="Shape 121"/>
+        <p:cNvPr id="122" name="Shape 122"/>
         <p:cNvGrpSpPr/>
         <p:nvPr/>
       </p:nvGrpSpPr>
@@ -12829,7 +13039,7 @@
       </p:grpSpPr>
       <p:sp>
         <p:nvSpPr>
-          <p:cNvPr id="122" name="Google Shape;122;p19"/>
+          <p:cNvPr id="123" name="Google Shape;123;p19"/>
           <p:cNvSpPr txBox="1"/>
           <p:nvPr>
             <p:ph idx="4294967295" type="title"/>

--- a/NandaPay.pptx
+++ b/NandaPay.pptx
@@ -11363,12 +11363,14 @@
       </p:sp>
       <p:pic>
         <p:nvPicPr>
-          <p:cNvPr id="104" name="Google Shape;104;p16"/>
+          <p:cNvPr id="104" name="Google Shape;104;p16">
+            <a:hlinkClick r:id="rId3"/>
+          </p:cNvPr>
           <p:cNvPicPr preferRelativeResize="0"/>
           <p:nvPr/>
         </p:nvPicPr>
         <p:blipFill>
-          <a:blip r:embed="rId3">
+          <a:blip r:embed="rId4">
             <a:alphaModFix/>
           </a:blip>
           <a:stretch>
